--- a/sjoskolan/vecka-40/aktuell/v40_02_Reaktans_och_impedans_elev.pptx
+++ b/sjoskolan/vecka-40/aktuell/v40_02_Reaktans_och_impedans_elev.pptx
@@ -4254,7 +4254,7 @@
         <p:spPr>
           <a:xfrm xmlns:a="http://schemas.openxmlformats.org/drawingml/2006/main">
             <a:off x="762000" y="2533650"/>
-            <a:ext cx="7620000" cy="2286000"/>
+            <a:ext cx="3886200" cy="2606040"/>
           </a:xfrm>
           <a:prstGeom xmlns:a="http://schemas.openxmlformats.org/drawingml/2006/main" prst="rect">
             <a:avLst/>
@@ -4411,6 +4411,30 @@
           </a:p>
         </p:txBody>
       </p:sp>
+      <p:pic xmlns:a="http://schemas.openxmlformats.org/drawingml/2006/main" xmlns:r="http://schemas.openxmlformats.org/officeDocument/2006/relationships">
+        <p:nvPicPr>
+          <p:cNvPr id="9" name="Figur: Växelspänningskälla 50 Hz med spole 0,10" descr="Växelspänningskälla 50 Hz med spole 0,10 H"/>
+          <p:cNvPicPr>
+            <a:picLocks noChangeAspect="1"/>
+          </p:cNvPicPr>
+          <p:nvPr/>
+        </p:nvPicPr>
+        <p:blipFill>
+          <a:blip r:embed="rId3"/>
+          <a:stretch>
+            <a:fillRect/>
+          </a:stretch>
+        </p:blipFill>
+        <p:spPr>
+          <a:xfrm>
+            <a:off x="4846320" y="2331720"/>
+            <a:ext cx="3931920" cy="2740984"/>
+          </a:xfrm>
+          <a:prstGeom prst="rect">
+            <a:avLst/>
+          </a:prstGeom>
+        </p:spPr>
+      </p:pic>
     </p:spTree>
     <p:extLst>
       <p:ext uri="{BB962C8B-B14F-4D97-AF65-F5344CB8AC3E}">
@@ -4978,7 +5002,7 @@
         <p:spPr>
           <a:xfrm xmlns:a="http://schemas.openxmlformats.org/drawingml/2006/main">
             <a:off x="762000" y="2533650"/>
-            <a:ext cx="7620000" cy="2286000"/>
+            <a:ext cx="3886200" cy="2606040"/>
           </a:xfrm>
           <a:prstGeom xmlns:a="http://schemas.openxmlformats.org/drawingml/2006/main" prst="rect">
             <a:avLst/>
@@ -5135,6 +5159,30 @@
           </a:p>
         </p:txBody>
       </p:sp>
+      <p:pic xmlns:a="http://schemas.openxmlformats.org/drawingml/2006/main" xmlns:r="http://schemas.openxmlformats.org/officeDocument/2006/relationships">
+        <p:nvPicPr>
+          <p:cNvPr id="9" name="Figur: Växelspänningskälla 50 Hz med kondensato" descr="Växelspänningskälla 50 Hz med kondensator 100 mikrofarad"/>
+          <p:cNvPicPr>
+            <a:picLocks noChangeAspect="1"/>
+          </p:cNvPicPr>
+          <p:nvPr/>
+        </p:nvPicPr>
+        <p:blipFill>
+          <a:blip r:embed="rId3"/>
+          <a:stretch>
+            <a:fillRect/>
+          </a:stretch>
+        </p:blipFill>
+        <p:spPr>
+          <a:xfrm>
+            <a:off x="4846320" y="2331720"/>
+            <a:ext cx="3931920" cy="2740984"/>
+          </a:xfrm>
+          <a:prstGeom prst="rect">
+            <a:avLst/>
+          </a:prstGeom>
+        </p:spPr>
+      </p:pic>
     </p:spTree>
     <p:extLst>
       <p:ext uri="{BB962C8B-B14F-4D97-AF65-F5344CB8AC3E}">
@@ -5702,7 +5750,7 @@
         <p:spPr>
           <a:xfrm xmlns:a="http://schemas.openxmlformats.org/drawingml/2006/main">
             <a:off x="762000" y="2533650"/>
-            <a:ext cx="7620000" cy="2286000"/>
+            <a:ext cx="3886200" cy="2606040"/>
           </a:xfrm>
           <a:prstGeom xmlns:a="http://schemas.openxmlformats.org/drawingml/2006/main" prst="rect">
             <a:avLst/>
@@ -5859,6 +5907,30 @@
           </a:p>
         </p:txBody>
       </p:sp>
+      <p:pic xmlns:a="http://schemas.openxmlformats.org/drawingml/2006/main" xmlns:r="http://schemas.openxmlformats.org/officeDocument/2006/relationships">
+        <p:nvPicPr>
+          <p:cNvPr id="9" name="Figur: Impedanstriangel med R = 30 ohm och XL =" descr="Impedanstriangel med R = 30 ohm och XL = 40 ohm"/>
+          <p:cNvPicPr>
+            <a:picLocks noChangeAspect="1"/>
+          </p:cNvPicPr>
+          <p:nvPr/>
+        </p:nvPicPr>
+        <p:blipFill>
+          <a:blip r:embed="rId3"/>
+          <a:stretch>
+            <a:fillRect/>
+          </a:stretch>
+        </p:blipFill>
+        <p:spPr>
+          <a:xfrm>
+            <a:off x="4846320" y="2331720"/>
+            <a:ext cx="3931920" cy="2740984"/>
+          </a:xfrm>
+          <a:prstGeom prst="rect">
+            <a:avLst/>
+          </a:prstGeom>
+        </p:spPr>
+      </p:pic>
     </p:spTree>
     <p:extLst>
       <p:ext uri="{BB962C8B-B14F-4D97-AF65-F5344CB8AC3E}">
@@ -6426,7 +6498,7 @@
         <p:spPr>
           <a:xfrm xmlns:a="http://schemas.openxmlformats.org/drawingml/2006/main">
             <a:off x="762000" y="2533650"/>
-            <a:ext cx="7620000" cy="2286000"/>
+            <a:ext cx="3886200" cy="2606040"/>
           </a:xfrm>
           <a:prstGeom xmlns:a="http://schemas.openxmlformats.org/drawingml/2006/main" prst="rect">
             <a:avLst/>
@@ -6583,6 +6655,30 @@
           </a:p>
         </p:txBody>
       </p:sp>
+      <p:pic xmlns:a="http://schemas.openxmlformats.org/drawingml/2006/main" xmlns:r="http://schemas.openxmlformats.org/officeDocument/2006/relationships">
+        <p:nvPicPr>
+          <p:cNvPr id="9" name="Figur: Seriekrets med 100 V RMS, R = 30 ohm och" descr="Seriekrets med 100 V RMS, R = 30 ohm och XL = 40 ohm"/>
+          <p:cNvPicPr>
+            <a:picLocks noChangeAspect="1"/>
+          </p:cNvPicPr>
+          <p:nvPr/>
+        </p:nvPicPr>
+        <p:blipFill>
+          <a:blip r:embed="rId3"/>
+          <a:stretch>
+            <a:fillRect/>
+          </a:stretch>
+        </p:blipFill>
+        <p:spPr>
+          <a:xfrm>
+            <a:off x="4846320" y="2331720"/>
+            <a:ext cx="3931920" cy="2740984"/>
+          </a:xfrm>
+          <a:prstGeom prst="rect">
+            <a:avLst/>
+          </a:prstGeom>
+        </p:spPr>
+      </p:pic>
     </p:spTree>
     <p:extLst>
       <p:ext uri="{BB962C8B-B14F-4D97-AF65-F5344CB8AC3E}">
@@ -7173,7 +7269,7 @@
         <p:spPr>
           <a:xfrm xmlns:a="http://schemas.openxmlformats.org/drawingml/2006/main">
             <a:off x="762000" y="2533650"/>
-            <a:ext cx="7620000" cy="2286000"/>
+            <a:ext cx="3886200" cy="2606040"/>
           </a:xfrm>
           <a:prstGeom xmlns:a="http://schemas.openxmlformats.org/drawingml/2006/main" prst="rect">
             <a:avLst/>
@@ -7330,6 +7426,30 @@
           </a:p>
         </p:txBody>
       </p:sp>
+      <p:pic xmlns:a="http://schemas.openxmlformats.org/drawingml/2006/main" xmlns:r="http://schemas.openxmlformats.org/officeDocument/2006/relationships">
+        <p:nvPicPr>
+          <p:cNvPr id="9" name="Figur: Seriekrets RL med strömmen 2,0 A och okä" descr="Seriekrets RL med strömmen 2,0 A och okända delspänningar"/>
+          <p:cNvPicPr>
+            <a:picLocks noChangeAspect="1"/>
+          </p:cNvPicPr>
+          <p:nvPr/>
+        </p:nvPicPr>
+        <p:blipFill>
+          <a:blip r:embed="rId3"/>
+          <a:stretch>
+            <a:fillRect/>
+          </a:stretch>
+        </p:blipFill>
+        <p:spPr>
+          <a:xfrm>
+            <a:off x="4846320" y="2331720"/>
+            <a:ext cx="3931920" cy="2740984"/>
+          </a:xfrm>
+          <a:prstGeom prst="rect">
+            <a:avLst/>
+          </a:prstGeom>
+        </p:spPr>
+      </p:pic>
     </p:spTree>
     <p:extLst>
       <p:ext uri="{BB962C8B-B14F-4D97-AF65-F5344CB8AC3E}">
@@ -8195,7 +8315,7 @@
         <p:spPr>
           <a:xfrm xmlns:a="http://schemas.openxmlformats.org/drawingml/2006/main">
             <a:off x="762000" y="1619250"/>
-            <a:ext cx="7620000" cy="1466850"/>
+            <a:ext cx="3977639" cy="1466850"/>
           </a:xfrm>
           <a:prstGeom xmlns:a="http://schemas.openxmlformats.org/drawingml/2006/main" prst="rect">
             <a:avLst/>
@@ -8223,7 +8343,7 @@
               </a:defRPr>
             </a:pPr>
             <a:r>
-              <a:rPr sz="2400" b="0">
+              <a:rPr sz="2350" b="0">
                 <a:solidFill>
                   <a:srgbClr val="111111"/>
                 </a:solidFill>
@@ -8247,7 +8367,7 @@
               </a:defRPr>
             </a:pPr>
             <a:r>
-              <a:rPr sz="2400" b="0">
+              <a:rPr sz="2350" b="0">
                 <a:solidFill>
                   <a:srgbClr val="111111"/>
                 </a:solidFill>
@@ -8277,7 +8397,7 @@
         <p:spPr>
           <a:xfrm xmlns:a="http://schemas.openxmlformats.org/drawingml/2006/main">
             <a:off x="762000" y="3200400"/>
-            <a:ext cx="7620000" cy="838200"/>
+            <a:ext cx="3977639" cy="838200"/>
           </a:xfrm>
           <a:prstGeom xmlns:a="http://schemas.openxmlformats.org/drawingml/2006/main" prst="rect">
             <a:avLst/>
@@ -8335,7 +8455,7 @@
         <p:spPr>
           <a:xfrm xmlns:a="http://schemas.openxmlformats.org/drawingml/2006/main">
             <a:off x="762000" y="4429125"/>
-            <a:ext cx="7620000" cy="1352550"/>
+            <a:ext cx="3977639" cy="1352550"/>
           </a:xfrm>
           <a:prstGeom xmlns:a="http://schemas.openxmlformats.org/drawingml/2006/main" prst="rect">
             <a:avLst/>
@@ -8458,6 +8578,30 @@
           </a:p>
         </p:txBody>
       </p:sp>
+      <p:pic xmlns:a="http://schemas.openxmlformats.org/drawingml/2006/main" xmlns:r="http://schemas.openxmlformats.org/officeDocument/2006/relationships">
+        <p:nvPicPr>
+          <p:cNvPr id="9" name="Figur: Impedanstrianglar: RL med positiv fasvin" descr="Impedanstrianglar: RL med positiv fasvinkel uppåt och RC med negativ fasvinkel nedåt"/>
+          <p:cNvPicPr>
+            <a:picLocks noChangeAspect="1"/>
+          </p:cNvPicPr>
+          <p:nvPr/>
+        </p:nvPicPr>
+        <p:blipFill>
+          <a:blip r:embed="rId3"/>
+          <a:stretch>
+            <a:fillRect/>
+          </a:stretch>
+        </p:blipFill>
+        <p:spPr>
+          <a:xfrm>
+            <a:off x="4892040" y="1645920"/>
+            <a:ext cx="3886200" cy="3976745"/>
+          </a:xfrm>
+          <a:prstGeom prst="rect">
+            <a:avLst/>
+          </a:prstGeom>
+        </p:spPr>
+      </p:pic>
     </p:spTree>
     <p:extLst>
       <p:ext uri="{BB962C8B-B14F-4D97-AF65-F5344CB8AC3E}">
@@ -9525,7 +9669,7 @@
         <p:spPr>
           <a:xfrm xmlns:a="http://schemas.openxmlformats.org/drawingml/2006/main">
             <a:off x="762000" y="1619250"/>
-            <a:ext cx="7620000" cy="1466850"/>
+            <a:ext cx="3977639" cy="1466850"/>
           </a:xfrm>
           <a:prstGeom xmlns:a="http://schemas.openxmlformats.org/drawingml/2006/main" prst="rect">
             <a:avLst/>
@@ -9553,7 +9697,7 @@
               </a:defRPr>
             </a:pPr>
             <a:r>
-              <a:rPr sz="2400" b="0">
+              <a:rPr sz="2350" b="0">
                 <a:solidFill>
                   <a:srgbClr val="111111"/>
                 </a:solidFill>
@@ -9577,7 +9721,7 @@
               </a:defRPr>
             </a:pPr>
             <a:r>
-              <a:rPr sz="2400" b="0">
+              <a:rPr sz="2350" b="0">
                 <a:solidFill>
                   <a:srgbClr val="111111"/>
                 </a:solidFill>
@@ -9607,7 +9751,7 @@
         <p:spPr>
           <a:xfrm xmlns:a="http://schemas.openxmlformats.org/drawingml/2006/main">
             <a:off x="762000" y="3200400"/>
-            <a:ext cx="7620000" cy="838200"/>
+            <a:ext cx="3977639" cy="838200"/>
           </a:xfrm>
           <a:prstGeom xmlns:a="http://schemas.openxmlformats.org/drawingml/2006/main" prst="rect">
             <a:avLst/>
@@ -9665,7 +9809,7 @@
         <p:spPr>
           <a:xfrm xmlns:a="http://schemas.openxmlformats.org/drawingml/2006/main">
             <a:off x="762000" y="4429125"/>
-            <a:ext cx="7620000" cy="1352550"/>
+            <a:ext cx="3977639" cy="1352550"/>
           </a:xfrm>
           <a:prstGeom xmlns:a="http://schemas.openxmlformats.org/drawingml/2006/main" prst="rect">
             <a:avLst/>
@@ -9788,6 +9932,30 @@
           </a:p>
         </p:txBody>
       </p:sp>
+      <p:pic xmlns:a="http://schemas.openxmlformats.org/drawingml/2006/main" xmlns:r="http://schemas.openxmlformats.org/officeDocument/2006/relationships">
+        <p:nvPicPr>
+          <p:cNvPr id="9" name="Figur: XL och XC som funktion av frekvens, kurv" descr="XL och XC som funktion av frekvens, kurvorna korsar varandra vid resonans"/>
+          <p:cNvPicPr>
+            <a:picLocks noChangeAspect="1"/>
+          </p:cNvPicPr>
+          <p:nvPr/>
+        </p:nvPicPr>
+        <p:blipFill>
+          <a:blip r:embed="rId3"/>
+          <a:stretch>
+            <a:fillRect/>
+          </a:stretch>
+        </p:blipFill>
+        <p:spPr>
+          <a:xfrm>
+            <a:off x="4892040" y="1645920"/>
+            <a:ext cx="3886200" cy="3071293"/>
+          </a:xfrm>
+          <a:prstGeom prst="rect">
+            <a:avLst/>
+          </a:prstGeom>
+        </p:spPr>
+      </p:pic>
     </p:spTree>
     <p:extLst>
       <p:ext uri="{BB962C8B-B14F-4D97-AF65-F5344CB8AC3E}">
@@ -10789,7 +10957,7 @@
         <p:spPr>
           <a:xfrm xmlns:a="http://schemas.openxmlformats.org/drawingml/2006/main">
             <a:off x="762000" y="2533650"/>
-            <a:ext cx="7620000" cy="2286000"/>
+            <a:ext cx="3886200" cy="2606040"/>
           </a:xfrm>
           <a:prstGeom xmlns:a="http://schemas.openxmlformats.org/drawingml/2006/main" prst="rect">
             <a:avLst/>
@@ -10946,6 +11114,30 @@
           </a:p>
         </p:txBody>
       </p:sp>
+      <p:pic xmlns:a="http://schemas.openxmlformats.org/drawingml/2006/main" xmlns:r="http://schemas.openxmlformats.org/officeDocument/2006/relationships">
+        <p:nvPicPr>
+          <p:cNvPr id="9" name="Figur: Impedanstriangel R = 30 ohm, XL = 40 ohm" descr="Impedanstriangel R = 30 ohm, XL = 40 ohm med okänd fasvinkel"/>
+          <p:cNvPicPr>
+            <a:picLocks noChangeAspect="1"/>
+          </p:cNvPicPr>
+          <p:nvPr/>
+        </p:nvPicPr>
+        <p:blipFill>
+          <a:blip r:embed="rId3"/>
+          <a:stretch>
+            <a:fillRect/>
+          </a:stretch>
+        </p:blipFill>
+        <p:spPr>
+          <a:xfrm>
+            <a:off x="4846320" y="2331720"/>
+            <a:ext cx="3931920" cy="2740984"/>
+          </a:xfrm>
+          <a:prstGeom prst="rect">
+            <a:avLst/>
+          </a:prstGeom>
+        </p:spPr>
+      </p:pic>
     </p:spTree>
     <p:extLst>
       <p:ext uri="{BB962C8B-B14F-4D97-AF65-F5344CB8AC3E}">
@@ -11536,7 +11728,7 @@
         <p:spPr>
           <a:xfrm xmlns:a="http://schemas.openxmlformats.org/drawingml/2006/main">
             <a:off x="762000" y="2533650"/>
-            <a:ext cx="7620000" cy="2286000"/>
+            <a:ext cx="3886200" cy="2606040"/>
           </a:xfrm>
           <a:prstGeom xmlns:a="http://schemas.openxmlformats.org/drawingml/2006/main" prst="rect">
             <a:avLst/>
@@ -11693,6 +11885,30 @@
           </a:p>
         </p:txBody>
       </p:sp>
+      <p:pic xmlns:a="http://schemas.openxmlformats.org/drawingml/2006/main" xmlns:r="http://schemas.openxmlformats.org/officeDocument/2006/relationships">
+        <p:nvPicPr>
+          <p:cNvPr id="9" name="Figur: Seriekrets med 200 V RMS, R = 60 ohm och" descr="Seriekrets med 200 V RMS, R = 60 ohm och XC = 80 ohm"/>
+          <p:cNvPicPr>
+            <a:picLocks noChangeAspect="1"/>
+          </p:cNvPicPr>
+          <p:nvPr/>
+        </p:nvPicPr>
+        <p:blipFill>
+          <a:blip r:embed="rId3"/>
+          <a:stretch>
+            <a:fillRect/>
+          </a:stretch>
+        </p:blipFill>
+        <p:spPr>
+          <a:xfrm>
+            <a:off x="4846320" y="2331720"/>
+            <a:ext cx="3931920" cy="2740984"/>
+          </a:xfrm>
+          <a:prstGeom prst="rect">
+            <a:avLst/>
+          </a:prstGeom>
+        </p:spPr>
+      </p:pic>
     </p:spTree>
     <p:extLst>
       <p:ext uri="{BB962C8B-B14F-4D97-AF65-F5344CB8AC3E}">
@@ -12774,7 +12990,7 @@
         <p:spPr>
           <a:xfrm xmlns:a="http://schemas.openxmlformats.org/drawingml/2006/main">
             <a:off x="762000" y="2533650"/>
-            <a:ext cx="7620000" cy="2286000"/>
+            <a:ext cx="3886200" cy="2606040"/>
           </a:xfrm>
           <a:prstGeom xmlns:a="http://schemas.openxmlformats.org/drawingml/2006/main" prst="rect">
             <a:avLst/>
@@ -12931,6 +13147,30 @@
           </a:p>
         </p:txBody>
       </p:sp>
+      <p:pic xmlns:a="http://schemas.openxmlformats.org/drawingml/2006/main" xmlns:r="http://schemas.openxmlformats.org/officeDocument/2006/relationships">
+        <p:nvPicPr>
+          <p:cNvPr id="9" name="Figur: Seriekrets med spole och kondensator där" descr="Seriekrets med spole och kondensator där frekvensen ökar från 50 till 100 Hz"/>
+          <p:cNvPicPr>
+            <a:picLocks noChangeAspect="1"/>
+          </p:cNvPicPr>
+          <p:nvPr/>
+        </p:nvPicPr>
+        <p:blipFill>
+          <a:blip r:embed="rId3"/>
+          <a:stretch>
+            <a:fillRect/>
+          </a:stretch>
+        </p:blipFill>
+        <p:spPr>
+          <a:xfrm>
+            <a:off x="4846320" y="2331720"/>
+            <a:ext cx="3931920" cy="2740984"/>
+          </a:xfrm>
+          <a:prstGeom prst="rect">
+            <a:avLst/>
+          </a:prstGeom>
+        </p:spPr>
+      </p:pic>
     </p:spTree>
     <p:extLst>
       <p:ext uri="{BB962C8B-B14F-4D97-AF65-F5344CB8AC3E}">
@@ -13521,7 +13761,7 @@
         <p:spPr>
           <a:xfrm xmlns:a="http://schemas.openxmlformats.org/drawingml/2006/main">
             <a:off x="762000" y="2533650"/>
-            <a:ext cx="7620000" cy="2286000"/>
+            <a:ext cx="3886200" cy="2606040"/>
           </a:xfrm>
           <a:prstGeom xmlns:a="http://schemas.openxmlformats.org/drawingml/2006/main" prst="rect">
             <a:avLst/>
@@ -13678,6 +13918,30 @@
           </a:p>
         </p:txBody>
       </p:sp>
+      <p:pic xmlns:a="http://schemas.openxmlformats.org/drawingml/2006/main" xmlns:r="http://schemas.openxmlformats.org/officeDocument/2006/relationships">
+        <p:nvPicPr>
+          <p:cNvPr id="9" name="Figur: RLC-seriekrets 100 V RMS med R 30 ohm, X" descr="RLC-seriekrets 100 V RMS med R 30 ohm, XL 50 ohm och XC 10 ohm"/>
+          <p:cNvPicPr>
+            <a:picLocks noChangeAspect="1"/>
+          </p:cNvPicPr>
+          <p:nvPr/>
+        </p:nvPicPr>
+        <p:blipFill>
+          <a:blip r:embed="rId3"/>
+          <a:stretch>
+            <a:fillRect/>
+          </a:stretch>
+        </p:blipFill>
+        <p:spPr>
+          <a:xfrm>
+            <a:off x="4846320" y="2331720"/>
+            <a:ext cx="3931920" cy="2740984"/>
+          </a:xfrm>
+          <a:prstGeom prst="rect">
+            <a:avLst/>
+          </a:prstGeom>
+        </p:spPr>
+      </p:pic>
     </p:spTree>
     <p:extLst>
       <p:ext uri="{BB962C8B-B14F-4D97-AF65-F5344CB8AC3E}">
@@ -14268,7 +14532,7 @@
         <p:spPr>
           <a:xfrm xmlns:a="http://schemas.openxmlformats.org/drawingml/2006/main">
             <a:off x="762000" y="2533650"/>
-            <a:ext cx="7620000" cy="2286000"/>
+            <a:ext cx="3886200" cy="2606040"/>
           </a:xfrm>
           <a:prstGeom xmlns:a="http://schemas.openxmlformats.org/drawingml/2006/main" prst="rect">
             <a:avLst/>
@@ -14425,6 +14689,30 @@
           </a:p>
         </p:txBody>
       </p:sp>
+      <p:pic xmlns:a="http://schemas.openxmlformats.org/drawingml/2006/main" xmlns:r="http://schemas.openxmlformats.org/officeDocument/2006/relationships">
+        <p:nvPicPr>
+          <p:cNvPr id="9" name="Figur: RLC-seriekrets 100 V RMS med R 20 ohm oc" descr="RLC-seriekrets 100 V RMS med R 20 ohm och XL = XC = 40 ohm"/>
+          <p:cNvPicPr>
+            <a:picLocks noChangeAspect="1"/>
+          </p:cNvPicPr>
+          <p:nvPr/>
+        </p:nvPicPr>
+        <p:blipFill>
+          <a:blip r:embed="rId3"/>
+          <a:stretch>
+            <a:fillRect/>
+          </a:stretch>
+        </p:blipFill>
+        <p:spPr>
+          <a:xfrm>
+            <a:off x="4846320" y="2331720"/>
+            <a:ext cx="3931920" cy="2740984"/>
+          </a:xfrm>
+          <a:prstGeom prst="rect">
+            <a:avLst/>
+          </a:prstGeom>
+        </p:spPr>
+      </p:pic>
     </p:spTree>
     <p:extLst>
       <p:ext uri="{BB962C8B-B14F-4D97-AF65-F5344CB8AC3E}">
@@ -16157,7 +16445,7 @@
         <p:spPr>
           <a:xfrm xmlns:a="http://schemas.openxmlformats.org/drawingml/2006/main">
             <a:off x="762000" y="1619250"/>
-            <a:ext cx="7620000" cy="1466850"/>
+            <a:ext cx="3977639" cy="1466850"/>
           </a:xfrm>
           <a:prstGeom xmlns:a="http://schemas.openxmlformats.org/drawingml/2006/main" prst="rect">
             <a:avLst/>
@@ -16185,7 +16473,7 @@
               </a:defRPr>
             </a:pPr>
             <a:r>
-              <a:rPr sz="2400" b="0">
+              <a:rPr sz="2200" b="0">
                 <a:solidFill>
                   <a:srgbClr val="111111"/>
                 </a:solidFill>
@@ -16209,7 +16497,7 @@
               </a:defRPr>
             </a:pPr>
             <a:r>
-              <a:rPr sz="2400" b="0">
+              <a:rPr sz="2200" b="0">
                 <a:solidFill>
                   <a:srgbClr val="111111"/>
                 </a:solidFill>
@@ -16239,7 +16527,7 @@
         <p:spPr>
           <a:xfrm xmlns:a="http://schemas.openxmlformats.org/drawingml/2006/main">
             <a:off x="762000" y="3200400"/>
-            <a:ext cx="7620000" cy="838200"/>
+            <a:ext cx="3977639" cy="838200"/>
           </a:xfrm>
           <a:prstGeom xmlns:a="http://schemas.openxmlformats.org/drawingml/2006/main" prst="rect">
             <a:avLst/>
@@ -16297,7 +16585,7 @@
         <p:spPr>
           <a:xfrm xmlns:a="http://schemas.openxmlformats.org/drawingml/2006/main">
             <a:off x="762000" y="4429125"/>
-            <a:ext cx="7620000" cy="1352550"/>
+            <a:ext cx="3977639" cy="1352550"/>
           </a:xfrm>
           <a:prstGeom xmlns:a="http://schemas.openxmlformats.org/drawingml/2006/main" prst="rect">
             <a:avLst/>
@@ -16325,7 +16613,7 @@
               </a:defRPr>
             </a:pPr>
             <a:r>
-              <a:rPr sz="2250" b="0">
+              <a:rPr sz="2100" b="0">
                 <a:solidFill>
                   <a:srgbClr val="111111"/>
                 </a:solidFill>
@@ -16349,7 +16637,7 @@
               </a:defRPr>
             </a:pPr>
             <a:r>
-              <a:rPr sz="2250" b="0">
+              <a:rPr sz="2100" b="0">
                 <a:solidFill>
                   <a:srgbClr val="111111"/>
                 </a:solidFill>
@@ -16420,6 +16708,30 @@
           </a:p>
         </p:txBody>
       </p:sp>
+      <p:pic xmlns:a="http://schemas.openxmlformats.org/drawingml/2006/main" xmlns:r="http://schemas.openxmlformats.org/officeDocument/2006/relationships">
+        <p:nvPicPr>
+          <p:cNvPr id="9" name="Figur: Induktiv reaktans ökar linjärt med frekv" descr="Induktiv reaktans ökar linjärt med frekvensen, 31,4 ohm vid 50 Hz för 0,10 H"/>
+          <p:cNvPicPr>
+            <a:picLocks noChangeAspect="1"/>
+          </p:cNvPicPr>
+          <p:nvPr/>
+        </p:nvPicPr>
+        <p:blipFill>
+          <a:blip r:embed="rId3"/>
+          <a:stretch>
+            <a:fillRect/>
+          </a:stretch>
+        </p:blipFill>
+        <p:spPr>
+          <a:xfrm>
+            <a:off x="4892040" y="1645920"/>
+            <a:ext cx="3886200" cy="3071293"/>
+          </a:xfrm>
+          <a:prstGeom prst="rect">
+            <a:avLst/>
+          </a:prstGeom>
+        </p:spPr>
+      </p:pic>
     </p:spTree>
     <p:extLst>
       <p:ext uri="{BB962C8B-B14F-4D97-AF65-F5344CB8AC3E}">
@@ -16541,7 +16853,7 @@
         <p:spPr>
           <a:xfrm xmlns:a="http://schemas.openxmlformats.org/drawingml/2006/main">
             <a:off x="762000" y="1619250"/>
-            <a:ext cx="7620000" cy="1466850"/>
+            <a:ext cx="3977639" cy="1466850"/>
           </a:xfrm>
           <a:prstGeom xmlns:a="http://schemas.openxmlformats.org/drawingml/2006/main" prst="rect">
             <a:avLst/>
@@ -16569,7 +16881,7 @@
               </a:defRPr>
             </a:pPr>
             <a:r>
-              <a:rPr sz="2400" b="0">
+              <a:rPr sz="2050" b="0">
                 <a:solidFill>
                   <a:srgbClr val="111111"/>
                 </a:solidFill>
@@ -16593,7 +16905,7 @@
               </a:defRPr>
             </a:pPr>
             <a:r>
-              <a:rPr sz="2400" b="0">
+              <a:rPr sz="2050" b="0">
                 <a:solidFill>
                   <a:srgbClr val="111111"/>
                 </a:solidFill>
@@ -16623,7 +16935,7 @@
         <p:spPr>
           <a:xfrm xmlns:a="http://schemas.openxmlformats.org/drawingml/2006/main">
             <a:off x="762000" y="3200400"/>
-            <a:ext cx="7620000" cy="838200"/>
+            <a:ext cx="3977639" cy="838200"/>
           </a:xfrm>
           <a:prstGeom xmlns:a="http://schemas.openxmlformats.org/drawingml/2006/main" prst="rect">
             <a:avLst/>
@@ -16681,7 +16993,7 @@
         <p:spPr>
           <a:xfrm xmlns:a="http://schemas.openxmlformats.org/drawingml/2006/main">
             <a:off x="762000" y="4429125"/>
-            <a:ext cx="7620000" cy="1352550"/>
+            <a:ext cx="3977639" cy="1352550"/>
           </a:xfrm>
           <a:prstGeom xmlns:a="http://schemas.openxmlformats.org/drawingml/2006/main" prst="rect">
             <a:avLst/>
@@ -16804,6 +17116,30 @@
           </a:p>
         </p:txBody>
       </p:sp>
+      <p:pic xmlns:a="http://schemas.openxmlformats.org/drawingml/2006/main" xmlns:r="http://schemas.openxmlformats.org/officeDocument/2006/relationships">
+        <p:nvPicPr>
+          <p:cNvPr id="9" name="Figur: Kapacitiv reaktans minskar med frekvense" descr="Kapacitiv reaktans minskar med frekvensen, 31,8 ohm vid 50 Hz för 100 mikrofarad"/>
+          <p:cNvPicPr>
+            <a:picLocks noChangeAspect="1"/>
+          </p:cNvPicPr>
+          <p:nvPr/>
+        </p:nvPicPr>
+        <p:blipFill>
+          <a:blip r:embed="rId3"/>
+          <a:stretch>
+            <a:fillRect/>
+          </a:stretch>
+        </p:blipFill>
+        <p:spPr>
+          <a:xfrm>
+            <a:off x="4892040" y="1645920"/>
+            <a:ext cx="3886200" cy="3071293"/>
+          </a:xfrm>
+          <a:prstGeom prst="rect">
+            <a:avLst/>
+          </a:prstGeom>
+        </p:spPr>
+      </p:pic>
     </p:spTree>
     <p:extLst>
       <p:ext uri="{BB962C8B-B14F-4D97-AF65-F5344CB8AC3E}">

--- a/sjoskolan/vecka-40/aktuell/v40_02_Reaktans_och_impedans_elev.pptx
+++ b/sjoskolan/vecka-40/aktuell/v40_02_Reaktans_och_impedans_elev.pptx
@@ -4290,7 +4290,7 @@
                 <a:ea typeface="Calibri"/>
                 <a:cs typeface="Calibri"/>
               </a:rPr>
-              <a:t>L = 0,10 H och f = 50 Hz. Beräkna Xᴸ.</a:t>
+              <a:t>L = 0,10 H och f = 50 Hz. Beräkna Xᴸ.</a:t>
             </a:r>
           </a:p>
         </p:txBody>
@@ -5038,7 +5038,7 @@
                 <a:ea typeface="Calibri"/>
                 <a:cs typeface="Calibri"/>
               </a:rPr>
-              <a:t>C = 100 µF och f = 50 Hz. Beräkna Xᶜ.</a:t>
+              <a:t>C = 100 µF och f = 50 Hz. Beräkna Xᶜ.</a:t>
             </a:r>
           </a:p>
         </p:txBody>
@@ -5786,7 +5786,7 @@
                 <a:ea typeface="Calibri"/>
                 <a:cs typeface="Calibri"/>
               </a:rPr>
-              <a:t>En seriekrets har R = 30 Ω och Xᴸ = 40 Ω. Beräkna |Z|.</a:t>
+              <a:t>En seriekrets har R = 30 Ω och Xᴸ = 40 Ω. Beräkna |Z|.</a:t>
             </a:r>
           </a:p>
         </p:txBody>
@@ -6534,7 +6534,7 @@
                 <a:ea typeface="Calibri"/>
                 <a:cs typeface="Calibri"/>
               </a:rPr>
-              <a:t>100 V RMS matar kretsen R = 30 Ω, Xᴸ = 40 Ω. Beräkna strömmen.</a:t>
+              <a:t>100 V RMS matar kretsen R = 30 Ω, Xᴸ = 40 Ω. Beräkna strömmen.</a:t>
             </a:r>
           </a:p>
         </p:txBody>
@@ -7305,7 +7305,7 @@
                 <a:ea typeface="Calibri"/>
                 <a:cs typeface="Calibri"/>
               </a:rPr>
-              <a:t>RL-kretsen har I = 2,0 A, R = 30 Ω och Xᴸ = 40 Ω. Beräkna Uᴿ, Uᴸ och källspänningen.</a:t>
+              <a:t>RL-kretsen har I = 2,0 A, R = 30 Ω och Xᴸ = 40 Ω. Beräkna Uᴿ, Uᴸ och källspänningen.</a:t>
             </a:r>
           </a:p>
         </p:txBody>
@@ -8433,7 +8433,7 @@
                 <a:ea typeface="Calibri"/>
                 <a:cs typeface="Calibri"/>
               </a:rPr>
-              <a:t>φ = arctan(X/R)</a:t>
+              <a:t>φ = arctan(X/R)</a:t>
             </a:r>
           </a:p>
         </p:txBody>
@@ -8491,7 +8491,7 @@
                 <a:ea typeface="Calibri"/>
                 <a:cs typeface="Calibri"/>
               </a:rPr>
-              <a:t>R = 30 Ω och X = +40 Ω ger φ = +53,1°.</a:t>
+              <a:t>R = 30 Ω och X = +40 Ω ger φ = +53,1°.</a:t>
             </a:r>
           </a:p>
           <a:p xmlns:a="http://schemas.openxmlformats.org/drawingml/2006/main">
@@ -8515,7 +8515,7 @@
                 <a:ea typeface="Calibri"/>
                 <a:cs typeface="Calibri"/>
               </a:rPr>
-              <a:t>X = −40 Ω ger φ = −53,1°.</a:t>
+              <a:t>X = −40 Ω ger φ = −53,1°.</a:t>
             </a:r>
           </a:p>
         </p:txBody>
@@ -9697,7 +9697,7 @@
               </a:defRPr>
             </a:pPr>
             <a:r>
-              <a:rPr sz="2350" b="0">
+              <a:rPr sz="2100" b="0">
                 <a:solidFill>
                   <a:srgbClr val="111111"/>
                 </a:solidFill>
@@ -9721,7 +9721,7 @@
               </a:defRPr>
             </a:pPr>
             <a:r>
-              <a:rPr sz="2350" b="0">
+              <a:rPr sz="2100" b="0">
                 <a:solidFill>
                   <a:srgbClr val="111111"/>
                 </a:solidFill>
@@ -9787,7 +9787,7 @@
                 <a:ea typeface="Calibri"/>
                 <a:cs typeface="Calibri"/>
               </a:rPr>
-              <a:t>X = Xᴸ − Xᶜ</a:t>
+              <a:t>X = Xᴸ − Xᶜ</a:t>
             </a:r>
           </a:p>
         </p:txBody>
@@ -9837,15 +9837,15 @@
               </a:defRPr>
             </a:pPr>
             <a:r>
-              <a:rPr sz="2250" b="0">
-                <a:solidFill>
-                  <a:srgbClr val="111111"/>
-                </a:solidFill>
-                <a:latin typeface="Calibri"/>
-                <a:ea typeface="Calibri"/>
-                <a:cs typeface="Calibri"/>
-              </a:rPr>
-              <a:t>Om Xᴸ = Xᶜ blir |Z| = R.</a:t>
+              <a:rPr sz="2100" b="0">
+                <a:solidFill>
+                  <a:srgbClr val="111111"/>
+                </a:solidFill>
+                <a:latin typeface="Calibri"/>
+                <a:ea typeface="Calibri"/>
+                <a:cs typeface="Calibri"/>
+              </a:rPr>
+              <a:t>Om Xᴸ = Xᶜ blir |Z| = R.</a:t>
             </a:r>
           </a:p>
           <a:p xmlns:a="http://schemas.openxmlformats.org/drawingml/2006/main">
@@ -9861,7 +9861,7 @@
               </a:defRPr>
             </a:pPr>
             <a:r>
-              <a:rPr sz="2250" b="0">
+              <a:rPr sz="2100" b="0">
                 <a:solidFill>
                   <a:srgbClr val="111111"/>
                 </a:solidFill>
@@ -10993,7 +10993,7 @@
                 <a:ea typeface="Calibri"/>
                 <a:cs typeface="Calibri"/>
               </a:rPr>
-              <a:t>R = 30 Ω, Xᴸ = 40 Ω. Bestäm φ och ange om strömmen leder eller släpar spänningen.</a:t>
+              <a:t>R = 30 Ω, Xᴸ = 40 Ω. Bestäm φ och ange om strömmen leder eller släpar spänningen.</a:t>
             </a:r>
           </a:p>
         </p:txBody>
@@ -11764,7 +11764,7 @@
                 <a:ea typeface="Calibri"/>
                 <a:cs typeface="Calibri"/>
               </a:rPr>
-              <a:t>R = 60 Ω och Xᶜ = 80 Ω i serie över 200 V RMS. Bestäm |Z|, I och φ.</a:t>
+              <a:t>R = 60 Ω och Xᶜ = 80 Ω i serie över 200 V RMS. Bestäm |Z|, I och φ.</a:t>
             </a:r>
           </a:p>
         </p:txBody>
@@ -13026,7 +13026,7 @@
                 <a:ea typeface="Calibri"/>
                 <a:cs typeface="Calibri"/>
               </a:rPr>
-              <a:t>Frekvensen ökas från 50 till 100 Hz. Hur ändras Xᴸ och Xᶜ om komponenterna är oförändrade?</a:t>
+              <a:t>Frekvensen ökas från 50 till 100 Hz. Hur ändras Xᴸ och Xᶜ om komponenterna är oförändrade?</a:t>
             </a:r>
           </a:p>
         </p:txBody>
@@ -13797,7 +13797,7 @@
                 <a:ea typeface="Calibri"/>
                 <a:cs typeface="Calibri"/>
               </a:rPr>
-              <a:t>R = 30 Ω, Xᴸ = 50 Ω och Xᶜ = 10 Ω i serie. U = 100 V RMS. Bestäm nettoreaktans, |Z| och I.</a:t>
+              <a:t>R = 30 Ω, Xᴸ = 50 Ω och Xᶜ = 10 Ω i serie. U = 100 V RMS. Bestäm nettoreaktans, |Z| och I.</a:t>
             </a:r>
           </a:p>
         </p:txBody>
@@ -14568,7 +14568,7 @@
                 <a:ea typeface="Calibri"/>
                 <a:cs typeface="Calibri"/>
               </a:rPr>
-              <a:t>En ideal RLC-seriekrets har R = 20 Ω och Xᴸ = Xᶜ = 40 Ω. Den matas med 100 V RMS. Bestäm ström och fasvinkel.</a:t>
+              <a:t>En ideal RLC-seriekrets har R = 20 Ω och Xᴸ = Xᶜ = 40 Ω. Den matas med 100 V RMS. Bestäm ström och fasvinkel.</a:t>
             </a:r>
           </a:p>
         </p:txBody>
@@ -16473,7 +16473,7 @@
               </a:defRPr>
             </a:pPr>
             <a:r>
-              <a:rPr sz="2200" b="0">
+              <a:rPr sz="1950" b="0">
                 <a:solidFill>
                   <a:srgbClr val="111111"/>
                 </a:solidFill>
@@ -16497,7 +16497,7 @@
               </a:defRPr>
             </a:pPr>
             <a:r>
-              <a:rPr sz="2200" b="0">
+              <a:rPr sz="1950" b="0">
                 <a:solidFill>
                   <a:srgbClr val="111111"/>
                 </a:solidFill>
@@ -16563,7 +16563,7 @@
                 <a:ea typeface="Calibri"/>
                 <a:cs typeface="Calibri"/>
               </a:rPr>
-              <a:t>Xᴸ = 2πfL</a:t>
+              <a:t>Xᴸ = 2πfL</a:t>
             </a:r>
           </a:p>
         </p:txBody>
@@ -16621,7 +16621,7 @@
                 <a:ea typeface="Calibri"/>
                 <a:cs typeface="Calibri"/>
               </a:rPr>
-              <a:t>50 Hz och L = 0,10 H ger Xᴸ ≈ 31,4 Ω.</a:t>
+              <a:t>50 Hz och L = 0,10 H ger Xᴸ ≈ 31,4 Ω.</a:t>
             </a:r>
           </a:p>
           <a:p xmlns:a="http://schemas.openxmlformats.org/drawingml/2006/main">
@@ -16881,7 +16881,7 @@
               </a:defRPr>
             </a:pPr>
             <a:r>
-              <a:rPr sz="2050" b="0">
+              <a:rPr sz="1900" b="0">
                 <a:solidFill>
                   <a:srgbClr val="111111"/>
                 </a:solidFill>
@@ -16905,7 +16905,7 @@
               </a:defRPr>
             </a:pPr>
             <a:r>
-              <a:rPr sz="2050" b="0">
+              <a:rPr sz="1900" b="0">
                 <a:solidFill>
                   <a:srgbClr val="111111"/>
                 </a:solidFill>
@@ -16971,7 +16971,7 @@
                 <a:ea typeface="Calibri"/>
                 <a:cs typeface="Calibri"/>
               </a:rPr>
-              <a:t>Xᶜ = 1/(2πfC)</a:t>
+              <a:t>Xᶜ = 1/(2πfC)</a:t>
             </a:r>
           </a:p>
         </p:txBody>
@@ -17029,7 +17029,7 @@
                 <a:ea typeface="Calibri"/>
                 <a:cs typeface="Calibri"/>
               </a:rPr>
-              <a:t>50 Hz och C = 100 µF ger Xᶜ ≈ 31,8 Ω.</a:t>
+              <a:t>50 Hz och C = 100 µF ger Xᶜ ≈ 31,8 Ω.</a:t>
             </a:r>
           </a:p>
           <a:p xmlns:a="http://schemas.openxmlformats.org/drawingml/2006/main">
@@ -17053,7 +17053,7 @@
                 <a:ea typeface="Calibri"/>
                 <a:cs typeface="Calibri"/>
               </a:rPr>
-              <a:t>100 µF = 100 · 10⁻⁶ F.</a:t>
+              <a:t>100 µF = 100 · 10⁻⁶ F.</a:t>
             </a:r>
           </a:p>
         </p:txBody>

--- a/sjoskolan/vecka-40/aktuell/v40_02_Reaktans_och_impedans_elev.pptx
+++ b/sjoskolan/vecka-40/aktuell/v40_02_Reaktans_och_impedans_elev.pptx
@@ -3792,7 +3792,7 @@
       </p:sp>
       <p:sp>
         <p:nvSpPr>
-          <p:cNvPr id="10" name="Xᴸ = 2πfL">
+          <p:cNvPr id="10" name="XL = 2πfL">
             <a:extLst xmlns:a="http://schemas.openxmlformats.org/drawingml/2006/main">
               <a:ext uri="{FF2B5EF4-FFF2-40B4-BE49-F238E27FC236}">
                 <a16:creationId xmlns:a16="http://schemas.microsoft.com/office/drawing/2014/main" id="{FECF8C0A-36AD-4C59-9D22-1ACEDB5AAA09}"/>
@@ -3842,14 +3842,36 @@
                 <a:ea typeface="Calibri"/>
                 <a:cs typeface="Calibri"/>
               </a:rPr>
-              <a:t>Xᴸ = 2πfL</a:t>
-            </a:r>
-          </a:p>
-        </p:txBody>
-      </p:sp>
-      <p:sp>
-        <p:nvSpPr>
-          <p:cNvPr id="11" name="Xᴸ är induktiv reaktans i Ω, f frekvens i Hz och L induktans i H.">
+              <a:t>X</a:t>
+            </a:r>
+            <a:r>
+              <a:rPr sz="2400" b="1" baseline="-25000">
+                <a:solidFill>
+                  <a:srgbClr val="064F91"/>
+                </a:solidFill>
+                <a:latin typeface="Calibri"/>
+                <a:ea typeface="Calibri"/>
+                <a:cs typeface="Calibri"/>
+              </a:rPr>
+              <a:t>L</a:t>
+            </a:r>
+            <a:r>
+              <a:rPr sz="2400" b="1">
+                <a:solidFill>
+                  <a:srgbClr val="064F91"/>
+                </a:solidFill>
+                <a:latin typeface="Calibri"/>
+                <a:ea typeface="Calibri"/>
+                <a:cs typeface="Calibri"/>
+              </a:rPr>
+              <a:t> = 2πfL</a:t>
+            </a:r>
+          </a:p>
+        </p:txBody>
+      </p:sp>
+      <p:sp>
+        <p:nvSpPr>
+          <p:cNvPr id="11" name="XL är induktiv reaktans i Ω, f frekvens i Hz och L induktans i H.">
             <a:extLst xmlns:a="http://schemas.openxmlformats.org/drawingml/2006/main">
               <a:ext uri="{FF2B5EF4-FFF2-40B4-BE49-F238E27FC236}">
                 <a16:creationId xmlns:a16="http://schemas.microsoft.com/office/drawing/2014/main" id="{91DEB969-677F-4F5B-89BA-5B28D69BD33E}"/>
@@ -3899,7 +3921,29 @@
                 <a:ea typeface="Calibri"/>
                 <a:cs typeface="Calibri"/>
               </a:rPr>
-              <a:t>Xᴸ är induktiv reaktans i Ω, f frekvens i Hz och L induktans i H.</a:t>
+              <a:t>X</a:t>
+            </a:r>
+            <a:r>
+              <a:rPr sz="2100" b="0" baseline="-25000">
+                <a:solidFill>
+                  <a:srgbClr val="111111"/>
+                </a:solidFill>
+                <a:latin typeface="Calibri"/>
+                <a:ea typeface="Calibri"/>
+                <a:cs typeface="Calibri"/>
+              </a:rPr>
+              <a:t>L</a:t>
+            </a:r>
+            <a:r>
+              <a:rPr sz="2100" b="0">
+                <a:solidFill>
+                  <a:srgbClr val="111111"/>
+                </a:solidFill>
+                <a:latin typeface="Calibri"/>
+                <a:ea typeface="Calibri"/>
+                <a:cs typeface="Calibri"/>
+              </a:rPr>
+              <a:t> är induktiv reaktans i Ω, f frekvens i Hz och L induktans i H.</a:t>
             </a:r>
           </a:p>
         </p:txBody>
@@ -4239,7 +4283,7 @@
       </p:sp>
       <p:sp>
         <p:nvSpPr>
-          <p:cNvPr id="4" name="L = 0,10 H och f = 50 Hz. Beräkna Xᴸ.">
+          <p:cNvPr id="4" name="L = 0,10 H och f = 50 Hz. Beräkna XL.">
             <a:extLst xmlns:a="http://schemas.openxmlformats.org/drawingml/2006/main">
               <a:ext uri="{FF2B5EF4-FFF2-40B4-BE49-F238E27FC236}">
                 <a16:creationId xmlns:a16="http://schemas.microsoft.com/office/drawing/2014/main" id="{A5EC6764-2AB5-4E23-BA1F-7593F23AE638}"/>
@@ -4290,7 +4334,29 @@
                 <a:ea typeface="Calibri"/>
                 <a:cs typeface="Calibri"/>
               </a:rPr>
-              <a:t>L = 0,10 H och f = 50 Hz. Beräkna Xᴸ.</a:t>
+              <a:t>L = 0,10 H och f = 50 Hz. Beräkna X</a:t>
+            </a:r>
+            <a:r>
+              <a:rPr sz="2400" b="0" baseline="-25000">
+                <a:solidFill>
+                  <a:srgbClr val="111111"/>
+                </a:solidFill>
+                <a:latin typeface="Calibri"/>
+                <a:ea typeface="Calibri"/>
+                <a:cs typeface="Calibri"/>
+              </a:rPr>
+              <a:t>L</a:t>
+            </a:r>
+            <a:r>
+              <a:rPr sz="2400" b="0">
+                <a:solidFill>
+                  <a:srgbClr val="111111"/>
+                </a:solidFill>
+                <a:latin typeface="Calibri"/>
+                <a:ea typeface="Calibri"/>
+                <a:cs typeface="Calibri"/>
+              </a:rPr>
+              <a:t>.</a:t>
             </a:r>
           </a:p>
         </p:txBody>
@@ -4540,7 +4606,7 @@
       </p:sp>
       <p:sp>
         <p:nvSpPr>
-          <p:cNvPr id="10" name="Xᶜ = 1/(2πfC)">
+          <p:cNvPr id="10" name="XC = 1/(2πfC)">
             <a:extLst xmlns:a="http://schemas.openxmlformats.org/drawingml/2006/main">
               <a:ext uri="{FF2B5EF4-FFF2-40B4-BE49-F238E27FC236}">
                 <a16:creationId xmlns:a16="http://schemas.microsoft.com/office/drawing/2014/main" id="{E36B74EC-58AA-4D6C-B6FA-A56B9062A8E8}"/>
@@ -4590,14 +4656,36 @@
                 <a:ea typeface="Calibri"/>
                 <a:cs typeface="Calibri"/>
               </a:rPr>
-              <a:t>Xᶜ = 1/(2πfC)</a:t>
-            </a:r>
-          </a:p>
-        </p:txBody>
-      </p:sp>
-      <p:sp>
-        <p:nvSpPr>
-          <p:cNvPr id="11" name="Xᶜ är kapacitiv reaktans belopp i Ω. C är kapacitans i F. 1 µF = ">
+              <a:t>X</a:t>
+            </a:r>
+            <a:r>
+              <a:rPr sz="2400" b="1" baseline="-25000">
+                <a:solidFill>
+                  <a:srgbClr val="064F91"/>
+                </a:solidFill>
+                <a:latin typeface="Calibri"/>
+                <a:ea typeface="Calibri"/>
+                <a:cs typeface="Calibri"/>
+              </a:rPr>
+              <a:t>C</a:t>
+            </a:r>
+            <a:r>
+              <a:rPr sz="2400" b="1">
+                <a:solidFill>
+                  <a:srgbClr val="064F91"/>
+                </a:solidFill>
+                <a:latin typeface="Calibri"/>
+                <a:ea typeface="Calibri"/>
+                <a:cs typeface="Calibri"/>
+              </a:rPr>
+              <a:t> = 1/(2πfC)</a:t>
+            </a:r>
+          </a:p>
+        </p:txBody>
+      </p:sp>
+      <p:sp>
+        <p:nvSpPr>
+          <p:cNvPr id="11" name="XC är kapacitiv reaktans belopp i Ω. C är kapacitans i F. 1 µF = ">
             <a:extLst xmlns:a="http://schemas.openxmlformats.org/drawingml/2006/main">
               <a:ext uri="{FF2B5EF4-FFF2-40B4-BE49-F238E27FC236}">
                 <a16:creationId xmlns:a16="http://schemas.microsoft.com/office/drawing/2014/main" id="{0C266534-9723-44BE-8649-A356B13F5B35}"/>
@@ -4647,7 +4735,29 @@
                 <a:ea typeface="Calibri"/>
                 <a:cs typeface="Calibri"/>
               </a:rPr>
-              <a:t>Xᶜ är kapacitiv reaktans belopp i Ω. C är kapacitans i F. 1 µF = 10⁻⁶ F.</a:t>
+              <a:t>X</a:t>
+            </a:r>
+            <a:r>
+              <a:rPr sz="2100" b="0" baseline="-25000">
+                <a:solidFill>
+                  <a:srgbClr val="111111"/>
+                </a:solidFill>
+                <a:latin typeface="Calibri"/>
+                <a:ea typeface="Calibri"/>
+                <a:cs typeface="Calibri"/>
+              </a:rPr>
+              <a:t>C</a:t>
+            </a:r>
+            <a:r>
+              <a:rPr sz="2100" b="0">
+                <a:solidFill>
+                  <a:srgbClr val="111111"/>
+                </a:solidFill>
+                <a:latin typeface="Calibri"/>
+                <a:ea typeface="Calibri"/>
+                <a:cs typeface="Calibri"/>
+              </a:rPr>
+              <a:t> är kapacitiv reaktans belopp i Ω. C är kapacitans i F. 1 µF = 10⁻⁶ F.</a:t>
             </a:r>
           </a:p>
         </p:txBody>
@@ -4987,7 +5097,7 @@
       </p:sp>
       <p:sp>
         <p:nvSpPr>
-          <p:cNvPr id="4" name="C = 100 µF och f = 50 Hz. Beräkna Xᶜ.">
+          <p:cNvPr id="4" name="C = 100 µF och f = 50 Hz. Beräkna XC.">
             <a:extLst xmlns:a="http://schemas.openxmlformats.org/drawingml/2006/main">
               <a:ext uri="{FF2B5EF4-FFF2-40B4-BE49-F238E27FC236}">
                 <a16:creationId xmlns:a16="http://schemas.microsoft.com/office/drawing/2014/main" id="{B5189CF3-7E7B-4BC6-9E95-0C1B322662BC}"/>
@@ -5038,7 +5148,29 @@
                 <a:ea typeface="Calibri"/>
                 <a:cs typeface="Calibri"/>
               </a:rPr>
-              <a:t>C = 100 µF och f = 50 Hz. Beräkna Xᶜ.</a:t>
+              <a:t>C = 100 µF och f = 50 Hz. Beräkna X</a:t>
+            </a:r>
+            <a:r>
+              <a:rPr sz="2400" b="0" baseline="-25000">
+                <a:solidFill>
+                  <a:srgbClr val="111111"/>
+                </a:solidFill>
+                <a:latin typeface="Calibri"/>
+                <a:ea typeface="Calibri"/>
+                <a:cs typeface="Calibri"/>
+              </a:rPr>
+              <a:t>C</a:t>
+            </a:r>
+            <a:r>
+              <a:rPr sz="2400" b="0">
+                <a:solidFill>
+                  <a:srgbClr val="111111"/>
+                </a:solidFill>
+                <a:latin typeface="Calibri"/>
+                <a:ea typeface="Calibri"/>
+                <a:cs typeface="Calibri"/>
+              </a:rPr>
+              <a:t>.</a:t>
             </a:r>
           </a:p>
         </p:txBody>
@@ -5402,7 +5534,7 @@
       </p:sp>
       <p:sp>
         <p:nvSpPr>
-          <p:cNvPr id="12" name="Förutsättningar: Seriekopplad RL-krets med R = 30 Ω och X = Xᴸ = ">
+          <p:cNvPr id="12" name="Förutsättningar: Seriekopplad RL-krets med R = 30 Ω och X = XL = ">
             <a:extLst xmlns:a="http://schemas.openxmlformats.org/drawingml/2006/main">
               <a:ext uri="{FF2B5EF4-FFF2-40B4-BE49-F238E27FC236}">
                 <a16:creationId xmlns:a16="http://schemas.microsoft.com/office/drawing/2014/main" id="{BDAE66CB-72B4-4187-A3F7-C0B9F67556A6}"/>
@@ -5452,7 +5584,29 @@
                 <a:ea typeface="Calibri"/>
                 <a:cs typeface="Calibri"/>
               </a:rPr>
-              <a:t>Förutsättningar: Seriekopplad RL-krets med R = 30 Ω och X = Xᴸ = +40 Ω.</a:t>
+              <a:t>Förutsättningar: Seriekopplad RL-krets med R = 30 Ω och X = X</a:t>
+            </a:r>
+            <a:r>
+              <a:rPr sz="2025" b="0" baseline="-25000">
+                <a:solidFill>
+                  <a:srgbClr val="111111"/>
+                </a:solidFill>
+                <a:latin typeface="Calibri"/>
+                <a:ea typeface="Calibri"/>
+                <a:cs typeface="Calibri"/>
+              </a:rPr>
+              <a:t>L</a:t>
+            </a:r>
+            <a:r>
+              <a:rPr sz="2025" b="0">
+                <a:solidFill>
+                  <a:srgbClr val="111111"/>
+                </a:solidFill>
+                <a:latin typeface="Calibri"/>
+                <a:ea typeface="Calibri"/>
+                <a:cs typeface="Calibri"/>
+              </a:rPr>
+              <a:t> = +40 Ω.</a:t>
             </a:r>
           </a:p>
         </p:txBody>
@@ -5735,7 +5889,7 @@
       </p:sp>
       <p:sp>
         <p:nvSpPr>
-          <p:cNvPr id="4" name="En seriekrets har R = 30 Ω och Xᴸ = 40 Ω. Beräkna |Z|.">
+          <p:cNvPr id="4" name="En seriekrets har R = 30 Ω och XL = 40 Ω. Beräkna |Z|.">
             <a:extLst xmlns:a="http://schemas.openxmlformats.org/drawingml/2006/main">
               <a:ext uri="{FF2B5EF4-FFF2-40B4-BE49-F238E27FC236}">
                 <a16:creationId xmlns:a16="http://schemas.microsoft.com/office/drawing/2014/main" id="{D37C2EA9-0E85-4308-AF79-DBDD6E245CEE}"/>
@@ -5786,7 +5940,29 @@
                 <a:ea typeface="Calibri"/>
                 <a:cs typeface="Calibri"/>
               </a:rPr>
-              <a:t>En seriekrets har R = 30 Ω och Xᴸ = 40 Ω. Beräkna |Z|.</a:t>
+              <a:t>En seriekrets har R = 30 Ω och X</a:t>
+            </a:r>
+            <a:r>
+              <a:rPr sz="2400" b="0" baseline="-25000">
+                <a:solidFill>
+                  <a:srgbClr val="111111"/>
+                </a:solidFill>
+                <a:latin typeface="Calibri"/>
+                <a:ea typeface="Calibri"/>
+                <a:cs typeface="Calibri"/>
+              </a:rPr>
+              <a:t>L</a:t>
+            </a:r>
+            <a:r>
+              <a:rPr sz="2400" b="0">
+                <a:solidFill>
+                  <a:srgbClr val="111111"/>
+                </a:solidFill>
+                <a:latin typeface="Calibri"/>
+                <a:ea typeface="Calibri"/>
+                <a:cs typeface="Calibri"/>
+              </a:rPr>
+              <a:t> = 40 Ω. Beräkna |Z|.</a:t>
             </a:r>
           </a:p>
         </p:txBody>
@@ -6150,7 +6326,7 @@
       </p:sp>
       <p:sp>
         <p:nvSpPr>
-          <p:cNvPr id="12" name="Förutsättningar: Serie-RL: U = 100 V, R = 30 Ω, Xᴸ = 40 Ω.">
+          <p:cNvPr id="12" name="Förutsättningar: Serie-RL: U = 100 V, R = 30 Ω, XL = 40 Ω.">
             <a:extLst xmlns:a="http://schemas.openxmlformats.org/drawingml/2006/main">
               <a:ext uri="{FF2B5EF4-FFF2-40B4-BE49-F238E27FC236}">
                 <a16:creationId xmlns:a16="http://schemas.microsoft.com/office/drawing/2014/main" id="{C32C3908-84F9-4D99-89D6-B2DDBA87D338}"/>
@@ -6200,7 +6376,29 @@
                 <a:ea typeface="Calibri"/>
                 <a:cs typeface="Calibri"/>
               </a:rPr>
-              <a:t>Förutsättningar: Serie-RL: U = 100 V, R = 30 Ω, Xᴸ = 40 Ω.</a:t>
+              <a:t>Förutsättningar: Serie-RL: U = 100 V, R = 30 Ω, X</a:t>
+            </a:r>
+            <a:r>
+              <a:rPr sz="2025" b="0" baseline="-25000">
+                <a:solidFill>
+                  <a:srgbClr val="111111"/>
+                </a:solidFill>
+                <a:latin typeface="Calibri"/>
+                <a:ea typeface="Calibri"/>
+                <a:cs typeface="Calibri"/>
+              </a:rPr>
+              <a:t>L</a:t>
+            </a:r>
+            <a:r>
+              <a:rPr sz="2025" b="0">
+                <a:solidFill>
+                  <a:srgbClr val="111111"/>
+                </a:solidFill>
+                <a:latin typeface="Calibri"/>
+                <a:ea typeface="Calibri"/>
+                <a:cs typeface="Calibri"/>
+              </a:rPr>
+              <a:t> = 40 Ω.</a:t>
             </a:r>
           </a:p>
         </p:txBody>
@@ -6483,7 +6681,7 @@
       </p:sp>
       <p:sp>
         <p:nvSpPr>
-          <p:cNvPr id="4" name="100 V RMS matar kretsen R = 30 Ω, Xᴸ = 40 Ω. Beräkna strömmen.">
+          <p:cNvPr id="4" name="100 V RMS matar kretsen R = 30 Ω, XL = 40 Ω. Beräkna strömmen.">
             <a:extLst xmlns:a="http://schemas.openxmlformats.org/drawingml/2006/main">
               <a:ext uri="{FF2B5EF4-FFF2-40B4-BE49-F238E27FC236}">
                 <a16:creationId xmlns:a16="http://schemas.microsoft.com/office/drawing/2014/main" id="{9F3767E2-8D97-4E50-9822-9290BF9F942D}"/>
@@ -6534,7 +6732,29 @@
                 <a:ea typeface="Calibri"/>
                 <a:cs typeface="Calibri"/>
               </a:rPr>
-              <a:t>100 V RMS matar kretsen R = 30 Ω, Xᴸ = 40 Ω. Beräkna strömmen.</a:t>
+              <a:t>100 V RMS matar kretsen R = 30 Ω, X</a:t>
+            </a:r>
+            <a:r>
+              <a:rPr sz="2400" b="0" baseline="-25000">
+                <a:solidFill>
+                  <a:srgbClr val="111111"/>
+                </a:solidFill>
+                <a:latin typeface="Calibri"/>
+                <a:ea typeface="Calibri"/>
+                <a:cs typeface="Calibri"/>
+              </a:rPr>
+              <a:t>L</a:t>
+            </a:r>
+            <a:r>
+              <a:rPr sz="2400" b="0">
+                <a:solidFill>
+                  <a:srgbClr val="111111"/>
+                </a:solidFill>
+                <a:latin typeface="Calibri"/>
+                <a:ea typeface="Calibri"/>
+                <a:cs typeface="Calibri"/>
+              </a:rPr>
+              <a:t> = 40 Ω. Beräkna strömmen.</a:t>
             </a:r>
           </a:p>
         </p:txBody>
@@ -6784,7 +7004,7 @@
       </p:sp>
       <p:sp>
         <p:nvSpPr>
-          <p:cNvPr id="10" name="Uᴿ = IR     Uᴸ = IXᴸ&#10;U = √(Uᴿ² + Uᴸ²)">
+          <p:cNvPr id="10" name="UR = IR     UL = IXL&#10;U = √(UR² + UL²)">
             <a:extLst xmlns:a="http://schemas.openxmlformats.org/drawingml/2006/main">
               <a:ext uri="{FF2B5EF4-FFF2-40B4-BE49-F238E27FC236}">
                 <a16:creationId xmlns:a16="http://schemas.microsoft.com/office/drawing/2014/main" id="{4C4F011D-47F3-458D-832F-BBE3F8183ECB}"/>
@@ -6834,7 +7054,62 @@
                 <a:ea typeface="Calibri"/>
                 <a:cs typeface="Calibri"/>
               </a:rPr>
-              <a:t>Uᴿ = IR     Uᴸ = IXᴸ</a:t>
+              <a:t>U</a:t>
+            </a:r>
+            <a:r>
+              <a:rPr sz="2400" b="1" baseline="-25000">
+                <a:solidFill>
+                  <a:srgbClr val="064F91"/>
+                </a:solidFill>
+                <a:latin typeface="Calibri"/>
+                <a:ea typeface="Calibri"/>
+                <a:cs typeface="Calibri"/>
+              </a:rPr>
+              <a:t>R</a:t>
+            </a:r>
+            <a:r>
+              <a:rPr sz="2400" b="1">
+                <a:solidFill>
+                  <a:srgbClr val="064F91"/>
+                </a:solidFill>
+                <a:latin typeface="Calibri"/>
+                <a:ea typeface="Calibri"/>
+                <a:cs typeface="Calibri"/>
+              </a:rPr>
+              <a:t> = IR     U</a:t>
+            </a:r>
+            <a:r>
+              <a:rPr sz="2400" b="1" baseline="-25000">
+                <a:solidFill>
+                  <a:srgbClr val="064F91"/>
+                </a:solidFill>
+                <a:latin typeface="Calibri"/>
+                <a:ea typeface="Calibri"/>
+                <a:cs typeface="Calibri"/>
+              </a:rPr>
+              <a:t>L</a:t>
+            </a:r>
+            <a:r>
+              <a:rPr sz="2400" b="1">
+                <a:solidFill>
+                  <a:srgbClr val="064F91"/>
+                </a:solidFill>
+                <a:latin typeface="Calibri"/>
+                <a:ea typeface="Calibri"/>
+                <a:cs typeface="Calibri"/>
+              </a:rPr>
+              <a:t> = IX</a:t>
+            </a:r>
+            <a:r>
+              <a:rPr sz="2400" b="1" baseline="-25000">
+                <a:solidFill>
+                  <a:srgbClr val="064F91"/>
+                </a:solidFill>
+                <a:latin typeface="Calibri"/>
+                <a:ea typeface="Calibri"/>
+                <a:cs typeface="Calibri"/>
+              </a:rPr>
+              <a:t>L</a:t>
             </a:r>
           </a:p>
           <a:p xmlns:a="http://schemas.openxmlformats.org/drawingml/2006/main">
@@ -6857,14 +7132,58 @@
                 <a:ea typeface="Calibri"/>
                 <a:cs typeface="Calibri"/>
               </a:rPr>
-              <a:t>U = √(Uᴿ² + Uᴸ²)</a:t>
-            </a:r>
-          </a:p>
-        </p:txBody>
-      </p:sp>
-      <p:sp>
-        <p:nvSpPr>
-          <p:cNvPr id="11" name="Uᴿ och Uᴸ är vinkelräta spänningsvisare. Samma RMS-ström går geno">
+              <a:t>U = √(U</a:t>
+            </a:r>
+            <a:r>
+              <a:rPr sz="2400" b="1" baseline="-25000">
+                <a:solidFill>
+                  <a:srgbClr val="064F91"/>
+                </a:solidFill>
+                <a:latin typeface="Calibri"/>
+                <a:ea typeface="Calibri"/>
+                <a:cs typeface="Calibri"/>
+              </a:rPr>
+              <a:t>R</a:t>
+            </a:r>
+            <a:r>
+              <a:rPr sz="2400" b="1">
+                <a:solidFill>
+                  <a:srgbClr val="064F91"/>
+                </a:solidFill>
+                <a:latin typeface="Calibri"/>
+                <a:ea typeface="Calibri"/>
+                <a:cs typeface="Calibri"/>
+              </a:rPr>
+              <a:t>² + U</a:t>
+            </a:r>
+            <a:r>
+              <a:rPr sz="2400" b="1" baseline="-25000">
+                <a:solidFill>
+                  <a:srgbClr val="064F91"/>
+                </a:solidFill>
+                <a:latin typeface="Calibri"/>
+                <a:ea typeface="Calibri"/>
+                <a:cs typeface="Calibri"/>
+              </a:rPr>
+              <a:t>L</a:t>
+            </a:r>
+            <a:r>
+              <a:rPr sz="2400" b="1">
+                <a:solidFill>
+                  <a:srgbClr val="064F91"/>
+                </a:solidFill>
+                <a:latin typeface="Calibri"/>
+                <a:ea typeface="Calibri"/>
+                <a:cs typeface="Calibri"/>
+              </a:rPr>
+              <a:t>²)</a:t>
+            </a:r>
+          </a:p>
+        </p:txBody>
+      </p:sp>
+      <p:sp>
+        <p:nvSpPr>
+          <p:cNvPr id="11" name="UR och UL är vinkelräta spänningsvisare. Samma RMS-ström går geno">
             <a:extLst xmlns:a="http://schemas.openxmlformats.org/drawingml/2006/main">
               <a:ext uri="{FF2B5EF4-FFF2-40B4-BE49-F238E27FC236}">
                 <a16:creationId xmlns:a16="http://schemas.microsoft.com/office/drawing/2014/main" id="{6B8E49A3-E9C1-46DF-9508-EEE3B97F3D61}"/>
@@ -6914,14 +7233,58 @@
                 <a:ea typeface="Calibri"/>
                 <a:cs typeface="Calibri"/>
               </a:rPr>
-              <a:t>Uᴿ och Uᴸ är vinkelräta spänningsvisare. Samma RMS-ström går genom båda komponenterna.</a:t>
-            </a:r>
-          </a:p>
-        </p:txBody>
-      </p:sp>
-      <p:sp>
-        <p:nvSpPr>
-          <p:cNvPr id="12" name="Förutsättningar: Serie-RL med I = 2,0 A, R = 30 Ω och Xᴸ = 40 Ω.">
+              <a:t>U</a:t>
+            </a:r>
+            <a:r>
+              <a:rPr sz="2100" b="0" baseline="-25000">
+                <a:solidFill>
+                  <a:srgbClr val="111111"/>
+                </a:solidFill>
+                <a:latin typeface="Calibri"/>
+                <a:ea typeface="Calibri"/>
+                <a:cs typeface="Calibri"/>
+              </a:rPr>
+              <a:t>R</a:t>
+            </a:r>
+            <a:r>
+              <a:rPr sz="2100" b="0">
+                <a:solidFill>
+                  <a:srgbClr val="111111"/>
+                </a:solidFill>
+                <a:latin typeface="Calibri"/>
+                <a:ea typeface="Calibri"/>
+                <a:cs typeface="Calibri"/>
+              </a:rPr>
+              <a:t> och U</a:t>
+            </a:r>
+            <a:r>
+              <a:rPr sz="2100" b="0" baseline="-25000">
+                <a:solidFill>
+                  <a:srgbClr val="111111"/>
+                </a:solidFill>
+                <a:latin typeface="Calibri"/>
+                <a:ea typeface="Calibri"/>
+                <a:cs typeface="Calibri"/>
+              </a:rPr>
+              <a:t>L</a:t>
+            </a:r>
+            <a:r>
+              <a:rPr sz="2100" b="0">
+                <a:solidFill>
+                  <a:srgbClr val="111111"/>
+                </a:solidFill>
+                <a:latin typeface="Calibri"/>
+                <a:ea typeface="Calibri"/>
+                <a:cs typeface="Calibri"/>
+              </a:rPr>
+              <a:t> är vinkelräta spänningsvisare. Samma RMS-ström går genom båda komponenterna.</a:t>
+            </a:r>
+          </a:p>
+        </p:txBody>
+      </p:sp>
+      <p:sp>
+        <p:nvSpPr>
+          <p:cNvPr id="12" name="Förutsättningar: Serie-RL med I = 2,0 A, R = 30 Ω och XL = 40 Ω.">
             <a:extLst xmlns:a="http://schemas.openxmlformats.org/drawingml/2006/main">
               <a:ext uri="{FF2B5EF4-FFF2-40B4-BE49-F238E27FC236}">
                 <a16:creationId xmlns:a16="http://schemas.microsoft.com/office/drawing/2014/main" id="{46AA4C40-D4B7-4985-B0D3-C59BE104B6BD}"/>
@@ -6971,7 +7334,29 @@
                 <a:ea typeface="Calibri"/>
                 <a:cs typeface="Calibri"/>
               </a:rPr>
-              <a:t>Förutsättningar: Serie-RL med I = 2,0 A, R = 30 Ω och Xᴸ = 40 Ω.</a:t>
+              <a:t>Förutsättningar: Serie-RL med I = 2,0 A, R = 30 Ω och X</a:t>
+            </a:r>
+            <a:r>
+              <a:rPr sz="2025" b="0" baseline="-25000">
+                <a:solidFill>
+                  <a:srgbClr val="111111"/>
+                </a:solidFill>
+                <a:latin typeface="Calibri"/>
+                <a:ea typeface="Calibri"/>
+                <a:cs typeface="Calibri"/>
+              </a:rPr>
+              <a:t>L</a:t>
+            </a:r>
+            <a:r>
+              <a:rPr sz="2025" b="0">
+                <a:solidFill>
+                  <a:srgbClr val="111111"/>
+                </a:solidFill>
+                <a:latin typeface="Calibri"/>
+                <a:ea typeface="Calibri"/>
+                <a:cs typeface="Calibri"/>
+              </a:rPr>
+              <a:t> = 40 Ω.</a:t>
             </a:r>
           </a:p>
         </p:txBody>
@@ -7254,7 +7639,7 @@
       </p:sp>
       <p:sp>
         <p:nvSpPr>
-          <p:cNvPr id="4" name="RL-kretsen har I = 2,0 A, R = 30 Ω och Xᴸ = 40 Ω. Beräkna Uᴿ, Uᴸ ">
+          <p:cNvPr id="4" name="RL-kretsen har I = 2,0 A, R = 30 Ω och XL = 40 Ω. Beräkna UR, UL ">
             <a:extLst xmlns:a="http://schemas.openxmlformats.org/drawingml/2006/main">
               <a:ext uri="{FF2B5EF4-FFF2-40B4-BE49-F238E27FC236}">
                 <a16:creationId xmlns:a16="http://schemas.microsoft.com/office/drawing/2014/main" id="{CDF16E5D-4EA7-4510-868B-B2B4763ABAEC}"/>
@@ -7305,7 +7690,73 @@
                 <a:ea typeface="Calibri"/>
                 <a:cs typeface="Calibri"/>
               </a:rPr>
-              <a:t>RL-kretsen har I = 2,0 A, R = 30 Ω och Xᴸ = 40 Ω. Beräkna Uᴿ, Uᴸ och källspänningen.</a:t>
+              <a:t>RL-kretsen har I = 2,0 A, R = 30 Ω och X</a:t>
+            </a:r>
+            <a:r>
+              <a:rPr sz="2400" b="0" baseline="-25000">
+                <a:solidFill>
+                  <a:srgbClr val="111111"/>
+                </a:solidFill>
+                <a:latin typeface="Calibri"/>
+                <a:ea typeface="Calibri"/>
+                <a:cs typeface="Calibri"/>
+              </a:rPr>
+              <a:t>L</a:t>
+            </a:r>
+            <a:r>
+              <a:rPr sz="2400" b="0">
+                <a:solidFill>
+                  <a:srgbClr val="111111"/>
+                </a:solidFill>
+                <a:latin typeface="Calibri"/>
+                <a:ea typeface="Calibri"/>
+                <a:cs typeface="Calibri"/>
+              </a:rPr>
+              <a:t> = 40 Ω. Beräkna U</a:t>
+            </a:r>
+            <a:r>
+              <a:rPr sz="2400" b="0" baseline="-25000">
+                <a:solidFill>
+                  <a:srgbClr val="111111"/>
+                </a:solidFill>
+                <a:latin typeface="Calibri"/>
+                <a:ea typeface="Calibri"/>
+                <a:cs typeface="Calibri"/>
+              </a:rPr>
+              <a:t>R</a:t>
+            </a:r>
+            <a:r>
+              <a:rPr sz="2400" b="0">
+                <a:solidFill>
+                  <a:srgbClr val="111111"/>
+                </a:solidFill>
+                <a:latin typeface="Calibri"/>
+                <a:ea typeface="Calibri"/>
+                <a:cs typeface="Calibri"/>
+              </a:rPr>
+              <a:t>, U</a:t>
+            </a:r>
+            <a:r>
+              <a:rPr sz="2400" b="0" baseline="-25000">
+                <a:solidFill>
+                  <a:srgbClr val="111111"/>
+                </a:solidFill>
+                <a:latin typeface="Calibri"/>
+                <a:ea typeface="Calibri"/>
+                <a:cs typeface="Calibri"/>
+              </a:rPr>
+              <a:t>L</a:t>
+            </a:r>
+            <a:r>
+              <a:rPr sz="2400" b="0">
+                <a:solidFill>
+                  <a:srgbClr val="111111"/>
+                </a:solidFill>
+                <a:latin typeface="Calibri"/>
+                <a:ea typeface="Calibri"/>
+                <a:cs typeface="Calibri"/>
+              </a:rPr>
+              <a:t> och källspänningen.</a:t>
             </a:r>
           </a:p>
         </p:txBody>
@@ -7556,7 +8007,7 @@
       </p:sp>
       <p:sp>
         <p:nvSpPr>
-          <p:cNvPr id="3" name="Beräkna Xᴸ, Xᶜ och impedansens belopp.">
+          <p:cNvPr id="3" name="Beräkna XL, XC och impedansens belopp.">
             <a:extLst xmlns:a="http://schemas.openxmlformats.org/drawingml/2006/main">
               <a:ext uri="{FF2B5EF4-FFF2-40B4-BE49-F238E27FC236}">
                 <a16:creationId xmlns:a16="http://schemas.microsoft.com/office/drawing/2014/main" id="{35CEB0E2-4E32-46ED-A925-845B8E6AAA2B}"/>
@@ -7607,7 +8058,51 @@
                 <a:ea typeface="Calibri"/>
                 <a:cs typeface="Calibri"/>
               </a:rPr>
-              <a:t>Beräkna Xᴸ, Xᶜ och impedansens belopp.</a:t>
+              <a:t>Beräkna X</a:t>
+            </a:r>
+            <a:r>
+              <a:rPr sz="2400" b="0" baseline="-25000">
+                <a:solidFill>
+                  <a:srgbClr val="111111"/>
+                </a:solidFill>
+                <a:latin typeface="Calibri"/>
+                <a:ea typeface="Calibri"/>
+                <a:cs typeface="Calibri"/>
+              </a:rPr>
+              <a:t>L</a:t>
+            </a:r>
+            <a:r>
+              <a:rPr sz="2400" b="0">
+                <a:solidFill>
+                  <a:srgbClr val="111111"/>
+                </a:solidFill>
+                <a:latin typeface="Calibri"/>
+                <a:ea typeface="Calibri"/>
+                <a:cs typeface="Calibri"/>
+              </a:rPr>
+              <a:t>, X</a:t>
+            </a:r>
+            <a:r>
+              <a:rPr sz="2400" b="0" baseline="-25000">
+                <a:solidFill>
+                  <a:srgbClr val="111111"/>
+                </a:solidFill>
+                <a:latin typeface="Calibri"/>
+                <a:ea typeface="Calibri"/>
+                <a:cs typeface="Calibri"/>
+              </a:rPr>
+              <a:t>C</a:t>
+            </a:r>
+            <a:r>
+              <a:rPr sz="2400" b="0">
+                <a:solidFill>
+                  <a:srgbClr val="111111"/>
+                </a:solidFill>
+                <a:latin typeface="Calibri"/>
+                <a:ea typeface="Calibri"/>
+                <a:cs typeface="Calibri"/>
+              </a:rPr>
+              <a:t> och impedansens belopp.</a:t>
             </a:r>
           </a:p>
         </p:txBody>
@@ -8491,7 +8986,7 @@
                 <a:ea typeface="Calibri"/>
                 <a:cs typeface="Calibri"/>
               </a:rPr>
-              <a:t>R = 30 Ω och X = +40 Ω ger φ = +53,1°.</a:t>
+              <a:t>R = 12 Ω och X = +5 Ω ger φ = +22,6°.</a:t>
             </a:r>
           </a:p>
           <a:p xmlns:a="http://schemas.openxmlformats.org/drawingml/2006/main">
@@ -8515,7 +9010,7 @@
                 <a:ea typeface="Calibri"/>
                 <a:cs typeface="Calibri"/>
               </a:rPr>
-              <a:t>X = −40 Ω ger φ = −53,1°.</a:t>
+              <a:t>X = −5 Ω ger φ = −22,6°.</a:t>
             </a:r>
           </a:p>
         </p:txBody>
@@ -9060,7 +9555,7 @@
       </p:sp>
       <p:sp>
         <p:nvSpPr>
-          <p:cNvPr id="13" name="Uᴿ = 60 V">
+          <p:cNvPr id="13" name="UR = 60 V">
             <a:extLst xmlns:a="http://schemas.openxmlformats.org/drawingml/2006/main">
               <a:ext uri="{FF2B5EF4-FFF2-40B4-BE49-F238E27FC236}">
                 <a16:creationId xmlns:a16="http://schemas.microsoft.com/office/drawing/2014/main" id="{9D08FE2D-133B-42FB-BC62-F0572AE21300}"/>
@@ -9111,14 +9606,36 @@
                 <a:ea typeface="Calibri"/>
                 <a:cs typeface="Calibri"/>
               </a:rPr>
-              <a:t>Uᴿ = 60 V</a:t>
-            </a:r>
-          </a:p>
-        </p:txBody>
-      </p:sp>
-      <p:sp>
-        <p:nvSpPr>
-          <p:cNvPr id="14" name="Uᴸ = 80 V">
+              <a:t>U</a:t>
+            </a:r>
+            <a:r>
+              <a:rPr sz="1763" b="0" baseline="-25000">
+                <a:solidFill>
+                  <a:srgbClr val="111111"/>
+                </a:solidFill>
+                <a:latin typeface="Calibri"/>
+                <a:ea typeface="Calibri"/>
+                <a:cs typeface="Calibri"/>
+              </a:rPr>
+              <a:t>R</a:t>
+            </a:r>
+            <a:r>
+              <a:rPr sz="1763" b="0">
+                <a:solidFill>
+                  <a:srgbClr val="111111"/>
+                </a:solidFill>
+                <a:latin typeface="Calibri"/>
+                <a:ea typeface="Calibri"/>
+                <a:cs typeface="Calibri"/>
+              </a:rPr>
+              <a:t> = 60 V</a:t>
+            </a:r>
+          </a:p>
+        </p:txBody>
+      </p:sp>
+      <p:sp>
+        <p:nvSpPr>
+          <p:cNvPr id="14" name="UL = 80 V">
             <a:extLst xmlns:a="http://schemas.openxmlformats.org/drawingml/2006/main">
               <a:ext uri="{FF2B5EF4-FFF2-40B4-BE49-F238E27FC236}">
                 <a16:creationId xmlns:a16="http://schemas.microsoft.com/office/drawing/2014/main" id="{95CE481E-5B6C-421B-9F49-7AFDF8C43CCE}"/>
@@ -9169,7 +9686,29 @@
                 <a:ea typeface="Calibri"/>
                 <a:cs typeface="Calibri"/>
               </a:rPr>
-              <a:t>Uᴸ = 80 V</a:t>
+              <a:t>U</a:t>
+            </a:r>
+            <a:r>
+              <a:rPr sz="1763" b="0" baseline="-25000">
+                <a:solidFill>
+                  <a:srgbClr val="111111"/>
+                </a:solidFill>
+                <a:latin typeface="Calibri"/>
+                <a:ea typeface="Calibri"/>
+                <a:cs typeface="Calibri"/>
+              </a:rPr>
+              <a:t>L</a:t>
+            </a:r>
+            <a:r>
+              <a:rPr sz="1763" b="0">
+                <a:solidFill>
+                  <a:srgbClr val="111111"/>
+                </a:solidFill>
+                <a:latin typeface="Calibri"/>
+                <a:ea typeface="Calibri"/>
+                <a:cs typeface="Calibri"/>
+              </a:rPr>
+              <a:t> = 80 V</a:t>
             </a:r>
           </a:p>
         </p:txBody>
@@ -9352,7 +9891,7 @@
       </p:sp>
       <p:sp>
         <p:nvSpPr>
-          <p:cNvPr id="19" name="U = √(Uᴿ² + Uˣ²)">
+          <p:cNvPr id="19" name="U = √(UR² + Uˣ²)">
             <a:extLst xmlns:a="http://schemas.openxmlformats.org/drawingml/2006/main">
               <a:ext uri="{FF2B5EF4-FFF2-40B4-BE49-F238E27FC236}">
                 <a16:creationId xmlns:a16="http://schemas.microsoft.com/office/drawing/2014/main" id="{F6C1C891-197F-487C-95FE-7B452F241744}"/>
@@ -9403,14 +9942,36 @@
                 <a:ea typeface="Calibri"/>
                 <a:cs typeface="Calibri"/>
               </a:rPr>
-              <a:t>U = √(Uᴿ² + Uˣ²)</a:t>
-            </a:r>
-          </a:p>
-        </p:txBody>
-      </p:sp>
-      <p:sp>
-        <p:nvSpPr>
-          <p:cNvPr id="20" name="Uᴿ = 60 V och Uᴸ = 80 V ger U = 100 V.&#10;Strömmen släpar källspänni">
+              <a:t>U = √(U</a:t>
+            </a:r>
+            <a:r>
+              <a:rPr sz="2400" b="1" baseline="-25000">
+                <a:solidFill>
+                  <a:srgbClr val="064F91"/>
+                </a:solidFill>
+                <a:latin typeface="Calibri"/>
+                <a:ea typeface="Calibri"/>
+                <a:cs typeface="Calibri"/>
+              </a:rPr>
+              <a:t>R</a:t>
+            </a:r>
+            <a:r>
+              <a:rPr sz="2400" b="1">
+                <a:solidFill>
+                  <a:srgbClr val="064F91"/>
+                </a:solidFill>
+                <a:latin typeface="Calibri"/>
+                <a:ea typeface="Calibri"/>
+                <a:cs typeface="Calibri"/>
+              </a:rPr>
+              <a:t>² + Uˣ²)</a:t>
+            </a:r>
+          </a:p>
+        </p:txBody>
+      </p:sp>
+      <p:sp>
+        <p:nvSpPr>
+          <p:cNvPr id="20" name="UR = 60 V och UL = 80 V ger U = 100 V.&#10;Strömmen släpar källspänni">
             <a:extLst xmlns:a="http://schemas.openxmlformats.org/drawingml/2006/main">
               <a:ext uri="{FF2B5EF4-FFF2-40B4-BE49-F238E27FC236}">
                 <a16:creationId xmlns:a16="http://schemas.microsoft.com/office/drawing/2014/main" id="{D090613E-0FEB-49D1-90CA-76DB228E46B3}"/>
@@ -9461,7 +10022,51 @@
                 <a:ea typeface="Calibri"/>
                 <a:cs typeface="Calibri"/>
               </a:rPr>
-              <a:t>Uᴿ = 60 V och Uᴸ = 80 V ger U = 100 V.</a:t>
+              <a:t>U</a:t>
+            </a:r>
+            <a:r>
+              <a:rPr sz="2000" b="0" baseline="-25000">
+                <a:solidFill>
+                  <a:srgbClr val="111111"/>
+                </a:solidFill>
+                <a:latin typeface="Calibri"/>
+                <a:ea typeface="Calibri"/>
+                <a:cs typeface="Calibri"/>
+              </a:rPr>
+              <a:t>R</a:t>
+            </a:r>
+            <a:r>
+              <a:rPr sz="2000" b="0">
+                <a:solidFill>
+                  <a:srgbClr val="111111"/>
+                </a:solidFill>
+                <a:latin typeface="Calibri"/>
+                <a:ea typeface="Calibri"/>
+                <a:cs typeface="Calibri"/>
+              </a:rPr>
+              <a:t> = 60 V och U</a:t>
+            </a:r>
+            <a:r>
+              <a:rPr sz="2000" b="0" baseline="-25000">
+                <a:solidFill>
+                  <a:srgbClr val="111111"/>
+                </a:solidFill>
+                <a:latin typeface="Calibri"/>
+                <a:ea typeface="Calibri"/>
+                <a:cs typeface="Calibri"/>
+              </a:rPr>
+              <a:t>L</a:t>
+            </a:r>
+            <a:r>
+              <a:rPr sz="2000" b="0">
+                <a:solidFill>
+                  <a:srgbClr val="111111"/>
+                </a:solidFill>
+                <a:latin typeface="Calibri"/>
+                <a:ea typeface="Calibri"/>
+                <a:cs typeface="Calibri"/>
+              </a:rPr>
+              <a:t> = 80 V ger U = 100 V.</a:t>
             </a:r>
           </a:p>
           <a:p xmlns:a="http://schemas.openxmlformats.org/drawingml/2006/main">
@@ -9729,14 +10334,58 @@
                 <a:ea typeface="Calibri"/>
                 <a:cs typeface="Calibri"/>
               </a:rPr>
-              <a:t>Vid ideal serieresonans tar Xᴸ och Xᶜ ut varandra.</a:t>
-            </a:r>
-          </a:p>
-        </p:txBody>
-      </p:sp>
-      <p:sp>
-        <p:nvSpPr>
-          <p:cNvPr id="4" name="X = Xᴸ − Xᶜ">
+              <a:t>Vid ideal serieresonans tar X</a:t>
+            </a:r>
+            <a:r>
+              <a:rPr sz="2100" b="0" baseline="-25000">
+                <a:solidFill>
+                  <a:srgbClr val="111111"/>
+                </a:solidFill>
+                <a:latin typeface="Calibri"/>
+                <a:ea typeface="Calibri"/>
+                <a:cs typeface="Calibri"/>
+              </a:rPr>
+              <a:t>L</a:t>
+            </a:r>
+            <a:r>
+              <a:rPr sz="2100" b="0">
+                <a:solidFill>
+                  <a:srgbClr val="111111"/>
+                </a:solidFill>
+                <a:latin typeface="Calibri"/>
+                <a:ea typeface="Calibri"/>
+                <a:cs typeface="Calibri"/>
+              </a:rPr>
+              <a:t> och X</a:t>
+            </a:r>
+            <a:r>
+              <a:rPr sz="2100" b="0" baseline="-25000">
+                <a:solidFill>
+                  <a:srgbClr val="111111"/>
+                </a:solidFill>
+                <a:latin typeface="Calibri"/>
+                <a:ea typeface="Calibri"/>
+                <a:cs typeface="Calibri"/>
+              </a:rPr>
+              <a:t>C</a:t>
+            </a:r>
+            <a:r>
+              <a:rPr sz="2100" b="0">
+                <a:solidFill>
+                  <a:srgbClr val="111111"/>
+                </a:solidFill>
+                <a:latin typeface="Calibri"/>
+                <a:ea typeface="Calibri"/>
+                <a:cs typeface="Calibri"/>
+              </a:rPr>
+              <a:t> ut varandra.</a:t>
+            </a:r>
+          </a:p>
+        </p:txBody>
+      </p:sp>
+      <p:sp>
+        <p:nvSpPr>
+          <p:cNvPr id="4" name="X = XL − XC">
             <a:extLst xmlns:a="http://schemas.openxmlformats.org/drawingml/2006/main">
               <a:ext uri="{FF2B5EF4-FFF2-40B4-BE49-F238E27FC236}">
                 <a16:creationId xmlns:a16="http://schemas.microsoft.com/office/drawing/2014/main" id="{263CB887-24F4-4EC5-B4E3-3673979D4B5A}"/>
@@ -9787,14 +10436,47 @@
                 <a:ea typeface="Calibri"/>
                 <a:cs typeface="Calibri"/>
               </a:rPr>
-              <a:t>X = Xᴸ − Xᶜ</a:t>
-            </a:r>
-          </a:p>
-        </p:txBody>
-      </p:sp>
-      <p:sp>
-        <p:nvSpPr>
-          <p:cNvPr id="5" name="Om Xᴸ = Xᶜ blir |Z| = R.&#10;En verklig krets begränsas även av kompo">
+              <a:t>X = X</a:t>
+            </a:r>
+            <a:r>
+              <a:rPr sz="2925" b="1" baseline="-25000">
+                <a:solidFill>
+                  <a:srgbClr val="064F91"/>
+                </a:solidFill>
+                <a:latin typeface="Calibri"/>
+                <a:ea typeface="Calibri"/>
+                <a:cs typeface="Calibri"/>
+              </a:rPr>
+              <a:t>L</a:t>
+            </a:r>
+            <a:r>
+              <a:rPr sz="2925" b="1">
+                <a:solidFill>
+                  <a:srgbClr val="064F91"/>
+                </a:solidFill>
+                <a:latin typeface="Calibri"/>
+                <a:ea typeface="Calibri"/>
+                <a:cs typeface="Calibri"/>
+              </a:rPr>
+              <a:t> − X</a:t>
+            </a:r>
+            <a:r>
+              <a:rPr sz="2925" b="1" baseline="-25000">
+                <a:solidFill>
+                  <a:srgbClr val="064F91"/>
+                </a:solidFill>
+                <a:latin typeface="Calibri"/>
+                <a:ea typeface="Calibri"/>
+                <a:cs typeface="Calibri"/>
+              </a:rPr>
+              <a:t>C</a:t>
+            </a:r>
+          </a:p>
+        </p:txBody>
+      </p:sp>
+      <p:sp>
+        <p:nvSpPr>
+          <p:cNvPr id="5" name="Om XL = XC blir |Z| = R.&#10;En verklig krets begränsas även av kompo">
             <a:extLst xmlns:a="http://schemas.openxmlformats.org/drawingml/2006/main">
               <a:ext uri="{FF2B5EF4-FFF2-40B4-BE49-F238E27FC236}">
                 <a16:creationId xmlns:a16="http://schemas.microsoft.com/office/drawing/2014/main" id="{729B87A3-99AC-4231-8C76-91955A891E0A}"/>
@@ -9845,7 +10527,51 @@
                 <a:ea typeface="Calibri"/>
                 <a:cs typeface="Calibri"/>
               </a:rPr>
-              <a:t>Om Xᴸ = Xᶜ blir |Z| = R.</a:t>
+              <a:t>Om X</a:t>
+            </a:r>
+            <a:r>
+              <a:rPr sz="2100" b="0" baseline="-25000">
+                <a:solidFill>
+                  <a:srgbClr val="111111"/>
+                </a:solidFill>
+                <a:latin typeface="Calibri"/>
+                <a:ea typeface="Calibri"/>
+                <a:cs typeface="Calibri"/>
+              </a:rPr>
+              <a:t>L</a:t>
+            </a:r>
+            <a:r>
+              <a:rPr sz="2100" b="0">
+                <a:solidFill>
+                  <a:srgbClr val="111111"/>
+                </a:solidFill>
+                <a:latin typeface="Calibri"/>
+                <a:ea typeface="Calibri"/>
+                <a:cs typeface="Calibri"/>
+              </a:rPr>
+              <a:t> = X</a:t>
+            </a:r>
+            <a:r>
+              <a:rPr sz="2100" b="0" baseline="-25000">
+                <a:solidFill>
+                  <a:srgbClr val="111111"/>
+                </a:solidFill>
+                <a:latin typeface="Calibri"/>
+                <a:ea typeface="Calibri"/>
+                <a:cs typeface="Calibri"/>
+              </a:rPr>
+              <a:t>C</a:t>
+            </a:r>
+            <a:r>
+              <a:rPr sz="2100" b="0">
+                <a:solidFill>
+                  <a:srgbClr val="111111"/>
+                </a:solidFill>
+                <a:latin typeface="Calibri"/>
+                <a:ea typeface="Calibri"/>
+                <a:cs typeface="Calibri"/>
+              </a:rPr>
+              <a:t> blir |Z| = R.</a:t>
             </a:r>
           </a:p>
           <a:p xmlns:a="http://schemas.openxmlformats.org/drawingml/2006/main">
@@ -10061,7 +10787,7 @@
       </p:sp>
       <p:sp>
         <p:nvSpPr>
-          <p:cNvPr id="10" name="Serie-RC med R = 12 Ω, Xᶜ = 16 Ω och U = 60 V RMS. Sök ström och ">
+          <p:cNvPr id="10" name="Serie-RC med R = 12 Ω, XC = 16 Ω och U = 60 V RMS. Sök ström och ">
             <a:extLst xmlns:a="http://schemas.openxmlformats.org/drawingml/2006/main">
               <a:ext uri="{FF2B5EF4-FFF2-40B4-BE49-F238E27FC236}">
                 <a16:creationId xmlns:a16="http://schemas.microsoft.com/office/drawing/2014/main" id="{29AF8672-30C8-4E37-8795-8DFB2B719C57}"/>
@@ -10111,14 +10837,36 @@
                 <a:ea typeface="Calibri"/>
                 <a:cs typeface="Calibri"/>
               </a:rPr>
-              <a:t>Serie-RC med R = 12 Ω, Xᶜ = 16 Ω och U = 60 V RMS. Sök ström och fasvinkel.</a:t>
-            </a:r>
-          </a:p>
-        </p:txBody>
-      </p:sp>
-      <p:sp>
-        <p:nvSpPr>
-          <p:cNvPr id="11" name="X = −Xᶜ     φ = arctan(X/R)">
+              <a:t>Serie-RC med R = 12 Ω, X</a:t>
+            </a:r>
+            <a:r>
+              <a:rPr sz="2175" b="0" baseline="-25000">
+                <a:solidFill>
+                  <a:srgbClr val="111111"/>
+                </a:solidFill>
+                <a:latin typeface="Calibri"/>
+                <a:ea typeface="Calibri"/>
+                <a:cs typeface="Calibri"/>
+              </a:rPr>
+              <a:t>C</a:t>
+            </a:r>
+            <a:r>
+              <a:rPr sz="2175" b="0">
+                <a:solidFill>
+                  <a:srgbClr val="111111"/>
+                </a:solidFill>
+                <a:latin typeface="Calibri"/>
+                <a:ea typeface="Calibri"/>
+                <a:cs typeface="Calibri"/>
+              </a:rPr>
+              <a:t> = 16 Ω och U = 60 V RMS. Sök ström och fasvinkel.</a:t>
+            </a:r>
+          </a:p>
+        </p:txBody>
+      </p:sp>
+      <p:sp>
+        <p:nvSpPr>
+          <p:cNvPr id="11" name="X = −XC     φ = arctan(X/R)">
             <a:extLst xmlns:a="http://schemas.openxmlformats.org/drawingml/2006/main">
               <a:ext uri="{FF2B5EF4-FFF2-40B4-BE49-F238E27FC236}">
                 <a16:creationId xmlns:a16="http://schemas.microsoft.com/office/drawing/2014/main" id="{12F3E108-AF25-41BB-A021-09B0E51A6582}"/>
@@ -10168,7 +10916,29 @@
                 <a:ea typeface="Calibri"/>
                 <a:cs typeface="Calibri"/>
               </a:rPr>
-              <a:t>X = −Xᶜ     φ = arctan(X/R)</a:t>
+              <a:t>X = −X</a:t>
+            </a:r>
+            <a:r>
+              <a:rPr sz="2325" b="1" baseline="-25000">
+                <a:solidFill>
+                  <a:srgbClr val="064F91"/>
+                </a:solidFill>
+                <a:latin typeface="Calibri"/>
+                <a:ea typeface="Calibri"/>
+                <a:cs typeface="Calibri"/>
+              </a:rPr>
+              <a:t>C</a:t>
+            </a:r>
+            <a:r>
+              <a:rPr sz="2325" b="1">
+                <a:solidFill>
+                  <a:srgbClr val="064F91"/>
+                </a:solidFill>
+                <a:latin typeface="Calibri"/>
+                <a:ea typeface="Calibri"/>
+                <a:cs typeface="Calibri"/>
+              </a:rPr>
+              <a:t>     φ = arctan(X/R)</a:t>
             </a:r>
           </a:p>
         </p:txBody>
@@ -10942,7 +11712,7 @@
       </p:sp>
       <p:sp>
         <p:nvSpPr>
-          <p:cNvPr id="4" name="R = 30 Ω, Xᴸ = 40 Ω. Bestäm φ och ange om strömmen leder eller sl">
+          <p:cNvPr id="4" name="R = 30 Ω, XL = 40 Ω. Bestäm φ och ange om strömmen leder eller sl">
             <a:extLst xmlns:a="http://schemas.openxmlformats.org/drawingml/2006/main">
               <a:ext uri="{FF2B5EF4-FFF2-40B4-BE49-F238E27FC236}">
                 <a16:creationId xmlns:a16="http://schemas.microsoft.com/office/drawing/2014/main" id="{A5962366-227F-42D3-A284-7015B39B3E2D}"/>
@@ -10993,7 +11763,29 @@
                 <a:ea typeface="Calibri"/>
                 <a:cs typeface="Calibri"/>
               </a:rPr>
-              <a:t>R = 30 Ω, Xᴸ = 40 Ω. Bestäm φ och ange om strömmen leder eller släpar spänningen.</a:t>
+              <a:t>R = 30 Ω, X</a:t>
+            </a:r>
+            <a:r>
+              <a:rPr sz="2400" b="0" baseline="-25000">
+                <a:solidFill>
+                  <a:srgbClr val="111111"/>
+                </a:solidFill>
+                <a:latin typeface="Calibri"/>
+                <a:ea typeface="Calibri"/>
+                <a:cs typeface="Calibri"/>
+              </a:rPr>
+              <a:t>L</a:t>
+            </a:r>
+            <a:r>
+              <a:rPr sz="2400" b="0">
+                <a:solidFill>
+                  <a:srgbClr val="111111"/>
+                </a:solidFill>
+                <a:latin typeface="Calibri"/>
+                <a:ea typeface="Calibri"/>
+                <a:cs typeface="Calibri"/>
+              </a:rPr>
+              <a:t> = 40 Ω. Bestäm φ och ange om strömmen leder eller släpar spänningen.</a:t>
             </a:r>
           </a:p>
         </p:txBody>
@@ -11243,7 +12035,7 @@
       </p:sp>
       <p:sp>
         <p:nvSpPr>
-          <p:cNvPr id="10" name="X = −Xᶜ     |Z| = √(R² + X²)&#10;I = U/|Z|     φ = arctan(X/R)">
+          <p:cNvPr id="10" name="X = −XC     |Z| = √(R² + X²)&#10;I = U/|Z|     φ = arctan(X/R)">
             <a:extLst xmlns:a="http://schemas.openxmlformats.org/drawingml/2006/main">
               <a:ext uri="{FF2B5EF4-FFF2-40B4-BE49-F238E27FC236}">
                 <a16:creationId xmlns:a16="http://schemas.microsoft.com/office/drawing/2014/main" id="{93A9B9F6-EC26-4BC9-9DFF-E782F2E5ED34}"/>
@@ -11293,7 +12085,29 @@
                 <a:ea typeface="Calibri"/>
                 <a:cs typeface="Calibri"/>
               </a:rPr>
-              <a:t>X = −Xᶜ     |Z| = √(R² + X²)</a:t>
+              <a:t>X = −X</a:t>
+            </a:r>
+            <a:r>
+              <a:rPr sz="2400" b="1" baseline="-25000">
+                <a:solidFill>
+                  <a:srgbClr val="064F91"/>
+                </a:solidFill>
+                <a:latin typeface="Calibri"/>
+                <a:ea typeface="Calibri"/>
+                <a:cs typeface="Calibri"/>
+              </a:rPr>
+              <a:t>C</a:t>
+            </a:r>
+            <a:r>
+              <a:rPr sz="2400" b="1">
+                <a:solidFill>
+                  <a:srgbClr val="064F91"/>
+                </a:solidFill>
+                <a:latin typeface="Calibri"/>
+                <a:ea typeface="Calibri"/>
+                <a:cs typeface="Calibri"/>
+              </a:rPr>
+              <a:t>     |Z| = √(R² + X²)</a:t>
             </a:r>
           </a:p>
           <a:p xmlns:a="http://schemas.openxmlformats.org/drawingml/2006/main">
@@ -11380,7 +12194,7 @@
       </p:sp>
       <p:sp>
         <p:nvSpPr>
-          <p:cNvPr id="12" name="Förutsättningar: Serie-RC: R = 60 Ω, Xᶜ = 80 Ω, U = 200 V RMS. Rä">
+          <p:cNvPr id="12" name="Förutsättningar: Serie-RC: R = 60 Ω, XC = 80 Ω, U = 200 V RMS. Rä">
             <a:extLst xmlns:a="http://schemas.openxmlformats.org/drawingml/2006/main">
               <a:ext uri="{FF2B5EF4-FFF2-40B4-BE49-F238E27FC236}">
                 <a16:creationId xmlns:a16="http://schemas.microsoft.com/office/drawing/2014/main" id="{B1887227-E936-4C0A-BB14-E9A7D1ACA09B}"/>
@@ -11430,7 +12244,29 @@
                 <a:ea typeface="Calibri"/>
                 <a:cs typeface="Calibri"/>
               </a:rPr>
-              <a:t>Förutsättningar: Serie-RC: R = 60 Ω, Xᶜ = 80 Ω, U = 200 V RMS. Räknaren står i DEG för φ.</a:t>
+              <a:t>Förutsättningar: Serie-RC: R = 60 Ω, X</a:t>
+            </a:r>
+            <a:r>
+              <a:rPr sz="2025" b="0" baseline="-25000">
+                <a:solidFill>
+                  <a:srgbClr val="111111"/>
+                </a:solidFill>
+                <a:latin typeface="Calibri"/>
+                <a:ea typeface="Calibri"/>
+                <a:cs typeface="Calibri"/>
+              </a:rPr>
+              <a:t>C</a:t>
+            </a:r>
+            <a:r>
+              <a:rPr sz="2025" b="0">
+                <a:solidFill>
+                  <a:srgbClr val="111111"/>
+                </a:solidFill>
+                <a:latin typeface="Calibri"/>
+                <a:ea typeface="Calibri"/>
+                <a:cs typeface="Calibri"/>
+              </a:rPr>
+              <a:t> = 80 Ω, U = 200 V RMS. Räknaren står i DEG för φ.</a:t>
             </a:r>
           </a:p>
         </p:txBody>
@@ -11713,7 +12549,7 @@
       </p:sp>
       <p:sp>
         <p:nvSpPr>
-          <p:cNvPr id="4" name="R = 60 Ω och Xᶜ = 80 Ω i serie över 200 V RMS. Bestäm |Z|, I och ">
+          <p:cNvPr id="4" name="R = 60 Ω och XC = 80 Ω i serie över 200 V RMS. Bestäm |Z|, I och ">
             <a:extLst xmlns:a="http://schemas.openxmlformats.org/drawingml/2006/main">
               <a:ext uri="{FF2B5EF4-FFF2-40B4-BE49-F238E27FC236}">
                 <a16:creationId xmlns:a16="http://schemas.microsoft.com/office/drawing/2014/main" id="{1FA10FDE-B14E-49D1-8EBD-845D4C2FD845}"/>
@@ -11764,7 +12600,29 @@
                 <a:ea typeface="Calibri"/>
                 <a:cs typeface="Calibri"/>
               </a:rPr>
-              <a:t>R = 60 Ω och Xᶜ = 80 Ω i serie över 200 V RMS. Bestäm |Z|, I och φ.</a:t>
+              <a:t>R = 60 Ω och X</a:t>
+            </a:r>
+            <a:r>
+              <a:rPr sz="2400" b="0" baseline="-25000">
+                <a:solidFill>
+                  <a:srgbClr val="111111"/>
+                </a:solidFill>
+                <a:latin typeface="Calibri"/>
+                <a:ea typeface="Calibri"/>
+                <a:cs typeface="Calibri"/>
+              </a:rPr>
+              <a:t>C</a:t>
+            </a:r>
+            <a:r>
+              <a:rPr sz="2400" b="0">
+                <a:solidFill>
+                  <a:srgbClr val="111111"/>
+                </a:solidFill>
+                <a:latin typeface="Calibri"/>
+                <a:ea typeface="Calibri"/>
+                <a:cs typeface="Calibri"/>
+              </a:rPr>
+              <a:t> = 80 Ω i serie över 200 V RMS. Bestäm |Z|, I och φ.</a:t>
             </a:r>
           </a:p>
         </p:txBody>
@@ -12014,7 +12872,7 @@
       </p:sp>
       <p:sp>
         <p:nvSpPr>
-          <p:cNvPr id="10" name="Xᴸ = 2πfL     Xᶜ = 1/(2πfC)">
+          <p:cNvPr id="10" name="XL = 2πfL     XC = 1/(2πfC)">
             <a:extLst xmlns:a="http://schemas.openxmlformats.org/drawingml/2006/main">
               <a:ext uri="{FF2B5EF4-FFF2-40B4-BE49-F238E27FC236}">
                 <a16:creationId xmlns:a16="http://schemas.microsoft.com/office/drawing/2014/main" id="{5C2B23F1-8B5E-4EA0-9A7D-A1F15CC27C84}"/>
@@ -12064,14 +12922,58 @@
                 <a:ea typeface="Calibri"/>
                 <a:cs typeface="Calibri"/>
               </a:rPr>
-              <a:t>Xᴸ = 2πfL     Xᶜ = 1/(2πfC)</a:t>
-            </a:r>
-          </a:p>
-        </p:txBody>
-      </p:sp>
-      <p:sp>
-        <p:nvSpPr>
-          <p:cNvPr id="11" name="Xᴸ växer med f. Xᶜ minskar när f växer, eftersom f står i nämnare">
+              <a:t>X</a:t>
+            </a:r>
+            <a:r>
+              <a:rPr sz="2400" b="1" baseline="-25000">
+                <a:solidFill>
+                  <a:srgbClr val="064F91"/>
+                </a:solidFill>
+                <a:latin typeface="Calibri"/>
+                <a:ea typeface="Calibri"/>
+                <a:cs typeface="Calibri"/>
+              </a:rPr>
+              <a:t>L</a:t>
+            </a:r>
+            <a:r>
+              <a:rPr sz="2400" b="1">
+                <a:solidFill>
+                  <a:srgbClr val="064F91"/>
+                </a:solidFill>
+                <a:latin typeface="Calibri"/>
+                <a:ea typeface="Calibri"/>
+                <a:cs typeface="Calibri"/>
+              </a:rPr>
+              <a:t> = 2πfL     X</a:t>
+            </a:r>
+            <a:r>
+              <a:rPr sz="2400" b="1" baseline="-25000">
+                <a:solidFill>
+                  <a:srgbClr val="064F91"/>
+                </a:solidFill>
+                <a:latin typeface="Calibri"/>
+                <a:ea typeface="Calibri"/>
+                <a:cs typeface="Calibri"/>
+              </a:rPr>
+              <a:t>C</a:t>
+            </a:r>
+            <a:r>
+              <a:rPr sz="2400" b="1">
+                <a:solidFill>
+                  <a:srgbClr val="064F91"/>
+                </a:solidFill>
+                <a:latin typeface="Calibri"/>
+                <a:ea typeface="Calibri"/>
+                <a:cs typeface="Calibri"/>
+              </a:rPr>
+              <a:t> = 1/(2πfC)</a:t>
+            </a:r>
+          </a:p>
+        </p:txBody>
+      </p:sp>
+      <p:sp>
+        <p:nvSpPr>
+          <p:cNvPr id="11" name="XL växer med f. XC minskar när f växer, eftersom f står i nämnare">
             <a:extLst xmlns:a="http://schemas.openxmlformats.org/drawingml/2006/main">
               <a:ext uri="{FF2B5EF4-FFF2-40B4-BE49-F238E27FC236}">
                 <a16:creationId xmlns:a16="http://schemas.microsoft.com/office/drawing/2014/main" id="{EFFBFB95-EA21-46F9-A670-4D8361A3E7EF}"/>
@@ -12121,7 +13023,51 @@
                 <a:ea typeface="Calibri"/>
                 <a:cs typeface="Calibri"/>
               </a:rPr>
-              <a:t>Xᴸ växer med f. Xᶜ minskar när f växer, eftersom f står i nämnaren.</a:t>
+              <a:t>X</a:t>
+            </a:r>
+            <a:r>
+              <a:rPr sz="2100" b="0" baseline="-25000">
+                <a:solidFill>
+                  <a:srgbClr val="111111"/>
+                </a:solidFill>
+                <a:latin typeface="Calibri"/>
+                <a:ea typeface="Calibri"/>
+                <a:cs typeface="Calibri"/>
+              </a:rPr>
+              <a:t>L</a:t>
+            </a:r>
+            <a:r>
+              <a:rPr sz="2100" b="0">
+                <a:solidFill>
+                  <a:srgbClr val="111111"/>
+                </a:solidFill>
+                <a:latin typeface="Calibri"/>
+                <a:ea typeface="Calibri"/>
+                <a:cs typeface="Calibri"/>
+              </a:rPr>
+              <a:t> växer med f. X</a:t>
+            </a:r>
+            <a:r>
+              <a:rPr sz="2100" b="0" baseline="-25000">
+                <a:solidFill>
+                  <a:srgbClr val="111111"/>
+                </a:solidFill>
+                <a:latin typeface="Calibri"/>
+                <a:ea typeface="Calibri"/>
+                <a:cs typeface="Calibri"/>
+              </a:rPr>
+              <a:t>C</a:t>
+            </a:r>
+            <a:r>
+              <a:rPr sz="2100" b="0">
+                <a:solidFill>
+                  <a:srgbClr val="111111"/>
+                </a:solidFill>
+                <a:latin typeface="Calibri"/>
+                <a:ea typeface="Calibri"/>
+                <a:cs typeface="Calibri"/>
+              </a:rPr>
+              <a:t> minskar när f växer, eftersom f står i nämnaren.</a:t>
             </a:r>
           </a:p>
         </p:txBody>
@@ -12975,7 +13921,7 @@
       </p:sp>
       <p:sp>
         <p:nvSpPr>
-          <p:cNvPr id="4" name="Frekvensen ökas från 50 till 100 Hz. Hur ändras Xᴸ och Xᶜ om komp">
+          <p:cNvPr id="4" name="Frekvensen ökas från 50 till 100 Hz. Hur ändras XL och XC om komp">
             <a:extLst xmlns:a="http://schemas.openxmlformats.org/drawingml/2006/main">
               <a:ext uri="{FF2B5EF4-FFF2-40B4-BE49-F238E27FC236}">
                 <a16:creationId xmlns:a16="http://schemas.microsoft.com/office/drawing/2014/main" id="{BB15ABA7-AD75-45FD-9B3E-7F5D43A690AB}"/>
@@ -13026,7 +13972,51 @@
                 <a:ea typeface="Calibri"/>
                 <a:cs typeface="Calibri"/>
               </a:rPr>
-              <a:t>Frekvensen ökas från 50 till 100 Hz. Hur ändras Xᴸ och Xᶜ om komponenterna är oförändrade?</a:t>
+              <a:t>Frekvensen ökas från 50 till 100 Hz. Hur ändras X</a:t>
+            </a:r>
+            <a:r>
+              <a:rPr sz="2400" b="0" baseline="-25000">
+                <a:solidFill>
+                  <a:srgbClr val="111111"/>
+                </a:solidFill>
+                <a:latin typeface="Calibri"/>
+                <a:ea typeface="Calibri"/>
+                <a:cs typeface="Calibri"/>
+              </a:rPr>
+              <a:t>L</a:t>
+            </a:r>
+            <a:r>
+              <a:rPr sz="2400" b="0">
+                <a:solidFill>
+                  <a:srgbClr val="111111"/>
+                </a:solidFill>
+                <a:latin typeface="Calibri"/>
+                <a:ea typeface="Calibri"/>
+                <a:cs typeface="Calibri"/>
+              </a:rPr>
+              <a:t> och X</a:t>
+            </a:r>
+            <a:r>
+              <a:rPr sz="2400" b="0" baseline="-25000">
+                <a:solidFill>
+                  <a:srgbClr val="111111"/>
+                </a:solidFill>
+                <a:latin typeface="Calibri"/>
+                <a:ea typeface="Calibri"/>
+                <a:cs typeface="Calibri"/>
+              </a:rPr>
+              <a:t>C</a:t>
+            </a:r>
+            <a:r>
+              <a:rPr sz="2400" b="0">
+                <a:solidFill>
+                  <a:srgbClr val="111111"/>
+                </a:solidFill>
+                <a:latin typeface="Calibri"/>
+                <a:ea typeface="Calibri"/>
+                <a:cs typeface="Calibri"/>
+              </a:rPr>
+              <a:t> om komponenterna är oförändrade?</a:t>
             </a:r>
           </a:p>
         </p:txBody>
@@ -13276,7 +14266,7 @@
       </p:sp>
       <p:sp>
         <p:nvSpPr>
-          <p:cNvPr id="10" name="X = Xᴸ − Xᶜ&#10;|Z| = √(R² + X²)     I = U/|Z|">
+          <p:cNvPr id="10" name="X = XL − XC&#10;|Z| = √(R² + X²)     I = U/|Z|">
             <a:extLst xmlns:a="http://schemas.openxmlformats.org/drawingml/2006/main">
               <a:ext uri="{FF2B5EF4-FFF2-40B4-BE49-F238E27FC236}">
                 <a16:creationId xmlns:a16="http://schemas.microsoft.com/office/drawing/2014/main" id="{2BA84EA4-1A8E-4871-909C-DEC33B00681F}"/>
@@ -13326,7 +14316,40 @@
                 <a:ea typeface="Calibri"/>
                 <a:cs typeface="Calibri"/>
               </a:rPr>
-              <a:t>X = Xᴸ − Xᶜ</a:t>
+              <a:t>X = X</a:t>
+            </a:r>
+            <a:r>
+              <a:rPr sz="2400" b="1" baseline="-25000">
+                <a:solidFill>
+                  <a:srgbClr val="064F91"/>
+                </a:solidFill>
+                <a:latin typeface="Calibri"/>
+                <a:ea typeface="Calibri"/>
+                <a:cs typeface="Calibri"/>
+              </a:rPr>
+              <a:t>L</a:t>
+            </a:r>
+            <a:r>
+              <a:rPr sz="2400" b="1">
+                <a:solidFill>
+                  <a:srgbClr val="064F91"/>
+                </a:solidFill>
+                <a:latin typeface="Calibri"/>
+                <a:ea typeface="Calibri"/>
+                <a:cs typeface="Calibri"/>
+              </a:rPr>
+              <a:t> − X</a:t>
+            </a:r>
+            <a:r>
+              <a:rPr sz="2400" b="1" baseline="-25000">
+                <a:solidFill>
+                  <a:srgbClr val="064F91"/>
+                </a:solidFill>
+                <a:latin typeface="Calibri"/>
+                <a:ea typeface="Calibri"/>
+                <a:cs typeface="Calibri"/>
+              </a:rPr>
+              <a:t>C</a:t>
             </a:r>
           </a:p>
           <a:p xmlns:a="http://schemas.openxmlformats.org/drawingml/2006/main">
@@ -13356,7 +14379,7 @@
       </p:sp>
       <p:sp>
         <p:nvSpPr>
-          <p:cNvPr id="11" name="X är nettoreaktans med tecken. Xᴸ och Xᶜ anges som positiva belop">
+          <p:cNvPr id="11" name="X är nettoreaktans med tecken. XL och XC anges som positiva belop">
             <a:extLst xmlns:a="http://schemas.openxmlformats.org/drawingml/2006/main">
               <a:ext uri="{FF2B5EF4-FFF2-40B4-BE49-F238E27FC236}">
                 <a16:creationId xmlns:a16="http://schemas.microsoft.com/office/drawing/2014/main" id="{CCDCB514-C594-4E9E-9020-94999647F65F}"/>
@@ -13406,14 +14429,58 @@
                 <a:ea typeface="Calibri"/>
                 <a:cs typeface="Calibri"/>
               </a:rPr>
-              <a:t>X är nettoreaktans med tecken. Xᴸ och Xᶜ anges som positiva belopp.</a:t>
-            </a:r>
-          </a:p>
-        </p:txBody>
-      </p:sp>
-      <p:sp>
-        <p:nvSpPr>
-          <p:cNvPr id="12" name="Förutsättningar: Serie-RLC: R = 30 Ω, Xᴸ = 50 Ω, Xᶜ = 10 Ω och U ">
+              <a:t>X är nettoreaktans med tecken. X</a:t>
+            </a:r>
+            <a:r>
+              <a:rPr sz="2100" b="0" baseline="-25000">
+                <a:solidFill>
+                  <a:srgbClr val="111111"/>
+                </a:solidFill>
+                <a:latin typeface="Calibri"/>
+                <a:ea typeface="Calibri"/>
+                <a:cs typeface="Calibri"/>
+              </a:rPr>
+              <a:t>L</a:t>
+            </a:r>
+            <a:r>
+              <a:rPr sz="2100" b="0">
+                <a:solidFill>
+                  <a:srgbClr val="111111"/>
+                </a:solidFill>
+                <a:latin typeface="Calibri"/>
+                <a:ea typeface="Calibri"/>
+                <a:cs typeface="Calibri"/>
+              </a:rPr>
+              <a:t> och X</a:t>
+            </a:r>
+            <a:r>
+              <a:rPr sz="2100" b="0" baseline="-25000">
+                <a:solidFill>
+                  <a:srgbClr val="111111"/>
+                </a:solidFill>
+                <a:latin typeface="Calibri"/>
+                <a:ea typeface="Calibri"/>
+                <a:cs typeface="Calibri"/>
+              </a:rPr>
+              <a:t>C</a:t>
+            </a:r>
+            <a:r>
+              <a:rPr sz="2100" b="0">
+                <a:solidFill>
+                  <a:srgbClr val="111111"/>
+                </a:solidFill>
+                <a:latin typeface="Calibri"/>
+                <a:ea typeface="Calibri"/>
+                <a:cs typeface="Calibri"/>
+              </a:rPr>
+              <a:t> anges som positiva belopp.</a:t>
+            </a:r>
+          </a:p>
+        </p:txBody>
+      </p:sp>
+      <p:sp>
+        <p:nvSpPr>
+          <p:cNvPr id="12" name="Förutsättningar: Serie-RLC: R = 30 Ω, XL = 50 Ω, XC = 10 Ω och U ">
             <a:extLst xmlns:a="http://schemas.openxmlformats.org/drawingml/2006/main">
               <a:ext uri="{FF2B5EF4-FFF2-40B4-BE49-F238E27FC236}">
                 <a16:creationId xmlns:a16="http://schemas.microsoft.com/office/drawing/2014/main" id="{C3DFB9EE-AF10-4922-A9ED-DB863B3DA0E9}"/>
@@ -13463,14 +14530,58 @@
                 <a:ea typeface="Calibri"/>
                 <a:cs typeface="Calibri"/>
               </a:rPr>
-              <a:t>Förutsättningar: Serie-RLC: R = 30 Ω, Xᴸ = 50 Ω, Xᶜ = 10 Ω och U = 100 V RMS.</a:t>
-            </a:r>
-          </a:p>
-        </p:txBody>
-      </p:sp>
-      <p:sp>
-        <p:nvSpPr>
-          <p:cNvPr id="13" name="Arbetsgång: Räkna nettoreaktansen först. Använd den, inte Xᴸ ensa">
+              <a:t>Förutsättningar: Serie-RLC: R = 30 Ω, X</a:t>
+            </a:r>
+            <a:r>
+              <a:rPr sz="2025" b="0" baseline="-25000">
+                <a:solidFill>
+                  <a:srgbClr val="111111"/>
+                </a:solidFill>
+                <a:latin typeface="Calibri"/>
+                <a:ea typeface="Calibri"/>
+                <a:cs typeface="Calibri"/>
+              </a:rPr>
+              <a:t>L</a:t>
+            </a:r>
+            <a:r>
+              <a:rPr sz="2025" b="0">
+                <a:solidFill>
+                  <a:srgbClr val="111111"/>
+                </a:solidFill>
+                <a:latin typeface="Calibri"/>
+                <a:ea typeface="Calibri"/>
+                <a:cs typeface="Calibri"/>
+              </a:rPr>
+              <a:t> = 50 Ω, X</a:t>
+            </a:r>
+            <a:r>
+              <a:rPr sz="2025" b="0" baseline="-25000">
+                <a:solidFill>
+                  <a:srgbClr val="111111"/>
+                </a:solidFill>
+                <a:latin typeface="Calibri"/>
+                <a:ea typeface="Calibri"/>
+                <a:cs typeface="Calibri"/>
+              </a:rPr>
+              <a:t>C</a:t>
+            </a:r>
+            <a:r>
+              <a:rPr sz="2025" b="0">
+                <a:solidFill>
+                  <a:srgbClr val="111111"/>
+                </a:solidFill>
+                <a:latin typeface="Calibri"/>
+                <a:ea typeface="Calibri"/>
+                <a:cs typeface="Calibri"/>
+              </a:rPr>
+              <a:t> = 10 Ω och U = 100 V RMS.</a:t>
+            </a:r>
+          </a:p>
+        </p:txBody>
+      </p:sp>
+      <p:sp>
+        <p:nvSpPr>
+          <p:cNvPr id="13" name="Arbetsgång: Räkna nettoreaktansen först. Använd den, inte XL ensa">
             <a:extLst xmlns:a="http://schemas.openxmlformats.org/drawingml/2006/main">
               <a:ext uri="{FF2B5EF4-FFF2-40B4-BE49-F238E27FC236}">
                 <a16:creationId xmlns:a16="http://schemas.microsoft.com/office/drawing/2014/main" id="{4D91CE32-4CAC-4467-80C7-E88E721A7B65}"/>
@@ -13520,7 +14631,29 @@
                 <a:ea typeface="Calibri"/>
                 <a:cs typeface="Calibri"/>
               </a:rPr>
-              <a:t>Arbetsgång: Räkna nettoreaktansen först. Använd den, inte Xᴸ ensam, i impedansformeln.</a:t>
+              <a:t>Arbetsgång: Räkna nettoreaktansen först. Använd den, inte X</a:t>
+            </a:r>
+            <a:r>
+              <a:rPr sz="2025" b="0" baseline="-25000">
+                <a:solidFill>
+                  <a:srgbClr val="111111"/>
+                </a:solidFill>
+                <a:latin typeface="Calibri"/>
+                <a:ea typeface="Calibri"/>
+                <a:cs typeface="Calibri"/>
+              </a:rPr>
+              <a:t>L</a:t>
+            </a:r>
+            <a:r>
+              <a:rPr sz="2025" b="0">
+                <a:solidFill>
+                  <a:srgbClr val="111111"/>
+                </a:solidFill>
+                <a:latin typeface="Calibri"/>
+                <a:ea typeface="Calibri"/>
+                <a:cs typeface="Calibri"/>
+              </a:rPr>
+              <a:t> ensam, i impedansformeln.</a:t>
             </a:r>
           </a:p>
         </p:txBody>
@@ -13746,7 +14879,7 @@
       </p:sp>
       <p:sp>
         <p:nvSpPr>
-          <p:cNvPr id="4" name="R = 30 Ω, Xᴸ = 50 Ω och Xᶜ = 10 Ω i serie. U = 100 V RMS. Bestäm ">
+          <p:cNvPr id="4" name="R = 30 Ω, XL = 50 Ω och XC = 10 Ω i serie. U = 100 V RMS. Bestäm ">
             <a:extLst xmlns:a="http://schemas.openxmlformats.org/drawingml/2006/main">
               <a:ext uri="{FF2B5EF4-FFF2-40B4-BE49-F238E27FC236}">
                 <a16:creationId xmlns:a16="http://schemas.microsoft.com/office/drawing/2014/main" id="{F20CE438-5738-445E-A66F-40F5D17B744D}"/>
@@ -13797,7 +14930,51 @@
                 <a:ea typeface="Calibri"/>
                 <a:cs typeface="Calibri"/>
               </a:rPr>
-              <a:t>R = 30 Ω, Xᴸ = 50 Ω och Xᶜ = 10 Ω i serie. U = 100 V RMS. Bestäm nettoreaktans, |Z| och I.</a:t>
+              <a:t>R = 30 Ω, X</a:t>
+            </a:r>
+            <a:r>
+              <a:rPr sz="2400" b="0" baseline="-25000">
+                <a:solidFill>
+                  <a:srgbClr val="111111"/>
+                </a:solidFill>
+                <a:latin typeface="Calibri"/>
+                <a:ea typeface="Calibri"/>
+                <a:cs typeface="Calibri"/>
+              </a:rPr>
+              <a:t>L</a:t>
+            </a:r>
+            <a:r>
+              <a:rPr sz="2400" b="0">
+                <a:solidFill>
+                  <a:srgbClr val="111111"/>
+                </a:solidFill>
+                <a:latin typeface="Calibri"/>
+                <a:ea typeface="Calibri"/>
+                <a:cs typeface="Calibri"/>
+              </a:rPr>
+              <a:t> = 50 Ω och X</a:t>
+            </a:r>
+            <a:r>
+              <a:rPr sz="2400" b="0" baseline="-25000">
+                <a:solidFill>
+                  <a:srgbClr val="111111"/>
+                </a:solidFill>
+                <a:latin typeface="Calibri"/>
+                <a:ea typeface="Calibri"/>
+                <a:cs typeface="Calibri"/>
+              </a:rPr>
+              <a:t>C</a:t>
+            </a:r>
+            <a:r>
+              <a:rPr sz="2400" b="0">
+                <a:solidFill>
+                  <a:srgbClr val="111111"/>
+                </a:solidFill>
+                <a:latin typeface="Calibri"/>
+                <a:ea typeface="Calibri"/>
+                <a:cs typeface="Calibri"/>
+              </a:rPr>
+              <a:t> = 10 Ω i serie. U = 100 V RMS. Bestäm nettoreaktans, |Z| och I.</a:t>
             </a:r>
           </a:p>
         </p:txBody>
@@ -14047,7 +15224,7 @@
       </p:sp>
       <p:sp>
         <p:nvSpPr>
-          <p:cNvPr id="10" name="X = Xᴸ − Xᶜ     I = U/√(R² + X²)&#10;φ = arctan(X/R)">
+          <p:cNvPr id="10" name="X = XL − XC     I = U/√(R² + X²)&#10;φ = arctan(X/R)">
             <a:extLst xmlns:a="http://schemas.openxmlformats.org/drawingml/2006/main">
               <a:ext uri="{FF2B5EF4-FFF2-40B4-BE49-F238E27FC236}">
                 <a16:creationId xmlns:a16="http://schemas.microsoft.com/office/drawing/2014/main" id="{CD60BDB2-5390-49D0-8166-001B9738FBF9}"/>
@@ -14097,7 +15274,51 @@
                 <a:ea typeface="Calibri"/>
                 <a:cs typeface="Calibri"/>
               </a:rPr>
-              <a:t>X = Xᴸ − Xᶜ     I = U/√(R² + X²)</a:t>
+              <a:t>X = X</a:t>
+            </a:r>
+            <a:r>
+              <a:rPr sz="2400" b="1" baseline="-25000">
+                <a:solidFill>
+                  <a:srgbClr val="064F91"/>
+                </a:solidFill>
+                <a:latin typeface="Calibri"/>
+                <a:ea typeface="Calibri"/>
+                <a:cs typeface="Calibri"/>
+              </a:rPr>
+              <a:t>L</a:t>
+            </a:r>
+            <a:r>
+              <a:rPr sz="2400" b="1">
+                <a:solidFill>
+                  <a:srgbClr val="064F91"/>
+                </a:solidFill>
+                <a:latin typeface="Calibri"/>
+                <a:ea typeface="Calibri"/>
+                <a:cs typeface="Calibri"/>
+              </a:rPr>
+              <a:t> − X</a:t>
+            </a:r>
+            <a:r>
+              <a:rPr sz="2400" b="1" baseline="-25000">
+                <a:solidFill>
+                  <a:srgbClr val="064F91"/>
+                </a:solidFill>
+                <a:latin typeface="Calibri"/>
+                <a:ea typeface="Calibri"/>
+                <a:cs typeface="Calibri"/>
+              </a:rPr>
+              <a:t>C</a:t>
+            </a:r>
+            <a:r>
+              <a:rPr sz="2400" b="1">
+                <a:solidFill>
+                  <a:srgbClr val="064F91"/>
+                </a:solidFill>
+                <a:latin typeface="Calibri"/>
+                <a:ea typeface="Calibri"/>
+                <a:cs typeface="Calibri"/>
+              </a:rPr>
+              <a:t>     I = U/√(R² + X²)</a:t>
             </a:r>
           </a:p>
           <a:p xmlns:a="http://schemas.openxmlformats.org/drawingml/2006/main">
@@ -14184,7 +15405,7 @@
       </p:sp>
       <p:sp>
         <p:nvSpPr>
-          <p:cNvPr id="12" name="Förutsättningar: R = 20 Ω, Xᴸ = Xᶜ = 40 Ω, U = 100 V RMS. Spole o">
+          <p:cNvPr id="12" name="Förutsättningar: R = 20 Ω, XL = XC = 40 Ω, U = 100 V RMS. Spole o">
             <a:extLst xmlns:a="http://schemas.openxmlformats.org/drawingml/2006/main">
               <a:ext uri="{FF2B5EF4-FFF2-40B4-BE49-F238E27FC236}">
                 <a16:creationId xmlns:a16="http://schemas.microsoft.com/office/drawing/2014/main" id="{633BD1CB-DC3B-479A-A34D-1ED4A9141842}"/>
@@ -14234,7 +15455,51 @@
                 <a:ea typeface="Calibri"/>
                 <a:cs typeface="Calibri"/>
               </a:rPr>
-              <a:t>Förutsättningar: R = 20 Ω, Xᴸ = Xᶜ = 40 Ω, U = 100 V RMS. Spole och kondensator är ideala.</a:t>
+              <a:t>Förutsättningar: R = 20 Ω, X</a:t>
+            </a:r>
+            <a:r>
+              <a:rPr sz="2025" b="0" baseline="-25000">
+                <a:solidFill>
+                  <a:srgbClr val="111111"/>
+                </a:solidFill>
+                <a:latin typeface="Calibri"/>
+                <a:ea typeface="Calibri"/>
+                <a:cs typeface="Calibri"/>
+              </a:rPr>
+              <a:t>L</a:t>
+            </a:r>
+            <a:r>
+              <a:rPr sz="2025" b="0">
+                <a:solidFill>
+                  <a:srgbClr val="111111"/>
+                </a:solidFill>
+                <a:latin typeface="Calibri"/>
+                <a:ea typeface="Calibri"/>
+                <a:cs typeface="Calibri"/>
+              </a:rPr>
+              <a:t> = X</a:t>
+            </a:r>
+            <a:r>
+              <a:rPr sz="2025" b="0" baseline="-25000">
+                <a:solidFill>
+                  <a:srgbClr val="111111"/>
+                </a:solidFill>
+                <a:latin typeface="Calibri"/>
+                <a:ea typeface="Calibri"/>
+                <a:cs typeface="Calibri"/>
+              </a:rPr>
+              <a:t>C</a:t>
+            </a:r>
+            <a:r>
+              <a:rPr sz="2025" b="0">
+                <a:solidFill>
+                  <a:srgbClr val="111111"/>
+                </a:solidFill>
+                <a:latin typeface="Calibri"/>
+                <a:ea typeface="Calibri"/>
+                <a:cs typeface="Calibri"/>
+              </a:rPr>
+              <a:t> = 40 Ω, U = 100 V RMS. Spole och kondensator är ideala.</a:t>
             </a:r>
           </a:p>
         </p:txBody>
@@ -14517,7 +15782,7 @@
       </p:sp>
       <p:sp>
         <p:nvSpPr>
-          <p:cNvPr id="4" name="En ideal RLC-seriekrets har R = 20 Ω och Xᴸ = Xᶜ = 40 Ω. Den mata">
+          <p:cNvPr id="4" name="En ideal RLC-seriekrets har R = 20 Ω och XL = XC = 40 Ω. Den mata">
             <a:extLst xmlns:a="http://schemas.openxmlformats.org/drawingml/2006/main">
               <a:ext uri="{FF2B5EF4-FFF2-40B4-BE49-F238E27FC236}">
                 <a16:creationId xmlns:a16="http://schemas.microsoft.com/office/drawing/2014/main" id="{1C7D8E8F-E7DD-4E74-BD91-AE22F8A43D05}"/>
@@ -14568,7 +15833,51 @@
                 <a:ea typeface="Calibri"/>
                 <a:cs typeface="Calibri"/>
               </a:rPr>
-              <a:t>En ideal RLC-seriekrets har R = 20 Ω och Xᴸ = Xᶜ = 40 Ω. Den matas med 100 V RMS. Bestäm ström och fasvinkel.</a:t>
+              <a:t>En ideal RLC-seriekrets har R = 20 Ω och X</a:t>
+            </a:r>
+            <a:r>
+              <a:rPr sz="2400" b="0" baseline="-25000">
+                <a:solidFill>
+                  <a:srgbClr val="111111"/>
+                </a:solidFill>
+                <a:latin typeface="Calibri"/>
+                <a:ea typeface="Calibri"/>
+                <a:cs typeface="Calibri"/>
+              </a:rPr>
+              <a:t>L</a:t>
+            </a:r>
+            <a:r>
+              <a:rPr sz="2400" b="0">
+                <a:solidFill>
+                  <a:srgbClr val="111111"/>
+                </a:solidFill>
+                <a:latin typeface="Calibri"/>
+                <a:ea typeface="Calibri"/>
+                <a:cs typeface="Calibri"/>
+              </a:rPr>
+              <a:t> = X</a:t>
+            </a:r>
+            <a:r>
+              <a:rPr sz="2400" b="0" baseline="-25000">
+                <a:solidFill>
+                  <a:srgbClr val="111111"/>
+                </a:solidFill>
+                <a:latin typeface="Calibri"/>
+                <a:ea typeface="Calibri"/>
+                <a:cs typeface="Calibri"/>
+              </a:rPr>
+              <a:t>C</a:t>
+            </a:r>
+            <a:r>
+              <a:rPr sz="2400" b="0">
+                <a:solidFill>
+                  <a:srgbClr val="111111"/>
+                </a:solidFill>
+                <a:latin typeface="Calibri"/>
+                <a:ea typeface="Calibri"/>
+                <a:cs typeface="Calibri"/>
+              </a:rPr>
+              <a:t> = 40 Ω. Den matas med 100 V RMS. Bestäm ström och fasvinkel.</a:t>
             </a:r>
           </a:p>
         </p:txBody>
@@ -15297,64 +16606,6 @@
       </p:sp>
       <p:sp>
         <p:nvSpPr>
-          <p:cNvPr id="6" name="Källor och lärarstöd finns även i bildanteckningarna.">
-            <a:extLst xmlns:a="http://schemas.openxmlformats.org/drawingml/2006/main">
-              <a:ext uri="{FF2B5EF4-FFF2-40B4-BE49-F238E27FC236}">
-                <a16:creationId xmlns:a16="http://schemas.microsoft.com/office/drawing/2014/main" id="{C8366D8C-A220-414D-866E-DC0D3B32670C}"/>
-              </a:ext>
-            </a:extLst>
-          </p:cNvPr>
-          <p:cNvSpPr>
-            <a:spLocks xmlns:a="http://schemas.openxmlformats.org/drawingml/2006/main" noGrp="1"/>
-          </p:cNvSpPr>
-          <p:nvPr/>
-        </p:nvSpPr>
-        <p:spPr>
-          <a:xfrm xmlns:a="http://schemas.openxmlformats.org/drawingml/2006/main">
-            <a:off x="762000" y="5676900"/>
-            <a:ext cx="7620000" cy="352425"/>
-          </a:xfrm>
-          <a:prstGeom xmlns:a="http://schemas.openxmlformats.org/drawingml/2006/main" prst="rect">
-            <a:avLst/>
-          </a:prstGeom>
-          <a:noFill xmlns:a="http://schemas.openxmlformats.org/drawingml/2006/main"/>
-          <a:ln xmlns:a="http://schemas.openxmlformats.org/drawingml/2006/main" w="0">
-            <a:noFill/>
-          </a:ln>
-        </p:spPr>
-        <p:txBody>
-          <a:bodyPr xmlns:a="http://schemas.openxmlformats.org/drawingml/2006/main" wrap="square" lIns="0" tIns="0" rIns="0" bIns="0" anchor="t">
-            <a:noAutofit/>
-          </a:bodyPr>
-          <a:lstStyle xmlns:a="http://schemas.openxmlformats.org/drawingml/2006/main"/>
-          <a:p xmlns:a="http://schemas.openxmlformats.org/drawingml/2006/main">
-            <a:pPr algn="l">
-              <a:buNone/>
-              <a:defRPr sz="1800" b="0">
-                <a:solidFill>
-                  <a:srgbClr val="111111"/>
-                </a:solidFill>
-                <a:latin typeface="Calibri"/>
-                <a:ea typeface="Calibri"/>
-                <a:cs typeface="Calibri"/>
-              </a:defRPr>
-            </a:pPr>
-            <a:r>
-              <a:rPr sz="1800" b="0">
-                <a:solidFill>
-                  <a:srgbClr val="111111"/>
-                </a:solidFill>
-                <a:latin typeface="Calibri"/>
-                <a:ea typeface="Calibri"/>
-                <a:cs typeface="Calibri"/>
-              </a:rPr>
-              <a:t>Källor och lärarstöd finns även i bildanteckningarna.</a:t>
-            </a:r>
-          </a:p>
-        </p:txBody>
-      </p:sp>
-      <p:sp>
-        <p:nvSpPr>
           <p:cNvPr id="7" name="22">
             <a:extLst xmlns:a="http://schemas.openxmlformats.org/drawingml/2006/main">
               <a:ext uri="{FF2B5EF4-FFF2-40B4-BE49-F238E27FC236}">
@@ -16512,7 +17763,7 @@
       </p:sp>
       <p:sp>
         <p:nvSpPr>
-          <p:cNvPr id="4" name="Xᴸ = 2πfL">
+          <p:cNvPr id="4" name="XL = 2πfL">
             <a:extLst xmlns:a="http://schemas.openxmlformats.org/drawingml/2006/main">
               <a:ext uri="{FF2B5EF4-FFF2-40B4-BE49-F238E27FC236}">
                 <a16:creationId xmlns:a16="http://schemas.microsoft.com/office/drawing/2014/main" id="{BC28BD74-FDA2-4773-8AE4-0EC24691DC68}"/>
@@ -16563,14 +17814,36 @@
                 <a:ea typeface="Calibri"/>
                 <a:cs typeface="Calibri"/>
               </a:rPr>
-              <a:t>Xᴸ = 2πfL</a:t>
-            </a:r>
-          </a:p>
-        </p:txBody>
-      </p:sp>
-      <p:sp>
-        <p:nvSpPr>
-          <p:cNvPr id="5" name="50 Hz och L = 0,10 H ger Xᴸ ≈ 31,4 Ω.&#10;En verklig spole har också ">
+              <a:t>X</a:t>
+            </a:r>
+            <a:r>
+              <a:rPr sz="2925" b="1" baseline="-25000">
+                <a:solidFill>
+                  <a:srgbClr val="064F91"/>
+                </a:solidFill>
+                <a:latin typeface="Calibri"/>
+                <a:ea typeface="Calibri"/>
+                <a:cs typeface="Calibri"/>
+              </a:rPr>
+              <a:t>L</a:t>
+            </a:r>
+            <a:r>
+              <a:rPr sz="2925" b="1">
+                <a:solidFill>
+                  <a:srgbClr val="064F91"/>
+                </a:solidFill>
+                <a:latin typeface="Calibri"/>
+                <a:ea typeface="Calibri"/>
+                <a:cs typeface="Calibri"/>
+              </a:rPr>
+              <a:t> = 2πfL</a:t>
+            </a:r>
+          </a:p>
+        </p:txBody>
+      </p:sp>
+      <p:sp>
+        <p:nvSpPr>
+          <p:cNvPr id="5" name="50 Hz och L = 0,10 H ger XL ≈ 31,4 Ω.&#10;En verklig spole har också ">
             <a:extLst xmlns:a="http://schemas.openxmlformats.org/drawingml/2006/main">
               <a:ext uri="{FF2B5EF4-FFF2-40B4-BE49-F238E27FC236}">
                 <a16:creationId xmlns:a16="http://schemas.microsoft.com/office/drawing/2014/main" id="{1E3A4784-A8AD-41BE-99BF-EF80552A7893}"/>
@@ -16621,7 +17894,29 @@
                 <a:ea typeface="Calibri"/>
                 <a:cs typeface="Calibri"/>
               </a:rPr>
-              <a:t>50 Hz och L = 0,10 H ger Xᴸ ≈ 31,4 Ω.</a:t>
+              <a:t>50 Hz och L = 0,10 H ger X</a:t>
+            </a:r>
+            <a:r>
+              <a:rPr sz="2100" b="0" baseline="-25000">
+                <a:solidFill>
+                  <a:srgbClr val="111111"/>
+                </a:solidFill>
+                <a:latin typeface="Calibri"/>
+                <a:ea typeface="Calibri"/>
+                <a:cs typeface="Calibri"/>
+              </a:rPr>
+              <a:t>L</a:t>
+            </a:r>
+            <a:r>
+              <a:rPr sz="2100" b="0">
+                <a:solidFill>
+                  <a:srgbClr val="111111"/>
+                </a:solidFill>
+                <a:latin typeface="Calibri"/>
+                <a:ea typeface="Calibri"/>
+                <a:cs typeface="Calibri"/>
+              </a:rPr>
+              <a:t> ≈ 31,4 Ω.</a:t>
             </a:r>
           </a:p>
           <a:p xmlns:a="http://schemas.openxmlformats.org/drawingml/2006/main">
@@ -16920,7 +18215,7 @@
       </p:sp>
       <p:sp>
         <p:nvSpPr>
-          <p:cNvPr id="4" name="Xᶜ = 1/(2πfC)">
+          <p:cNvPr id="4" name="XC = 1/(2πfC)">
             <a:extLst xmlns:a="http://schemas.openxmlformats.org/drawingml/2006/main">
               <a:ext uri="{FF2B5EF4-FFF2-40B4-BE49-F238E27FC236}">
                 <a16:creationId xmlns:a16="http://schemas.microsoft.com/office/drawing/2014/main" id="{6E9577E1-04A8-4F76-86C4-F4D1E7A901C6}"/>
@@ -16971,14 +18266,36 @@
                 <a:ea typeface="Calibri"/>
                 <a:cs typeface="Calibri"/>
               </a:rPr>
-              <a:t>Xᶜ = 1/(2πfC)</a:t>
-            </a:r>
-          </a:p>
-        </p:txBody>
-      </p:sp>
-      <p:sp>
-        <p:nvSpPr>
-          <p:cNvPr id="5" name="50 Hz och C = 100 µF ger Xᶜ ≈ 31,8 Ω.&#10;100 µF = 100 · 10⁻⁶ F.">
+              <a:t>X</a:t>
+            </a:r>
+            <a:r>
+              <a:rPr sz="2925" b="1" baseline="-25000">
+                <a:solidFill>
+                  <a:srgbClr val="064F91"/>
+                </a:solidFill>
+                <a:latin typeface="Calibri"/>
+                <a:ea typeface="Calibri"/>
+                <a:cs typeface="Calibri"/>
+              </a:rPr>
+              <a:t>C</a:t>
+            </a:r>
+            <a:r>
+              <a:rPr sz="2925" b="1">
+                <a:solidFill>
+                  <a:srgbClr val="064F91"/>
+                </a:solidFill>
+                <a:latin typeface="Calibri"/>
+                <a:ea typeface="Calibri"/>
+                <a:cs typeface="Calibri"/>
+              </a:rPr>
+              <a:t> = 1/(2πfC)</a:t>
+            </a:r>
+          </a:p>
+        </p:txBody>
+      </p:sp>
+      <p:sp>
+        <p:nvSpPr>
+          <p:cNvPr id="5" name="50 Hz och C = 100 µF ger XC ≈ 31,8 Ω.&#10;100 µF = 100 · 10⁻⁶ F.">
             <a:extLst xmlns:a="http://schemas.openxmlformats.org/drawingml/2006/main">
               <a:ext uri="{FF2B5EF4-FFF2-40B4-BE49-F238E27FC236}">
                 <a16:creationId xmlns:a16="http://schemas.microsoft.com/office/drawing/2014/main" id="{8AD96358-3CED-4365-8784-A4F473E763C3}"/>
@@ -17029,7 +18346,29 @@
                 <a:ea typeface="Calibri"/>
                 <a:cs typeface="Calibri"/>
               </a:rPr>
-              <a:t>50 Hz och C = 100 µF ger Xᶜ ≈ 31,8 Ω.</a:t>
+              <a:t>50 Hz och C = 100 µF ger X</a:t>
+            </a:r>
+            <a:r>
+              <a:rPr sz="2250" b="0" baseline="-25000">
+                <a:solidFill>
+                  <a:srgbClr val="111111"/>
+                </a:solidFill>
+                <a:latin typeface="Calibri"/>
+                <a:ea typeface="Calibri"/>
+                <a:cs typeface="Calibri"/>
+              </a:rPr>
+              <a:t>C</a:t>
+            </a:r>
+            <a:r>
+              <a:rPr sz="2250" b="0">
+                <a:solidFill>
+                  <a:srgbClr val="111111"/>
+                </a:solidFill>
+                <a:latin typeface="Calibri"/>
+                <a:ea typeface="Calibri"/>
+                <a:cs typeface="Calibri"/>
+              </a:rPr>
+              <a:t> ≈ 31,8 Ω.</a:t>
             </a:r>
           </a:p>
           <a:p xmlns:a="http://schemas.openxmlformats.org/drawingml/2006/main">
@@ -17649,14 +18988,14 @@
                 <a:ea typeface="Calibri"/>
                 <a:cs typeface="Calibri"/>
               </a:rPr>
-              <a:t>R = 30 Ω</a:t>
-            </a:r>
-          </a:p>
-        </p:txBody>
-      </p:sp>
-      <p:sp>
-        <p:nvSpPr>
-          <p:cNvPr id="14" name="Xᴸ = 40 Ω">
+              <a:t>R = 15 Ω</a:t>
+            </a:r>
+          </a:p>
+        </p:txBody>
+      </p:sp>
+      <p:sp>
+        <p:nvSpPr>
+          <p:cNvPr id="14" name="XL = 40 Ω">
             <a:extLst xmlns:a="http://schemas.openxmlformats.org/drawingml/2006/main">
               <a:ext uri="{FF2B5EF4-FFF2-40B4-BE49-F238E27FC236}">
                 <a16:creationId xmlns:a16="http://schemas.microsoft.com/office/drawing/2014/main" id="{FF8B82AB-692D-415D-B249-25598A962555}"/>
@@ -17707,7 +19046,29 @@
                 <a:ea typeface="Calibri"/>
                 <a:cs typeface="Calibri"/>
               </a:rPr>
-              <a:t>Xᴸ = 40 Ω</a:t>
+              <a:t>X</a:t>
+            </a:r>
+            <a:r>
+              <a:rPr sz="1763" b="0" baseline="-25000">
+                <a:solidFill>
+                  <a:srgbClr val="111111"/>
+                </a:solidFill>
+                <a:latin typeface="Calibri"/>
+                <a:ea typeface="Calibri"/>
+                <a:cs typeface="Calibri"/>
+              </a:rPr>
+              <a:t>L</a:t>
+            </a:r>
+            <a:r>
+              <a:rPr sz="1763" b="0">
+                <a:solidFill>
+                  <a:srgbClr val="111111"/>
+                </a:solidFill>
+                <a:latin typeface="Calibri"/>
+                <a:ea typeface="Calibri"/>
+                <a:cs typeface="Calibri"/>
+              </a:rPr>
+              <a:t> = 20 Ω</a:t>
             </a:r>
           </a:p>
         </p:txBody>
@@ -17765,7 +19126,7 @@
                 <a:ea typeface="Calibri"/>
                 <a:cs typeface="Calibri"/>
               </a:rPr>
-              <a:t>|Z| = 50 Ω</a:t>
+              <a:t>|Z| = 25 Ω</a:t>
             </a:r>
           </a:p>
         </p:txBody>
@@ -17999,7 +19360,7 @@
                 <a:ea typeface="Calibri"/>
                 <a:cs typeface="Calibri"/>
               </a:rPr>
-              <a:t>R = 30 Ω och X = 40 Ω ger |Z| = 50 Ω.</a:t>
+              <a:t>R = 15 Ω och X = 20 Ω ger |Z| = 25 Ω.</a:t>
             </a:r>
           </a:p>
           <a:p xmlns:a="http://schemas.openxmlformats.org/drawingml/2006/main">
@@ -18023,7 +19384,7 @@
                 <a:ea typeface="Calibri"/>
                 <a:cs typeface="Calibri"/>
               </a:rPr>
-              <a:t>Vid U = 100 V RMS blir I = 2,0 A.</a:t>
+              <a:t>Vid U = 100 V RMS blir I = 4,0 A.</a:t>
             </a:r>
           </a:p>
         </p:txBody>
@@ -18191,7 +19552,7 @@
       </p:sp>
       <p:sp>
         <p:nvSpPr>
-          <p:cNvPr id="10" name="En serie-RL-krets har R = 12 Ω, Xᴸ = 16 Ω och matas med 60 V RMS.">
+          <p:cNvPr id="10" name="En serie-RL-krets har R = 12 Ω, XL = 16 Ω och matas med 60 V RMS.">
             <a:extLst xmlns:a="http://schemas.openxmlformats.org/drawingml/2006/main">
               <a:ext uri="{FF2B5EF4-FFF2-40B4-BE49-F238E27FC236}">
                 <a16:creationId xmlns:a16="http://schemas.microsoft.com/office/drawing/2014/main" id="{3C0537B0-1C20-44A3-AF64-9C7BC0BC6ED3}"/>
@@ -18241,14 +19602,36 @@
                 <a:ea typeface="Calibri"/>
                 <a:cs typeface="Calibri"/>
               </a:rPr>
-              <a:t>En serie-RL-krets har R = 12 Ω, Xᴸ = 16 Ω och matas med 60 V RMS.</a:t>
-            </a:r>
-          </a:p>
-        </p:txBody>
-      </p:sp>
-      <p:sp>
-        <p:nvSpPr>
-          <p:cNvPr id="11" name="|Z| = √(R² + Xᴸ²)     I = U/|Z|">
+              <a:t>En serie-RL-krets har R = 12 Ω, X</a:t>
+            </a:r>
+            <a:r>
+              <a:rPr sz="2175" b="0" baseline="-25000">
+                <a:solidFill>
+                  <a:srgbClr val="111111"/>
+                </a:solidFill>
+                <a:latin typeface="Calibri"/>
+                <a:ea typeface="Calibri"/>
+                <a:cs typeface="Calibri"/>
+              </a:rPr>
+              <a:t>L</a:t>
+            </a:r>
+            <a:r>
+              <a:rPr sz="2175" b="0">
+                <a:solidFill>
+                  <a:srgbClr val="111111"/>
+                </a:solidFill>
+                <a:latin typeface="Calibri"/>
+                <a:ea typeface="Calibri"/>
+                <a:cs typeface="Calibri"/>
+              </a:rPr>
+              <a:t> = 16 Ω och matas med 60 V RMS.</a:t>
+            </a:r>
+          </a:p>
+        </p:txBody>
+      </p:sp>
+      <p:sp>
+        <p:nvSpPr>
+          <p:cNvPr id="11" name="|Z| = √(R² + XL²)     I = U/|Z|">
             <a:extLst xmlns:a="http://schemas.openxmlformats.org/drawingml/2006/main">
               <a:ext uri="{FF2B5EF4-FFF2-40B4-BE49-F238E27FC236}">
                 <a16:creationId xmlns:a16="http://schemas.microsoft.com/office/drawing/2014/main" id="{1A02C638-250A-4443-8FB8-0F53B1949C3E}"/>
@@ -18298,7 +19681,29 @@
                 <a:ea typeface="Calibri"/>
                 <a:cs typeface="Calibri"/>
               </a:rPr>
-              <a:t>|Z| = √(R² + Xᴸ²)     I = U/|Z|</a:t>
+              <a:t>|Z| = √(R² + X</a:t>
+            </a:r>
+            <a:r>
+              <a:rPr sz="2325" b="1" baseline="-25000">
+                <a:solidFill>
+                  <a:srgbClr val="064F91"/>
+                </a:solidFill>
+                <a:latin typeface="Calibri"/>
+                <a:ea typeface="Calibri"/>
+                <a:cs typeface="Calibri"/>
+              </a:rPr>
+              <a:t>L</a:t>
+            </a:r>
+            <a:r>
+              <a:rPr sz="2325" b="1">
+                <a:solidFill>
+                  <a:srgbClr val="064F91"/>
+                </a:solidFill>
+                <a:latin typeface="Calibri"/>
+                <a:ea typeface="Calibri"/>
+                <a:cs typeface="Calibri"/>
+              </a:rPr>
+              <a:t>²)     I = U/|Z|</a:t>
             </a:r>
           </a:p>
         </p:txBody>
@@ -18401,7 +19806,51 @@
                 <a:ea typeface="Calibri"/>
                 <a:cs typeface="Calibri"/>
               </a:rPr>
-              <a:t>3. Uᴿ = 3 · 12 = 36 V. Uᴸ = 3 · 16 = 48 V.</a:t>
+              <a:t>3. U</a:t>
+            </a:r>
+            <a:r>
+              <a:rPr sz="2063" b="0" baseline="-25000">
+                <a:solidFill>
+                  <a:srgbClr val="111111"/>
+                </a:solidFill>
+                <a:latin typeface="Calibri"/>
+                <a:ea typeface="Calibri"/>
+                <a:cs typeface="Calibri"/>
+              </a:rPr>
+              <a:t>R</a:t>
+            </a:r>
+            <a:r>
+              <a:rPr sz="2063" b="0">
+                <a:solidFill>
+                  <a:srgbClr val="111111"/>
+                </a:solidFill>
+                <a:latin typeface="Calibri"/>
+                <a:ea typeface="Calibri"/>
+                <a:cs typeface="Calibri"/>
+              </a:rPr>
+              <a:t> = 3 · 12 = 36 V. U</a:t>
+            </a:r>
+            <a:r>
+              <a:rPr sz="2063" b="0" baseline="-25000">
+                <a:solidFill>
+                  <a:srgbClr val="111111"/>
+                </a:solidFill>
+                <a:latin typeface="Calibri"/>
+                <a:ea typeface="Calibri"/>
+                <a:cs typeface="Calibri"/>
+              </a:rPr>
+              <a:t>L</a:t>
+            </a:r>
+            <a:r>
+              <a:rPr sz="2063" b="0">
+                <a:solidFill>
+                  <a:srgbClr val="111111"/>
+                </a:solidFill>
+                <a:latin typeface="Calibri"/>
+                <a:ea typeface="Calibri"/>
+                <a:cs typeface="Calibri"/>
+              </a:rPr>
+              <a:t> = 3 · 16 = 48 V.</a:t>
             </a:r>
           </a:p>
         </p:txBody>

--- a/sjoskolan/vecka-40/aktuell/v40_02_Reaktans_och_impedans_elev.pptx
+++ b/sjoskolan/vecka-40/aktuell/v40_02_Reaktans_och_impedans_elev.pptx
@@ -14579,12 +14579,7 @@
                 <a:ea typeface="Calibri"/>
                 <a:cs typeface="Calibri"/>
               </a:rPr>
-              <a:t>φ = arctan(X/R). Räknaren ska stå i DEG.</a:t>
-            </a:r>
-          </a:p>
-          <a:p xmlns:a="http://schemas.openxmlformats.org/drawingml/2006/main">
-            <a:r>
-              <a:t/>
+              <a:t>Fasvinkeln φ (fi) mellan spänning och ström: φ = arctan(X/R). Räknaren ska stå i DEG (grader).</a:t>
             </a:r>
           </a:p>
           <a:p xmlns:a="http://schemas.openxmlformats.org/drawingml/2006/main">
@@ -14598,6 +14593,18 @@
                 <a:cs typeface="Calibri"/>
               </a:defRPr>
             </a:pPr>
+          </a:p>
+          <a:p xmlns:a="http://schemas.openxmlformats.org/drawingml/2006/main">
+            <a:pPr>
+              <a:defRPr sz="1650" b="0">
+                <a:solidFill>
+                  <a:srgbClr val="172F43"/>
+                </a:solidFill>
+                <a:latin typeface="Calibri"/>
+                <a:ea typeface="Calibri"/>
+                <a:cs typeface="Calibri"/>
+              </a:defRPr>
+            </a:pPr>
             <a:r>
               <a:rPr sz="1650" b="0">
                 <a:solidFill>
@@ -14607,13 +14614,64 @@
                 <a:ea typeface="Calibri"/>
                 <a:cs typeface="Calibri"/>
               </a:rPr>
-              <a:t>För RL: X = +XL. Med R = 40 Ω och XL = 30 Ω blir φ ≈ +36,87°.</a:t>
-            </a:r>
-          </a:p>
-          <a:p xmlns:a="http://schemas.openxmlformats.org/drawingml/2006/main">
-            <a:r>
-              <a:t/>
-            </a:r>
+              <a:t>För RL: X = +X</a:t>
+            </a:r>
+            <a:r>
+              <a:rPr sz="1650" b="0" baseline="-25000">
+                <a:solidFill>
+                  <a:srgbClr val="172F43"/>
+                </a:solidFill>
+                <a:latin typeface="Calibri"/>
+                <a:ea typeface="Calibri"/>
+                <a:cs typeface="Calibri"/>
+              </a:rPr>
+              <a:t>L</a:t>
+            </a:r>
+            <a:r>
+              <a:rPr sz="1650" b="0">
+                <a:solidFill>
+                  <a:srgbClr val="172F43"/>
+                </a:solidFill>
+                <a:latin typeface="Calibri"/>
+                <a:ea typeface="Calibri"/>
+                <a:cs typeface="Calibri"/>
+              </a:rPr>
+              <a:t>. Med R = 40 Ω och X</a:t>
+            </a:r>
+            <a:r>
+              <a:rPr sz="1650" b="0" baseline="-25000">
+                <a:solidFill>
+                  <a:srgbClr val="172F43"/>
+                </a:solidFill>
+                <a:latin typeface="Calibri"/>
+                <a:ea typeface="Calibri"/>
+                <a:cs typeface="Calibri"/>
+              </a:rPr>
+              <a:t>L</a:t>
+            </a:r>
+            <a:r>
+              <a:rPr sz="1650" b="0">
+                <a:solidFill>
+                  <a:srgbClr val="172F43"/>
+                </a:solidFill>
+                <a:latin typeface="Calibri"/>
+                <a:ea typeface="Calibri"/>
+                <a:cs typeface="Calibri"/>
+              </a:rPr>
+              <a:t> = 30 Ω blir φ ≈ +36,87°.</a:t>
+            </a:r>
+          </a:p>
+          <a:p xmlns:a="http://schemas.openxmlformats.org/drawingml/2006/main">
+            <a:pPr>
+              <a:defRPr sz="1650" b="0">
+                <a:solidFill>
+                  <a:srgbClr val="172F43"/>
+                </a:solidFill>
+                <a:latin typeface="Calibri"/>
+                <a:ea typeface="Calibri"/>
+                <a:cs typeface="Calibri"/>
+              </a:defRPr>
+            </a:pPr>
           </a:p>
           <a:p xmlns:a="http://schemas.openxmlformats.org/drawingml/2006/main">
             <a:pPr>
@@ -14966,13 +15024,42 @@
                 <a:ea typeface="Calibri"/>
                 <a:cs typeface="Calibri"/>
               </a:rPr>
-              <a:t>R = 30 Ω, XL = 40 Ω och U = 100 V RMS.</a:t>
-            </a:r>
-          </a:p>
-          <a:p xmlns:a="http://schemas.openxmlformats.org/drawingml/2006/main">
-            <a:r>
-              <a:t/>
-            </a:r>
+              <a:t>R = 30 Ω, X</a:t>
+            </a:r>
+            <a:r>
+              <a:rPr sz="2100" b="0" baseline="-25000">
+                <a:solidFill>
+                  <a:srgbClr val="172F43"/>
+                </a:solidFill>
+                <a:latin typeface="Calibri"/>
+                <a:ea typeface="Calibri"/>
+                <a:cs typeface="Calibri"/>
+              </a:rPr>
+              <a:t>L</a:t>
+            </a:r>
+            <a:r>
+              <a:rPr sz="2100" b="0">
+                <a:solidFill>
+                  <a:srgbClr val="172F43"/>
+                </a:solidFill>
+                <a:latin typeface="Calibri"/>
+                <a:ea typeface="Calibri"/>
+                <a:cs typeface="Calibri"/>
+              </a:rPr>
+              <a:t> = 40 Ω och U = 100 V RMS.</a:t>
+            </a:r>
+          </a:p>
+          <a:p xmlns:a="http://schemas.openxmlformats.org/drawingml/2006/main">
+            <a:pPr>
+              <a:defRPr sz="2100" b="0">
+                <a:solidFill>
+                  <a:srgbClr val="172F43"/>
+                </a:solidFill>
+                <a:latin typeface="Calibri"/>
+                <a:ea typeface="Calibri"/>
+                <a:cs typeface="Calibri"/>
+              </a:defRPr>
+            </a:pPr>
           </a:p>
           <a:p xmlns:a="http://schemas.openxmlformats.org/drawingml/2006/main">
             <a:pPr>
@@ -15329,11 +15416,6 @@
             </a:r>
           </a:p>
           <a:p xmlns:a="http://schemas.openxmlformats.org/drawingml/2006/main">
-            <a:r>
-              <a:t/>
-            </a:r>
-          </a:p>
-          <a:p xmlns:a="http://schemas.openxmlformats.org/drawingml/2006/main">
             <a:pPr>
               <a:defRPr sz="2100" b="0">
                 <a:solidFill>
@@ -15344,22 +15426,6 @@
                 <a:cs typeface="Calibri"/>
               </a:defRPr>
             </a:pPr>
-            <a:r>
-              <a:rPr sz="2100" b="0">
-                <a:solidFill>
-                  <a:srgbClr val="172F43"/>
-                </a:solidFill>
-                <a:latin typeface="Calibri"/>
-                <a:ea typeface="Calibri"/>
-                <a:cs typeface="Calibri"/>
-              </a:rPr>
-              <a:t>C = 100 µF = 0,000100 F vid 50 Hz.</a:t>
-            </a:r>
-          </a:p>
-          <a:p xmlns:a="http://schemas.openxmlformats.org/drawingml/2006/main">
-            <a:r>
-              <a:t/>
-            </a:r>
           </a:p>
           <a:p xmlns:a="http://schemas.openxmlformats.org/drawingml/2006/main">
             <a:pPr>
@@ -15381,12 +15447,29 @@
                 <a:ea typeface="Calibri"/>
                 <a:cs typeface="Calibri"/>
               </a:rPr>
-              <a:t>XC = 1/(2π · 50 · 0,000100) ≈ 31,83 Ω.</a:t>
-            </a:r>
-          </a:p>
-          <a:p xmlns:a="http://schemas.openxmlformats.org/drawingml/2006/main">
-            <a:r>
-              <a:t/>
+              <a:t>Kondensatorns reaktans skrivs X</a:t>
+            </a:r>
+            <a:r>
+              <a:rPr sz="2100" b="0" baseline="-25000">
+                <a:solidFill>
+                  <a:srgbClr val="172F43"/>
+                </a:solidFill>
+                <a:latin typeface="Calibri"/>
+                <a:ea typeface="Calibri"/>
+                <a:cs typeface="Calibri"/>
+              </a:rPr>
+              <a:t>C</a:t>
+            </a:r>
+            <a:r>
+              <a:rPr sz="2100" b="0">
+                <a:solidFill>
+                  <a:srgbClr val="172F43"/>
+                </a:solidFill>
+                <a:latin typeface="Calibri"/>
+                <a:ea typeface="Calibri"/>
+                <a:cs typeface="Calibri"/>
+              </a:rPr>
+              <a:t>. C är kapacitansen i farad (F). C = 100 µF (mikrofarad) = 0,000100 F vid 50 Hz.</a:t>
             </a:r>
           </a:p>
           <a:p xmlns:a="http://schemas.openxmlformats.org/drawingml/2006/main">
@@ -15400,6 +15483,18 @@
                 <a:cs typeface="Calibri"/>
               </a:defRPr>
             </a:pPr>
+          </a:p>
+          <a:p xmlns:a="http://schemas.openxmlformats.org/drawingml/2006/main">
+            <a:pPr>
+              <a:defRPr sz="2100" b="0">
+                <a:solidFill>
+                  <a:srgbClr val="172F43"/>
+                </a:solidFill>
+                <a:latin typeface="Calibri"/>
+                <a:ea typeface="Calibri"/>
+                <a:cs typeface="Calibri"/>
+              </a:defRPr>
+            </a:pPr>
             <a:r>
               <a:rPr sz="2100" b="0">
                 <a:solidFill>
@@ -15409,7 +15504,86 @@
                 <a:ea typeface="Calibri"/>
                 <a:cs typeface="Calibri"/>
               </a:rPr>
-              <a:t>När frekvensen fördubblas halveras XC.</a:t>
+              <a:t>X</a:t>
+            </a:r>
+            <a:r>
+              <a:rPr sz="2100" b="0" baseline="-25000">
+                <a:solidFill>
+                  <a:srgbClr val="172F43"/>
+                </a:solidFill>
+                <a:latin typeface="Calibri"/>
+                <a:ea typeface="Calibri"/>
+                <a:cs typeface="Calibri"/>
+              </a:rPr>
+              <a:t>C</a:t>
+            </a:r>
+            <a:r>
+              <a:rPr sz="2100" b="0">
+                <a:solidFill>
+                  <a:srgbClr val="172F43"/>
+                </a:solidFill>
+                <a:latin typeface="Calibri"/>
+                <a:ea typeface="Calibri"/>
+                <a:cs typeface="Calibri"/>
+              </a:rPr>
+              <a:t> = 1/(2π · 50 · 0,000100) ≈ 31,83 Ω.</a:t>
+            </a:r>
+          </a:p>
+          <a:p xmlns:a="http://schemas.openxmlformats.org/drawingml/2006/main">
+            <a:pPr>
+              <a:defRPr sz="2100" b="0">
+                <a:solidFill>
+                  <a:srgbClr val="172F43"/>
+                </a:solidFill>
+                <a:latin typeface="Calibri"/>
+                <a:ea typeface="Calibri"/>
+                <a:cs typeface="Calibri"/>
+              </a:defRPr>
+            </a:pPr>
+          </a:p>
+          <a:p xmlns:a="http://schemas.openxmlformats.org/drawingml/2006/main">
+            <a:pPr>
+              <a:defRPr sz="2100" b="0">
+                <a:solidFill>
+                  <a:srgbClr val="172F43"/>
+                </a:solidFill>
+                <a:latin typeface="Calibri"/>
+                <a:ea typeface="Calibri"/>
+                <a:cs typeface="Calibri"/>
+              </a:defRPr>
+            </a:pPr>
+            <a:r>
+              <a:rPr sz="2100" b="0">
+                <a:solidFill>
+                  <a:srgbClr val="172F43"/>
+                </a:solidFill>
+                <a:latin typeface="Calibri"/>
+                <a:ea typeface="Calibri"/>
+                <a:cs typeface="Calibri"/>
+              </a:rPr>
+              <a:t>När frekvensen fördubblas halveras X</a:t>
+            </a:r>
+            <a:r>
+              <a:rPr sz="2100" b="0" baseline="-25000">
+                <a:solidFill>
+                  <a:srgbClr val="172F43"/>
+                </a:solidFill>
+                <a:latin typeface="Calibri"/>
+                <a:ea typeface="Calibri"/>
+                <a:cs typeface="Calibri"/>
+              </a:rPr>
+              <a:t>C</a:t>
+            </a:r>
+            <a:r>
+              <a:rPr sz="2100" b="0">
+                <a:solidFill>
+                  <a:srgbClr val="172F43"/>
+                </a:solidFill>
+                <a:latin typeface="Calibri"/>
+                <a:ea typeface="Calibri"/>
+                <a:cs typeface="Calibri"/>
+              </a:rPr>
+              <a:t>.</a:t>
             </a:r>
           </a:p>
         </p:txBody>
@@ -15466,7 +15640,29 @@
                 <a:ea typeface="Calibri"/>
                 <a:cs typeface="Calibri"/>
               </a:rPr>
-              <a:t>XC = 1/(2πfC)</a:t>
+              <a:t>X</a:t>
+            </a:r>
+            <a:r>
+              <a:rPr sz="2250" b="1" baseline="-25000">
+                <a:solidFill>
+                  <a:srgbClr val="064F91"/>
+                </a:solidFill>
+                <a:latin typeface="Calibri"/>
+                <a:ea typeface="Calibri"/>
+                <a:cs typeface="Calibri"/>
+              </a:rPr>
+              <a:t>C</a:t>
+            </a:r>
+            <a:r>
+              <a:rPr sz="2250" b="1">
+                <a:solidFill>
+                  <a:srgbClr val="064F91"/>
+                </a:solidFill>
+                <a:latin typeface="Calibri"/>
+                <a:ea typeface="Calibri"/>
+                <a:cs typeface="Calibri"/>
+              </a:rPr>
+              <a:t> = 1/(2πfC)</a:t>
             </a:r>
           </a:p>
         </p:txBody>
@@ -15740,12 +15936,29 @@
                 <a:ea typeface="Calibri"/>
                 <a:cs typeface="Calibri"/>
               </a:rPr>
-              <a:t>R = 40 Ω och XC = 30 Ω. Nettoreaktansen är X = −30 Ω.</a:t>
-            </a:r>
-          </a:p>
-          <a:p xmlns:a="http://schemas.openxmlformats.org/drawingml/2006/main">
-            <a:r>
-              <a:t/>
+              <a:t>Resistor och kondensator i serie kallas RC-krets. R = 40 Ω och X</a:t>
+            </a:r>
+            <a:r>
+              <a:rPr sz="2100" b="0" baseline="-25000">
+                <a:solidFill>
+                  <a:srgbClr val="172F43"/>
+                </a:solidFill>
+                <a:latin typeface="Calibri"/>
+                <a:ea typeface="Calibri"/>
+                <a:cs typeface="Calibri"/>
+              </a:rPr>
+              <a:t>C</a:t>
+            </a:r>
+            <a:r>
+              <a:rPr sz="2100" b="0">
+                <a:solidFill>
+                  <a:srgbClr val="172F43"/>
+                </a:solidFill>
+                <a:latin typeface="Calibri"/>
+                <a:ea typeface="Calibri"/>
+                <a:cs typeface="Calibri"/>
+              </a:rPr>
+              <a:t> = 30 Ω. Nettoreaktansen är X = −30 Ω.</a:t>
             </a:r>
           </a:p>
           <a:p xmlns:a="http://schemas.openxmlformats.org/drawingml/2006/main">
@@ -15759,6 +15972,18 @@
                 <a:cs typeface="Calibri"/>
               </a:defRPr>
             </a:pPr>
+          </a:p>
+          <a:p xmlns:a="http://schemas.openxmlformats.org/drawingml/2006/main">
+            <a:pPr>
+              <a:defRPr sz="2100" b="0">
+                <a:solidFill>
+                  <a:srgbClr val="172F43"/>
+                </a:solidFill>
+                <a:latin typeface="Calibri"/>
+                <a:ea typeface="Calibri"/>
+                <a:cs typeface="Calibri"/>
+              </a:defRPr>
+            </a:pPr>
             <a:r>
               <a:rPr sz="2100" b="0">
                 <a:solidFill>
@@ -15772,11 +15997,6 @@
             </a:r>
           </a:p>
           <a:p xmlns:a="http://schemas.openxmlformats.org/drawingml/2006/main">
-            <a:r>
-              <a:t/>
-            </a:r>
-          </a:p>
-          <a:p xmlns:a="http://schemas.openxmlformats.org/drawingml/2006/main">
             <a:pPr>
               <a:defRPr sz="2100" b="0">
                 <a:solidFill>
@@ -15787,6 +16007,18 @@
                 <a:cs typeface="Calibri"/>
               </a:defRPr>
             </a:pPr>
+          </a:p>
+          <a:p xmlns:a="http://schemas.openxmlformats.org/drawingml/2006/main">
+            <a:pPr>
+              <a:defRPr sz="2100" b="0">
+                <a:solidFill>
+                  <a:srgbClr val="172F43"/>
+                </a:solidFill>
+                <a:latin typeface="Calibri"/>
+                <a:ea typeface="Calibri"/>
+                <a:cs typeface="Calibri"/>
+              </a:defRPr>
+            </a:pPr>
             <a:r>
               <a:rPr sz="2100" b="0">
                 <a:solidFill>
@@ -15800,9 +16032,16 @@
             </a:r>
           </a:p>
           <a:p xmlns:a="http://schemas.openxmlformats.org/drawingml/2006/main">
-            <a:r>
-              <a:t/>
-            </a:r>
+            <a:pPr>
+              <a:defRPr sz="2100" b="0">
+                <a:solidFill>
+                  <a:srgbClr val="172F43"/>
+                </a:solidFill>
+                <a:latin typeface="Calibri"/>
+                <a:ea typeface="Calibri"/>
+                <a:cs typeface="Calibri"/>
+              </a:defRPr>
+            </a:pPr>
           </a:p>
           <a:p xmlns:a="http://schemas.openxmlformats.org/drawingml/2006/main">
             <a:pPr>
@@ -16098,12 +16337,51 @@
                 <a:ea typeface="Calibri"/>
                 <a:cs typeface="Calibri"/>
               </a:rPr>
-              <a:t>I serie: X = XL − XC. Därefter |Z| = √(R² + X²).</a:t>
-            </a:r>
-          </a:p>
-          <a:p xmlns:a="http://schemas.openxmlformats.org/drawingml/2006/main">
-            <a:r>
-              <a:t/>
+              <a:t>Resistor, spole och kondensator i serie kallas RLC-krets. I serie: X = X</a:t>
+            </a:r>
+            <a:r>
+              <a:rPr sz="2100" b="0" baseline="-25000">
+                <a:solidFill>
+                  <a:srgbClr val="172F43"/>
+                </a:solidFill>
+                <a:latin typeface="Calibri"/>
+                <a:ea typeface="Calibri"/>
+                <a:cs typeface="Calibri"/>
+              </a:rPr>
+              <a:t>L</a:t>
+            </a:r>
+            <a:r>
+              <a:rPr sz="2100" b="0">
+                <a:solidFill>
+                  <a:srgbClr val="172F43"/>
+                </a:solidFill>
+                <a:latin typeface="Calibri"/>
+                <a:ea typeface="Calibri"/>
+                <a:cs typeface="Calibri"/>
+              </a:rPr>
+              <a:t> − X</a:t>
+            </a:r>
+            <a:r>
+              <a:rPr sz="2100" b="0" baseline="-25000">
+                <a:solidFill>
+                  <a:srgbClr val="172F43"/>
+                </a:solidFill>
+                <a:latin typeface="Calibri"/>
+                <a:ea typeface="Calibri"/>
+                <a:cs typeface="Calibri"/>
+              </a:rPr>
+              <a:t>C</a:t>
+            </a:r>
+            <a:r>
+              <a:rPr sz="2100" b="0">
+                <a:solidFill>
+                  <a:srgbClr val="172F43"/>
+                </a:solidFill>
+                <a:latin typeface="Calibri"/>
+                <a:ea typeface="Calibri"/>
+                <a:cs typeface="Calibri"/>
+              </a:rPr>
+              <a:t>. Därefter |Z| = √(R² + X²).</a:t>
             </a:r>
           </a:p>
           <a:p xmlns:a="http://schemas.openxmlformats.org/drawingml/2006/main">
@@ -16117,22 +16395,6 @@
                 <a:cs typeface="Calibri"/>
               </a:defRPr>
             </a:pPr>
-            <a:r>
-              <a:rPr sz="2100" b="0">
-                <a:solidFill>
-                  <a:srgbClr val="172F43"/>
-                </a:solidFill>
-                <a:latin typeface="Calibri"/>
-                <a:ea typeface="Calibri"/>
-                <a:cs typeface="Calibri"/>
-              </a:rPr>
-              <a:t>Den komplexa skrivformen är Z = R + jX. j markerar den vinkelräta reaktiva delen.</a:t>
-            </a:r>
-          </a:p>
-          <a:p xmlns:a="http://schemas.openxmlformats.org/drawingml/2006/main">
-            <a:r>
-              <a:t/>
-            </a:r>
           </a:p>
           <a:p xmlns:a="http://schemas.openxmlformats.org/drawingml/2006/main">
             <a:pPr>
@@ -16154,7 +16416,86 @@
                 <a:ea typeface="Calibri"/>
                 <a:cs typeface="Calibri"/>
               </a:rPr>
-              <a:t>Exempel: R = 30 Ω, XL = 50 Ω, XC = 10 Ω. X = 40 Ω och |Z| = 50 Ω.</a:t>
+              <a:t>Den komplexa skrivformen är Z = R + jX. Bokstaven j markerar att den reaktiva delen X ligger vinkelrätt mot R.</a:t>
+            </a:r>
+          </a:p>
+          <a:p xmlns:a="http://schemas.openxmlformats.org/drawingml/2006/main">
+            <a:pPr>
+              <a:defRPr sz="2100" b="0">
+                <a:solidFill>
+                  <a:srgbClr val="172F43"/>
+                </a:solidFill>
+                <a:latin typeface="Calibri"/>
+                <a:ea typeface="Calibri"/>
+                <a:cs typeface="Calibri"/>
+              </a:defRPr>
+            </a:pPr>
+          </a:p>
+          <a:p xmlns:a="http://schemas.openxmlformats.org/drawingml/2006/main">
+            <a:pPr>
+              <a:defRPr sz="2100" b="0">
+                <a:solidFill>
+                  <a:srgbClr val="172F43"/>
+                </a:solidFill>
+                <a:latin typeface="Calibri"/>
+                <a:ea typeface="Calibri"/>
+                <a:cs typeface="Calibri"/>
+              </a:defRPr>
+            </a:pPr>
+            <a:r>
+              <a:rPr sz="2100" b="0">
+                <a:solidFill>
+                  <a:srgbClr val="172F43"/>
+                </a:solidFill>
+                <a:latin typeface="Calibri"/>
+                <a:ea typeface="Calibri"/>
+                <a:cs typeface="Calibri"/>
+              </a:rPr>
+              <a:t>Exempel: R = 30 Ω, X</a:t>
+            </a:r>
+            <a:r>
+              <a:rPr sz="2100" b="0" baseline="-25000">
+                <a:solidFill>
+                  <a:srgbClr val="172F43"/>
+                </a:solidFill>
+                <a:latin typeface="Calibri"/>
+                <a:ea typeface="Calibri"/>
+                <a:cs typeface="Calibri"/>
+              </a:rPr>
+              <a:t>L</a:t>
+            </a:r>
+            <a:r>
+              <a:rPr sz="2100" b="0">
+                <a:solidFill>
+                  <a:srgbClr val="172F43"/>
+                </a:solidFill>
+                <a:latin typeface="Calibri"/>
+                <a:ea typeface="Calibri"/>
+                <a:cs typeface="Calibri"/>
+              </a:rPr>
+              <a:t> = 50 Ω, X</a:t>
+            </a:r>
+            <a:r>
+              <a:rPr sz="2100" b="0" baseline="-25000">
+                <a:solidFill>
+                  <a:srgbClr val="172F43"/>
+                </a:solidFill>
+                <a:latin typeface="Calibri"/>
+                <a:ea typeface="Calibri"/>
+                <a:cs typeface="Calibri"/>
+              </a:rPr>
+              <a:t>C</a:t>
+            </a:r>
+            <a:r>
+              <a:rPr sz="2100" b="0">
+                <a:solidFill>
+                  <a:srgbClr val="172F43"/>
+                </a:solidFill>
+                <a:latin typeface="Calibri"/>
+                <a:ea typeface="Calibri"/>
+                <a:cs typeface="Calibri"/>
+              </a:rPr>
+              <a:t> = 10 Ω. X = 40 Ω och |Z| = 50 Ω.</a:t>
             </a:r>
           </a:p>
         </p:txBody>
@@ -16428,12 +16769,73 @@
                 <a:ea typeface="Calibri"/>
                 <a:cs typeface="Calibri"/>
               </a:rPr>
-              <a:t>Vid serieresonans är XL = XC. Nettoreaktansen blir noll och |Z| = R.</a:t>
-            </a:r>
-          </a:p>
-          <a:p xmlns:a="http://schemas.openxmlformats.org/drawingml/2006/main">
-            <a:r>
-              <a:t/>
+              <a:t>Vid serieresonans är X</a:t>
+            </a:r>
+            <a:r>
+              <a:rPr sz="2100" b="0" baseline="-25000">
+                <a:solidFill>
+                  <a:srgbClr val="172F43"/>
+                </a:solidFill>
+                <a:latin typeface="Calibri"/>
+                <a:ea typeface="Calibri"/>
+                <a:cs typeface="Calibri"/>
+              </a:rPr>
+              <a:t>L</a:t>
+            </a:r>
+            <a:r>
+              <a:rPr sz="2100" b="0">
+                <a:solidFill>
+                  <a:srgbClr val="172F43"/>
+                </a:solidFill>
+                <a:latin typeface="Calibri"/>
+                <a:ea typeface="Calibri"/>
+                <a:cs typeface="Calibri"/>
+              </a:rPr>
+              <a:t> = X</a:t>
+            </a:r>
+            <a:r>
+              <a:rPr sz="2100" b="0" baseline="-25000">
+                <a:solidFill>
+                  <a:srgbClr val="172F43"/>
+                </a:solidFill>
+                <a:latin typeface="Calibri"/>
+                <a:ea typeface="Calibri"/>
+                <a:cs typeface="Calibri"/>
+              </a:rPr>
+              <a:t>C</a:t>
+            </a:r>
+            <a:r>
+              <a:rPr sz="2100" b="0">
+                <a:solidFill>
+                  <a:srgbClr val="172F43"/>
+                </a:solidFill>
+                <a:latin typeface="Calibri"/>
+                <a:ea typeface="Calibri"/>
+                <a:cs typeface="Calibri"/>
+              </a:rPr>
+              <a:t>. Nettoreaktansen blir noll och |Z| = R. Frekvensen där det händer kallas resonansfrekvens, f</a:t>
+            </a:r>
+            <a:r>
+              <a:rPr sz="2100" b="0" baseline="-25000">
+                <a:solidFill>
+                  <a:srgbClr val="172F43"/>
+                </a:solidFill>
+                <a:latin typeface="Calibri"/>
+                <a:ea typeface="Calibri"/>
+                <a:cs typeface="Calibri"/>
+              </a:rPr>
+              <a:t>0</a:t>
+            </a:r>
+            <a:r>
+              <a:rPr sz="2100" b="0">
+                <a:solidFill>
+                  <a:srgbClr val="172F43"/>
+                </a:solidFill>
+                <a:latin typeface="Calibri"/>
+                <a:ea typeface="Calibri"/>
+                <a:cs typeface="Calibri"/>
+              </a:rPr>
+              <a:t>.</a:t>
             </a:r>
           </a:p>
           <a:p xmlns:a="http://schemas.openxmlformats.org/drawingml/2006/main">
@@ -16447,6 +16849,18 @@
                 <a:cs typeface="Calibri"/>
               </a:defRPr>
             </a:pPr>
+          </a:p>
+          <a:p xmlns:a="http://schemas.openxmlformats.org/drawingml/2006/main">
+            <a:pPr>
+              <a:defRPr sz="2100" b="0">
+                <a:solidFill>
+                  <a:srgbClr val="172F43"/>
+                </a:solidFill>
+                <a:latin typeface="Calibri"/>
+                <a:ea typeface="Calibri"/>
+                <a:cs typeface="Calibri"/>
+              </a:defRPr>
+            </a:pPr>
             <a:r>
               <a:rPr sz="2100" b="0">
                 <a:solidFill>
@@ -16460,11 +16874,6 @@
             </a:r>
           </a:p>
           <a:p xmlns:a="http://schemas.openxmlformats.org/drawingml/2006/main">
-            <a:r>
-              <a:t/>
-            </a:r>
-          </a:p>
-          <a:p xmlns:a="http://schemas.openxmlformats.org/drawingml/2006/main">
             <a:pPr>
               <a:defRPr sz="2100" b="0">
                 <a:solidFill>
@@ -16475,22 +16884,6 @@
                 <a:cs typeface="Calibri"/>
               </a:defRPr>
             </a:pPr>
-            <a:r>
-              <a:rPr sz="2100" b="0">
-                <a:solidFill>
-                  <a:srgbClr val="172F43"/>
-                </a:solidFill>
-                <a:latin typeface="Calibri"/>
-                <a:ea typeface="Calibri"/>
-                <a:cs typeface="Calibri"/>
-              </a:rPr>
-              <a:t>√(LC) = √0,0000075 ≈ 0,0027386.</a:t>
-            </a:r>
-          </a:p>
-          <a:p xmlns:a="http://schemas.openxmlformats.org/drawingml/2006/main">
-            <a:r>
-              <a:t/>
-            </a:r>
           </a:p>
           <a:p xmlns:a="http://schemas.openxmlformats.org/drawingml/2006/main">
             <a:pPr>
@@ -16512,7 +16905,64 @@
                 <a:ea typeface="Calibri"/>
                 <a:cs typeface="Calibri"/>
               </a:rPr>
-              <a:t>f₀ = 1/(2π · 0,0027386) ≈ 58,12 Hz.</a:t>
+              <a:t>√(L · C) = √0,0000075 ≈ 0,0027386.</a:t>
+            </a:r>
+          </a:p>
+          <a:p xmlns:a="http://schemas.openxmlformats.org/drawingml/2006/main">
+            <a:pPr>
+              <a:defRPr sz="2100" b="0">
+                <a:solidFill>
+                  <a:srgbClr val="172F43"/>
+                </a:solidFill>
+                <a:latin typeface="Calibri"/>
+                <a:ea typeface="Calibri"/>
+                <a:cs typeface="Calibri"/>
+              </a:defRPr>
+            </a:pPr>
+          </a:p>
+          <a:p xmlns:a="http://schemas.openxmlformats.org/drawingml/2006/main">
+            <a:pPr>
+              <a:defRPr sz="2100" b="0">
+                <a:solidFill>
+                  <a:srgbClr val="172F43"/>
+                </a:solidFill>
+                <a:latin typeface="Calibri"/>
+                <a:ea typeface="Calibri"/>
+                <a:cs typeface="Calibri"/>
+              </a:defRPr>
+            </a:pPr>
+            <a:r>
+              <a:rPr sz="2100" b="0">
+                <a:solidFill>
+                  <a:srgbClr val="172F43"/>
+                </a:solidFill>
+                <a:latin typeface="Calibri"/>
+                <a:ea typeface="Calibri"/>
+                <a:cs typeface="Calibri"/>
+              </a:rPr>
+              <a:t>f</a:t>
+            </a:r>
+            <a:r>
+              <a:rPr sz="2100" b="0" baseline="-25000">
+                <a:solidFill>
+                  <a:srgbClr val="172F43"/>
+                </a:solidFill>
+                <a:latin typeface="Calibri"/>
+                <a:ea typeface="Calibri"/>
+                <a:cs typeface="Calibri"/>
+              </a:rPr>
+              <a:t>0</a:t>
+            </a:r>
+            <a:r>
+              <a:rPr sz="2100" b="0">
+                <a:solidFill>
+                  <a:srgbClr val="172F43"/>
+                </a:solidFill>
+                <a:latin typeface="Calibri"/>
+                <a:ea typeface="Calibri"/>
+                <a:cs typeface="Calibri"/>
+              </a:rPr>
+              <a:t> = 1/(2π · 0,0027386) ≈ 58,12 Hz.</a:t>
             </a:r>
           </a:p>
         </p:txBody>
@@ -16569,7 +17019,29 @@
                 <a:ea typeface="Calibri"/>
                 <a:cs typeface="Calibri"/>
               </a:rPr>
-              <a:t>f₀ = 1/(2π√(LC))</a:t>
+              <a:t>f</a:t>
+            </a:r>
+            <a:r>
+              <a:rPr sz="2250" b="1" baseline="-25000">
+                <a:solidFill>
+                  <a:srgbClr val="064F91"/>
+                </a:solidFill>
+                <a:latin typeface="Calibri"/>
+                <a:ea typeface="Calibri"/>
+                <a:cs typeface="Calibri"/>
+              </a:rPr>
+              <a:t>0</a:t>
+            </a:r>
+            <a:r>
+              <a:rPr sz="2250" b="1">
+                <a:solidFill>
+                  <a:srgbClr val="064F91"/>
+                </a:solidFill>
+                <a:latin typeface="Calibri"/>
+                <a:ea typeface="Calibri"/>
+                <a:cs typeface="Calibri"/>
+              </a:rPr>
+              <a:t> = 1/(2π√(L · C))</a:t>
             </a:r>
           </a:p>
         </p:txBody>
@@ -16843,12 +17315,29 @@
                 <a:ea typeface="Calibri"/>
                 <a:cs typeface="Calibri"/>
               </a:rPr>
-              <a:t>Kan du gå från mH till H och från XL till ström?</a:t>
-            </a:r>
-          </a:p>
-          <a:p xmlns:a="http://schemas.openxmlformats.org/drawingml/2006/main">
-            <a:r>
-              <a:t/>
+              <a:t>Kan du gå från mH till H och från X</a:t>
+            </a:r>
+            <a:r>
+              <a:rPr sz="2100" b="0" baseline="-25000">
+                <a:solidFill>
+                  <a:srgbClr val="172F43"/>
+                </a:solidFill>
+                <a:latin typeface="Calibri"/>
+                <a:ea typeface="Calibri"/>
+                <a:cs typeface="Calibri"/>
+              </a:rPr>
+              <a:t>L</a:t>
+            </a:r>
+            <a:r>
+              <a:rPr sz="2100" b="0">
+                <a:solidFill>
+                  <a:srgbClr val="172F43"/>
+                </a:solidFill>
+                <a:latin typeface="Calibri"/>
+                <a:ea typeface="Calibri"/>
+                <a:cs typeface="Calibri"/>
+              </a:rPr>
+              <a:t> till ström?</a:t>
             </a:r>
           </a:p>
           <a:p xmlns:a="http://schemas.openxmlformats.org/drawingml/2006/main">
@@ -16862,22 +17351,6 @@
                 <a:cs typeface="Calibri"/>
               </a:defRPr>
             </a:pPr>
-            <a:r>
-              <a:rPr sz="2100" b="0">
-                <a:solidFill>
-                  <a:srgbClr val="172F43"/>
-                </a:solidFill>
-                <a:latin typeface="Calibri"/>
-                <a:ea typeface="Calibri"/>
-                <a:cs typeface="Calibri"/>
-              </a:rPr>
-              <a:t>Kan du förklara varför R och XL ligger vinkelrätt?</a:t>
-            </a:r>
-          </a:p>
-          <a:p xmlns:a="http://schemas.openxmlformats.org/drawingml/2006/main">
-            <a:r>
-              <a:t/>
-            </a:r>
           </a:p>
           <a:p xmlns:a="http://schemas.openxmlformats.org/drawingml/2006/main">
             <a:pPr>
@@ -16899,13 +17372,77 @@
                 <a:ea typeface="Calibri"/>
                 <a:cs typeface="Calibri"/>
               </a:rPr>
+              <a:t>Kan du förklara varför R och X</a:t>
+            </a:r>
+            <a:r>
+              <a:rPr sz="2100" b="0" baseline="-25000">
+                <a:solidFill>
+                  <a:srgbClr val="172F43"/>
+                </a:solidFill>
+                <a:latin typeface="Calibri"/>
+                <a:ea typeface="Calibri"/>
+                <a:cs typeface="Calibri"/>
+              </a:rPr>
+              <a:t>L</a:t>
+            </a:r>
+            <a:r>
+              <a:rPr sz="2100" b="0">
+                <a:solidFill>
+                  <a:srgbClr val="172F43"/>
+                </a:solidFill>
+                <a:latin typeface="Calibri"/>
+                <a:ea typeface="Calibri"/>
+                <a:cs typeface="Calibri"/>
+              </a:rPr>
+              <a:t> ligger vinkelrätt?</a:t>
+            </a:r>
+          </a:p>
+          <a:p xmlns:a="http://schemas.openxmlformats.org/drawingml/2006/main">
+            <a:pPr>
+              <a:defRPr sz="2100" b="0">
+                <a:solidFill>
+                  <a:srgbClr val="172F43"/>
+                </a:solidFill>
+                <a:latin typeface="Calibri"/>
+                <a:ea typeface="Calibri"/>
+                <a:cs typeface="Calibri"/>
+              </a:defRPr>
+            </a:pPr>
+          </a:p>
+          <a:p xmlns:a="http://schemas.openxmlformats.org/drawingml/2006/main">
+            <a:pPr>
+              <a:defRPr sz="2100" b="0">
+                <a:solidFill>
+                  <a:srgbClr val="172F43"/>
+                </a:solidFill>
+                <a:latin typeface="Calibri"/>
+                <a:ea typeface="Calibri"/>
+                <a:cs typeface="Calibri"/>
+              </a:defRPr>
+            </a:pPr>
+            <a:r>
+              <a:rPr sz="2100" b="0">
+                <a:solidFill>
+                  <a:srgbClr val="172F43"/>
+                </a:solidFill>
+                <a:latin typeface="Calibri"/>
+                <a:ea typeface="Calibri"/>
+                <a:cs typeface="Calibri"/>
+              </a:rPr>
               <a:t>Kan du visa att strömmen släpar i RL-kretsen?</a:t>
             </a:r>
           </a:p>
           <a:p xmlns:a="http://schemas.openxmlformats.org/drawingml/2006/main">
-            <a:r>
-              <a:t/>
-            </a:r>
+            <a:pPr>
+              <a:defRPr sz="2100" b="0">
+                <a:solidFill>
+                  <a:srgbClr val="172F43"/>
+                </a:solidFill>
+                <a:latin typeface="Calibri"/>
+                <a:ea typeface="Calibri"/>
+                <a:cs typeface="Calibri"/>
+              </a:defRPr>
+            </a:pPr>
           </a:p>
           <a:p xmlns:a="http://schemas.openxmlformats.org/drawingml/2006/main">
             <a:pPr>
@@ -17205,11 +17742,6 @@
             </a:r>
           </a:p>
           <a:p xmlns:a="http://schemas.openxmlformats.org/drawingml/2006/main">
-            <a:r>
-              <a:t/>
-            </a:r>
-          </a:p>
-          <a:p xmlns:a="http://schemas.openxmlformats.org/drawingml/2006/main">
             <a:pPr>
               <a:defRPr sz="2100" b="0">
                 <a:solidFill>
@@ -17220,6 +17752,18 @@
                 <a:cs typeface="Calibri"/>
               </a:defRPr>
             </a:pPr>
+          </a:p>
+          <a:p xmlns:a="http://schemas.openxmlformats.org/drawingml/2006/main">
+            <a:pPr>
+              <a:defRPr sz="2100" b="0">
+                <a:solidFill>
+                  <a:srgbClr val="172F43"/>
+                </a:solidFill>
+                <a:latin typeface="Calibri"/>
+                <a:ea typeface="Calibri"/>
+                <a:cs typeface="Calibri"/>
+              </a:defRPr>
+            </a:pPr>
             <a:r>
               <a:rPr sz="2100" b="0">
                 <a:solidFill>
@@ -17229,13 +17773,20 @@
                 <a:ea typeface="Calibri"/>
                 <a:cs typeface="Calibri"/>
               </a:rPr>
-              <a:t>Du ska kunna omvandla mH till H, beräkna reaktans och därefter ström.</a:t>
-            </a:r>
-          </a:p>
-          <a:p xmlns:a="http://schemas.openxmlformats.org/drawingml/2006/main">
-            <a:r>
-              <a:t/>
-            </a:r>
+              <a:t>Du ska kunna omvandla mH (millihenry) till H (henry, enheten för induktans), beräkna reaktans och därefter ström.</a:t>
+            </a:r>
+          </a:p>
+          <a:p xmlns:a="http://schemas.openxmlformats.org/drawingml/2006/main">
+            <a:pPr>
+              <a:defRPr sz="2100" b="0">
+                <a:solidFill>
+                  <a:srgbClr val="172F43"/>
+                </a:solidFill>
+                <a:latin typeface="Calibri"/>
+                <a:ea typeface="Calibri"/>
+                <a:cs typeface="Calibri"/>
+              </a:defRPr>
+            </a:pPr>
           </a:p>
           <a:p xmlns:a="http://schemas.openxmlformats.org/drawingml/2006/main">
             <a:pPr>
@@ -17897,11 +18448,6 @@
             </a:r>
           </a:p>
           <a:p xmlns:a="http://schemas.openxmlformats.org/drawingml/2006/main">
-            <a:r>
-              <a:t/>
-            </a:r>
-          </a:p>
-          <a:p xmlns:a="http://schemas.openxmlformats.org/drawingml/2006/main">
             <a:pPr>
               <a:defRPr sz="1650" b="0">
                 <a:solidFill>
@@ -17912,22 +18458,6 @@
                 <a:cs typeface="Calibri"/>
               </a:defRPr>
             </a:pPr>
-            <a:r>
-              <a:rPr sz="1650" b="0">
-                <a:solidFill>
-                  <a:srgbClr val="172F43"/>
-                </a:solidFill>
-                <a:latin typeface="Calibri"/>
-                <a:ea typeface="Calibri"/>
-                <a:cs typeface="Calibri"/>
-              </a:rPr>
-              <a:t>I RL-kretsen kommer strömmens topp efter källspänningens topp. Strömmen släpar.</a:t>
-            </a:r>
-          </a:p>
-          <a:p xmlns:a="http://schemas.openxmlformats.org/drawingml/2006/main">
-            <a:r>
-              <a:t/>
-            </a:r>
           </a:p>
           <a:p xmlns:a="http://schemas.openxmlformats.org/drawingml/2006/main">
             <a:pPr>
@@ -17949,7 +18479,42 @@
                 <a:ea typeface="Calibri"/>
                 <a:cs typeface="Calibri"/>
               </a:rPr>
-              <a:t>Spolen tillför reaktans, som mäts i ohm. Den påverkar strömmen utöver resistorn.</a:t>
+              <a:t>Resistor (R) och spole (L) i serie kallas RL-krets. I RL-kretsen kommer strömmens topp efter källspänningens topp. Strömmen släpar.</a:t>
+            </a:r>
+          </a:p>
+          <a:p xmlns:a="http://schemas.openxmlformats.org/drawingml/2006/main">
+            <a:pPr>
+              <a:defRPr sz="1650" b="0">
+                <a:solidFill>
+                  <a:srgbClr val="172F43"/>
+                </a:solidFill>
+                <a:latin typeface="Calibri"/>
+                <a:ea typeface="Calibri"/>
+                <a:cs typeface="Calibri"/>
+              </a:defRPr>
+            </a:pPr>
+          </a:p>
+          <a:p xmlns:a="http://schemas.openxmlformats.org/drawingml/2006/main">
+            <a:pPr>
+              <a:defRPr sz="1650" b="0">
+                <a:solidFill>
+                  <a:srgbClr val="172F43"/>
+                </a:solidFill>
+                <a:latin typeface="Calibri"/>
+                <a:ea typeface="Calibri"/>
+                <a:cs typeface="Calibri"/>
+              </a:defRPr>
+            </a:pPr>
+            <a:r>
+              <a:rPr sz="1650" b="0">
+                <a:solidFill>
+                  <a:srgbClr val="172F43"/>
+                </a:solidFill>
+                <a:latin typeface="Calibri"/>
+                <a:ea typeface="Calibri"/>
+                <a:cs typeface="Calibri"/>
+              </a:rPr>
+              <a:t>Spolen tillför reaktans, ett motstånd mot växelström som mäts i ohm. Den påverkar strömmen utöver resistorn.</a:t>
             </a:r>
           </a:p>
         </p:txBody>
@@ -18223,12 +18788,29 @@
                 <a:ea typeface="Calibri"/>
                 <a:cs typeface="Calibri"/>
               </a:rPr>
-              <a:t>Givet: L = 95,5 mH = 0,0955 H och f = 50 Hz.</a:t>
-            </a:r>
-          </a:p>
-          <a:p xmlns:a="http://schemas.openxmlformats.org/drawingml/2006/main">
-            <a:r>
-              <a:t/>
+              <a:t>Spolens reaktans skrivs X</a:t>
+            </a:r>
+            <a:r>
+              <a:rPr sz="2100" b="0" baseline="-25000">
+                <a:solidFill>
+                  <a:srgbClr val="172F43"/>
+                </a:solidFill>
+                <a:latin typeface="Calibri"/>
+                <a:ea typeface="Calibri"/>
+                <a:cs typeface="Calibri"/>
+              </a:rPr>
+              <a:t>L</a:t>
+            </a:r>
+            <a:r>
+              <a:rPr sz="2100" b="0">
+                <a:solidFill>
+                  <a:srgbClr val="172F43"/>
+                </a:solidFill>
+                <a:latin typeface="Calibri"/>
+                <a:ea typeface="Calibri"/>
+                <a:cs typeface="Calibri"/>
+              </a:rPr>
+              <a:t> (X för reaktans, L för spole). L är spolens induktans i henry. Givet: L = 95,5 mH = 0,0955 H och f = 50 Hz.</a:t>
             </a:r>
           </a:p>
           <a:p xmlns:a="http://schemas.openxmlformats.org/drawingml/2006/main">
@@ -18242,22 +18824,6 @@
                 <a:cs typeface="Calibri"/>
               </a:defRPr>
             </a:pPr>
-            <a:r>
-              <a:rPr sz="2100" b="0">
-                <a:solidFill>
-                  <a:srgbClr val="172F43"/>
-                </a:solidFill>
-                <a:latin typeface="Calibri"/>
-                <a:ea typeface="Calibri"/>
-                <a:cs typeface="Calibri"/>
-              </a:rPr>
-              <a:t>XL = 2π · 50 · 0,0955 ≈ 30,00 Ω.</a:t>
-            </a:r>
-          </a:p>
-          <a:p xmlns:a="http://schemas.openxmlformats.org/drawingml/2006/main">
-            <a:r>
-              <a:t/>
-            </a:r>
           </a:p>
           <a:p xmlns:a="http://schemas.openxmlformats.org/drawingml/2006/main">
             <a:pPr>
@@ -18279,7 +18845,86 @@
                 <a:ea typeface="Calibri"/>
                 <a:cs typeface="Calibri"/>
               </a:rPr>
-              <a:t>Vid dubbla frekvensen blir XL dubbelt så stor om L är oförändrad.</a:t>
+              <a:t>X</a:t>
+            </a:r>
+            <a:r>
+              <a:rPr sz="2100" b="0" baseline="-25000">
+                <a:solidFill>
+                  <a:srgbClr val="172F43"/>
+                </a:solidFill>
+                <a:latin typeface="Calibri"/>
+                <a:ea typeface="Calibri"/>
+                <a:cs typeface="Calibri"/>
+              </a:rPr>
+              <a:t>L</a:t>
+            </a:r>
+            <a:r>
+              <a:rPr sz="2100" b="0">
+                <a:solidFill>
+                  <a:srgbClr val="172F43"/>
+                </a:solidFill>
+                <a:latin typeface="Calibri"/>
+                <a:ea typeface="Calibri"/>
+                <a:cs typeface="Calibri"/>
+              </a:rPr>
+              <a:t> = 2π · 50 · 0,0955 ≈ 30,00 Ω.</a:t>
+            </a:r>
+          </a:p>
+          <a:p xmlns:a="http://schemas.openxmlformats.org/drawingml/2006/main">
+            <a:pPr>
+              <a:defRPr sz="2100" b="0">
+                <a:solidFill>
+                  <a:srgbClr val="172F43"/>
+                </a:solidFill>
+                <a:latin typeface="Calibri"/>
+                <a:ea typeface="Calibri"/>
+                <a:cs typeface="Calibri"/>
+              </a:defRPr>
+            </a:pPr>
+          </a:p>
+          <a:p xmlns:a="http://schemas.openxmlformats.org/drawingml/2006/main">
+            <a:pPr>
+              <a:defRPr sz="2100" b="0">
+                <a:solidFill>
+                  <a:srgbClr val="172F43"/>
+                </a:solidFill>
+                <a:latin typeface="Calibri"/>
+                <a:ea typeface="Calibri"/>
+                <a:cs typeface="Calibri"/>
+              </a:defRPr>
+            </a:pPr>
+            <a:r>
+              <a:rPr sz="2100" b="0">
+                <a:solidFill>
+                  <a:srgbClr val="172F43"/>
+                </a:solidFill>
+                <a:latin typeface="Calibri"/>
+                <a:ea typeface="Calibri"/>
+                <a:cs typeface="Calibri"/>
+              </a:rPr>
+              <a:t>Vid dubbla frekvensen blir X</a:t>
+            </a:r>
+            <a:r>
+              <a:rPr sz="2100" b="0" baseline="-25000">
+                <a:solidFill>
+                  <a:srgbClr val="172F43"/>
+                </a:solidFill>
+                <a:latin typeface="Calibri"/>
+                <a:ea typeface="Calibri"/>
+                <a:cs typeface="Calibri"/>
+              </a:rPr>
+              <a:t>L</a:t>
+            </a:r>
+            <a:r>
+              <a:rPr sz="2100" b="0">
+                <a:solidFill>
+                  <a:srgbClr val="172F43"/>
+                </a:solidFill>
+                <a:latin typeface="Calibri"/>
+                <a:ea typeface="Calibri"/>
+                <a:cs typeface="Calibri"/>
+              </a:rPr>
+              <a:t> dubbelt så stor om L är oförändrad.</a:t>
             </a:r>
           </a:p>
         </p:txBody>
@@ -18336,7 +18981,29 @@
                 <a:ea typeface="Calibri"/>
                 <a:cs typeface="Calibri"/>
               </a:rPr>
-              <a:t>XL = 2πfL</a:t>
+              <a:t>X</a:t>
+            </a:r>
+            <a:r>
+              <a:rPr sz="2250" b="1" baseline="-25000">
+                <a:solidFill>
+                  <a:srgbClr val="064F91"/>
+                </a:solidFill>
+                <a:latin typeface="Calibri"/>
+                <a:ea typeface="Calibri"/>
+                <a:cs typeface="Calibri"/>
+              </a:rPr>
+              <a:t>L</a:t>
+            </a:r>
+            <a:r>
+              <a:rPr sz="2250" b="1">
+                <a:solidFill>
+                  <a:srgbClr val="064F91"/>
+                </a:solidFill>
+                <a:latin typeface="Calibri"/>
+                <a:ea typeface="Calibri"/>
+                <a:cs typeface="Calibri"/>
+              </a:rPr>
+              <a:t> = 2πfL</a:t>
             </a:r>
           </a:p>
         </p:txBody>
@@ -18919,7 +19586,29 @@
                 <a:ea typeface="Calibri"/>
                 <a:cs typeface="Calibri"/>
               </a:rPr>
-              <a:t>XL ≈ 30 Ω</a:t>
+              <a:t>X</a:t>
+            </a:r>
+            <a:r>
+              <a:rPr sz="1650" b="1" baseline="-25000">
+                <a:solidFill>
+                  <a:srgbClr val="AD5018"/>
+                </a:solidFill>
+                <a:latin typeface="Calibri"/>
+                <a:ea typeface="Calibri"/>
+                <a:cs typeface="Calibri"/>
+              </a:rPr>
+              <a:t>L</a:t>
+            </a:r>
+            <a:r>
+              <a:rPr sz="1650" b="1">
+                <a:solidFill>
+                  <a:srgbClr val="AD5018"/>
+                </a:solidFill>
+                <a:latin typeface="Calibri"/>
+                <a:ea typeface="Calibri"/>
+                <a:cs typeface="Calibri"/>
+              </a:rPr>
+              <a:t> ≈ 30 Ω</a:t>
             </a:r>
           </a:p>
         </p:txBody>
@@ -19033,12 +19722,29 @@
                 <a:ea typeface="Calibri"/>
                 <a:cs typeface="Calibri"/>
               </a:rPr>
-              <a:t>R = 40 Ω och XL ≈ 30 Ω är vinkelräta delar i impedansdiagrammet.</a:t>
-            </a:r>
-          </a:p>
-          <a:p xmlns:a="http://schemas.openxmlformats.org/drawingml/2006/main">
-            <a:r>
-              <a:t/>
+              <a:t>Impedansen Z är kretsens totala motstånd mot växelström. R = 40 Ω och X</a:t>
+            </a:r>
+            <a:r>
+              <a:rPr sz="1650" b="0" baseline="-25000">
+                <a:solidFill>
+                  <a:srgbClr val="172F43"/>
+                </a:solidFill>
+                <a:latin typeface="Calibri"/>
+                <a:ea typeface="Calibri"/>
+                <a:cs typeface="Calibri"/>
+              </a:rPr>
+              <a:t>L</a:t>
+            </a:r>
+            <a:r>
+              <a:rPr sz="1650" b="0">
+                <a:solidFill>
+                  <a:srgbClr val="172F43"/>
+                </a:solidFill>
+                <a:latin typeface="Calibri"/>
+                <a:ea typeface="Calibri"/>
+                <a:cs typeface="Calibri"/>
+              </a:rPr>
+              <a:t> ≈ 30 Ω är vinkelräta delar i impedansdiagrammet.</a:t>
             </a:r>
           </a:p>
           <a:p xmlns:a="http://schemas.openxmlformats.org/drawingml/2006/main">
@@ -19052,6 +19758,18 @@
                 <a:cs typeface="Calibri"/>
               </a:defRPr>
             </a:pPr>
+          </a:p>
+          <a:p xmlns:a="http://schemas.openxmlformats.org/drawingml/2006/main">
+            <a:pPr>
+              <a:defRPr sz="1650" b="0">
+                <a:solidFill>
+                  <a:srgbClr val="172F43"/>
+                </a:solidFill>
+                <a:latin typeface="Calibri"/>
+                <a:ea typeface="Calibri"/>
+                <a:cs typeface="Calibri"/>
+              </a:defRPr>
+            </a:pPr>
             <a:r>
               <a:rPr sz="1650" b="0">
                 <a:solidFill>
@@ -19065,11 +19783,6 @@
             </a:r>
           </a:p>
           <a:p xmlns:a="http://schemas.openxmlformats.org/drawingml/2006/main">
-            <a:r>
-              <a:t/>
-            </a:r>
-          </a:p>
-          <a:p xmlns:a="http://schemas.openxmlformats.org/drawingml/2006/main">
             <a:pPr>
               <a:defRPr sz="1650" b="0">
                 <a:solidFill>
@@ -19080,6 +19793,18 @@
                 <a:cs typeface="Calibri"/>
               </a:defRPr>
             </a:pPr>
+          </a:p>
+          <a:p xmlns:a="http://schemas.openxmlformats.org/drawingml/2006/main">
+            <a:pPr>
+              <a:defRPr sz="1650" b="0">
+                <a:solidFill>
+                  <a:srgbClr val="172F43"/>
+                </a:solidFill>
+                <a:latin typeface="Calibri"/>
+                <a:ea typeface="Calibri"/>
+                <a:cs typeface="Calibri"/>
+              </a:defRPr>
+            </a:pPr>
             <a:r>
               <a:rPr sz="1650" b="0">
                 <a:solidFill>
@@ -19089,7 +19814,7 @@
                 <a:ea typeface="Calibri"/>
                 <a:cs typeface="Calibri"/>
               </a:rPr>
-              <a:t>Beloppen 40 och 30 ska inte adderas direkt. Diagonalen ger impedansens belopp.</a:t>
+              <a:t>Beloppen 40 och 30 ska inte adderas direkt. Diagonalen ger impedansens belopp |Z|; strecken betyder belopp (storlek).</a:t>
             </a:r>
           </a:p>
         </p:txBody>
@@ -19146,7 +19871,29 @@
                 <a:ea typeface="Calibri"/>
                 <a:cs typeface="Calibri"/>
               </a:rPr>
-              <a:t>|Z| = √(R² + XL²)</a:t>
+              <a:t>|Z| = √(R² + X</a:t>
+            </a:r>
+            <a:r>
+              <a:rPr sz="1725" b="1" baseline="-25000">
+                <a:solidFill>
+                  <a:srgbClr val="064F91"/>
+                </a:solidFill>
+                <a:latin typeface="Calibri"/>
+                <a:ea typeface="Calibri"/>
+                <a:cs typeface="Calibri"/>
+              </a:rPr>
+              <a:t>L</a:t>
+            </a:r>
+            <a:r>
+              <a:rPr sz="1725" b="1">
+                <a:solidFill>
+                  <a:srgbClr val="064F91"/>
+                </a:solidFill>
+                <a:latin typeface="Calibri"/>
+                <a:ea typeface="Calibri"/>
+                <a:cs typeface="Calibri"/>
+              </a:rPr>
+              <a:t>²)</a:t>
             </a:r>
           </a:p>
         </p:txBody>
@@ -19823,12 +20570,29 @@
                 <a:ea typeface="Calibri"/>
                 <a:cs typeface="Calibri"/>
               </a:rPr>
-              <a:t>En annan RL-krets har R = 12 Ω, XL = 16 Ω och U = 60 V RMS.</a:t>
-            </a:r>
-          </a:p>
-          <a:p xmlns:a="http://schemas.openxmlformats.org/drawingml/2006/main">
-            <a:r>
-              <a:t/>
+              <a:t>En annan RL-krets har R = 12 Ω, X</a:t>
+            </a:r>
+            <a:r>
+              <a:rPr sz="2100" b="0" baseline="-25000">
+                <a:solidFill>
+                  <a:srgbClr val="172F43"/>
+                </a:solidFill>
+                <a:latin typeface="Calibri"/>
+                <a:ea typeface="Calibri"/>
+                <a:cs typeface="Calibri"/>
+              </a:rPr>
+              <a:t>L</a:t>
+            </a:r>
+            <a:r>
+              <a:rPr sz="2100" b="0">
+                <a:solidFill>
+                  <a:srgbClr val="172F43"/>
+                </a:solidFill>
+                <a:latin typeface="Calibri"/>
+                <a:ea typeface="Calibri"/>
+                <a:cs typeface="Calibri"/>
+              </a:rPr>
+              <a:t> = 16 Ω och U = 60 V RMS.</a:t>
             </a:r>
           </a:p>
           <a:p xmlns:a="http://schemas.openxmlformats.org/drawingml/2006/main">
@@ -19842,6 +20606,18 @@
                 <a:cs typeface="Calibri"/>
               </a:defRPr>
             </a:pPr>
+          </a:p>
+          <a:p xmlns:a="http://schemas.openxmlformats.org/drawingml/2006/main">
+            <a:pPr>
+              <a:defRPr sz="2100" b="0">
+                <a:solidFill>
+                  <a:srgbClr val="172F43"/>
+                </a:solidFill>
+                <a:latin typeface="Calibri"/>
+                <a:ea typeface="Calibri"/>
+                <a:cs typeface="Calibri"/>
+              </a:defRPr>
+            </a:pPr>
             <a:r>
               <a:rPr sz="2100" b="0">
                 <a:solidFill>
@@ -19855,11 +20631,6 @@
             </a:r>
           </a:p>
           <a:p xmlns:a="http://schemas.openxmlformats.org/drawingml/2006/main">
-            <a:r>
-              <a:t/>
-            </a:r>
-          </a:p>
-          <a:p xmlns:a="http://schemas.openxmlformats.org/drawingml/2006/main">
             <a:pPr>
               <a:defRPr sz="2100" b="0">
                 <a:solidFill>
@@ -19870,6 +20641,18 @@
                 <a:cs typeface="Calibri"/>
               </a:defRPr>
             </a:pPr>
+          </a:p>
+          <a:p xmlns:a="http://schemas.openxmlformats.org/drawingml/2006/main">
+            <a:pPr>
+              <a:defRPr sz="2100" b="0">
+                <a:solidFill>
+                  <a:srgbClr val="172F43"/>
+                </a:solidFill>
+                <a:latin typeface="Calibri"/>
+                <a:ea typeface="Calibri"/>
+                <a:cs typeface="Calibri"/>
+              </a:defRPr>
+            </a:pPr>
             <a:r>
               <a:rPr sz="2100" b="0">
                 <a:solidFill>
@@ -19883,11 +20666,6 @@
             </a:r>
           </a:p>
           <a:p xmlns:a="http://schemas.openxmlformats.org/drawingml/2006/main">
-            <a:r>
-              <a:t/>
-            </a:r>
-          </a:p>
-          <a:p xmlns:a="http://schemas.openxmlformats.org/drawingml/2006/main">
             <a:pPr>
               <a:defRPr sz="2100" b="0">
                 <a:solidFill>
@@ -19898,6 +20676,18 @@
                 <a:cs typeface="Calibri"/>
               </a:defRPr>
             </a:pPr>
+          </a:p>
+          <a:p xmlns:a="http://schemas.openxmlformats.org/drawingml/2006/main">
+            <a:pPr>
+              <a:defRPr sz="2100" b="0">
+                <a:solidFill>
+                  <a:srgbClr val="172F43"/>
+                </a:solidFill>
+                <a:latin typeface="Calibri"/>
+                <a:ea typeface="Calibri"/>
+                <a:cs typeface="Calibri"/>
+              </a:defRPr>
+            </a:pPr>
             <a:r>
               <a:rPr sz="2100" b="0">
                 <a:solidFill>
@@ -19907,7 +20697,73 @@
                 <a:ea typeface="Calibri"/>
                 <a:cs typeface="Calibri"/>
               </a:rPr>
-              <a:t>UR = IR = 36 V och UL = IXL = 48 V. Källan är √(36² + 48²) = 60 V.</a:t>
+              <a:t>Spänningen över resistorn: U</a:t>
+            </a:r>
+            <a:r>
+              <a:rPr sz="2100" b="0" baseline="-25000">
+                <a:solidFill>
+                  <a:srgbClr val="172F43"/>
+                </a:solidFill>
+                <a:latin typeface="Calibri"/>
+                <a:ea typeface="Calibri"/>
+                <a:cs typeface="Calibri"/>
+              </a:rPr>
+              <a:t>R</a:t>
+            </a:r>
+            <a:r>
+              <a:rPr sz="2100" b="0">
+                <a:solidFill>
+                  <a:srgbClr val="172F43"/>
+                </a:solidFill>
+                <a:latin typeface="Calibri"/>
+                <a:ea typeface="Calibri"/>
+                <a:cs typeface="Calibri"/>
+              </a:rPr>
+              <a:t> = I · R = 3 · 12 = 36 V. Spänningen över spolen: U</a:t>
+            </a:r>
+            <a:r>
+              <a:rPr sz="2100" b="0" baseline="-25000">
+                <a:solidFill>
+                  <a:srgbClr val="172F43"/>
+                </a:solidFill>
+                <a:latin typeface="Calibri"/>
+                <a:ea typeface="Calibri"/>
+                <a:cs typeface="Calibri"/>
+              </a:rPr>
+              <a:t>L</a:t>
+            </a:r>
+            <a:r>
+              <a:rPr sz="2100" b="0">
+                <a:solidFill>
+                  <a:srgbClr val="172F43"/>
+                </a:solidFill>
+                <a:latin typeface="Calibri"/>
+                <a:ea typeface="Calibri"/>
+                <a:cs typeface="Calibri"/>
+              </a:rPr>
+              <a:t> = I · X</a:t>
+            </a:r>
+            <a:r>
+              <a:rPr sz="2100" b="0" baseline="-25000">
+                <a:solidFill>
+                  <a:srgbClr val="172F43"/>
+                </a:solidFill>
+                <a:latin typeface="Calibri"/>
+                <a:ea typeface="Calibri"/>
+                <a:cs typeface="Calibri"/>
+              </a:rPr>
+              <a:t>L</a:t>
+            </a:r>
+            <a:r>
+              <a:rPr sz="2100" b="0">
+                <a:solidFill>
+                  <a:srgbClr val="172F43"/>
+                </a:solidFill>
+                <a:latin typeface="Calibri"/>
+                <a:ea typeface="Calibri"/>
+                <a:cs typeface="Calibri"/>
+              </a:rPr>
+              <a:t> = 3 · 16 = 48 V. De adderas vinkelrätt: √(36² + 48²) = 60 V, källans spänning.</a:t>
             </a:r>
           </a:p>
         </p:txBody>
@@ -20181,12 +21037,29 @@
                 <a:ea typeface="Calibri"/>
                 <a:cs typeface="Calibri"/>
               </a:rPr>
-              <a:t>Förutsäg XL. Läs av och kontrollera enheten Ω.</a:t>
-            </a:r>
-          </a:p>
-          <a:p xmlns:a="http://schemas.openxmlformats.org/drawingml/2006/main">
-            <a:r>
-              <a:t/>
+              <a:t>Förutsäg X</a:t>
+            </a:r>
+            <a:r>
+              <a:rPr sz="2100" b="0" baseline="-25000">
+                <a:solidFill>
+                  <a:srgbClr val="172F43"/>
+                </a:solidFill>
+                <a:latin typeface="Calibri"/>
+                <a:ea typeface="Calibri"/>
+                <a:cs typeface="Calibri"/>
+              </a:rPr>
+              <a:t>L</a:t>
+            </a:r>
+            <a:r>
+              <a:rPr sz="2100" b="0">
+                <a:solidFill>
+                  <a:srgbClr val="172F43"/>
+                </a:solidFill>
+                <a:latin typeface="Calibri"/>
+                <a:ea typeface="Calibri"/>
+                <a:cs typeface="Calibri"/>
+              </a:rPr>
+              <a:t>. Läs av och kontrollera enheten Ω.</a:t>
             </a:r>
           </a:p>
           <a:p xmlns:a="http://schemas.openxmlformats.org/drawingml/2006/main">
@@ -20200,22 +21073,6 @@
                 <a:cs typeface="Calibri"/>
               </a:defRPr>
             </a:pPr>
-            <a:r>
-              <a:rPr sz="2100" b="0">
-                <a:solidFill>
-                  <a:srgbClr val="172F43"/>
-                </a:solidFill>
-                <a:latin typeface="Calibri"/>
-                <a:ea typeface="Calibri"/>
-                <a:cs typeface="Calibri"/>
-              </a:rPr>
-              <a:t>Använd R och XL för att beräkna |Z|.</a:t>
-            </a:r>
-          </a:p>
-          <a:p xmlns:a="http://schemas.openxmlformats.org/drawingml/2006/main">
-            <a:r>
-              <a:t/>
-            </a:r>
           </a:p>
           <a:p xmlns:a="http://schemas.openxmlformats.org/drawingml/2006/main">
             <a:pPr>
@@ -20237,13 +21094,77 @@
                 <a:ea typeface="Calibri"/>
                 <a:cs typeface="Calibri"/>
               </a:rPr>
+              <a:t>Använd R och X</a:t>
+            </a:r>
+            <a:r>
+              <a:rPr sz="2100" b="0" baseline="-25000">
+                <a:solidFill>
+                  <a:srgbClr val="172F43"/>
+                </a:solidFill>
+                <a:latin typeface="Calibri"/>
+                <a:ea typeface="Calibri"/>
+                <a:cs typeface="Calibri"/>
+              </a:rPr>
+              <a:t>L</a:t>
+            </a:r>
+            <a:r>
+              <a:rPr sz="2100" b="0">
+                <a:solidFill>
+                  <a:srgbClr val="172F43"/>
+                </a:solidFill>
+                <a:latin typeface="Calibri"/>
+                <a:ea typeface="Calibri"/>
+                <a:cs typeface="Calibri"/>
+              </a:rPr>
+              <a:t> för att beräkna |Z|.</a:t>
+            </a:r>
+          </a:p>
+          <a:p xmlns:a="http://schemas.openxmlformats.org/drawingml/2006/main">
+            <a:pPr>
+              <a:defRPr sz="2100" b="0">
+                <a:solidFill>
+                  <a:srgbClr val="172F43"/>
+                </a:solidFill>
+                <a:latin typeface="Calibri"/>
+                <a:ea typeface="Calibri"/>
+                <a:cs typeface="Calibri"/>
+              </a:defRPr>
+            </a:pPr>
+          </a:p>
+          <a:p xmlns:a="http://schemas.openxmlformats.org/drawingml/2006/main">
+            <a:pPr>
+              <a:defRPr sz="2100" b="0">
+                <a:solidFill>
+                  <a:srgbClr val="172F43"/>
+                </a:solidFill>
+                <a:latin typeface="Calibri"/>
+                <a:ea typeface="Calibri"/>
+                <a:cs typeface="Calibri"/>
+              </a:defRPr>
+            </a:pPr>
+            <a:r>
+              <a:rPr sz="2100" b="0">
+                <a:solidFill>
+                  <a:srgbClr val="172F43"/>
+                </a:solidFill>
+                <a:latin typeface="Calibri"/>
+                <a:ea typeface="Calibri"/>
+                <a:cs typeface="Calibri"/>
+              </a:rPr>
               <a:t>Beräkna strömmen och jämför med kretsen som bara innehåller R.</a:t>
             </a:r>
           </a:p>
           <a:p xmlns:a="http://schemas.openxmlformats.org/drawingml/2006/main">
-            <a:r>
-              <a:t/>
-            </a:r>
+            <a:pPr>
+              <a:defRPr sz="2100" b="0">
+                <a:solidFill>
+                  <a:srgbClr val="172F43"/>
+                </a:solidFill>
+                <a:latin typeface="Calibri"/>
+                <a:ea typeface="Calibri"/>
+                <a:cs typeface="Calibri"/>
+              </a:defRPr>
+            </a:pPr>
           </a:p>
           <a:p xmlns:a="http://schemas.openxmlformats.org/drawingml/2006/main">
             <a:pPr>

--- a/sjoskolan/vecka-40/aktuell/v40_02_Reaktans_och_impedans_elev.pptx
+++ b/sjoskolan/vecka-40/aktuell/v40_02_Reaktans_och_impedans_elev.pptx
@@ -994,7 +994,7 @@
           <a:lstStyle xmlns:a="http://schemas.openxmlformats.org/drawingml/2006/main"/>
           <a:p xmlns:a="http://schemas.openxmlformats.org/drawingml/2006/main">
             <a:r>
-              <a:t>Härledd ur 2πfL = 1/(2πfC). Vid R = 20 Ω och U = 100 V blir I = 5 A och φ = 0°. Verkliga komponenter har förluster och begränsningar.</a:t>
+              <a:t>Härledd ur 2πfL = 1/(2πfC). Vid R = 25 Ω och U = 100 V blir I = 4 A och φ = 0°. Verkliga komponenter har förluster och begränsningar.</a:t>
             </a:r>
           </a:p>
           <a:p xmlns:a="http://schemas.openxmlformats.org/drawingml/2006/main">
@@ -1639,7 +1639,16 @@
           <a:lstStyle xmlns:a="http://schemas.openxmlformats.org/drawingml/2006/main"/>
           <a:p xmlns:a="http://schemas.openxmlformats.org/drawingml/2006/main">
             <a:r>
-              <a:t>Modellen använder XL = 30,0022 Ω, varför fler decimaler ger I ≈ 0,239994 A. Två decimaler är 0,24 A.</a:t>
+              <a:rPr/>
+              <a:t>Med X</a:t>
+            </a:r>
+            <a:r>
+              <a:rPr baseline="-25000"/>
+              <a:t>L</a:t>
+            </a:r>
+            <a:r>
+              <a:rPr/>
+              <a:t> = 2π · 50 · 0,382 = 120,0 Ω blir I ≈ 1,769 A. Två decimaler är 1,77 A. Labbens krets räknas på samma sätt med andra värden.</a:t>
             </a:r>
           </a:p>
           <a:p xmlns:a="http://schemas.openxmlformats.org/drawingml/2006/main">
@@ -7469,7 +7478,15 @@
           <c:idx val="0"/>
           <c:order val="0"/>
           <c:tx>
-            <c:v>Spänning u (normaliserad)</c:v>
+            <c:strRef>
+              <c:f>Sheet1!$B$1</c:f>
+              <c:strCache>
+                <c:ptCount val="1"/>
+                <c:pt idx="0">
+                  <c:v>u</c:v>
+                </c:pt>
+              </c:strCache>
+            </c:strRef>
           </c:tx>
           <c:spPr>
             <a:ln xmlns:a="http://schemas.openxmlformats.org/drawingml/2006/main" w="23813">
@@ -7483,12 +7500,12 @@
           </c:marker>
           <c:xVal>
             <c:numRef>
-              <c:f>'Chart Data'!$A$2:$A$162</c:f>
+              <c:f>Sheet1!$A$2:$A$162</c:f>
               <c:numCache>
                 <c:formatCode>General</c:formatCode>
                 <c:ptCount val="161"/>
                 <c:pt idx="0">
-                  <c:v>0</c:v>
+                  <c:v>0.0</c:v>
                 </c:pt>
                 <c:pt idx="1">
                   <c:v>0.25</c:v>
@@ -7500,7 +7517,7 @@
                   <c:v>0.75</c:v>
                 </c:pt>
                 <c:pt idx="4">
-                  <c:v>1</c:v>
+                  <c:v>1.0</c:v>
                 </c:pt>
                 <c:pt idx="5">
                   <c:v>1.25</c:v>
@@ -7512,7 +7529,7 @@
                   <c:v>1.75</c:v>
                 </c:pt>
                 <c:pt idx="8">
-                  <c:v>2</c:v>
+                  <c:v>2.0</c:v>
                 </c:pt>
                 <c:pt idx="9">
                   <c:v>2.25</c:v>
@@ -7524,7 +7541,7 @@
                   <c:v>2.75</c:v>
                 </c:pt>
                 <c:pt idx="12">
-                  <c:v>3</c:v>
+                  <c:v>3.0</c:v>
                 </c:pt>
                 <c:pt idx="13">
                   <c:v>3.25</c:v>
@@ -7536,7 +7553,7 @@
                   <c:v>3.75</c:v>
                 </c:pt>
                 <c:pt idx="16">
-                  <c:v>4</c:v>
+                  <c:v>4.0</c:v>
                 </c:pt>
                 <c:pt idx="17">
                   <c:v>4.25</c:v>
@@ -7548,7 +7565,7 @@
                   <c:v>4.75</c:v>
                 </c:pt>
                 <c:pt idx="20">
-                  <c:v>5</c:v>
+                  <c:v>5.0</c:v>
                 </c:pt>
                 <c:pt idx="21">
                   <c:v>5.25</c:v>
@@ -7560,7 +7577,7 @@
                   <c:v>5.75</c:v>
                 </c:pt>
                 <c:pt idx="24">
-                  <c:v>6</c:v>
+                  <c:v>6.0</c:v>
                 </c:pt>
                 <c:pt idx="25">
                   <c:v>6.25</c:v>
@@ -7572,7 +7589,7 @@
                   <c:v>6.75</c:v>
                 </c:pt>
                 <c:pt idx="28">
-                  <c:v>7</c:v>
+                  <c:v>7.0</c:v>
                 </c:pt>
                 <c:pt idx="29">
                   <c:v>7.25</c:v>
@@ -7584,7 +7601,7 @@
                   <c:v>7.75</c:v>
                 </c:pt>
                 <c:pt idx="32">
-                  <c:v>8</c:v>
+                  <c:v>8.0</c:v>
                 </c:pt>
                 <c:pt idx="33">
                   <c:v>8.25</c:v>
@@ -7596,7 +7613,7 @@
                   <c:v>8.75</c:v>
                 </c:pt>
                 <c:pt idx="36">
-                  <c:v>9</c:v>
+                  <c:v>9.0</c:v>
                 </c:pt>
                 <c:pt idx="37">
                   <c:v>9.25</c:v>
@@ -7608,7 +7625,7 @@
                   <c:v>9.75</c:v>
                 </c:pt>
                 <c:pt idx="40">
-                  <c:v>10</c:v>
+                  <c:v>10.0</c:v>
                 </c:pt>
                 <c:pt idx="41">
                   <c:v>10.25</c:v>
@@ -7620,7 +7637,7 @@
                   <c:v>10.75</c:v>
                 </c:pt>
                 <c:pt idx="44">
-                  <c:v>11</c:v>
+                  <c:v>11.0</c:v>
                 </c:pt>
                 <c:pt idx="45">
                   <c:v>11.25</c:v>
@@ -7632,7 +7649,7 @@
                   <c:v>11.75</c:v>
                 </c:pt>
                 <c:pt idx="48">
-                  <c:v>12</c:v>
+                  <c:v>12.0</c:v>
                 </c:pt>
                 <c:pt idx="49">
                   <c:v>12.25</c:v>
@@ -7644,7 +7661,7 @@
                   <c:v>12.75</c:v>
                 </c:pt>
                 <c:pt idx="52">
-                  <c:v>13</c:v>
+                  <c:v>13.0</c:v>
                 </c:pt>
                 <c:pt idx="53">
                   <c:v>13.25</c:v>
@@ -7656,7 +7673,7 @@
                   <c:v>13.75</c:v>
                 </c:pt>
                 <c:pt idx="56">
-                  <c:v>14</c:v>
+                  <c:v>14.0</c:v>
                 </c:pt>
                 <c:pt idx="57">
                   <c:v>14.25</c:v>
@@ -7668,7 +7685,7 @@
                   <c:v>14.75</c:v>
                 </c:pt>
                 <c:pt idx="60">
-                  <c:v>15</c:v>
+                  <c:v>15.0</c:v>
                 </c:pt>
                 <c:pt idx="61">
                   <c:v>15.25</c:v>
@@ -7680,7 +7697,7 @@
                   <c:v>15.75</c:v>
                 </c:pt>
                 <c:pt idx="64">
-                  <c:v>16</c:v>
+                  <c:v>16.0</c:v>
                 </c:pt>
                 <c:pt idx="65">
                   <c:v>16.25</c:v>
@@ -7692,7 +7709,7 @@
                   <c:v>16.75</c:v>
                 </c:pt>
                 <c:pt idx="68">
-                  <c:v>17</c:v>
+                  <c:v>17.0</c:v>
                 </c:pt>
                 <c:pt idx="69">
                   <c:v>17.25</c:v>
@@ -7704,7 +7721,7 @@
                   <c:v>17.75</c:v>
                 </c:pt>
                 <c:pt idx="72">
-                  <c:v>18</c:v>
+                  <c:v>18.0</c:v>
                 </c:pt>
                 <c:pt idx="73">
                   <c:v>18.25</c:v>
@@ -7716,7 +7733,7 @@
                   <c:v>18.75</c:v>
                 </c:pt>
                 <c:pt idx="76">
-                  <c:v>19</c:v>
+                  <c:v>19.0</c:v>
                 </c:pt>
                 <c:pt idx="77">
                   <c:v>19.25</c:v>
@@ -7728,7 +7745,7 @@
                   <c:v>19.75</c:v>
                 </c:pt>
                 <c:pt idx="80">
-                  <c:v>20</c:v>
+                  <c:v>20.0</c:v>
                 </c:pt>
                 <c:pt idx="81">
                   <c:v>20.25</c:v>
@@ -7740,7 +7757,7 @@
                   <c:v>20.75</c:v>
                 </c:pt>
                 <c:pt idx="84">
-                  <c:v>21</c:v>
+                  <c:v>21.0</c:v>
                 </c:pt>
                 <c:pt idx="85">
                   <c:v>21.25</c:v>
@@ -7752,7 +7769,7 @@
                   <c:v>21.75</c:v>
                 </c:pt>
                 <c:pt idx="88">
-                  <c:v>22</c:v>
+                  <c:v>22.0</c:v>
                 </c:pt>
                 <c:pt idx="89">
                   <c:v>22.25</c:v>
@@ -7764,7 +7781,7 @@
                   <c:v>22.75</c:v>
                 </c:pt>
                 <c:pt idx="92">
-                  <c:v>23</c:v>
+                  <c:v>23.0</c:v>
                 </c:pt>
                 <c:pt idx="93">
                   <c:v>23.25</c:v>
@@ -7776,7 +7793,7 @@
                   <c:v>23.75</c:v>
                 </c:pt>
                 <c:pt idx="96">
-                  <c:v>24</c:v>
+                  <c:v>24.0</c:v>
                 </c:pt>
                 <c:pt idx="97">
                   <c:v>24.25</c:v>
@@ -7788,7 +7805,7 @@
                   <c:v>24.75</c:v>
                 </c:pt>
                 <c:pt idx="100">
-                  <c:v>25</c:v>
+                  <c:v>25.0</c:v>
                 </c:pt>
                 <c:pt idx="101">
                   <c:v>25.25</c:v>
@@ -7800,7 +7817,7 @@
                   <c:v>25.75</c:v>
                 </c:pt>
                 <c:pt idx="104">
-                  <c:v>26</c:v>
+                  <c:v>26.0</c:v>
                 </c:pt>
                 <c:pt idx="105">
                   <c:v>26.25</c:v>
@@ -7812,7 +7829,7 @@
                   <c:v>26.75</c:v>
                 </c:pt>
                 <c:pt idx="108">
-                  <c:v>27</c:v>
+                  <c:v>27.0</c:v>
                 </c:pt>
                 <c:pt idx="109">
                   <c:v>27.25</c:v>
@@ -7824,7 +7841,7 @@
                   <c:v>27.75</c:v>
                 </c:pt>
                 <c:pt idx="112">
-                  <c:v>28</c:v>
+                  <c:v>28.0</c:v>
                 </c:pt>
                 <c:pt idx="113">
                   <c:v>28.25</c:v>
@@ -7836,7 +7853,7 @@
                   <c:v>28.75</c:v>
                 </c:pt>
                 <c:pt idx="116">
-                  <c:v>29</c:v>
+                  <c:v>29.0</c:v>
                 </c:pt>
                 <c:pt idx="117">
                   <c:v>29.25</c:v>
@@ -7848,7 +7865,7 @@
                   <c:v>29.75</c:v>
                 </c:pt>
                 <c:pt idx="120">
-                  <c:v>30</c:v>
+                  <c:v>30.0</c:v>
                 </c:pt>
                 <c:pt idx="121">
                   <c:v>30.25</c:v>
@@ -7860,7 +7877,7 @@
                   <c:v>30.75</c:v>
                 </c:pt>
                 <c:pt idx="124">
-                  <c:v>31</c:v>
+                  <c:v>31.0</c:v>
                 </c:pt>
                 <c:pt idx="125">
                   <c:v>31.25</c:v>
@@ -7872,7 +7889,7 @@
                   <c:v>31.75</c:v>
                 </c:pt>
                 <c:pt idx="128">
-                  <c:v>32</c:v>
+                  <c:v>32.0</c:v>
                 </c:pt>
                 <c:pt idx="129">
                   <c:v>32.25</c:v>
@@ -7884,7 +7901,7 @@
                   <c:v>32.75</c:v>
                 </c:pt>
                 <c:pt idx="132">
-                  <c:v>33</c:v>
+                  <c:v>33.0</c:v>
                 </c:pt>
                 <c:pt idx="133">
                   <c:v>33.25</c:v>
@@ -7896,7 +7913,7 @@
                   <c:v>33.75</c:v>
                 </c:pt>
                 <c:pt idx="136">
-                  <c:v>34</c:v>
+                  <c:v>34.0</c:v>
                 </c:pt>
                 <c:pt idx="137">
                   <c:v>34.25</c:v>
@@ -7908,7 +7925,7 @@
                   <c:v>34.75</c:v>
                 </c:pt>
                 <c:pt idx="140">
-                  <c:v>35</c:v>
+                  <c:v>35.0</c:v>
                 </c:pt>
                 <c:pt idx="141">
                   <c:v>35.25</c:v>
@@ -7920,7 +7937,7 @@
                   <c:v>35.75</c:v>
                 </c:pt>
                 <c:pt idx="144">
-                  <c:v>36</c:v>
+                  <c:v>36.0</c:v>
                 </c:pt>
                 <c:pt idx="145">
                   <c:v>36.25</c:v>
@@ -7932,7 +7949,7 @@
                   <c:v>36.75</c:v>
                 </c:pt>
                 <c:pt idx="148">
-                  <c:v>37</c:v>
+                  <c:v>37.0</c:v>
                 </c:pt>
                 <c:pt idx="149">
                   <c:v>37.25</c:v>
@@ -7944,7 +7961,7 @@
                   <c:v>37.75</c:v>
                 </c:pt>
                 <c:pt idx="152">
-                  <c:v>38</c:v>
+                  <c:v>38.0</c:v>
                 </c:pt>
                 <c:pt idx="153">
                   <c:v>38.25</c:v>
@@ -7956,7 +7973,7 @@
                   <c:v>38.75</c:v>
                 </c:pt>
                 <c:pt idx="156">
-                  <c:v>39</c:v>
+                  <c:v>39.0</c:v>
                 </c:pt>
                 <c:pt idx="157">
                   <c:v>39.25</c:v>
@@ -7968,499 +7985,499 @@
                   <c:v>39.75</c:v>
                 </c:pt>
                 <c:pt idx="160">
-                  <c:v>40</c:v>
+                  <c:v>40.0</c:v>
                 </c:pt>
               </c:numCache>
             </c:numRef>
           </c:xVal>
           <c:yVal>
             <c:numRef>
-              <c:f>'Chart Data'!$B$2:$B$162</c:f>
+              <c:f>Sheet1!$B$2:$B$162</c:f>
               <c:numCache>
                 <c:formatCode>General</c:formatCode>
                 <c:ptCount val="161"/>
                 <c:pt idx="0">
-                  <c:v>0</c:v>
+                  <c:v>0.0</c:v>
                 </c:pt>
                 <c:pt idx="1">
-                  <c:v>0.0784591</c:v>
+                  <c:v>0.0785</c:v>
                 </c:pt>
                 <c:pt idx="2">
-                  <c:v>0.15643447</c:v>
+                  <c:v>0.1564</c:v>
                 </c:pt>
                 <c:pt idx="3">
-                  <c:v>0.23344536</c:v>
+                  <c:v>0.2334</c:v>
                 </c:pt>
                 <c:pt idx="4">
-                  <c:v>0.30901699</c:v>
+                  <c:v>0.309</c:v>
                 </c:pt>
                 <c:pt idx="5">
-                  <c:v>0.38268343</c:v>
+                  <c:v>0.3827</c:v>
                 </c:pt>
                 <c:pt idx="6">
-                  <c:v>0.4539905</c:v>
+                  <c:v>0.454</c:v>
                 </c:pt>
                 <c:pt idx="7">
-                  <c:v>0.52249856</c:v>
+                  <c:v>0.5225</c:v>
                 </c:pt>
                 <c:pt idx="8">
-                  <c:v>0.58778525</c:v>
+                  <c:v>0.5878</c:v>
                 </c:pt>
                 <c:pt idx="9">
-                  <c:v>0.64944805</c:v>
+                  <c:v>0.6494</c:v>
                 </c:pt>
                 <c:pt idx="10">
-                  <c:v>0.70710678</c:v>
+                  <c:v>0.7071</c:v>
                 </c:pt>
                 <c:pt idx="11">
-                  <c:v>0.76040597</c:v>
+                  <c:v>0.7604</c:v>
                 </c:pt>
                 <c:pt idx="12">
-                  <c:v>0.80901699</c:v>
+                  <c:v>0.809</c:v>
                 </c:pt>
                 <c:pt idx="13">
-                  <c:v>0.85264016</c:v>
+                  <c:v>0.8526</c:v>
                 </c:pt>
                 <c:pt idx="14">
-                  <c:v>0.89100652</c:v>
+                  <c:v>0.891</c:v>
                 </c:pt>
                 <c:pt idx="15">
-                  <c:v>0.92387953</c:v>
+                  <c:v>0.9239</c:v>
                 </c:pt>
                 <c:pt idx="16">
-                  <c:v>0.95105652</c:v>
+                  <c:v>0.9511</c:v>
                 </c:pt>
                 <c:pt idx="17">
-                  <c:v>0.97236992</c:v>
+                  <c:v>0.9724</c:v>
                 </c:pt>
                 <c:pt idx="18">
-                  <c:v>0.98768834</c:v>
+                  <c:v>0.9877</c:v>
                 </c:pt>
                 <c:pt idx="19">
-                  <c:v>0.99691733</c:v>
+                  <c:v>0.9969</c:v>
                 </c:pt>
                 <c:pt idx="20">
-                  <c:v>1</c:v>
+                  <c:v>1.0</c:v>
                 </c:pt>
                 <c:pt idx="21">
-                  <c:v>0.99691733</c:v>
+                  <c:v>0.9969</c:v>
                 </c:pt>
                 <c:pt idx="22">
-                  <c:v>0.98768834</c:v>
+                  <c:v>0.9877</c:v>
                 </c:pt>
                 <c:pt idx="23">
-                  <c:v>0.97236992</c:v>
+                  <c:v>0.9724</c:v>
                 </c:pt>
                 <c:pt idx="24">
-                  <c:v>0.95105652</c:v>
+                  <c:v>0.9511</c:v>
                 </c:pt>
                 <c:pt idx="25">
-                  <c:v>0.92387953</c:v>
+                  <c:v>0.9239</c:v>
                 </c:pt>
                 <c:pt idx="26">
-                  <c:v>0.89100652</c:v>
+                  <c:v>0.891</c:v>
                 </c:pt>
                 <c:pt idx="27">
-                  <c:v>0.85264016</c:v>
+                  <c:v>0.8526</c:v>
                 </c:pt>
                 <c:pt idx="28">
-                  <c:v>0.80901699</c:v>
+                  <c:v>0.809</c:v>
                 </c:pt>
                 <c:pt idx="29">
-                  <c:v>0.76040597</c:v>
+                  <c:v>0.7604</c:v>
                 </c:pt>
                 <c:pt idx="30">
-                  <c:v>0.70710678</c:v>
+                  <c:v>0.7071</c:v>
                 </c:pt>
                 <c:pt idx="31">
-                  <c:v>0.64944805</c:v>
+                  <c:v>0.6494</c:v>
                 </c:pt>
                 <c:pt idx="32">
-                  <c:v>0.58778525</c:v>
+                  <c:v>0.5878</c:v>
                 </c:pt>
                 <c:pt idx="33">
-                  <c:v>0.52249856</c:v>
+                  <c:v>0.5225</c:v>
                 </c:pt>
                 <c:pt idx="34">
-                  <c:v>0.4539905</c:v>
+                  <c:v>0.454</c:v>
                 </c:pt>
                 <c:pt idx="35">
-                  <c:v>0.38268343</c:v>
+                  <c:v>0.3827</c:v>
                 </c:pt>
                 <c:pt idx="36">
-                  <c:v>0.30901699</c:v>
+                  <c:v>0.309</c:v>
                 </c:pt>
                 <c:pt idx="37">
-                  <c:v>0.23344536</c:v>
+                  <c:v>0.2334</c:v>
                 </c:pt>
                 <c:pt idx="38">
-                  <c:v>0.15643447</c:v>
+                  <c:v>0.1564</c:v>
                 </c:pt>
                 <c:pt idx="39">
-                  <c:v>0.0784591</c:v>
+                  <c:v>0.0785</c:v>
                 </c:pt>
                 <c:pt idx="40">
-                  <c:v>0</c:v>
+                  <c:v>0.0</c:v>
                 </c:pt>
                 <c:pt idx="41">
-                  <c:v>-0.0784591</c:v>
+                  <c:v>-0.0785</c:v>
                 </c:pt>
                 <c:pt idx="42">
-                  <c:v>-0.15643447</c:v>
+                  <c:v>-0.1564</c:v>
                 </c:pt>
                 <c:pt idx="43">
-                  <c:v>-0.23344536</c:v>
+                  <c:v>-0.2334</c:v>
                 </c:pt>
                 <c:pt idx="44">
-                  <c:v>-0.30901699</c:v>
+                  <c:v>-0.309</c:v>
                 </c:pt>
                 <c:pt idx="45">
-                  <c:v>-0.38268343</c:v>
+                  <c:v>-0.3827</c:v>
                 </c:pt>
                 <c:pt idx="46">
-                  <c:v>-0.4539905</c:v>
+                  <c:v>-0.454</c:v>
                 </c:pt>
                 <c:pt idx="47">
-                  <c:v>-0.52249856</c:v>
+                  <c:v>-0.5225</c:v>
                 </c:pt>
                 <c:pt idx="48">
-                  <c:v>-0.58778525</c:v>
+                  <c:v>-0.5878</c:v>
                 </c:pt>
                 <c:pt idx="49">
-                  <c:v>-0.64944805</c:v>
+                  <c:v>-0.6494</c:v>
                 </c:pt>
                 <c:pt idx="50">
-                  <c:v>-0.70710678</c:v>
+                  <c:v>-0.7071</c:v>
                 </c:pt>
                 <c:pt idx="51">
-                  <c:v>-0.76040597</c:v>
+                  <c:v>-0.7604</c:v>
                 </c:pt>
                 <c:pt idx="52">
-                  <c:v>-0.80901699</c:v>
+                  <c:v>-0.809</c:v>
                 </c:pt>
                 <c:pt idx="53">
-                  <c:v>-0.85264016</c:v>
+                  <c:v>-0.8526</c:v>
                 </c:pt>
                 <c:pt idx="54">
-                  <c:v>-0.89100652</c:v>
+                  <c:v>-0.891</c:v>
                 </c:pt>
                 <c:pt idx="55">
-                  <c:v>-0.92387953</c:v>
+                  <c:v>-0.9239</c:v>
                 </c:pt>
                 <c:pt idx="56">
-                  <c:v>-0.95105652</c:v>
+                  <c:v>-0.9511</c:v>
                 </c:pt>
                 <c:pt idx="57">
-                  <c:v>-0.97236992</c:v>
+                  <c:v>-0.9724</c:v>
                 </c:pt>
                 <c:pt idx="58">
-                  <c:v>-0.98768834</c:v>
+                  <c:v>-0.9877</c:v>
                 </c:pt>
                 <c:pt idx="59">
-                  <c:v>-0.99691733</c:v>
+                  <c:v>-0.9969</c:v>
                 </c:pt>
                 <c:pt idx="60">
-                  <c:v>-1</c:v>
+                  <c:v>-1.0</c:v>
                 </c:pt>
                 <c:pt idx="61">
-                  <c:v>-0.99691733</c:v>
+                  <c:v>-0.9969</c:v>
                 </c:pt>
                 <c:pt idx="62">
-                  <c:v>-0.98768834</c:v>
+                  <c:v>-0.9877</c:v>
                 </c:pt>
                 <c:pt idx="63">
-                  <c:v>-0.97236992</c:v>
+                  <c:v>-0.9724</c:v>
                 </c:pt>
                 <c:pt idx="64">
-                  <c:v>-0.95105652</c:v>
+                  <c:v>-0.9511</c:v>
                 </c:pt>
                 <c:pt idx="65">
-                  <c:v>-0.92387953</c:v>
+                  <c:v>-0.9239</c:v>
                 </c:pt>
                 <c:pt idx="66">
-                  <c:v>-0.89100652</c:v>
+                  <c:v>-0.891</c:v>
                 </c:pt>
                 <c:pt idx="67">
-                  <c:v>-0.85264016</c:v>
+                  <c:v>-0.8526</c:v>
                 </c:pt>
                 <c:pt idx="68">
-                  <c:v>-0.80901699</c:v>
+                  <c:v>-0.809</c:v>
                 </c:pt>
                 <c:pt idx="69">
-                  <c:v>-0.76040597</c:v>
+                  <c:v>-0.7604</c:v>
                 </c:pt>
                 <c:pt idx="70">
-                  <c:v>-0.70710678</c:v>
+                  <c:v>-0.7071</c:v>
                 </c:pt>
                 <c:pt idx="71">
-                  <c:v>-0.64944805</c:v>
+                  <c:v>-0.6494</c:v>
                 </c:pt>
                 <c:pt idx="72">
-                  <c:v>-0.58778525</c:v>
+                  <c:v>-0.5878</c:v>
                 </c:pt>
                 <c:pt idx="73">
-                  <c:v>-0.52249856</c:v>
+                  <c:v>-0.5225</c:v>
                 </c:pt>
                 <c:pt idx="74">
-                  <c:v>-0.4539905</c:v>
+                  <c:v>-0.454</c:v>
                 </c:pt>
                 <c:pt idx="75">
-                  <c:v>-0.38268343</c:v>
+                  <c:v>-0.3827</c:v>
                 </c:pt>
                 <c:pt idx="76">
-                  <c:v>-0.30901699</c:v>
+                  <c:v>-0.309</c:v>
                 </c:pt>
                 <c:pt idx="77">
-                  <c:v>-0.23344536</c:v>
+                  <c:v>-0.2334</c:v>
                 </c:pt>
                 <c:pt idx="78">
-                  <c:v>-0.15643447</c:v>
+                  <c:v>-0.1564</c:v>
                 </c:pt>
                 <c:pt idx="79">
-                  <c:v>-0.0784591</c:v>
+                  <c:v>-0.0785</c:v>
                 </c:pt>
                 <c:pt idx="80">
-                  <c:v>-0</c:v>
+                  <c:v>-0.0</c:v>
                 </c:pt>
                 <c:pt idx="81">
-                  <c:v>0.0784591</c:v>
+                  <c:v>0.0785</c:v>
                 </c:pt>
                 <c:pt idx="82">
-                  <c:v>0.15643447</c:v>
+                  <c:v>0.1564</c:v>
                 </c:pt>
                 <c:pt idx="83">
-                  <c:v>0.23344536</c:v>
+                  <c:v>0.2334</c:v>
                 </c:pt>
                 <c:pt idx="84">
-                  <c:v>0.30901699</c:v>
+                  <c:v>0.309</c:v>
                 </c:pt>
                 <c:pt idx="85">
-                  <c:v>0.38268343</c:v>
+                  <c:v>0.3827</c:v>
                 </c:pt>
                 <c:pt idx="86">
-                  <c:v>0.4539905</c:v>
+                  <c:v>0.454</c:v>
                 </c:pt>
                 <c:pt idx="87">
-                  <c:v>0.52249856</c:v>
+                  <c:v>0.5225</c:v>
                 </c:pt>
                 <c:pt idx="88">
-                  <c:v>0.58778525</c:v>
+                  <c:v>0.5878</c:v>
                 </c:pt>
                 <c:pt idx="89">
-                  <c:v>0.64944805</c:v>
+                  <c:v>0.6494</c:v>
                 </c:pt>
                 <c:pt idx="90">
-                  <c:v>0.70710678</c:v>
+                  <c:v>0.7071</c:v>
                 </c:pt>
                 <c:pt idx="91">
-                  <c:v>0.76040597</c:v>
+                  <c:v>0.7604</c:v>
                 </c:pt>
                 <c:pt idx="92">
-                  <c:v>0.80901699</c:v>
+                  <c:v>0.809</c:v>
                 </c:pt>
                 <c:pt idx="93">
-                  <c:v>0.85264016</c:v>
+                  <c:v>0.8526</c:v>
                 </c:pt>
                 <c:pt idx="94">
-                  <c:v>0.89100652</c:v>
+                  <c:v>0.891</c:v>
                 </c:pt>
                 <c:pt idx="95">
-                  <c:v>0.92387953</c:v>
+                  <c:v>0.9239</c:v>
                 </c:pt>
                 <c:pt idx="96">
-                  <c:v>0.95105652</c:v>
+                  <c:v>0.9511</c:v>
                 </c:pt>
                 <c:pt idx="97">
-                  <c:v>0.97236992</c:v>
+                  <c:v>0.9724</c:v>
                 </c:pt>
                 <c:pt idx="98">
-                  <c:v>0.98768834</c:v>
+                  <c:v>0.9877</c:v>
                 </c:pt>
                 <c:pt idx="99">
-                  <c:v>0.99691733</c:v>
+                  <c:v>0.9969</c:v>
                 </c:pt>
                 <c:pt idx="100">
-                  <c:v>1</c:v>
+                  <c:v>1.0</c:v>
                 </c:pt>
                 <c:pt idx="101">
-                  <c:v>0.99691733</c:v>
+                  <c:v>0.9969</c:v>
                 </c:pt>
                 <c:pt idx="102">
-                  <c:v>0.98768834</c:v>
+                  <c:v>0.9877</c:v>
                 </c:pt>
                 <c:pt idx="103">
-                  <c:v>0.97236992</c:v>
+                  <c:v>0.9724</c:v>
                 </c:pt>
                 <c:pt idx="104">
-                  <c:v>0.95105652</c:v>
+                  <c:v>0.9511</c:v>
                 </c:pt>
                 <c:pt idx="105">
-                  <c:v>0.92387953</c:v>
+                  <c:v>0.9239</c:v>
                 </c:pt>
                 <c:pt idx="106">
-                  <c:v>0.89100652</c:v>
+                  <c:v>0.891</c:v>
                 </c:pt>
                 <c:pt idx="107">
-                  <c:v>0.85264016</c:v>
+                  <c:v>0.8526</c:v>
                 </c:pt>
                 <c:pt idx="108">
-                  <c:v>0.80901699</c:v>
+                  <c:v>0.809</c:v>
                 </c:pt>
                 <c:pt idx="109">
-                  <c:v>0.76040597</c:v>
+                  <c:v>0.7604</c:v>
                 </c:pt>
                 <c:pt idx="110">
-                  <c:v>0.70710678</c:v>
+                  <c:v>0.7071</c:v>
                 </c:pt>
                 <c:pt idx="111">
-                  <c:v>0.64944805</c:v>
+                  <c:v>0.6494</c:v>
                 </c:pt>
                 <c:pt idx="112">
-                  <c:v>0.58778525</c:v>
+                  <c:v>0.5878</c:v>
                 </c:pt>
                 <c:pt idx="113">
-                  <c:v>0.52249856</c:v>
+                  <c:v>0.5225</c:v>
                 </c:pt>
                 <c:pt idx="114">
-                  <c:v>0.4539905</c:v>
+                  <c:v>0.454</c:v>
                 </c:pt>
                 <c:pt idx="115">
-                  <c:v>0.38268343</c:v>
+                  <c:v>0.3827</c:v>
                 </c:pt>
                 <c:pt idx="116">
-                  <c:v>0.30901699</c:v>
+                  <c:v>0.309</c:v>
                 </c:pt>
                 <c:pt idx="117">
-                  <c:v>0.23344536</c:v>
+                  <c:v>0.2334</c:v>
                 </c:pt>
                 <c:pt idx="118">
-                  <c:v>0.15643447</c:v>
+                  <c:v>0.1564</c:v>
                 </c:pt>
                 <c:pt idx="119">
-                  <c:v>0.0784591</c:v>
+                  <c:v>0.0785</c:v>
                 </c:pt>
                 <c:pt idx="120">
-                  <c:v>0</c:v>
+                  <c:v>0.0</c:v>
                 </c:pt>
                 <c:pt idx="121">
-                  <c:v>-0.0784591</c:v>
+                  <c:v>-0.0785</c:v>
                 </c:pt>
                 <c:pt idx="122">
-                  <c:v>-0.15643447</c:v>
+                  <c:v>-0.1564</c:v>
                 </c:pt>
                 <c:pt idx="123">
-                  <c:v>-0.23344536</c:v>
+                  <c:v>-0.2334</c:v>
                 </c:pt>
                 <c:pt idx="124">
-                  <c:v>-0.30901699</c:v>
+                  <c:v>-0.309</c:v>
                 </c:pt>
                 <c:pt idx="125">
-                  <c:v>-0.38268343</c:v>
+                  <c:v>-0.3827</c:v>
                 </c:pt>
                 <c:pt idx="126">
-                  <c:v>-0.4539905</c:v>
+                  <c:v>-0.454</c:v>
                 </c:pt>
                 <c:pt idx="127">
-                  <c:v>-0.52249856</c:v>
+                  <c:v>-0.5225</c:v>
                 </c:pt>
                 <c:pt idx="128">
-                  <c:v>-0.58778525</c:v>
+                  <c:v>-0.5878</c:v>
                 </c:pt>
                 <c:pt idx="129">
-                  <c:v>-0.64944805</c:v>
+                  <c:v>-0.6494</c:v>
                 </c:pt>
                 <c:pt idx="130">
-                  <c:v>-0.70710678</c:v>
+                  <c:v>-0.7071</c:v>
                 </c:pt>
                 <c:pt idx="131">
-                  <c:v>-0.76040597</c:v>
+                  <c:v>-0.7604</c:v>
                 </c:pt>
                 <c:pt idx="132">
-                  <c:v>-0.80901699</c:v>
+                  <c:v>-0.809</c:v>
                 </c:pt>
                 <c:pt idx="133">
-                  <c:v>-0.85264016</c:v>
+                  <c:v>-0.8526</c:v>
                 </c:pt>
                 <c:pt idx="134">
-                  <c:v>-0.89100652</c:v>
+                  <c:v>-0.891</c:v>
                 </c:pt>
                 <c:pt idx="135">
-                  <c:v>-0.92387953</c:v>
+                  <c:v>-0.9239</c:v>
                 </c:pt>
                 <c:pt idx="136">
-                  <c:v>-0.95105652</c:v>
+                  <c:v>-0.9511</c:v>
                 </c:pt>
                 <c:pt idx="137">
-                  <c:v>-0.97236992</c:v>
+                  <c:v>-0.9724</c:v>
                 </c:pt>
                 <c:pt idx="138">
-                  <c:v>-0.98768834</c:v>
+                  <c:v>-0.9877</c:v>
                 </c:pt>
                 <c:pt idx="139">
-                  <c:v>-0.99691733</c:v>
+                  <c:v>-0.9969</c:v>
                 </c:pt>
                 <c:pt idx="140">
-                  <c:v>-1</c:v>
+                  <c:v>-1.0</c:v>
                 </c:pt>
                 <c:pt idx="141">
-                  <c:v>-0.99691733</c:v>
+                  <c:v>-0.9969</c:v>
                 </c:pt>
                 <c:pt idx="142">
-                  <c:v>-0.98768834</c:v>
+                  <c:v>-0.9877</c:v>
                 </c:pt>
                 <c:pt idx="143">
-                  <c:v>-0.97236992</c:v>
+                  <c:v>-0.9724</c:v>
                 </c:pt>
                 <c:pt idx="144">
-                  <c:v>-0.95105652</c:v>
+                  <c:v>-0.9511</c:v>
                 </c:pt>
                 <c:pt idx="145">
-                  <c:v>-0.92387953</c:v>
+                  <c:v>-0.9239</c:v>
                 </c:pt>
                 <c:pt idx="146">
-                  <c:v>-0.89100652</c:v>
+                  <c:v>-0.891</c:v>
                 </c:pt>
                 <c:pt idx="147">
-                  <c:v>-0.85264016</c:v>
+                  <c:v>-0.8526</c:v>
                 </c:pt>
                 <c:pt idx="148">
-                  <c:v>-0.80901699</c:v>
+                  <c:v>-0.809</c:v>
                 </c:pt>
                 <c:pt idx="149">
-                  <c:v>-0.76040597</c:v>
+                  <c:v>-0.7604</c:v>
                 </c:pt>
                 <c:pt idx="150">
-                  <c:v>-0.70710678</c:v>
+                  <c:v>-0.7071</c:v>
                 </c:pt>
                 <c:pt idx="151">
-                  <c:v>-0.64944805</c:v>
+                  <c:v>-0.6494</c:v>
                 </c:pt>
                 <c:pt idx="152">
-                  <c:v>-0.58778525</c:v>
+                  <c:v>-0.5878</c:v>
                 </c:pt>
                 <c:pt idx="153">
-                  <c:v>-0.52249856</c:v>
+                  <c:v>-0.5225</c:v>
                 </c:pt>
                 <c:pt idx="154">
-                  <c:v>-0.4539905</c:v>
+                  <c:v>-0.454</c:v>
                 </c:pt>
                 <c:pt idx="155">
-                  <c:v>-0.38268343</c:v>
+                  <c:v>-0.3827</c:v>
                 </c:pt>
                 <c:pt idx="156">
-                  <c:v>-0.30901699</c:v>
+                  <c:v>-0.309</c:v>
                 </c:pt>
                 <c:pt idx="157">
-                  <c:v>-0.23344536</c:v>
+                  <c:v>-0.2334</c:v>
                 </c:pt>
                 <c:pt idx="158">
-                  <c:v>-0.15643447</c:v>
+                  <c:v>-0.1564</c:v>
                 </c:pt>
                 <c:pt idx="159">
-                  <c:v>-0.0784591</c:v>
+                  <c:v>-0.0785</c:v>
                 </c:pt>
                 <c:pt idx="160">
-                  <c:v>-0</c:v>
+                  <c:v>-0.0</c:v>
                 </c:pt>
               </c:numCache>
             </c:numRef>
@@ -8470,7 +8487,15 @@
           <c:idx val="1"/>
           <c:order val="1"/>
           <c:tx>
-            <c:v>Ström i (normaliserad)</c:v>
+            <c:strRef>
+              <c:f>Sheet1!$B$164</c:f>
+              <c:strCache>
+                <c:ptCount val="1"/>
+                <c:pt idx="0">
+                  <c:v>i</c:v>
+                </c:pt>
+              </c:strCache>
+            </c:strRef>
           </c:tx>
           <c:spPr>
             <a:ln xmlns:a="http://schemas.openxmlformats.org/drawingml/2006/main" w="23813">
@@ -8484,12 +8509,12 @@
           </c:marker>
           <c:xVal>
             <c:numRef>
-              <c:f>'Chart Data'!$C$2:$C$162</c:f>
+              <c:f>Sheet1!$A$165:$A$325</c:f>
               <c:numCache>
                 <c:formatCode>General</c:formatCode>
                 <c:ptCount val="161"/>
                 <c:pt idx="0">
-                  <c:v>0</c:v>
+                  <c:v>0.0</c:v>
                 </c:pt>
                 <c:pt idx="1">
                   <c:v>0.25</c:v>
@@ -8501,7 +8526,7 @@
                   <c:v>0.75</c:v>
                 </c:pt>
                 <c:pt idx="4">
-                  <c:v>1</c:v>
+                  <c:v>1.0</c:v>
                 </c:pt>
                 <c:pt idx="5">
                   <c:v>1.25</c:v>
@@ -8513,7 +8538,7 @@
                   <c:v>1.75</c:v>
                 </c:pt>
                 <c:pt idx="8">
-                  <c:v>2</c:v>
+                  <c:v>2.0</c:v>
                 </c:pt>
                 <c:pt idx="9">
                   <c:v>2.25</c:v>
@@ -8525,7 +8550,7 @@
                   <c:v>2.75</c:v>
                 </c:pt>
                 <c:pt idx="12">
-                  <c:v>3</c:v>
+                  <c:v>3.0</c:v>
                 </c:pt>
                 <c:pt idx="13">
                   <c:v>3.25</c:v>
@@ -8537,7 +8562,7 @@
                   <c:v>3.75</c:v>
                 </c:pt>
                 <c:pt idx="16">
-                  <c:v>4</c:v>
+                  <c:v>4.0</c:v>
                 </c:pt>
                 <c:pt idx="17">
                   <c:v>4.25</c:v>
@@ -8549,7 +8574,7 @@
                   <c:v>4.75</c:v>
                 </c:pt>
                 <c:pt idx="20">
-                  <c:v>5</c:v>
+                  <c:v>5.0</c:v>
                 </c:pt>
                 <c:pt idx="21">
                   <c:v>5.25</c:v>
@@ -8561,7 +8586,7 @@
                   <c:v>5.75</c:v>
                 </c:pt>
                 <c:pt idx="24">
-                  <c:v>6</c:v>
+                  <c:v>6.0</c:v>
                 </c:pt>
                 <c:pt idx="25">
                   <c:v>6.25</c:v>
@@ -8573,7 +8598,7 @@
                   <c:v>6.75</c:v>
                 </c:pt>
                 <c:pt idx="28">
-                  <c:v>7</c:v>
+                  <c:v>7.0</c:v>
                 </c:pt>
                 <c:pt idx="29">
                   <c:v>7.25</c:v>
@@ -8585,7 +8610,7 @@
                   <c:v>7.75</c:v>
                 </c:pt>
                 <c:pt idx="32">
-                  <c:v>8</c:v>
+                  <c:v>8.0</c:v>
                 </c:pt>
                 <c:pt idx="33">
                   <c:v>8.25</c:v>
@@ -8597,7 +8622,7 @@
                   <c:v>8.75</c:v>
                 </c:pt>
                 <c:pt idx="36">
-                  <c:v>9</c:v>
+                  <c:v>9.0</c:v>
                 </c:pt>
                 <c:pt idx="37">
                   <c:v>9.25</c:v>
@@ -8609,7 +8634,7 @@
                   <c:v>9.75</c:v>
                 </c:pt>
                 <c:pt idx="40">
-                  <c:v>10</c:v>
+                  <c:v>10.0</c:v>
                 </c:pt>
                 <c:pt idx="41">
                   <c:v>10.25</c:v>
@@ -8621,7 +8646,7 @@
                   <c:v>10.75</c:v>
                 </c:pt>
                 <c:pt idx="44">
-                  <c:v>11</c:v>
+                  <c:v>11.0</c:v>
                 </c:pt>
                 <c:pt idx="45">
                   <c:v>11.25</c:v>
@@ -8633,7 +8658,7 @@
                   <c:v>11.75</c:v>
                 </c:pt>
                 <c:pt idx="48">
-                  <c:v>12</c:v>
+                  <c:v>12.0</c:v>
                 </c:pt>
                 <c:pt idx="49">
                   <c:v>12.25</c:v>
@@ -8645,7 +8670,7 @@
                   <c:v>12.75</c:v>
                 </c:pt>
                 <c:pt idx="52">
-                  <c:v>13</c:v>
+                  <c:v>13.0</c:v>
                 </c:pt>
                 <c:pt idx="53">
                   <c:v>13.25</c:v>
@@ -8657,7 +8682,7 @@
                   <c:v>13.75</c:v>
                 </c:pt>
                 <c:pt idx="56">
-                  <c:v>14</c:v>
+                  <c:v>14.0</c:v>
                 </c:pt>
                 <c:pt idx="57">
                   <c:v>14.25</c:v>
@@ -8669,7 +8694,7 @@
                   <c:v>14.75</c:v>
                 </c:pt>
                 <c:pt idx="60">
-                  <c:v>15</c:v>
+                  <c:v>15.0</c:v>
                 </c:pt>
                 <c:pt idx="61">
                   <c:v>15.25</c:v>
@@ -8681,7 +8706,7 @@
                   <c:v>15.75</c:v>
                 </c:pt>
                 <c:pt idx="64">
-                  <c:v>16</c:v>
+                  <c:v>16.0</c:v>
                 </c:pt>
                 <c:pt idx="65">
                   <c:v>16.25</c:v>
@@ -8693,7 +8718,7 @@
                   <c:v>16.75</c:v>
                 </c:pt>
                 <c:pt idx="68">
-                  <c:v>17</c:v>
+                  <c:v>17.0</c:v>
                 </c:pt>
                 <c:pt idx="69">
                   <c:v>17.25</c:v>
@@ -8705,7 +8730,7 @@
                   <c:v>17.75</c:v>
                 </c:pt>
                 <c:pt idx="72">
-                  <c:v>18</c:v>
+                  <c:v>18.0</c:v>
                 </c:pt>
                 <c:pt idx="73">
                   <c:v>18.25</c:v>
@@ -8717,7 +8742,7 @@
                   <c:v>18.75</c:v>
                 </c:pt>
                 <c:pt idx="76">
-                  <c:v>19</c:v>
+                  <c:v>19.0</c:v>
                 </c:pt>
                 <c:pt idx="77">
                   <c:v>19.25</c:v>
@@ -8729,7 +8754,7 @@
                   <c:v>19.75</c:v>
                 </c:pt>
                 <c:pt idx="80">
-                  <c:v>20</c:v>
+                  <c:v>20.0</c:v>
                 </c:pt>
                 <c:pt idx="81">
                   <c:v>20.25</c:v>
@@ -8741,7 +8766,7 @@
                   <c:v>20.75</c:v>
                 </c:pt>
                 <c:pt idx="84">
-                  <c:v>21</c:v>
+                  <c:v>21.0</c:v>
                 </c:pt>
                 <c:pt idx="85">
                   <c:v>21.25</c:v>
@@ -8753,7 +8778,7 @@
                   <c:v>21.75</c:v>
                 </c:pt>
                 <c:pt idx="88">
-                  <c:v>22</c:v>
+                  <c:v>22.0</c:v>
                 </c:pt>
                 <c:pt idx="89">
                   <c:v>22.25</c:v>
@@ -8765,7 +8790,7 @@
                   <c:v>22.75</c:v>
                 </c:pt>
                 <c:pt idx="92">
-                  <c:v>23</c:v>
+                  <c:v>23.0</c:v>
                 </c:pt>
                 <c:pt idx="93">
                   <c:v>23.25</c:v>
@@ -8777,7 +8802,7 @@
                   <c:v>23.75</c:v>
                 </c:pt>
                 <c:pt idx="96">
-                  <c:v>24</c:v>
+                  <c:v>24.0</c:v>
                 </c:pt>
                 <c:pt idx="97">
                   <c:v>24.25</c:v>
@@ -8789,7 +8814,7 @@
                   <c:v>24.75</c:v>
                 </c:pt>
                 <c:pt idx="100">
-                  <c:v>25</c:v>
+                  <c:v>25.0</c:v>
                 </c:pt>
                 <c:pt idx="101">
                   <c:v>25.25</c:v>
@@ -8801,7 +8826,7 @@
                   <c:v>25.75</c:v>
                 </c:pt>
                 <c:pt idx="104">
-                  <c:v>26</c:v>
+                  <c:v>26.0</c:v>
                 </c:pt>
                 <c:pt idx="105">
                   <c:v>26.25</c:v>
@@ -8813,7 +8838,7 @@
                   <c:v>26.75</c:v>
                 </c:pt>
                 <c:pt idx="108">
-                  <c:v>27</c:v>
+                  <c:v>27.0</c:v>
                 </c:pt>
                 <c:pt idx="109">
                   <c:v>27.25</c:v>
@@ -8825,7 +8850,7 @@
                   <c:v>27.75</c:v>
                 </c:pt>
                 <c:pt idx="112">
-                  <c:v>28</c:v>
+                  <c:v>28.0</c:v>
                 </c:pt>
                 <c:pt idx="113">
                   <c:v>28.25</c:v>
@@ -8837,7 +8862,7 @@
                   <c:v>28.75</c:v>
                 </c:pt>
                 <c:pt idx="116">
-                  <c:v>29</c:v>
+                  <c:v>29.0</c:v>
                 </c:pt>
                 <c:pt idx="117">
                   <c:v>29.25</c:v>
@@ -8849,7 +8874,7 @@
                   <c:v>29.75</c:v>
                 </c:pt>
                 <c:pt idx="120">
-                  <c:v>30</c:v>
+                  <c:v>30.0</c:v>
                 </c:pt>
                 <c:pt idx="121">
                   <c:v>30.25</c:v>
@@ -8861,7 +8886,7 @@
                   <c:v>30.75</c:v>
                 </c:pt>
                 <c:pt idx="124">
-                  <c:v>31</c:v>
+                  <c:v>31.0</c:v>
                 </c:pt>
                 <c:pt idx="125">
                   <c:v>31.25</c:v>
@@ -8873,7 +8898,7 @@
                   <c:v>31.75</c:v>
                 </c:pt>
                 <c:pt idx="128">
-                  <c:v>32</c:v>
+                  <c:v>32.0</c:v>
                 </c:pt>
                 <c:pt idx="129">
                   <c:v>32.25</c:v>
@@ -8885,7 +8910,7 @@
                   <c:v>32.75</c:v>
                 </c:pt>
                 <c:pt idx="132">
-                  <c:v>33</c:v>
+                  <c:v>33.0</c:v>
                 </c:pt>
                 <c:pt idx="133">
                   <c:v>33.25</c:v>
@@ -8897,7 +8922,7 @@
                   <c:v>33.75</c:v>
                 </c:pt>
                 <c:pt idx="136">
-                  <c:v>34</c:v>
+                  <c:v>34.0</c:v>
                 </c:pt>
                 <c:pt idx="137">
                   <c:v>34.25</c:v>
@@ -8909,7 +8934,7 @@
                   <c:v>34.75</c:v>
                 </c:pt>
                 <c:pt idx="140">
-                  <c:v>35</c:v>
+                  <c:v>35.0</c:v>
                 </c:pt>
                 <c:pt idx="141">
                   <c:v>35.25</c:v>
@@ -8921,7 +8946,7 @@
                   <c:v>35.75</c:v>
                 </c:pt>
                 <c:pt idx="144">
-                  <c:v>36</c:v>
+                  <c:v>36.0</c:v>
                 </c:pt>
                 <c:pt idx="145">
                   <c:v>36.25</c:v>
@@ -8933,7 +8958,7 @@
                   <c:v>36.75</c:v>
                 </c:pt>
                 <c:pt idx="148">
-                  <c:v>37</c:v>
+                  <c:v>37.0</c:v>
                 </c:pt>
                 <c:pt idx="149">
                   <c:v>37.25</c:v>
@@ -8945,7 +8970,7 @@
                   <c:v>37.75</c:v>
                 </c:pt>
                 <c:pt idx="152">
-                  <c:v>38</c:v>
+                  <c:v>38.0</c:v>
                 </c:pt>
                 <c:pt idx="153">
                   <c:v>38.25</c:v>
@@ -8957,7 +8982,7 @@
                   <c:v>38.75</c:v>
                 </c:pt>
                 <c:pt idx="156">
-                  <c:v>39</c:v>
+                  <c:v>39.0</c:v>
                 </c:pt>
                 <c:pt idx="157">
                   <c:v>39.25</c:v>
@@ -8969,499 +8994,499 @@
                   <c:v>39.75</c:v>
                 </c:pt>
                 <c:pt idx="160">
-                  <c:v>40</c:v>
+                  <c:v>40.0</c:v>
                 </c:pt>
               </c:numCache>
             </c:numRef>
           </c:xVal>
           <c:yVal>
             <c:numRef>
-              <c:f>'Chart Data'!$D$2:$D$162</c:f>
+              <c:f>Sheet1!$B$165:$B$325</c:f>
               <c:numCache>
                 <c:formatCode>General</c:formatCode>
                 <c:ptCount val="161"/>
                 <c:pt idx="0">
-                  <c:v>-0.6</c:v>
+                  <c:v>-0.9231</c:v>
                 </c:pt>
                 <c:pt idx="1">
-                  <c:v>-0.53538312</c:v>
+                  <c:v>-0.8901</c:v>
                 </c:pt>
                 <c:pt idx="2">
-                  <c:v>-0.46746543</c:v>
+                  <c:v>-0.8515</c:v>
                 </c:pt>
                 <c:pt idx="3">
-                  <c:v>-0.39666566</c:v>
+                  <c:v>-0.8078</c:v>
                 </c:pt>
                 <c:pt idx="4">
-                  <c:v>-0.32342031</c:v>
+                  <c:v>-0.759</c:v>
                 </c:pt>
                 <c:pt idx="5">
-                  <c:v>-0.24818097</c:v>
+                  <c:v>-0.7056</c:v>
                 </c:pt>
                 <c:pt idx="6">
-                  <c:v>-0.17141151</c:v>
+                  <c:v>-0.6479</c:v>
                 </c:pt>
                 <c:pt idx="7">
-                  <c:v>-0.09358525</c:v>
+                  <c:v>-0.5861</c:v>
                 </c:pt>
                 <c:pt idx="8">
-                  <c:v>-0.01518199</c:v>
+                  <c:v>-0.5207</c:v>
                 </c:pt>
                 <c:pt idx="9">
-                  <c:v>0.06331486</c:v>
+                  <c:v>-0.4521</c:v>
                 </c:pt>
                 <c:pt idx="10">
-                  <c:v>0.14142136</c:v>
+                  <c:v>-0.3807</c:v>
                 </c:pt>
                 <c:pt idx="11">
-                  <c:v>0.21865594</c:v>
+                  <c:v>-0.307</c:v>
                 </c:pt>
                 <c:pt idx="12">
-                  <c:v>0.29454244</c:v>
+                  <c:v>-0.2314</c:v>
                 </c:pt>
                 <c:pt idx="13">
-                  <c:v>0.36861299</c:v>
+                  <c:v>-0.1544</c:v>
                 </c:pt>
                 <c:pt idx="14">
-                  <c:v>0.44041092</c:v>
+                  <c:v>-0.0764</c:v>
                 </c:pt>
                 <c:pt idx="15">
-                  <c:v>0.50949357</c:v>
+                  <c:v>0.0021</c:v>
                 </c:pt>
                 <c:pt idx="16">
-                  <c:v>0.57543502</c:v>
+                  <c:v>0.0805</c:v>
                 </c:pt>
                 <c:pt idx="17">
-                  <c:v>0.63782872</c:v>
+                  <c:v>0.1585</c:v>
                 </c:pt>
                 <c:pt idx="18">
-                  <c:v>0.69628999</c:v>
+                  <c:v>0.2355</c:v>
                 </c:pt>
                 <c:pt idx="19">
-                  <c:v>0.75045841</c:v>
+                  <c:v>0.311</c:v>
                 </c:pt>
                 <c:pt idx="20">
-                  <c:v>0.8</c:v>
+                  <c:v>0.3846</c:v>
                 </c:pt>
                 <c:pt idx="21">
-                  <c:v>0.84460932</c:v>
+                  <c:v>0.4559</c:v>
                 </c:pt>
                 <c:pt idx="22">
-                  <c:v>0.88401135</c:v>
+                  <c:v>0.5243</c:v>
                 </c:pt>
                 <c:pt idx="23">
-                  <c:v>0.91796315</c:v>
+                  <c:v>0.5895</c:v>
                 </c:pt>
                 <c:pt idx="24">
-                  <c:v>0.94625541</c:v>
+                  <c:v>0.651</c:v>
                 </c:pt>
                 <c:pt idx="25">
-                  <c:v>0.96871369</c:v>
+                  <c:v>0.7086</c:v>
                 </c:pt>
                 <c:pt idx="26">
-                  <c:v>0.98519952</c:v>
+                  <c:v>0.7618</c:v>
                 </c:pt>
                 <c:pt idx="27">
-                  <c:v>0.99561127</c:v>
+                  <c:v>0.8102</c:v>
                 </c:pt>
                 <c:pt idx="28">
-                  <c:v>0.99988475</c:v>
+                  <c:v>0.8537</c:v>
                 </c:pt>
                 <c:pt idx="29">
-                  <c:v>0.9979936</c:v>
+                  <c:v>0.892</c:v>
                 </c:pt>
                 <c:pt idx="30">
-                  <c:v>0.98994949</c:v>
+                  <c:v>0.9247</c:v>
                 </c:pt>
                 <c:pt idx="31">
-                  <c:v>0.97580202</c:v>
+                  <c:v>0.9517</c:v>
                 </c:pt>
                 <c:pt idx="32">
-                  <c:v>0.9556384</c:v>
+                  <c:v>0.9729</c:v>
                 </c:pt>
                 <c:pt idx="33">
-                  <c:v>0.92958295</c:v>
+                  <c:v>0.988</c:v>
                 </c:pt>
                 <c:pt idx="34">
-                  <c:v>0.89779631</c:v>
+                  <c:v>0.9971</c:v>
                 </c:pt>
                 <c:pt idx="35">
-                  <c:v>0.86047447</c:v>
+                  <c:v>1.0</c:v>
                 </c:pt>
                 <c:pt idx="36">
-                  <c:v>0.81784751</c:v>
+                  <c:v>0.9968</c:v>
                 </c:pt>
                 <c:pt idx="37">
-                  <c:v>0.77017824</c:v>
+                  <c:v>0.9874</c:v>
                 </c:pt>
                 <c:pt idx="38">
-                  <c:v>0.71776058</c:v>
+                  <c:v>0.9719</c:v>
                 </c:pt>
                 <c:pt idx="39">
-                  <c:v>0.66091768</c:v>
+                  <c:v>0.9504</c:v>
                 </c:pt>
                 <c:pt idx="40">
-                  <c:v>0.6</c:v>
+                  <c:v>0.9231</c:v>
                 </c:pt>
                 <c:pt idx="41">
-                  <c:v>0.53538312</c:v>
+                  <c:v>0.8901</c:v>
                 </c:pt>
                 <c:pt idx="42">
-                  <c:v>0.46746543</c:v>
+                  <c:v>0.8515</c:v>
                 </c:pt>
                 <c:pt idx="43">
-                  <c:v>0.39666566</c:v>
+                  <c:v>0.8078</c:v>
                 </c:pt>
                 <c:pt idx="44">
-                  <c:v>0.32342031</c:v>
+                  <c:v>0.759</c:v>
                 </c:pt>
                 <c:pt idx="45">
-                  <c:v>0.24818097</c:v>
+                  <c:v>0.7056</c:v>
                 </c:pt>
                 <c:pt idx="46">
-                  <c:v>0.17141151</c:v>
+                  <c:v>0.6479</c:v>
                 </c:pt>
                 <c:pt idx="47">
-                  <c:v>0.09358525</c:v>
+                  <c:v>0.5861</c:v>
                 </c:pt>
                 <c:pt idx="48">
-                  <c:v>0.01518199</c:v>
+                  <c:v>0.5207</c:v>
                 </c:pt>
                 <c:pt idx="49">
-                  <c:v>-0.06331486</c:v>
+                  <c:v>0.4521</c:v>
                 </c:pt>
                 <c:pt idx="50">
-                  <c:v>-0.14142136</c:v>
+                  <c:v>0.3807</c:v>
                 </c:pt>
                 <c:pt idx="51">
-                  <c:v>-0.21865594</c:v>
+                  <c:v>0.307</c:v>
                 </c:pt>
                 <c:pt idx="52">
-                  <c:v>-0.29454244</c:v>
+                  <c:v>0.2314</c:v>
                 </c:pt>
                 <c:pt idx="53">
-                  <c:v>-0.36861299</c:v>
+                  <c:v>0.1544</c:v>
                 </c:pt>
                 <c:pt idx="54">
-                  <c:v>-0.44041092</c:v>
+                  <c:v>0.0764</c:v>
                 </c:pt>
                 <c:pt idx="55">
-                  <c:v>-0.50949357</c:v>
+                  <c:v>-0.0021</c:v>
                 </c:pt>
                 <c:pt idx="56">
-                  <c:v>-0.57543502</c:v>
+                  <c:v>-0.0805</c:v>
                 </c:pt>
                 <c:pt idx="57">
-                  <c:v>-0.63782872</c:v>
+                  <c:v>-0.1585</c:v>
                 </c:pt>
                 <c:pt idx="58">
-                  <c:v>-0.69628999</c:v>
+                  <c:v>-0.2355</c:v>
                 </c:pt>
                 <c:pt idx="59">
-                  <c:v>-0.75045841</c:v>
+                  <c:v>-0.311</c:v>
                 </c:pt>
                 <c:pt idx="60">
-                  <c:v>-0.8</c:v>
+                  <c:v>-0.3846</c:v>
                 </c:pt>
                 <c:pt idx="61">
-                  <c:v>-0.84460932</c:v>
+                  <c:v>-0.4559</c:v>
                 </c:pt>
                 <c:pt idx="62">
-                  <c:v>-0.88401135</c:v>
+                  <c:v>-0.5243</c:v>
                 </c:pt>
                 <c:pt idx="63">
-                  <c:v>-0.91796315</c:v>
+                  <c:v>-0.5895</c:v>
                 </c:pt>
                 <c:pt idx="64">
-                  <c:v>-0.94625541</c:v>
+                  <c:v>-0.651</c:v>
                 </c:pt>
                 <c:pt idx="65">
-                  <c:v>-0.96871369</c:v>
+                  <c:v>-0.7086</c:v>
                 </c:pt>
                 <c:pt idx="66">
-                  <c:v>-0.98519952</c:v>
+                  <c:v>-0.7618</c:v>
                 </c:pt>
                 <c:pt idx="67">
-                  <c:v>-0.99561127</c:v>
+                  <c:v>-0.8102</c:v>
                 </c:pt>
                 <c:pt idx="68">
-                  <c:v>-0.99988475</c:v>
+                  <c:v>-0.8537</c:v>
                 </c:pt>
                 <c:pt idx="69">
-                  <c:v>-0.9979936</c:v>
+                  <c:v>-0.892</c:v>
                 </c:pt>
                 <c:pt idx="70">
-                  <c:v>-0.98994949</c:v>
+                  <c:v>-0.9247</c:v>
                 </c:pt>
                 <c:pt idx="71">
-                  <c:v>-0.97580202</c:v>
+                  <c:v>-0.9517</c:v>
                 </c:pt>
                 <c:pt idx="72">
-                  <c:v>-0.9556384</c:v>
+                  <c:v>-0.9729</c:v>
                 </c:pt>
                 <c:pt idx="73">
-                  <c:v>-0.92958295</c:v>
+                  <c:v>-0.988</c:v>
                 </c:pt>
                 <c:pt idx="74">
-                  <c:v>-0.89779631</c:v>
+                  <c:v>-0.9971</c:v>
                 </c:pt>
                 <c:pt idx="75">
-                  <c:v>-0.86047447</c:v>
+                  <c:v>-1.0</c:v>
                 </c:pt>
                 <c:pt idx="76">
-                  <c:v>-0.81784751</c:v>
+                  <c:v>-0.9968</c:v>
                 </c:pt>
                 <c:pt idx="77">
-                  <c:v>-0.77017824</c:v>
+                  <c:v>-0.9874</c:v>
                 </c:pt>
                 <c:pt idx="78">
-                  <c:v>-0.71776058</c:v>
+                  <c:v>-0.9719</c:v>
                 </c:pt>
                 <c:pt idx="79">
-                  <c:v>-0.66091768</c:v>
+                  <c:v>-0.9504</c:v>
                 </c:pt>
                 <c:pt idx="80">
-                  <c:v>-0.6</c:v>
+                  <c:v>-0.9231</c:v>
                 </c:pt>
                 <c:pt idx="81">
-                  <c:v>-0.53538312</c:v>
+                  <c:v>-0.8901</c:v>
                 </c:pt>
                 <c:pt idx="82">
-                  <c:v>-0.46746543</c:v>
+                  <c:v>-0.8515</c:v>
                 </c:pt>
                 <c:pt idx="83">
-                  <c:v>-0.39666566</c:v>
+                  <c:v>-0.8078</c:v>
                 </c:pt>
                 <c:pt idx="84">
-                  <c:v>-0.32342031</c:v>
+                  <c:v>-0.759</c:v>
                 </c:pt>
                 <c:pt idx="85">
-                  <c:v>-0.24818097</c:v>
+                  <c:v>-0.7056</c:v>
                 </c:pt>
                 <c:pt idx="86">
-                  <c:v>-0.17141151</c:v>
+                  <c:v>-0.6479</c:v>
                 </c:pt>
                 <c:pt idx="87">
-                  <c:v>-0.09358525</c:v>
+                  <c:v>-0.5861</c:v>
                 </c:pt>
                 <c:pt idx="88">
-                  <c:v>-0.01518199</c:v>
+                  <c:v>-0.5207</c:v>
                 </c:pt>
                 <c:pt idx="89">
-                  <c:v>0.06331486</c:v>
+                  <c:v>-0.4521</c:v>
                 </c:pt>
                 <c:pt idx="90">
-                  <c:v>0.14142136</c:v>
+                  <c:v>-0.3807</c:v>
                 </c:pt>
                 <c:pt idx="91">
-                  <c:v>0.21865594</c:v>
+                  <c:v>-0.307</c:v>
                 </c:pt>
                 <c:pt idx="92">
-                  <c:v>0.29454244</c:v>
+                  <c:v>-0.2314</c:v>
                 </c:pt>
                 <c:pt idx="93">
-                  <c:v>0.36861299</c:v>
+                  <c:v>-0.1544</c:v>
                 </c:pt>
                 <c:pt idx="94">
-                  <c:v>0.44041092</c:v>
+                  <c:v>-0.0764</c:v>
                 </c:pt>
                 <c:pt idx="95">
-                  <c:v>0.50949357</c:v>
+                  <c:v>0.0021</c:v>
                 </c:pt>
                 <c:pt idx="96">
-                  <c:v>0.57543502</c:v>
+                  <c:v>0.0805</c:v>
                 </c:pt>
                 <c:pt idx="97">
-                  <c:v>0.63782872</c:v>
+                  <c:v>0.1585</c:v>
                 </c:pt>
                 <c:pt idx="98">
-                  <c:v>0.69628999</c:v>
+                  <c:v>0.2355</c:v>
                 </c:pt>
                 <c:pt idx="99">
-                  <c:v>0.75045841</c:v>
+                  <c:v>0.311</c:v>
                 </c:pt>
                 <c:pt idx="100">
-                  <c:v>0.8</c:v>
+                  <c:v>0.3846</c:v>
                 </c:pt>
                 <c:pt idx="101">
-                  <c:v>0.84460932</c:v>
+                  <c:v>0.4559</c:v>
                 </c:pt>
                 <c:pt idx="102">
-                  <c:v>0.88401135</c:v>
+                  <c:v>0.5243</c:v>
                 </c:pt>
                 <c:pt idx="103">
-                  <c:v>0.91796315</c:v>
+                  <c:v>0.5895</c:v>
                 </c:pt>
                 <c:pt idx="104">
-                  <c:v>0.94625541</c:v>
+                  <c:v>0.651</c:v>
                 </c:pt>
                 <c:pt idx="105">
-                  <c:v>0.96871369</c:v>
+                  <c:v>0.7086</c:v>
                 </c:pt>
                 <c:pt idx="106">
-                  <c:v>0.98519952</c:v>
+                  <c:v>0.7618</c:v>
                 </c:pt>
                 <c:pt idx="107">
-                  <c:v>0.99561127</c:v>
+                  <c:v>0.8102</c:v>
                 </c:pt>
                 <c:pt idx="108">
-                  <c:v>0.99988475</c:v>
+                  <c:v>0.8537</c:v>
                 </c:pt>
                 <c:pt idx="109">
-                  <c:v>0.9979936</c:v>
+                  <c:v>0.892</c:v>
                 </c:pt>
                 <c:pt idx="110">
-                  <c:v>0.98994949</c:v>
+                  <c:v>0.9247</c:v>
                 </c:pt>
                 <c:pt idx="111">
-                  <c:v>0.97580202</c:v>
+                  <c:v>0.9517</c:v>
                 </c:pt>
                 <c:pt idx="112">
-                  <c:v>0.9556384</c:v>
+                  <c:v>0.9729</c:v>
                 </c:pt>
                 <c:pt idx="113">
-                  <c:v>0.92958295</c:v>
+                  <c:v>0.988</c:v>
                 </c:pt>
                 <c:pt idx="114">
-                  <c:v>0.89779631</c:v>
+                  <c:v>0.9971</c:v>
                 </c:pt>
                 <c:pt idx="115">
-                  <c:v>0.86047447</c:v>
+                  <c:v>1.0</c:v>
                 </c:pt>
                 <c:pt idx="116">
-                  <c:v>0.81784751</c:v>
+                  <c:v>0.9968</c:v>
                 </c:pt>
                 <c:pt idx="117">
-                  <c:v>0.77017824</c:v>
+                  <c:v>0.9874</c:v>
                 </c:pt>
                 <c:pt idx="118">
-                  <c:v>0.71776058</c:v>
+                  <c:v>0.9719</c:v>
                 </c:pt>
                 <c:pt idx="119">
-                  <c:v>0.66091768</c:v>
+                  <c:v>0.9504</c:v>
                 </c:pt>
                 <c:pt idx="120">
-                  <c:v>0.6</c:v>
+                  <c:v>0.9231</c:v>
                 </c:pt>
                 <c:pt idx="121">
-                  <c:v>0.53538312</c:v>
+                  <c:v>0.8901</c:v>
                 </c:pt>
                 <c:pt idx="122">
-                  <c:v>0.46746543</c:v>
+                  <c:v>0.8515</c:v>
                 </c:pt>
                 <c:pt idx="123">
-                  <c:v>0.39666566</c:v>
+                  <c:v>0.8078</c:v>
                 </c:pt>
                 <c:pt idx="124">
-                  <c:v>0.32342031</c:v>
+                  <c:v>0.759</c:v>
                 </c:pt>
                 <c:pt idx="125">
-                  <c:v>0.24818097</c:v>
+                  <c:v>0.7056</c:v>
                 </c:pt>
                 <c:pt idx="126">
-                  <c:v>0.17141151</c:v>
+                  <c:v>0.6479</c:v>
                 </c:pt>
                 <c:pt idx="127">
-                  <c:v>0.09358525</c:v>
+                  <c:v>0.5861</c:v>
                 </c:pt>
                 <c:pt idx="128">
-                  <c:v>0.01518199</c:v>
+                  <c:v>0.5207</c:v>
                 </c:pt>
                 <c:pt idx="129">
-                  <c:v>-0.06331486</c:v>
+                  <c:v>0.4521</c:v>
                 </c:pt>
                 <c:pt idx="130">
-                  <c:v>-0.14142136</c:v>
+                  <c:v>0.3807</c:v>
                 </c:pt>
                 <c:pt idx="131">
-                  <c:v>-0.21865594</c:v>
+                  <c:v>0.307</c:v>
                 </c:pt>
                 <c:pt idx="132">
-                  <c:v>-0.29454244</c:v>
+                  <c:v>0.2314</c:v>
                 </c:pt>
                 <c:pt idx="133">
-                  <c:v>-0.36861299</c:v>
+                  <c:v>0.1544</c:v>
                 </c:pt>
                 <c:pt idx="134">
-                  <c:v>-0.44041092</c:v>
+                  <c:v>0.0764</c:v>
                 </c:pt>
                 <c:pt idx="135">
-                  <c:v>-0.50949357</c:v>
+                  <c:v>-0.0021</c:v>
                 </c:pt>
                 <c:pt idx="136">
-                  <c:v>-0.57543502</c:v>
+                  <c:v>-0.0805</c:v>
                 </c:pt>
                 <c:pt idx="137">
-                  <c:v>-0.63782872</c:v>
+                  <c:v>-0.1585</c:v>
                 </c:pt>
                 <c:pt idx="138">
-                  <c:v>-0.69628999</c:v>
+                  <c:v>-0.2355</c:v>
                 </c:pt>
                 <c:pt idx="139">
-                  <c:v>-0.75045841</c:v>
+                  <c:v>-0.311</c:v>
                 </c:pt>
                 <c:pt idx="140">
-                  <c:v>-0.8</c:v>
+                  <c:v>-0.3846</c:v>
                 </c:pt>
                 <c:pt idx="141">
-                  <c:v>-0.84460932</c:v>
+                  <c:v>-0.4559</c:v>
                 </c:pt>
                 <c:pt idx="142">
-                  <c:v>-0.88401135</c:v>
+                  <c:v>-0.5243</c:v>
                 </c:pt>
                 <c:pt idx="143">
-                  <c:v>-0.91796315</c:v>
+                  <c:v>-0.5895</c:v>
                 </c:pt>
                 <c:pt idx="144">
-                  <c:v>-0.94625541</c:v>
+                  <c:v>-0.651</c:v>
                 </c:pt>
                 <c:pt idx="145">
-                  <c:v>-0.96871369</c:v>
+                  <c:v>-0.7086</c:v>
                 </c:pt>
                 <c:pt idx="146">
-                  <c:v>-0.98519952</c:v>
+                  <c:v>-0.7618</c:v>
                 </c:pt>
                 <c:pt idx="147">
-                  <c:v>-0.99561127</c:v>
+                  <c:v>-0.8102</c:v>
                 </c:pt>
                 <c:pt idx="148">
-                  <c:v>-0.99988475</c:v>
+                  <c:v>-0.8537</c:v>
                 </c:pt>
                 <c:pt idx="149">
-                  <c:v>-0.9979936</c:v>
+                  <c:v>-0.892</c:v>
                 </c:pt>
                 <c:pt idx="150">
-                  <c:v>-0.98994949</c:v>
+                  <c:v>-0.9247</c:v>
                 </c:pt>
                 <c:pt idx="151">
-                  <c:v>-0.97580202</c:v>
+                  <c:v>-0.9517</c:v>
                 </c:pt>
                 <c:pt idx="152">
-                  <c:v>-0.9556384</c:v>
+                  <c:v>-0.9729</c:v>
                 </c:pt>
                 <c:pt idx="153">
-                  <c:v>-0.92958295</c:v>
+                  <c:v>-0.988</c:v>
                 </c:pt>
                 <c:pt idx="154">
-                  <c:v>-0.89779631</c:v>
+                  <c:v>-0.9971</c:v>
                 </c:pt>
                 <c:pt idx="155">
-                  <c:v>-0.86047447</c:v>
+                  <c:v>-1.0</c:v>
                 </c:pt>
                 <c:pt idx="156">
-                  <c:v>-0.81784751</c:v>
+                  <c:v>-0.9968</c:v>
                 </c:pt>
                 <c:pt idx="157">
-                  <c:v>-0.77017824</c:v>
+                  <c:v>-0.9874</c:v>
                 </c:pt>
                 <c:pt idx="158">
-                  <c:v>-0.71776058</c:v>
+                  <c:v>-0.9719</c:v>
                 </c:pt>
                 <c:pt idx="159">
-                  <c:v>-0.66091768</c:v>
+                  <c:v>-0.9504</c:v>
                 </c:pt>
                 <c:pt idx="160">
-                  <c:v>-0.6</c:v>
+                  <c:v>-0.9231</c:v>
                 </c:pt>
               </c:numCache>
             </c:numRef>
@@ -9690,7 +9715,15 @@
           <c:idx val="0"/>
           <c:order val="0"/>
           <c:tx>
-            <c:v>Spänning u (normaliserad)</c:v>
+            <c:strRef>
+              <c:f>Sheet1!$B$1</c:f>
+              <c:strCache>
+                <c:ptCount val="1"/>
+                <c:pt idx="0">
+                  <c:v>u</c:v>
+                </c:pt>
+              </c:strCache>
+            </c:strRef>
           </c:tx>
           <c:spPr>
             <a:ln xmlns:a="http://schemas.openxmlformats.org/drawingml/2006/main" w="23813">
@@ -9704,12 +9737,12 @@
           </c:marker>
           <c:xVal>
             <c:numRef>
-              <c:f>'Chart Data'!$A$2:$A$162</c:f>
+              <c:f>Sheet1!$A$2:$A$162</c:f>
               <c:numCache>
                 <c:formatCode>General</c:formatCode>
                 <c:ptCount val="161"/>
                 <c:pt idx="0">
-                  <c:v>0</c:v>
+                  <c:v>0.0</c:v>
                 </c:pt>
                 <c:pt idx="1">
                   <c:v>0.25</c:v>
@@ -9721,7 +9754,7 @@
                   <c:v>0.75</c:v>
                 </c:pt>
                 <c:pt idx="4">
-                  <c:v>1</c:v>
+                  <c:v>1.0</c:v>
                 </c:pt>
                 <c:pt idx="5">
                   <c:v>1.25</c:v>
@@ -9733,7 +9766,7 @@
                   <c:v>1.75</c:v>
                 </c:pt>
                 <c:pt idx="8">
-                  <c:v>2</c:v>
+                  <c:v>2.0</c:v>
                 </c:pt>
                 <c:pt idx="9">
                   <c:v>2.25</c:v>
@@ -9745,7 +9778,7 @@
                   <c:v>2.75</c:v>
                 </c:pt>
                 <c:pt idx="12">
-                  <c:v>3</c:v>
+                  <c:v>3.0</c:v>
                 </c:pt>
                 <c:pt idx="13">
                   <c:v>3.25</c:v>
@@ -9757,7 +9790,7 @@
                   <c:v>3.75</c:v>
                 </c:pt>
                 <c:pt idx="16">
-                  <c:v>4</c:v>
+                  <c:v>4.0</c:v>
                 </c:pt>
                 <c:pt idx="17">
                   <c:v>4.25</c:v>
@@ -9769,7 +9802,7 @@
                   <c:v>4.75</c:v>
                 </c:pt>
                 <c:pt idx="20">
-                  <c:v>5</c:v>
+                  <c:v>5.0</c:v>
                 </c:pt>
                 <c:pt idx="21">
                   <c:v>5.25</c:v>
@@ -9781,7 +9814,7 @@
                   <c:v>5.75</c:v>
                 </c:pt>
                 <c:pt idx="24">
-                  <c:v>6</c:v>
+                  <c:v>6.0</c:v>
                 </c:pt>
                 <c:pt idx="25">
                   <c:v>6.25</c:v>
@@ -9793,7 +9826,7 @@
                   <c:v>6.75</c:v>
                 </c:pt>
                 <c:pt idx="28">
-                  <c:v>7</c:v>
+                  <c:v>7.0</c:v>
                 </c:pt>
                 <c:pt idx="29">
                   <c:v>7.25</c:v>
@@ -9805,7 +9838,7 @@
                   <c:v>7.75</c:v>
                 </c:pt>
                 <c:pt idx="32">
-                  <c:v>8</c:v>
+                  <c:v>8.0</c:v>
                 </c:pt>
                 <c:pt idx="33">
                   <c:v>8.25</c:v>
@@ -9817,7 +9850,7 @@
                   <c:v>8.75</c:v>
                 </c:pt>
                 <c:pt idx="36">
-                  <c:v>9</c:v>
+                  <c:v>9.0</c:v>
                 </c:pt>
                 <c:pt idx="37">
                   <c:v>9.25</c:v>
@@ -9829,7 +9862,7 @@
                   <c:v>9.75</c:v>
                 </c:pt>
                 <c:pt idx="40">
-                  <c:v>10</c:v>
+                  <c:v>10.0</c:v>
                 </c:pt>
                 <c:pt idx="41">
                   <c:v>10.25</c:v>
@@ -9841,7 +9874,7 @@
                   <c:v>10.75</c:v>
                 </c:pt>
                 <c:pt idx="44">
-                  <c:v>11</c:v>
+                  <c:v>11.0</c:v>
                 </c:pt>
                 <c:pt idx="45">
                   <c:v>11.25</c:v>
@@ -9853,7 +9886,7 @@
                   <c:v>11.75</c:v>
                 </c:pt>
                 <c:pt idx="48">
-                  <c:v>12</c:v>
+                  <c:v>12.0</c:v>
                 </c:pt>
                 <c:pt idx="49">
                   <c:v>12.25</c:v>
@@ -9865,7 +9898,7 @@
                   <c:v>12.75</c:v>
                 </c:pt>
                 <c:pt idx="52">
-                  <c:v>13</c:v>
+                  <c:v>13.0</c:v>
                 </c:pt>
                 <c:pt idx="53">
                   <c:v>13.25</c:v>
@@ -9877,7 +9910,7 @@
                   <c:v>13.75</c:v>
                 </c:pt>
                 <c:pt idx="56">
-                  <c:v>14</c:v>
+                  <c:v>14.0</c:v>
                 </c:pt>
                 <c:pt idx="57">
                   <c:v>14.25</c:v>
@@ -9889,7 +9922,7 @@
                   <c:v>14.75</c:v>
                 </c:pt>
                 <c:pt idx="60">
-                  <c:v>15</c:v>
+                  <c:v>15.0</c:v>
                 </c:pt>
                 <c:pt idx="61">
                   <c:v>15.25</c:v>
@@ -9901,7 +9934,7 @@
                   <c:v>15.75</c:v>
                 </c:pt>
                 <c:pt idx="64">
-                  <c:v>16</c:v>
+                  <c:v>16.0</c:v>
                 </c:pt>
                 <c:pt idx="65">
                   <c:v>16.25</c:v>
@@ -9913,7 +9946,7 @@
                   <c:v>16.75</c:v>
                 </c:pt>
                 <c:pt idx="68">
-                  <c:v>17</c:v>
+                  <c:v>17.0</c:v>
                 </c:pt>
                 <c:pt idx="69">
                   <c:v>17.25</c:v>
@@ -9925,7 +9958,7 @@
                   <c:v>17.75</c:v>
                 </c:pt>
                 <c:pt idx="72">
-                  <c:v>18</c:v>
+                  <c:v>18.0</c:v>
                 </c:pt>
                 <c:pt idx="73">
                   <c:v>18.25</c:v>
@@ -9937,7 +9970,7 @@
                   <c:v>18.75</c:v>
                 </c:pt>
                 <c:pt idx="76">
-                  <c:v>19</c:v>
+                  <c:v>19.0</c:v>
                 </c:pt>
                 <c:pt idx="77">
                   <c:v>19.25</c:v>
@@ -9949,7 +9982,7 @@
                   <c:v>19.75</c:v>
                 </c:pt>
                 <c:pt idx="80">
-                  <c:v>20</c:v>
+                  <c:v>20.0</c:v>
                 </c:pt>
                 <c:pt idx="81">
                   <c:v>20.25</c:v>
@@ -9961,7 +9994,7 @@
                   <c:v>20.75</c:v>
                 </c:pt>
                 <c:pt idx="84">
-                  <c:v>21</c:v>
+                  <c:v>21.0</c:v>
                 </c:pt>
                 <c:pt idx="85">
                   <c:v>21.25</c:v>
@@ -9973,7 +10006,7 @@
                   <c:v>21.75</c:v>
                 </c:pt>
                 <c:pt idx="88">
-                  <c:v>22</c:v>
+                  <c:v>22.0</c:v>
                 </c:pt>
                 <c:pt idx="89">
                   <c:v>22.25</c:v>
@@ -9985,7 +10018,7 @@
                   <c:v>22.75</c:v>
                 </c:pt>
                 <c:pt idx="92">
-                  <c:v>23</c:v>
+                  <c:v>23.0</c:v>
                 </c:pt>
                 <c:pt idx="93">
                   <c:v>23.25</c:v>
@@ -9997,7 +10030,7 @@
                   <c:v>23.75</c:v>
                 </c:pt>
                 <c:pt idx="96">
-                  <c:v>24</c:v>
+                  <c:v>24.0</c:v>
                 </c:pt>
                 <c:pt idx="97">
                   <c:v>24.25</c:v>
@@ -10009,7 +10042,7 @@
                   <c:v>24.75</c:v>
                 </c:pt>
                 <c:pt idx="100">
-                  <c:v>25</c:v>
+                  <c:v>25.0</c:v>
                 </c:pt>
                 <c:pt idx="101">
                   <c:v>25.25</c:v>
@@ -10021,7 +10054,7 @@
                   <c:v>25.75</c:v>
                 </c:pt>
                 <c:pt idx="104">
-                  <c:v>26</c:v>
+                  <c:v>26.0</c:v>
                 </c:pt>
                 <c:pt idx="105">
                   <c:v>26.25</c:v>
@@ -10033,7 +10066,7 @@
                   <c:v>26.75</c:v>
                 </c:pt>
                 <c:pt idx="108">
-                  <c:v>27</c:v>
+                  <c:v>27.0</c:v>
                 </c:pt>
                 <c:pt idx="109">
                   <c:v>27.25</c:v>
@@ -10045,7 +10078,7 @@
                   <c:v>27.75</c:v>
                 </c:pt>
                 <c:pt idx="112">
-                  <c:v>28</c:v>
+                  <c:v>28.0</c:v>
                 </c:pt>
                 <c:pt idx="113">
                   <c:v>28.25</c:v>
@@ -10057,7 +10090,7 @@
                   <c:v>28.75</c:v>
                 </c:pt>
                 <c:pt idx="116">
-                  <c:v>29</c:v>
+                  <c:v>29.0</c:v>
                 </c:pt>
                 <c:pt idx="117">
                   <c:v>29.25</c:v>
@@ -10069,7 +10102,7 @@
                   <c:v>29.75</c:v>
                 </c:pt>
                 <c:pt idx="120">
-                  <c:v>30</c:v>
+                  <c:v>30.0</c:v>
                 </c:pt>
                 <c:pt idx="121">
                   <c:v>30.25</c:v>
@@ -10081,7 +10114,7 @@
                   <c:v>30.75</c:v>
                 </c:pt>
                 <c:pt idx="124">
-                  <c:v>31</c:v>
+                  <c:v>31.0</c:v>
                 </c:pt>
                 <c:pt idx="125">
                   <c:v>31.25</c:v>
@@ -10093,7 +10126,7 @@
                   <c:v>31.75</c:v>
                 </c:pt>
                 <c:pt idx="128">
-                  <c:v>32</c:v>
+                  <c:v>32.0</c:v>
                 </c:pt>
                 <c:pt idx="129">
                   <c:v>32.25</c:v>
@@ -10105,7 +10138,7 @@
                   <c:v>32.75</c:v>
                 </c:pt>
                 <c:pt idx="132">
-                  <c:v>33</c:v>
+                  <c:v>33.0</c:v>
                 </c:pt>
                 <c:pt idx="133">
                   <c:v>33.25</c:v>
@@ -10117,7 +10150,7 @@
                   <c:v>33.75</c:v>
                 </c:pt>
                 <c:pt idx="136">
-                  <c:v>34</c:v>
+                  <c:v>34.0</c:v>
                 </c:pt>
                 <c:pt idx="137">
                   <c:v>34.25</c:v>
@@ -10129,7 +10162,7 @@
                   <c:v>34.75</c:v>
                 </c:pt>
                 <c:pt idx="140">
-                  <c:v>35</c:v>
+                  <c:v>35.0</c:v>
                 </c:pt>
                 <c:pt idx="141">
                   <c:v>35.25</c:v>
@@ -10141,7 +10174,7 @@
                   <c:v>35.75</c:v>
                 </c:pt>
                 <c:pt idx="144">
-                  <c:v>36</c:v>
+                  <c:v>36.0</c:v>
                 </c:pt>
                 <c:pt idx="145">
                   <c:v>36.25</c:v>
@@ -10153,7 +10186,7 @@
                   <c:v>36.75</c:v>
                 </c:pt>
                 <c:pt idx="148">
-                  <c:v>37</c:v>
+                  <c:v>37.0</c:v>
                 </c:pt>
                 <c:pt idx="149">
                   <c:v>37.25</c:v>
@@ -10165,7 +10198,7 @@
                   <c:v>37.75</c:v>
                 </c:pt>
                 <c:pt idx="152">
-                  <c:v>38</c:v>
+                  <c:v>38.0</c:v>
                 </c:pt>
                 <c:pt idx="153">
                   <c:v>38.25</c:v>
@@ -10177,7 +10210,7 @@
                   <c:v>38.75</c:v>
                 </c:pt>
                 <c:pt idx="156">
-                  <c:v>39</c:v>
+                  <c:v>39.0</c:v>
                 </c:pt>
                 <c:pt idx="157">
                   <c:v>39.25</c:v>
@@ -10189,499 +10222,499 @@
                   <c:v>39.75</c:v>
                 </c:pt>
                 <c:pt idx="160">
-                  <c:v>40</c:v>
+                  <c:v>40.0</c:v>
                 </c:pt>
               </c:numCache>
             </c:numRef>
           </c:xVal>
           <c:yVal>
             <c:numRef>
-              <c:f>'Chart Data'!$B$2:$B$162</c:f>
+              <c:f>Sheet1!$B$2:$B$162</c:f>
               <c:numCache>
                 <c:formatCode>General</c:formatCode>
                 <c:ptCount val="161"/>
                 <c:pt idx="0">
-                  <c:v>0</c:v>
+                  <c:v>0.0</c:v>
                 </c:pt>
                 <c:pt idx="1">
-                  <c:v>0.0784591</c:v>
+                  <c:v>0.0785</c:v>
                 </c:pt>
                 <c:pt idx="2">
-                  <c:v>0.15643447</c:v>
+                  <c:v>0.1564</c:v>
                 </c:pt>
                 <c:pt idx="3">
-                  <c:v>0.23344536</c:v>
+                  <c:v>0.2334</c:v>
                 </c:pt>
                 <c:pt idx="4">
-                  <c:v>0.30901699</c:v>
+                  <c:v>0.309</c:v>
                 </c:pt>
                 <c:pt idx="5">
-                  <c:v>0.38268343</c:v>
+                  <c:v>0.3827</c:v>
                 </c:pt>
                 <c:pt idx="6">
-                  <c:v>0.4539905</c:v>
+                  <c:v>0.454</c:v>
                 </c:pt>
                 <c:pt idx="7">
-                  <c:v>0.52249856</c:v>
+                  <c:v>0.5225</c:v>
                 </c:pt>
                 <c:pt idx="8">
-                  <c:v>0.58778525</c:v>
+                  <c:v>0.5878</c:v>
                 </c:pt>
                 <c:pt idx="9">
-                  <c:v>0.64944805</c:v>
+                  <c:v>0.6494</c:v>
                 </c:pt>
                 <c:pt idx="10">
-                  <c:v>0.70710678</c:v>
+                  <c:v>0.7071</c:v>
                 </c:pt>
                 <c:pt idx="11">
-                  <c:v>0.76040597</c:v>
+                  <c:v>0.7604</c:v>
                 </c:pt>
                 <c:pt idx="12">
-                  <c:v>0.80901699</c:v>
+                  <c:v>0.809</c:v>
                 </c:pt>
                 <c:pt idx="13">
-                  <c:v>0.85264016</c:v>
+                  <c:v>0.8526</c:v>
                 </c:pt>
                 <c:pt idx="14">
-                  <c:v>0.89100652</c:v>
+                  <c:v>0.891</c:v>
                 </c:pt>
                 <c:pt idx="15">
-                  <c:v>0.92387953</c:v>
+                  <c:v>0.9239</c:v>
                 </c:pt>
                 <c:pt idx="16">
-                  <c:v>0.95105652</c:v>
+                  <c:v>0.9511</c:v>
                 </c:pt>
                 <c:pt idx="17">
-                  <c:v>0.97236992</c:v>
+                  <c:v>0.9724</c:v>
                 </c:pt>
                 <c:pt idx="18">
-                  <c:v>0.98768834</c:v>
+                  <c:v>0.9877</c:v>
                 </c:pt>
                 <c:pt idx="19">
-                  <c:v>0.99691733</c:v>
+                  <c:v>0.9969</c:v>
                 </c:pt>
                 <c:pt idx="20">
-                  <c:v>1</c:v>
+                  <c:v>1.0</c:v>
                 </c:pt>
                 <c:pt idx="21">
-                  <c:v>0.99691733</c:v>
+                  <c:v>0.9969</c:v>
                 </c:pt>
                 <c:pt idx="22">
-                  <c:v>0.98768834</c:v>
+                  <c:v>0.9877</c:v>
                 </c:pt>
                 <c:pt idx="23">
-                  <c:v>0.97236992</c:v>
+                  <c:v>0.9724</c:v>
                 </c:pt>
                 <c:pt idx="24">
-                  <c:v>0.95105652</c:v>
+                  <c:v>0.9511</c:v>
                 </c:pt>
                 <c:pt idx="25">
-                  <c:v>0.92387953</c:v>
+                  <c:v>0.9239</c:v>
                 </c:pt>
                 <c:pt idx="26">
-                  <c:v>0.89100652</c:v>
+                  <c:v>0.891</c:v>
                 </c:pt>
                 <c:pt idx="27">
-                  <c:v>0.85264016</c:v>
+                  <c:v>0.8526</c:v>
                 </c:pt>
                 <c:pt idx="28">
-                  <c:v>0.80901699</c:v>
+                  <c:v>0.809</c:v>
                 </c:pt>
                 <c:pt idx="29">
-                  <c:v>0.76040597</c:v>
+                  <c:v>0.7604</c:v>
                 </c:pt>
                 <c:pt idx="30">
-                  <c:v>0.70710678</c:v>
+                  <c:v>0.7071</c:v>
                 </c:pt>
                 <c:pt idx="31">
-                  <c:v>0.64944805</c:v>
+                  <c:v>0.6494</c:v>
                 </c:pt>
                 <c:pt idx="32">
-                  <c:v>0.58778525</c:v>
+                  <c:v>0.5878</c:v>
                 </c:pt>
                 <c:pt idx="33">
-                  <c:v>0.52249856</c:v>
+                  <c:v>0.5225</c:v>
                 </c:pt>
                 <c:pt idx="34">
-                  <c:v>0.4539905</c:v>
+                  <c:v>0.454</c:v>
                 </c:pt>
                 <c:pt idx="35">
-                  <c:v>0.38268343</c:v>
+                  <c:v>0.3827</c:v>
                 </c:pt>
                 <c:pt idx="36">
-                  <c:v>0.30901699</c:v>
+                  <c:v>0.309</c:v>
                 </c:pt>
                 <c:pt idx="37">
-                  <c:v>0.23344536</c:v>
+                  <c:v>0.2334</c:v>
                 </c:pt>
                 <c:pt idx="38">
-                  <c:v>0.15643447</c:v>
+                  <c:v>0.1564</c:v>
                 </c:pt>
                 <c:pt idx="39">
-                  <c:v>0.0784591</c:v>
+                  <c:v>0.0785</c:v>
                 </c:pt>
                 <c:pt idx="40">
-                  <c:v>0</c:v>
+                  <c:v>0.0</c:v>
                 </c:pt>
                 <c:pt idx="41">
-                  <c:v>-0.0784591</c:v>
+                  <c:v>-0.0785</c:v>
                 </c:pt>
                 <c:pt idx="42">
-                  <c:v>-0.15643447</c:v>
+                  <c:v>-0.1564</c:v>
                 </c:pt>
                 <c:pt idx="43">
-                  <c:v>-0.23344536</c:v>
+                  <c:v>-0.2334</c:v>
                 </c:pt>
                 <c:pt idx="44">
-                  <c:v>-0.30901699</c:v>
+                  <c:v>-0.309</c:v>
                 </c:pt>
                 <c:pt idx="45">
-                  <c:v>-0.38268343</c:v>
+                  <c:v>-0.3827</c:v>
                 </c:pt>
                 <c:pt idx="46">
-                  <c:v>-0.4539905</c:v>
+                  <c:v>-0.454</c:v>
                 </c:pt>
                 <c:pt idx="47">
-                  <c:v>-0.52249856</c:v>
+                  <c:v>-0.5225</c:v>
                 </c:pt>
                 <c:pt idx="48">
-                  <c:v>-0.58778525</c:v>
+                  <c:v>-0.5878</c:v>
                 </c:pt>
                 <c:pt idx="49">
-                  <c:v>-0.64944805</c:v>
+                  <c:v>-0.6494</c:v>
                 </c:pt>
                 <c:pt idx="50">
-                  <c:v>-0.70710678</c:v>
+                  <c:v>-0.7071</c:v>
                 </c:pt>
                 <c:pt idx="51">
-                  <c:v>-0.76040597</c:v>
+                  <c:v>-0.7604</c:v>
                 </c:pt>
                 <c:pt idx="52">
-                  <c:v>-0.80901699</c:v>
+                  <c:v>-0.809</c:v>
                 </c:pt>
                 <c:pt idx="53">
-                  <c:v>-0.85264016</c:v>
+                  <c:v>-0.8526</c:v>
                 </c:pt>
                 <c:pt idx="54">
-                  <c:v>-0.89100652</c:v>
+                  <c:v>-0.891</c:v>
                 </c:pt>
                 <c:pt idx="55">
-                  <c:v>-0.92387953</c:v>
+                  <c:v>-0.9239</c:v>
                 </c:pt>
                 <c:pt idx="56">
-                  <c:v>-0.95105652</c:v>
+                  <c:v>-0.9511</c:v>
                 </c:pt>
                 <c:pt idx="57">
-                  <c:v>-0.97236992</c:v>
+                  <c:v>-0.9724</c:v>
                 </c:pt>
                 <c:pt idx="58">
-                  <c:v>-0.98768834</c:v>
+                  <c:v>-0.9877</c:v>
                 </c:pt>
                 <c:pt idx="59">
-                  <c:v>-0.99691733</c:v>
+                  <c:v>-0.9969</c:v>
                 </c:pt>
                 <c:pt idx="60">
-                  <c:v>-1</c:v>
+                  <c:v>-1.0</c:v>
                 </c:pt>
                 <c:pt idx="61">
-                  <c:v>-0.99691733</c:v>
+                  <c:v>-0.9969</c:v>
                 </c:pt>
                 <c:pt idx="62">
-                  <c:v>-0.98768834</c:v>
+                  <c:v>-0.9877</c:v>
                 </c:pt>
                 <c:pt idx="63">
-                  <c:v>-0.97236992</c:v>
+                  <c:v>-0.9724</c:v>
                 </c:pt>
                 <c:pt idx="64">
-                  <c:v>-0.95105652</c:v>
+                  <c:v>-0.9511</c:v>
                 </c:pt>
                 <c:pt idx="65">
-                  <c:v>-0.92387953</c:v>
+                  <c:v>-0.9239</c:v>
                 </c:pt>
                 <c:pt idx="66">
-                  <c:v>-0.89100652</c:v>
+                  <c:v>-0.891</c:v>
                 </c:pt>
                 <c:pt idx="67">
-                  <c:v>-0.85264016</c:v>
+                  <c:v>-0.8526</c:v>
                 </c:pt>
                 <c:pt idx="68">
-                  <c:v>-0.80901699</c:v>
+                  <c:v>-0.809</c:v>
                 </c:pt>
                 <c:pt idx="69">
-                  <c:v>-0.76040597</c:v>
+                  <c:v>-0.7604</c:v>
                 </c:pt>
                 <c:pt idx="70">
-                  <c:v>-0.70710678</c:v>
+                  <c:v>-0.7071</c:v>
                 </c:pt>
                 <c:pt idx="71">
-                  <c:v>-0.64944805</c:v>
+                  <c:v>-0.6494</c:v>
                 </c:pt>
                 <c:pt idx="72">
-                  <c:v>-0.58778525</c:v>
+                  <c:v>-0.5878</c:v>
                 </c:pt>
                 <c:pt idx="73">
-                  <c:v>-0.52249856</c:v>
+                  <c:v>-0.5225</c:v>
                 </c:pt>
                 <c:pt idx="74">
-                  <c:v>-0.4539905</c:v>
+                  <c:v>-0.454</c:v>
                 </c:pt>
                 <c:pt idx="75">
-                  <c:v>-0.38268343</c:v>
+                  <c:v>-0.3827</c:v>
                 </c:pt>
                 <c:pt idx="76">
-                  <c:v>-0.30901699</c:v>
+                  <c:v>-0.309</c:v>
                 </c:pt>
                 <c:pt idx="77">
-                  <c:v>-0.23344536</c:v>
+                  <c:v>-0.2334</c:v>
                 </c:pt>
                 <c:pt idx="78">
-                  <c:v>-0.15643447</c:v>
+                  <c:v>-0.1564</c:v>
                 </c:pt>
                 <c:pt idx="79">
-                  <c:v>-0.0784591</c:v>
+                  <c:v>-0.0785</c:v>
                 </c:pt>
                 <c:pt idx="80">
-                  <c:v>-0</c:v>
+                  <c:v>-0.0</c:v>
                 </c:pt>
                 <c:pt idx="81">
-                  <c:v>0.0784591</c:v>
+                  <c:v>0.0785</c:v>
                 </c:pt>
                 <c:pt idx="82">
-                  <c:v>0.15643447</c:v>
+                  <c:v>0.1564</c:v>
                 </c:pt>
                 <c:pt idx="83">
-                  <c:v>0.23344536</c:v>
+                  <c:v>0.2334</c:v>
                 </c:pt>
                 <c:pt idx="84">
-                  <c:v>0.30901699</c:v>
+                  <c:v>0.309</c:v>
                 </c:pt>
                 <c:pt idx="85">
-                  <c:v>0.38268343</c:v>
+                  <c:v>0.3827</c:v>
                 </c:pt>
                 <c:pt idx="86">
-                  <c:v>0.4539905</c:v>
+                  <c:v>0.454</c:v>
                 </c:pt>
                 <c:pt idx="87">
-                  <c:v>0.52249856</c:v>
+                  <c:v>0.5225</c:v>
                 </c:pt>
                 <c:pt idx="88">
-                  <c:v>0.58778525</c:v>
+                  <c:v>0.5878</c:v>
                 </c:pt>
                 <c:pt idx="89">
-                  <c:v>0.64944805</c:v>
+                  <c:v>0.6494</c:v>
                 </c:pt>
                 <c:pt idx="90">
-                  <c:v>0.70710678</c:v>
+                  <c:v>0.7071</c:v>
                 </c:pt>
                 <c:pt idx="91">
-                  <c:v>0.76040597</c:v>
+                  <c:v>0.7604</c:v>
                 </c:pt>
                 <c:pt idx="92">
-                  <c:v>0.80901699</c:v>
+                  <c:v>0.809</c:v>
                 </c:pt>
                 <c:pt idx="93">
-                  <c:v>0.85264016</c:v>
+                  <c:v>0.8526</c:v>
                 </c:pt>
                 <c:pt idx="94">
-                  <c:v>0.89100652</c:v>
+                  <c:v>0.891</c:v>
                 </c:pt>
                 <c:pt idx="95">
-                  <c:v>0.92387953</c:v>
+                  <c:v>0.9239</c:v>
                 </c:pt>
                 <c:pt idx="96">
-                  <c:v>0.95105652</c:v>
+                  <c:v>0.9511</c:v>
                 </c:pt>
                 <c:pt idx="97">
-                  <c:v>0.97236992</c:v>
+                  <c:v>0.9724</c:v>
                 </c:pt>
                 <c:pt idx="98">
-                  <c:v>0.98768834</c:v>
+                  <c:v>0.9877</c:v>
                 </c:pt>
                 <c:pt idx="99">
-                  <c:v>0.99691733</c:v>
+                  <c:v>0.9969</c:v>
                 </c:pt>
                 <c:pt idx="100">
-                  <c:v>1</c:v>
+                  <c:v>1.0</c:v>
                 </c:pt>
                 <c:pt idx="101">
-                  <c:v>0.99691733</c:v>
+                  <c:v>0.9969</c:v>
                 </c:pt>
                 <c:pt idx="102">
-                  <c:v>0.98768834</c:v>
+                  <c:v>0.9877</c:v>
                 </c:pt>
                 <c:pt idx="103">
-                  <c:v>0.97236992</c:v>
+                  <c:v>0.9724</c:v>
                 </c:pt>
                 <c:pt idx="104">
-                  <c:v>0.95105652</c:v>
+                  <c:v>0.9511</c:v>
                 </c:pt>
                 <c:pt idx="105">
-                  <c:v>0.92387953</c:v>
+                  <c:v>0.9239</c:v>
                 </c:pt>
                 <c:pt idx="106">
-                  <c:v>0.89100652</c:v>
+                  <c:v>0.891</c:v>
                 </c:pt>
                 <c:pt idx="107">
-                  <c:v>0.85264016</c:v>
+                  <c:v>0.8526</c:v>
                 </c:pt>
                 <c:pt idx="108">
-                  <c:v>0.80901699</c:v>
+                  <c:v>0.809</c:v>
                 </c:pt>
                 <c:pt idx="109">
-                  <c:v>0.76040597</c:v>
+                  <c:v>0.7604</c:v>
                 </c:pt>
                 <c:pt idx="110">
-                  <c:v>0.70710678</c:v>
+                  <c:v>0.7071</c:v>
                 </c:pt>
                 <c:pt idx="111">
-                  <c:v>0.64944805</c:v>
+                  <c:v>0.6494</c:v>
                 </c:pt>
                 <c:pt idx="112">
-                  <c:v>0.58778525</c:v>
+                  <c:v>0.5878</c:v>
                 </c:pt>
                 <c:pt idx="113">
-                  <c:v>0.52249856</c:v>
+                  <c:v>0.5225</c:v>
                 </c:pt>
                 <c:pt idx="114">
-                  <c:v>0.4539905</c:v>
+                  <c:v>0.454</c:v>
                 </c:pt>
                 <c:pt idx="115">
-                  <c:v>0.38268343</c:v>
+                  <c:v>0.3827</c:v>
                 </c:pt>
                 <c:pt idx="116">
-                  <c:v>0.30901699</c:v>
+                  <c:v>0.309</c:v>
                 </c:pt>
                 <c:pt idx="117">
-                  <c:v>0.23344536</c:v>
+                  <c:v>0.2334</c:v>
                 </c:pt>
                 <c:pt idx="118">
-                  <c:v>0.15643447</c:v>
+                  <c:v>0.1564</c:v>
                 </c:pt>
                 <c:pt idx="119">
-                  <c:v>0.0784591</c:v>
+                  <c:v>0.0785</c:v>
                 </c:pt>
                 <c:pt idx="120">
-                  <c:v>0</c:v>
+                  <c:v>0.0</c:v>
                 </c:pt>
                 <c:pt idx="121">
-                  <c:v>-0.0784591</c:v>
+                  <c:v>-0.0785</c:v>
                 </c:pt>
                 <c:pt idx="122">
-                  <c:v>-0.15643447</c:v>
+                  <c:v>-0.1564</c:v>
                 </c:pt>
                 <c:pt idx="123">
-                  <c:v>-0.23344536</c:v>
+                  <c:v>-0.2334</c:v>
                 </c:pt>
                 <c:pt idx="124">
-                  <c:v>-0.30901699</c:v>
+                  <c:v>-0.309</c:v>
                 </c:pt>
                 <c:pt idx="125">
-                  <c:v>-0.38268343</c:v>
+                  <c:v>-0.3827</c:v>
                 </c:pt>
                 <c:pt idx="126">
-                  <c:v>-0.4539905</c:v>
+                  <c:v>-0.454</c:v>
                 </c:pt>
                 <c:pt idx="127">
-                  <c:v>-0.52249856</c:v>
+                  <c:v>-0.5225</c:v>
                 </c:pt>
                 <c:pt idx="128">
-                  <c:v>-0.58778525</c:v>
+                  <c:v>-0.5878</c:v>
                 </c:pt>
                 <c:pt idx="129">
-                  <c:v>-0.64944805</c:v>
+                  <c:v>-0.6494</c:v>
                 </c:pt>
                 <c:pt idx="130">
-                  <c:v>-0.70710678</c:v>
+                  <c:v>-0.7071</c:v>
                 </c:pt>
                 <c:pt idx="131">
-                  <c:v>-0.76040597</c:v>
+                  <c:v>-0.7604</c:v>
                 </c:pt>
                 <c:pt idx="132">
-                  <c:v>-0.80901699</c:v>
+                  <c:v>-0.809</c:v>
                 </c:pt>
                 <c:pt idx="133">
-                  <c:v>-0.85264016</c:v>
+                  <c:v>-0.8526</c:v>
                 </c:pt>
                 <c:pt idx="134">
-                  <c:v>-0.89100652</c:v>
+                  <c:v>-0.891</c:v>
                 </c:pt>
                 <c:pt idx="135">
-                  <c:v>-0.92387953</c:v>
+                  <c:v>-0.9239</c:v>
                 </c:pt>
                 <c:pt idx="136">
-                  <c:v>-0.95105652</c:v>
+                  <c:v>-0.9511</c:v>
                 </c:pt>
                 <c:pt idx="137">
-                  <c:v>-0.97236992</c:v>
+                  <c:v>-0.9724</c:v>
                 </c:pt>
                 <c:pt idx="138">
-                  <c:v>-0.98768834</c:v>
+                  <c:v>-0.9877</c:v>
                 </c:pt>
                 <c:pt idx="139">
-                  <c:v>-0.99691733</c:v>
+                  <c:v>-0.9969</c:v>
                 </c:pt>
                 <c:pt idx="140">
-                  <c:v>-1</c:v>
+                  <c:v>-1.0</c:v>
                 </c:pt>
                 <c:pt idx="141">
-                  <c:v>-0.99691733</c:v>
+                  <c:v>-0.9969</c:v>
                 </c:pt>
                 <c:pt idx="142">
-                  <c:v>-0.98768834</c:v>
+                  <c:v>-0.9877</c:v>
                 </c:pt>
                 <c:pt idx="143">
-                  <c:v>-0.97236992</c:v>
+                  <c:v>-0.9724</c:v>
                 </c:pt>
                 <c:pt idx="144">
-                  <c:v>-0.95105652</c:v>
+                  <c:v>-0.9511</c:v>
                 </c:pt>
                 <c:pt idx="145">
-                  <c:v>-0.92387953</c:v>
+                  <c:v>-0.9239</c:v>
                 </c:pt>
                 <c:pt idx="146">
-                  <c:v>-0.89100652</c:v>
+                  <c:v>-0.891</c:v>
                 </c:pt>
                 <c:pt idx="147">
-                  <c:v>-0.85264016</c:v>
+                  <c:v>-0.8526</c:v>
                 </c:pt>
                 <c:pt idx="148">
-                  <c:v>-0.80901699</c:v>
+                  <c:v>-0.809</c:v>
                 </c:pt>
                 <c:pt idx="149">
-                  <c:v>-0.76040597</c:v>
+                  <c:v>-0.7604</c:v>
                 </c:pt>
                 <c:pt idx="150">
-                  <c:v>-0.70710678</c:v>
+                  <c:v>-0.7071</c:v>
                 </c:pt>
                 <c:pt idx="151">
-                  <c:v>-0.64944805</c:v>
+                  <c:v>-0.6494</c:v>
                 </c:pt>
                 <c:pt idx="152">
-                  <c:v>-0.58778525</c:v>
+                  <c:v>-0.5878</c:v>
                 </c:pt>
                 <c:pt idx="153">
-                  <c:v>-0.52249856</c:v>
+                  <c:v>-0.5225</c:v>
                 </c:pt>
                 <c:pt idx="154">
-                  <c:v>-0.4539905</c:v>
+                  <c:v>-0.454</c:v>
                 </c:pt>
                 <c:pt idx="155">
-                  <c:v>-0.38268343</c:v>
+                  <c:v>-0.3827</c:v>
                 </c:pt>
                 <c:pt idx="156">
-                  <c:v>-0.30901699</c:v>
+                  <c:v>-0.309</c:v>
                 </c:pt>
                 <c:pt idx="157">
-                  <c:v>-0.23344536</c:v>
+                  <c:v>-0.2334</c:v>
                 </c:pt>
                 <c:pt idx="158">
-                  <c:v>-0.15643447</c:v>
+                  <c:v>-0.1564</c:v>
                 </c:pt>
                 <c:pt idx="159">
-                  <c:v>-0.0784591</c:v>
+                  <c:v>-0.0785</c:v>
                 </c:pt>
                 <c:pt idx="160">
-                  <c:v>-0</c:v>
+                  <c:v>-0.0</c:v>
                 </c:pt>
               </c:numCache>
             </c:numRef>
@@ -10691,7 +10724,15 @@
           <c:idx val="1"/>
           <c:order val="1"/>
           <c:tx>
-            <c:v>Ström i (normaliserad)</c:v>
+            <c:strRef>
+              <c:f>Sheet1!$B$164</c:f>
+              <c:strCache>
+                <c:ptCount val="1"/>
+                <c:pt idx="0">
+                  <c:v>i</c:v>
+                </c:pt>
+              </c:strCache>
+            </c:strRef>
           </c:tx>
           <c:spPr>
             <a:ln xmlns:a="http://schemas.openxmlformats.org/drawingml/2006/main" w="23813">
@@ -10705,12 +10746,12 @@
           </c:marker>
           <c:xVal>
             <c:numRef>
-              <c:f>'Chart Data'!$C$2:$C$162</c:f>
+              <c:f>Sheet1!$A$165:$A$325</c:f>
               <c:numCache>
                 <c:formatCode>General</c:formatCode>
                 <c:ptCount val="161"/>
                 <c:pt idx="0">
-                  <c:v>0</c:v>
+                  <c:v>0.0</c:v>
                 </c:pt>
                 <c:pt idx="1">
                   <c:v>0.25</c:v>
@@ -10722,7 +10763,7 @@
                   <c:v>0.75</c:v>
                 </c:pt>
                 <c:pt idx="4">
-                  <c:v>1</c:v>
+                  <c:v>1.0</c:v>
                 </c:pt>
                 <c:pt idx="5">
                   <c:v>1.25</c:v>
@@ -10734,7 +10775,7 @@
                   <c:v>1.75</c:v>
                 </c:pt>
                 <c:pt idx="8">
-                  <c:v>2</c:v>
+                  <c:v>2.0</c:v>
                 </c:pt>
                 <c:pt idx="9">
                   <c:v>2.25</c:v>
@@ -10746,7 +10787,7 @@
                   <c:v>2.75</c:v>
                 </c:pt>
                 <c:pt idx="12">
-                  <c:v>3</c:v>
+                  <c:v>3.0</c:v>
                 </c:pt>
                 <c:pt idx="13">
                   <c:v>3.25</c:v>
@@ -10758,7 +10799,7 @@
                   <c:v>3.75</c:v>
                 </c:pt>
                 <c:pt idx="16">
-                  <c:v>4</c:v>
+                  <c:v>4.0</c:v>
                 </c:pt>
                 <c:pt idx="17">
                   <c:v>4.25</c:v>
@@ -10770,7 +10811,7 @@
                   <c:v>4.75</c:v>
                 </c:pt>
                 <c:pt idx="20">
-                  <c:v>5</c:v>
+                  <c:v>5.0</c:v>
                 </c:pt>
                 <c:pt idx="21">
                   <c:v>5.25</c:v>
@@ -10782,7 +10823,7 @@
                   <c:v>5.75</c:v>
                 </c:pt>
                 <c:pt idx="24">
-                  <c:v>6</c:v>
+                  <c:v>6.0</c:v>
                 </c:pt>
                 <c:pt idx="25">
                   <c:v>6.25</c:v>
@@ -10794,7 +10835,7 @@
                   <c:v>6.75</c:v>
                 </c:pt>
                 <c:pt idx="28">
-                  <c:v>7</c:v>
+                  <c:v>7.0</c:v>
                 </c:pt>
                 <c:pt idx="29">
                   <c:v>7.25</c:v>
@@ -10806,7 +10847,7 @@
                   <c:v>7.75</c:v>
                 </c:pt>
                 <c:pt idx="32">
-                  <c:v>8</c:v>
+                  <c:v>8.0</c:v>
                 </c:pt>
                 <c:pt idx="33">
                   <c:v>8.25</c:v>
@@ -10818,7 +10859,7 @@
                   <c:v>8.75</c:v>
                 </c:pt>
                 <c:pt idx="36">
-                  <c:v>9</c:v>
+                  <c:v>9.0</c:v>
                 </c:pt>
                 <c:pt idx="37">
                   <c:v>9.25</c:v>
@@ -10830,7 +10871,7 @@
                   <c:v>9.75</c:v>
                 </c:pt>
                 <c:pt idx="40">
-                  <c:v>10</c:v>
+                  <c:v>10.0</c:v>
                 </c:pt>
                 <c:pt idx="41">
                   <c:v>10.25</c:v>
@@ -10842,7 +10883,7 @@
                   <c:v>10.75</c:v>
                 </c:pt>
                 <c:pt idx="44">
-                  <c:v>11</c:v>
+                  <c:v>11.0</c:v>
                 </c:pt>
                 <c:pt idx="45">
                   <c:v>11.25</c:v>
@@ -10854,7 +10895,7 @@
                   <c:v>11.75</c:v>
                 </c:pt>
                 <c:pt idx="48">
-                  <c:v>12</c:v>
+                  <c:v>12.0</c:v>
                 </c:pt>
                 <c:pt idx="49">
                   <c:v>12.25</c:v>
@@ -10866,7 +10907,7 @@
                   <c:v>12.75</c:v>
                 </c:pt>
                 <c:pt idx="52">
-                  <c:v>13</c:v>
+                  <c:v>13.0</c:v>
                 </c:pt>
                 <c:pt idx="53">
                   <c:v>13.25</c:v>
@@ -10878,7 +10919,7 @@
                   <c:v>13.75</c:v>
                 </c:pt>
                 <c:pt idx="56">
-                  <c:v>14</c:v>
+                  <c:v>14.0</c:v>
                 </c:pt>
                 <c:pt idx="57">
                   <c:v>14.25</c:v>
@@ -10890,7 +10931,7 @@
                   <c:v>14.75</c:v>
                 </c:pt>
                 <c:pt idx="60">
-                  <c:v>15</c:v>
+                  <c:v>15.0</c:v>
                 </c:pt>
                 <c:pt idx="61">
                   <c:v>15.25</c:v>
@@ -10902,7 +10943,7 @@
                   <c:v>15.75</c:v>
                 </c:pt>
                 <c:pt idx="64">
-                  <c:v>16</c:v>
+                  <c:v>16.0</c:v>
                 </c:pt>
                 <c:pt idx="65">
                   <c:v>16.25</c:v>
@@ -10914,7 +10955,7 @@
                   <c:v>16.75</c:v>
                 </c:pt>
                 <c:pt idx="68">
-                  <c:v>17</c:v>
+                  <c:v>17.0</c:v>
                 </c:pt>
                 <c:pt idx="69">
                   <c:v>17.25</c:v>
@@ -10926,7 +10967,7 @@
                   <c:v>17.75</c:v>
                 </c:pt>
                 <c:pt idx="72">
-                  <c:v>18</c:v>
+                  <c:v>18.0</c:v>
                 </c:pt>
                 <c:pt idx="73">
                   <c:v>18.25</c:v>
@@ -10938,7 +10979,7 @@
                   <c:v>18.75</c:v>
                 </c:pt>
                 <c:pt idx="76">
-                  <c:v>19</c:v>
+                  <c:v>19.0</c:v>
                 </c:pt>
                 <c:pt idx="77">
                   <c:v>19.25</c:v>
@@ -10950,7 +10991,7 @@
                   <c:v>19.75</c:v>
                 </c:pt>
                 <c:pt idx="80">
-                  <c:v>20</c:v>
+                  <c:v>20.0</c:v>
                 </c:pt>
                 <c:pt idx="81">
                   <c:v>20.25</c:v>
@@ -10962,7 +11003,7 @@
                   <c:v>20.75</c:v>
                 </c:pt>
                 <c:pt idx="84">
-                  <c:v>21</c:v>
+                  <c:v>21.0</c:v>
                 </c:pt>
                 <c:pt idx="85">
                   <c:v>21.25</c:v>
@@ -10974,7 +11015,7 @@
                   <c:v>21.75</c:v>
                 </c:pt>
                 <c:pt idx="88">
-                  <c:v>22</c:v>
+                  <c:v>22.0</c:v>
                 </c:pt>
                 <c:pt idx="89">
                   <c:v>22.25</c:v>
@@ -10986,7 +11027,7 @@
                   <c:v>22.75</c:v>
                 </c:pt>
                 <c:pt idx="92">
-                  <c:v>23</c:v>
+                  <c:v>23.0</c:v>
                 </c:pt>
                 <c:pt idx="93">
                   <c:v>23.25</c:v>
@@ -10998,7 +11039,7 @@
                   <c:v>23.75</c:v>
                 </c:pt>
                 <c:pt idx="96">
-                  <c:v>24</c:v>
+                  <c:v>24.0</c:v>
                 </c:pt>
                 <c:pt idx="97">
                   <c:v>24.25</c:v>
@@ -11010,7 +11051,7 @@
                   <c:v>24.75</c:v>
                 </c:pt>
                 <c:pt idx="100">
-                  <c:v>25</c:v>
+                  <c:v>25.0</c:v>
                 </c:pt>
                 <c:pt idx="101">
                   <c:v>25.25</c:v>
@@ -11022,7 +11063,7 @@
                   <c:v>25.75</c:v>
                 </c:pt>
                 <c:pt idx="104">
-                  <c:v>26</c:v>
+                  <c:v>26.0</c:v>
                 </c:pt>
                 <c:pt idx="105">
                   <c:v>26.25</c:v>
@@ -11034,7 +11075,7 @@
                   <c:v>26.75</c:v>
                 </c:pt>
                 <c:pt idx="108">
-                  <c:v>27</c:v>
+                  <c:v>27.0</c:v>
                 </c:pt>
                 <c:pt idx="109">
                   <c:v>27.25</c:v>
@@ -11046,7 +11087,7 @@
                   <c:v>27.75</c:v>
                 </c:pt>
                 <c:pt idx="112">
-                  <c:v>28</c:v>
+                  <c:v>28.0</c:v>
                 </c:pt>
                 <c:pt idx="113">
                   <c:v>28.25</c:v>
@@ -11058,7 +11099,7 @@
                   <c:v>28.75</c:v>
                 </c:pt>
                 <c:pt idx="116">
-                  <c:v>29</c:v>
+                  <c:v>29.0</c:v>
                 </c:pt>
                 <c:pt idx="117">
                   <c:v>29.25</c:v>
@@ -11070,7 +11111,7 @@
                   <c:v>29.75</c:v>
                 </c:pt>
                 <c:pt idx="120">
-                  <c:v>30</c:v>
+                  <c:v>30.0</c:v>
                 </c:pt>
                 <c:pt idx="121">
                   <c:v>30.25</c:v>
@@ -11082,7 +11123,7 @@
                   <c:v>30.75</c:v>
                 </c:pt>
                 <c:pt idx="124">
-                  <c:v>31</c:v>
+                  <c:v>31.0</c:v>
                 </c:pt>
                 <c:pt idx="125">
                   <c:v>31.25</c:v>
@@ -11094,7 +11135,7 @@
                   <c:v>31.75</c:v>
                 </c:pt>
                 <c:pt idx="128">
-                  <c:v>32</c:v>
+                  <c:v>32.0</c:v>
                 </c:pt>
                 <c:pt idx="129">
                   <c:v>32.25</c:v>
@@ -11106,7 +11147,7 @@
                   <c:v>32.75</c:v>
                 </c:pt>
                 <c:pt idx="132">
-                  <c:v>33</c:v>
+                  <c:v>33.0</c:v>
                 </c:pt>
                 <c:pt idx="133">
                   <c:v>33.25</c:v>
@@ -11118,7 +11159,7 @@
                   <c:v>33.75</c:v>
                 </c:pt>
                 <c:pt idx="136">
-                  <c:v>34</c:v>
+                  <c:v>34.0</c:v>
                 </c:pt>
                 <c:pt idx="137">
                   <c:v>34.25</c:v>
@@ -11130,7 +11171,7 @@
                   <c:v>34.75</c:v>
                 </c:pt>
                 <c:pt idx="140">
-                  <c:v>35</c:v>
+                  <c:v>35.0</c:v>
                 </c:pt>
                 <c:pt idx="141">
                   <c:v>35.25</c:v>
@@ -11142,7 +11183,7 @@
                   <c:v>35.75</c:v>
                 </c:pt>
                 <c:pt idx="144">
-                  <c:v>36</c:v>
+                  <c:v>36.0</c:v>
                 </c:pt>
                 <c:pt idx="145">
                   <c:v>36.25</c:v>
@@ -11154,7 +11195,7 @@
                   <c:v>36.75</c:v>
                 </c:pt>
                 <c:pt idx="148">
-                  <c:v>37</c:v>
+                  <c:v>37.0</c:v>
                 </c:pt>
                 <c:pt idx="149">
                   <c:v>37.25</c:v>
@@ -11166,7 +11207,7 @@
                   <c:v>37.75</c:v>
                 </c:pt>
                 <c:pt idx="152">
-                  <c:v>38</c:v>
+                  <c:v>38.0</c:v>
                 </c:pt>
                 <c:pt idx="153">
                   <c:v>38.25</c:v>
@@ -11178,7 +11219,7 @@
                   <c:v>38.75</c:v>
                 </c:pt>
                 <c:pt idx="156">
-                  <c:v>39</c:v>
+                  <c:v>39.0</c:v>
                 </c:pt>
                 <c:pt idx="157">
                   <c:v>39.25</c:v>
@@ -11190,499 +11231,499 @@
                   <c:v>39.75</c:v>
                 </c:pt>
                 <c:pt idx="160">
-                  <c:v>40</c:v>
+                  <c:v>40.0</c:v>
                 </c:pt>
               </c:numCache>
             </c:numRef>
           </c:xVal>
           <c:yVal>
             <c:numRef>
-              <c:f>'Chart Data'!$D$2:$D$162</c:f>
+              <c:f>Sheet1!$B$165:$B$325</c:f>
               <c:numCache>
                 <c:formatCode>General</c:formatCode>
                 <c:ptCount val="161"/>
                 <c:pt idx="0">
-                  <c:v>-0.6</c:v>
+                  <c:v>-0.9231</c:v>
                 </c:pt>
                 <c:pt idx="1">
-                  <c:v>-0.53538312</c:v>
+                  <c:v>-0.8901</c:v>
                 </c:pt>
                 <c:pt idx="2">
-                  <c:v>-0.46746543</c:v>
+                  <c:v>-0.8515</c:v>
                 </c:pt>
                 <c:pt idx="3">
-                  <c:v>-0.39666566</c:v>
+                  <c:v>-0.8078</c:v>
                 </c:pt>
                 <c:pt idx="4">
-                  <c:v>-0.32342031</c:v>
+                  <c:v>-0.759</c:v>
                 </c:pt>
                 <c:pt idx="5">
-                  <c:v>-0.24818097</c:v>
+                  <c:v>-0.7056</c:v>
                 </c:pt>
                 <c:pt idx="6">
-                  <c:v>-0.17141151</c:v>
+                  <c:v>-0.6479</c:v>
                 </c:pt>
                 <c:pt idx="7">
-                  <c:v>-0.09358525</c:v>
+                  <c:v>-0.5861</c:v>
                 </c:pt>
                 <c:pt idx="8">
-                  <c:v>-0.01518199</c:v>
+                  <c:v>-0.5207</c:v>
                 </c:pt>
                 <c:pt idx="9">
-                  <c:v>0.06331486</c:v>
+                  <c:v>-0.4521</c:v>
                 </c:pt>
                 <c:pt idx="10">
-                  <c:v>0.14142136</c:v>
+                  <c:v>-0.3807</c:v>
                 </c:pt>
                 <c:pt idx="11">
-                  <c:v>0.21865594</c:v>
+                  <c:v>-0.307</c:v>
                 </c:pt>
                 <c:pt idx="12">
-                  <c:v>0.29454244</c:v>
+                  <c:v>-0.2314</c:v>
                 </c:pt>
                 <c:pt idx="13">
-                  <c:v>0.36861299</c:v>
+                  <c:v>-0.1544</c:v>
                 </c:pt>
                 <c:pt idx="14">
-                  <c:v>0.44041092</c:v>
+                  <c:v>-0.0764</c:v>
                 </c:pt>
                 <c:pt idx="15">
-                  <c:v>0.50949357</c:v>
+                  <c:v>0.0021</c:v>
                 </c:pt>
                 <c:pt idx="16">
-                  <c:v>0.57543502</c:v>
+                  <c:v>0.0805</c:v>
                 </c:pt>
                 <c:pt idx="17">
-                  <c:v>0.63782872</c:v>
+                  <c:v>0.1585</c:v>
                 </c:pt>
                 <c:pt idx="18">
-                  <c:v>0.69628999</c:v>
+                  <c:v>0.2355</c:v>
                 </c:pt>
                 <c:pt idx="19">
-                  <c:v>0.75045841</c:v>
+                  <c:v>0.311</c:v>
                 </c:pt>
                 <c:pt idx="20">
-                  <c:v>0.8</c:v>
+                  <c:v>0.3846</c:v>
                 </c:pt>
                 <c:pt idx="21">
-                  <c:v>0.84460932</c:v>
+                  <c:v>0.4559</c:v>
                 </c:pt>
                 <c:pt idx="22">
-                  <c:v>0.88401135</c:v>
+                  <c:v>0.5243</c:v>
                 </c:pt>
                 <c:pt idx="23">
-                  <c:v>0.91796315</c:v>
+                  <c:v>0.5895</c:v>
                 </c:pt>
                 <c:pt idx="24">
-                  <c:v>0.94625541</c:v>
+                  <c:v>0.651</c:v>
                 </c:pt>
                 <c:pt idx="25">
-                  <c:v>0.96871369</c:v>
+                  <c:v>0.7086</c:v>
                 </c:pt>
                 <c:pt idx="26">
-                  <c:v>0.98519952</c:v>
+                  <c:v>0.7618</c:v>
                 </c:pt>
                 <c:pt idx="27">
-                  <c:v>0.99561127</c:v>
+                  <c:v>0.8102</c:v>
                 </c:pt>
                 <c:pt idx="28">
-                  <c:v>0.99988475</c:v>
+                  <c:v>0.8537</c:v>
                 </c:pt>
                 <c:pt idx="29">
-                  <c:v>0.9979936</c:v>
+                  <c:v>0.892</c:v>
                 </c:pt>
                 <c:pt idx="30">
-                  <c:v>0.98994949</c:v>
+                  <c:v>0.9247</c:v>
                 </c:pt>
                 <c:pt idx="31">
-                  <c:v>0.97580202</c:v>
+                  <c:v>0.9517</c:v>
                 </c:pt>
                 <c:pt idx="32">
-                  <c:v>0.9556384</c:v>
+                  <c:v>0.9729</c:v>
                 </c:pt>
                 <c:pt idx="33">
-                  <c:v>0.92958295</c:v>
+                  <c:v>0.988</c:v>
                 </c:pt>
                 <c:pt idx="34">
-                  <c:v>0.89779631</c:v>
+                  <c:v>0.9971</c:v>
                 </c:pt>
                 <c:pt idx="35">
-                  <c:v>0.86047447</c:v>
+                  <c:v>1.0</c:v>
                 </c:pt>
                 <c:pt idx="36">
-                  <c:v>0.81784751</c:v>
+                  <c:v>0.9968</c:v>
                 </c:pt>
                 <c:pt idx="37">
-                  <c:v>0.77017824</c:v>
+                  <c:v>0.9874</c:v>
                 </c:pt>
                 <c:pt idx="38">
-                  <c:v>0.71776058</c:v>
+                  <c:v>0.9719</c:v>
                 </c:pt>
                 <c:pt idx="39">
-                  <c:v>0.66091768</c:v>
+                  <c:v>0.9504</c:v>
                 </c:pt>
                 <c:pt idx="40">
-                  <c:v>0.6</c:v>
+                  <c:v>0.9231</c:v>
                 </c:pt>
                 <c:pt idx="41">
-                  <c:v>0.53538312</c:v>
+                  <c:v>0.8901</c:v>
                 </c:pt>
                 <c:pt idx="42">
-                  <c:v>0.46746543</c:v>
+                  <c:v>0.8515</c:v>
                 </c:pt>
                 <c:pt idx="43">
-                  <c:v>0.39666566</c:v>
+                  <c:v>0.8078</c:v>
                 </c:pt>
                 <c:pt idx="44">
-                  <c:v>0.32342031</c:v>
+                  <c:v>0.759</c:v>
                 </c:pt>
                 <c:pt idx="45">
-                  <c:v>0.24818097</c:v>
+                  <c:v>0.7056</c:v>
                 </c:pt>
                 <c:pt idx="46">
-                  <c:v>0.17141151</c:v>
+                  <c:v>0.6479</c:v>
                 </c:pt>
                 <c:pt idx="47">
-                  <c:v>0.09358525</c:v>
+                  <c:v>0.5861</c:v>
                 </c:pt>
                 <c:pt idx="48">
-                  <c:v>0.01518199</c:v>
+                  <c:v>0.5207</c:v>
                 </c:pt>
                 <c:pt idx="49">
-                  <c:v>-0.06331486</c:v>
+                  <c:v>0.4521</c:v>
                 </c:pt>
                 <c:pt idx="50">
-                  <c:v>-0.14142136</c:v>
+                  <c:v>0.3807</c:v>
                 </c:pt>
                 <c:pt idx="51">
-                  <c:v>-0.21865594</c:v>
+                  <c:v>0.307</c:v>
                 </c:pt>
                 <c:pt idx="52">
-                  <c:v>-0.29454244</c:v>
+                  <c:v>0.2314</c:v>
                 </c:pt>
                 <c:pt idx="53">
-                  <c:v>-0.36861299</c:v>
+                  <c:v>0.1544</c:v>
                 </c:pt>
                 <c:pt idx="54">
-                  <c:v>-0.44041092</c:v>
+                  <c:v>0.0764</c:v>
                 </c:pt>
                 <c:pt idx="55">
-                  <c:v>-0.50949357</c:v>
+                  <c:v>-0.0021</c:v>
                 </c:pt>
                 <c:pt idx="56">
-                  <c:v>-0.57543502</c:v>
+                  <c:v>-0.0805</c:v>
                 </c:pt>
                 <c:pt idx="57">
-                  <c:v>-0.63782872</c:v>
+                  <c:v>-0.1585</c:v>
                 </c:pt>
                 <c:pt idx="58">
-                  <c:v>-0.69628999</c:v>
+                  <c:v>-0.2355</c:v>
                 </c:pt>
                 <c:pt idx="59">
-                  <c:v>-0.75045841</c:v>
+                  <c:v>-0.311</c:v>
                 </c:pt>
                 <c:pt idx="60">
-                  <c:v>-0.8</c:v>
+                  <c:v>-0.3846</c:v>
                 </c:pt>
                 <c:pt idx="61">
-                  <c:v>-0.84460932</c:v>
+                  <c:v>-0.4559</c:v>
                 </c:pt>
                 <c:pt idx="62">
-                  <c:v>-0.88401135</c:v>
+                  <c:v>-0.5243</c:v>
                 </c:pt>
                 <c:pt idx="63">
-                  <c:v>-0.91796315</c:v>
+                  <c:v>-0.5895</c:v>
                 </c:pt>
                 <c:pt idx="64">
-                  <c:v>-0.94625541</c:v>
+                  <c:v>-0.651</c:v>
                 </c:pt>
                 <c:pt idx="65">
-                  <c:v>-0.96871369</c:v>
+                  <c:v>-0.7086</c:v>
                 </c:pt>
                 <c:pt idx="66">
-                  <c:v>-0.98519952</c:v>
+                  <c:v>-0.7618</c:v>
                 </c:pt>
                 <c:pt idx="67">
-                  <c:v>-0.99561127</c:v>
+                  <c:v>-0.8102</c:v>
                 </c:pt>
                 <c:pt idx="68">
-                  <c:v>-0.99988475</c:v>
+                  <c:v>-0.8537</c:v>
                 </c:pt>
                 <c:pt idx="69">
-                  <c:v>-0.9979936</c:v>
+                  <c:v>-0.892</c:v>
                 </c:pt>
                 <c:pt idx="70">
-                  <c:v>-0.98994949</c:v>
+                  <c:v>-0.9247</c:v>
                 </c:pt>
                 <c:pt idx="71">
-                  <c:v>-0.97580202</c:v>
+                  <c:v>-0.9517</c:v>
                 </c:pt>
                 <c:pt idx="72">
-                  <c:v>-0.9556384</c:v>
+                  <c:v>-0.9729</c:v>
                 </c:pt>
                 <c:pt idx="73">
-                  <c:v>-0.92958295</c:v>
+                  <c:v>-0.988</c:v>
                 </c:pt>
                 <c:pt idx="74">
-                  <c:v>-0.89779631</c:v>
+                  <c:v>-0.9971</c:v>
                 </c:pt>
                 <c:pt idx="75">
-                  <c:v>-0.86047447</c:v>
+                  <c:v>-1.0</c:v>
                 </c:pt>
                 <c:pt idx="76">
-                  <c:v>-0.81784751</c:v>
+                  <c:v>-0.9968</c:v>
                 </c:pt>
                 <c:pt idx="77">
-                  <c:v>-0.77017824</c:v>
+                  <c:v>-0.9874</c:v>
                 </c:pt>
                 <c:pt idx="78">
-                  <c:v>-0.71776058</c:v>
+                  <c:v>-0.9719</c:v>
                 </c:pt>
                 <c:pt idx="79">
-                  <c:v>-0.66091768</c:v>
+                  <c:v>-0.9504</c:v>
                 </c:pt>
                 <c:pt idx="80">
-                  <c:v>-0.6</c:v>
+                  <c:v>-0.9231</c:v>
                 </c:pt>
                 <c:pt idx="81">
-                  <c:v>-0.53538312</c:v>
+                  <c:v>-0.8901</c:v>
                 </c:pt>
                 <c:pt idx="82">
-                  <c:v>-0.46746543</c:v>
+                  <c:v>-0.8515</c:v>
                 </c:pt>
                 <c:pt idx="83">
-                  <c:v>-0.39666566</c:v>
+                  <c:v>-0.8078</c:v>
                 </c:pt>
                 <c:pt idx="84">
-                  <c:v>-0.32342031</c:v>
+                  <c:v>-0.759</c:v>
                 </c:pt>
                 <c:pt idx="85">
-                  <c:v>-0.24818097</c:v>
+                  <c:v>-0.7056</c:v>
                 </c:pt>
                 <c:pt idx="86">
-                  <c:v>-0.17141151</c:v>
+                  <c:v>-0.6479</c:v>
                 </c:pt>
                 <c:pt idx="87">
-                  <c:v>-0.09358525</c:v>
+                  <c:v>-0.5861</c:v>
                 </c:pt>
                 <c:pt idx="88">
-                  <c:v>-0.01518199</c:v>
+                  <c:v>-0.5207</c:v>
                 </c:pt>
                 <c:pt idx="89">
-                  <c:v>0.06331486</c:v>
+                  <c:v>-0.4521</c:v>
                 </c:pt>
                 <c:pt idx="90">
-                  <c:v>0.14142136</c:v>
+                  <c:v>-0.3807</c:v>
                 </c:pt>
                 <c:pt idx="91">
-                  <c:v>0.21865594</c:v>
+                  <c:v>-0.307</c:v>
                 </c:pt>
                 <c:pt idx="92">
-                  <c:v>0.29454244</c:v>
+                  <c:v>-0.2314</c:v>
                 </c:pt>
                 <c:pt idx="93">
-                  <c:v>0.36861299</c:v>
+                  <c:v>-0.1544</c:v>
                 </c:pt>
                 <c:pt idx="94">
-                  <c:v>0.44041092</c:v>
+                  <c:v>-0.0764</c:v>
                 </c:pt>
                 <c:pt idx="95">
-                  <c:v>0.50949357</c:v>
+                  <c:v>0.0021</c:v>
                 </c:pt>
                 <c:pt idx="96">
-                  <c:v>0.57543502</c:v>
+                  <c:v>0.0805</c:v>
                 </c:pt>
                 <c:pt idx="97">
-                  <c:v>0.63782872</c:v>
+                  <c:v>0.1585</c:v>
                 </c:pt>
                 <c:pt idx="98">
-                  <c:v>0.69628999</c:v>
+                  <c:v>0.2355</c:v>
                 </c:pt>
                 <c:pt idx="99">
-                  <c:v>0.75045841</c:v>
+                  <c:v>0.311</c:v>
                 </c:pt>
                 <c:pt idx="100">
-                  <c:v>0.8</c:v>
+                  <c:v>0.3846</c:v>
                 </c:pt>
                 <c:pt idx="101">
-                  <c:v>0.84460932</c:v>
+                  <c:v>0.4559</c:v>
                 </c:pt>
                 <c:pt idx="102">
-                  <c:v>0.88401135</c:v>
+                  <c:v>0.5243</c:v>
                 </c:pt>
                 <c:pt idx="103">
-                  <c:v>0.91796315</c:v>
+                  <c:v>0.5895</c:v>
                 </c:pt>
                 <c:pt idx="104">
-                  <c:v>0.94625541</c:v>
+                  <c:v>0.651</c:v>
                 </c:pt>
                 <c:pt idx="105">
-                  <c:v>0.96871369</c:v>
+                  <c:v>0.7086</c:v>
                 </c:pt>
                 <c:pt idx="106">
-                  <c:v>0.98519952</c:v>
+                  <c:v>0.7618</c:v>
                 </c:pt>
                 <c:pt idx="107">
-                  <c:v>0.99561127</c:v>
+                  <c:v>0.8102</c:v>
                 </c:pt>
                 <c:pt idx="108">
-                  <c:v>0.99988475</c:v>
+                  <c:v>0.8537</c:v>
                 </c:pt>
                 <c:pt idx="109">
-                  <c:v>0.9979936</c:v>
+                  <c:v>0.892</c:v>
                 </c:pt>
                 <c:pt idx="110">
-                  <c:v>0.98994949</c:v>
+                  <c:v>0.9247</c:v>
                 </c:pt>
                 <c:pt idx="111">
-                  <c:v>0.97580202</c:v>
+                  <c:v>0.9517</c:v>
                 </c:pt>
                 <c:pt idx="112">
-                  <c:v>0.9556384</c:v>
+                  <c:v>0.9729</c:v>
                 </c:pt>
                 <c:pt idx="113">
-                  <c:v>0.92958295</c:v>
+                  <c:v>0.988</c:v>
                 </c:pt>
                 <c:pt idx="114">
-                  <c:v>0.89779631</c:v>
+                  <c:v>0.9971</c:v>
                 </c:pt>
                 <c:pt idx="115">
-                  <c:v>0.86047447</c:v>
+                  <c:v>1.0</c:v>
                 </c:pt>
                 <c:pt idx="116">
-                  <c:v>0.81784751</c:v>
+                  <c:v>0.9968</c:v>
                 </c:pt>
                 <c:pt idx="117">
-                  <c:v>0.77017824</c:v>
+                  <c:v>0.9874</c:v>
                 </c:pt>
                 <c:pt idx="118">
-                  <c:v>0.71776058</c:v>
+                  <c:v>0.9719</c:v>
                 </c:pt>
                 <c:pt idx="119">
-                  <c:v>0.66091768</c:v>
+                  <c:v>0.9504</c:v>
                 </c:pt>
                 <c:pt idx="120">
-                  <c:v>0.6</c:v>
+                  <c:v>0.9231</c:v>
                 </c:pt>
                 <c:pt idx="121">
-                  <c:v>0.53538312</c:v>
+                  <c:v>0.8901</c:v>
                 </c:pt>
                 <c:pt idx="122">
-                  <c:v>0.46746543</c:v>
+                  <c:v>0.8515</c:v>
                 </c:pt>
                 <c:pt idx="123">
-                  <c:v>0.39666566</c:v>
+                  <c:v>0.8078</c:v>
                 </c:pt>
                 <c:pt idx="124">
-                  <c:v>0.32342031</c:v>
+                  <c:v>0.759</c:v>
                 </c:pt>
                 <c:pt idx="125">
-                  <c:v>0.24818097</c:v>
+                  <c:v>0.7056</c:v>
                 </c:pt>
                 <c:pt idx="126">
-                  <c:v>0.17141151</c:v>
+                  <c:v>0.6479</c:v>
                 </c:pt>
                 <c:pt idx="127">
-                  <c:v>0.09358525</c:v>
+                  <c:v>0.5861</c:v>
                 </c:pt>
                 <c:pt idx="128">
-                  <c:v>0.01518199</c:v>
+                  <c:v>0.5207</c:v>
                 </c:pt>
                 <c:pt idx="129">
-                  <c:v>-0.06331486</c:v>
+                  <c:v>0.4521</c:v>
                 </c:pt>
                 <c:pt idx="130">
-                  <c:v>-0.14142136</c:v>
+                  <c:v>0.3807</c:v>
                 </c:pt>
                 <c:pt idx="131">
-                  <c:v>-0.21865594</c:v>
+                  <c:v>0.307</c:v>
                 </c:pt>
                 <c:pt idx="132">
-                  <c:v>-0.29454244</c:v>
+                  <c:v>0.2314</c:v>
                 </c:pt>
                 <c:pt idx="133">
-                  <c:v>-0.36861299</c:v>
+                  <c:v>0.1544</c:v>
                 </c:pt>
                 <c:pt idx="134">
-                  <c:v>-0.44041092</c:v>
+                  <c:v>0.0764</c:v>
                 </c:pt>
                 <c:pt idx="135">
-                  <c:v>-0.50949357</c:v>
+                  <c:v>-0.0021</c:v>
                 </c:pt>
                 <c:pt idx="136">
-                  <c:v>-0.57543502</c:v>
+                  <c:v>-0.0805</c:v>
                 </c:pt>
                 <c:pt idx="137">
-                  <c:v>-0.63782872</c:v>
+                  <c:v>-0.1585</c:v>
                 </c:pt>
                 <c:pt idx="138">
-                  <c:v>-0.69628999</c:v>
+                  <c:v>-0.2355</c:v>
                 </c:pt>
                 <c:pt idx="139">
-                  <c:v>-0.75045841</c:v>
+                  <c:v>-0.311</c:v>
                 </c:pt>
                 <c:pt idx="140">
-                  <c:v>-0.8</c:v>
+                  <c:v>-0.3846</c:v>
                 </c:pt>
                 <c:pt idx="141">
-                  <c:v>-0.84460932</c:v>
+                  <c:v>-0.4559</c:v>
                 </c:pt>
                 <c:pt idx="142">
-                  <c:v>-0.88401135</c:v>
+                  <c:v>-0.5243</c:v>
                 </c:pt>
                 <c:pt idx="143">
-                  <c:v>-0.91796315</c:v>
+                  <c:v>-0.5895</c:v>
                 </c:pt>
                 <c:pt idx="144">
-                  <c:v>-0.94625541</c:v>
+                  <c:v>-0.651</c:v>
                 </c:pt>
                 <c:pt idx="145">
-                  <c:v>-0.96871369</c:v>
+                  <c:v>-0.7086</c:v>
                 </c:pt>
                 <c:pt idx="146">
-                  <c:v>-0.98519952</c:v>
+                  <c:v>-0.7618</c:v>
                 </c:pt>
                 <c:pt idx="147">
-                  <c:v>-0.99561127</c:v>
+                  <c:v>-0.8102</c:v>
                 </c:pt>
                 <c:pt idx="148">
-                  <c:v>-0.99988475</c:v>
+                  <c:v>-0.8537</c:v>
                 </c:pt>
                 <c:pt idx="149">
-                  <c:v>-0.9979936</c:v>
+                  <c:v>-0.892</c:v>
                 </c:pt>
                 <c:pt idx="150">
-                  <c:v>-0.98994949</c:v>
+                  <c:v>-0.9247</c:v>
                 </c:pt>
                 <c:pt idx="151">
-                  <c:v>-0.97580202</c:v>
+                  <c:v>-0.9517</c:v>
                 </c:pt>
                 <c:pt idx="152">
-                  <c:v>-0.9556384</c:v>
+                  <c:v>-0.9729</c:v>
                 </c:pt>
                 <c:pt idx="153">
-                  <c:v>-0.92958295</c:v>
+                  <c:v>-0.988</c:v>
                 </c:pt>
                 <c:pt idx="154">
-                  <c:v>-0.89779631</c:v>
+                  <c:v>-0.9971</c:v>
                 </c:pt>
                 <c:pt idx="155">
-                  <c:v>-0.86047447</c:v>
+                  <c:v>-1.0</c:v>
                 </c:pt>
                 <c:pt idx="156">
-                  <c:v>-0.81784751</c:v>
+                  <c:v>-0.9968</c:v>
                 </c:pt>
                 <c:pt idx="157">
-                  <c:v>-0.77017824</c:v>
+                  <c:v>-0.9874</c:v>
                 </c:pt>
                 <c:pt idx="158">
-                  <c:v>-0.71776058</c:v>
+                  <c:v>-0.9719</c:v>
                 </c:pt>
                 <c:pt idx="159">
-                  <c:v>-0.66091768</c:v>
+                  <c:v>-0.9504</c:v>
                 </c:pt>
                 <c:pt idx="160">
-                  <c:v>-0.6</c:v>
+                  <c:v>-0.9231</c:v>
                 </c:pt>
               </c:numCache>
             </c:numRef>
@@ -11911,7 +11952,15 @@
           <c:idx val="0"/>
           <c:order val="0"/>
           <c:tx>
-            <c:v>Spänning u (normaliserad)</c:v>
+            <c:strRef>
+              <c:f>Sheet1!$B$1</c:f>
+              <c:strCache>
+                <c:ptCount val="1"/>
+                <c:pt idx="0">
+                  <c:v>u</c:v>
+                </c:pt>
+              </c:strCache>
+            </c:strRef>
           </c:tx>
           <c:spPr>
             <a:ln xmlns:a="http://schemas.openxmlformats.org/drawingml/2006/main" w="23813">
@@ -11925,12 +11974,12 @@
           </c:marker>
           <c:xVal>
             <c:numRef>
-              <c:f>'Chart Data'!$A$2:$A$162</c:f>
+              <c:f>Sheet1!$A$2:$A$162</c:f>
               <c:numCache>
                 <c:formatCode>General</c:formatCode>
                 <c:ptCount val="161"/>
                 <c:pt idx="0">
-                  <c:v>0</c:v>
+                  <c:v>0.0</c:v>
                 </c:pt>
                 <c:pt idx="1">
                   <c:v>0.25</c:v>
@@ -11942,7 +11991,7 @@
                   <c:v>0.75</c:v>
                 </c:pt>
                 <c:pt idx="4">
-                  <c:v>1</c:v>
+                  <c:v>1.0</c:v>
                 </c:pt>
                 <c:pt idx="5">
                   <c:v>1.25</c:v>
@@ -11954,7 +12003,7 @@
                   <c:v>1.75</c:v>
                 </c:pt>
                 <c:pt idx="8">
-                  <c:v>2</c:v>
+                  <c:v>2.0</c:v>
                 </c:pt>
                 <c:pt idx="9">
                   <c:v>2.25</c:v>
@@ -11966,7 +12015,7 @@
                   <c:v>2.75</c:v>
                 </c:pt>
                 <c:pt idx="12">
-                  <c:v>3</c:v>
+                  <c:v>3.0</c:v>
                 </c:pt>
                 <c:pt idx="13">
                   <c:v>3.25</c:v>
@@ -11978,7 +12027,7 @@
                   <c:v>3.75</c:v>
                 </c:pt>
                 <c:pt idx="16">
-                  <c:v>4</c:v>
+                  <c:v>4.0</c:v>
                 </c:pt>
                 <c:pt idx="17">
                   <c:v>4.25</c:v>
@@ -11990,7 +12039,7 @@
                   <c:v>4.75</c:v>
                 </c:pt>
                 <c:pt idx="20">
-                  <c:v>5</c:v>
+                  <c:v>5.0</c:v>
                 </c:pt>
                 <c:pt idx="21">
                   <c:v>5.25</c:v>
@@ -12002,7 +12051,7 @@
                   <c:v>5.75</c:v>
                 </c:pt>
                 <c:pt idx="24">
-                  <c:v>6</c:v>
+                  <c:v>6.0</c:v>
                 </c:pt>
                 <c:pt idx="25">
                   <c:v>6.25</c:v>
@@ -12014,7 +12063,7 @@
                   <c:v>6.75</c:v>
                 </c:pt>
                 <c:pt idx="28">
-                  <c:v>7</c:v>
+                  <c:v>7.0</c:v>
                 </c:pt>
                 <c:pt idx="29">
                   <c:v>7.25</c:v>
@@ -12026,7 +12075,7 @@
                   <c:v>7.75</c:v>
                 </c:pt>
                 <c:pt idx="32">
-                  <c:v>8</c:v>
+                  <c:v>8.0</c:v>
                 </c:pt>
                 <c:pt idx="33">
                   <c:v>8.25</c:v>
@@ -12038,7 +12087,7 @@
                   <c:v>8.75</c:v>
                 </c:pt>
                 <c:pt idx="36">
-                  <c:v>9</c:v>
+                  <c:v>9.0</c:v>
                 </c:pt>
                 <c:pt idx="37">
                   <c:v>9.25</c:v>
@@ -12050,7 +12099,7 @@
                   <c:v>9.75</c:v>
                 </c:pt>
                 <c:pt idx="40">
-                  <c:v>10</c:v>
+                  <c:v>10.0</c:v>
                 </c:pt>
                 <c:pt idx="41">
                   <c:v>10.25</c:v>
@@ -12062,7 +12111,7 @@
                   <c:v>10.75</c:v>
                 </c:pt>
                 <c:pt idx="44">
-                  <c:v>11</c:v>
+                  <c:v>11.0</c:v>
                 </c:pt>
                 <c:pt idx="45">
                   <c:v>11.25</c:v>
@@ -12074,7 +12123,7 @@
                   <c:v>11.75</c:v>
                 </c:pt>
                 <c:pt idx="48">
-                  <c:v>12</c:v>
+                  <c:v>12.0</c:v>
                 </c:pt>
                 <c:pt idx="49">
                   <c:v>12.25</c:v>
@@ -12086,7 +12135,7 @@
                   <c:v>12.75</c:v>
                 </c:pt>
                 <c:pt idx="52">
-                  <c:v>13</c:v>
+                  <c:v>13.0</c:v>
                 </c:pt>
                 <c:pt idx="53">
                   <c:v>13.25</c:v>
@@ -12098,7 +12147,7 @@
                   <c:v>13.75</c:v>
                 </c:pt>
                 <c:pt idx="56">
-                  <c:v>14</c:v>
+                  <c:v>14.0</c:v>
                 </c:pt>
                 <c:pt idx="57">
                   <c:v>14.25</c:v>
@@ -12110,7 +12159,7 @@
                   <c:v>14.75</c:v>
                 </c:pt>
                 <c:pt idx="60">
-                  <c:v>15</c:v>
+                  <c:v>15.0</c:v>
                 </c:pt>
                 <c:pt idx="61">
                   <c:v>15.25</c:v>
@@ -12122,7 +12171,7 @@
                   <c:v>15.75</c:v>
                 </c:pt>
                 <c:pt idx="64">
-                  <c:v>16</c:v>
+                  <c:v>16.0</c:v>
                 </c:pt>
                 <c:pt idx="65">
                   <c:v>16.25</c:v>
@@ -12134,7 +12183,7 @@
                   <c:v>16.75</c:v>
                 </c:pt>
                 <c:pt idx="68">
-                  <c:v>17</c:v>
+                  <c:v>17.0</c:v>
                 </c:pt>
                 <c:pt idx="69">
                   <c:v>17.25</c:v>
@@ -12146,7 +12195,7 @@
                   <c:v>17.75</c:v>
                 </c:pt>
                 <c:pt idx="72">
-                  <c:v>18</c:v>
+                  <c:v>18.0</c:v>
                 </c:pt>
                 <c:pt idx="73">
                   <c:v>18.25</c:v>
@@ -12158,7 +12207,7 @@
                   <c:v>18.75</c:v>
                 </c:pt>
                 <c:pt idx="76">
-                  <c:v>19</c:v>
+                  <c:v>19.0</c:v>
                 </c:pt>
                 <c:pt idx="77">
                   <c:v>19.25</c:v>
@@ -12170,7 +12219,7 @@
                   <c:v>19.75</c:v>
                 </c:pt>
                 <c:pt idx="80">
-                  <c:v>20</c:v>
+                  <c:v>20.0</c:v>
                 </c:pt>
                 <c:pt idx="81">
                   <c:v>20.25</c:v>
@@ -12182,7 +12231,7 @@
                   <c:v>20.75</c:v>
                 </c:pt>
                 <c:pt idx="84">
-                  <c:v>21</c:v>
+                  <c:v>21.0</c:v>
                 </c:pt>
                 <c:pt idx="85">
                   <c:v>21.25</c:v>
@@ -12194,7 +12243,7 @@
                   <c:v>21.75</c:v>
                 </c:pt>
                 <c:pt idx="88">
-                  <c:v>22</c:v>
+                  <c:v>22.0</c:v>
                 </c:pt>
                 <c:pt idx="89">
                   <c:v>22.25</c:v>
@@ -12206,7 +12255,7 @@
                   <c:v>22.75</c:v>
                 </c:pt>
                 <c:pt idx="92">
-                  <c:v>23</c:v>
+                  <c:v>23.0</c:v>
                 </c:pt>
                 <c:pt idx="93">
                   <c:v>23.25</c:v>
@@ -12218,7 +12267,7 @@
                   <c:v>23.75</c:v>
                 </c:pt>
                 <c:pt idx="96">
-                  <c:v>24</c:v>
+                  <c:v>24.0</c:v>
                 </c:pt>
                 <c:pt idx="97">
                   <c:v>24.25</c:v>
@@ -12230,7 +12279,7 @@
                   <c:v>24.75</c:v>
                 </c:pt>
                 <c:pt idx="100">
-                  <c:v>25</c:v>
+                  <c:v>25.0</c:v>
                 </c:pt>
                 <c:pt idx="101">
                   <c:v>25.25</c:v>
@@ -12242,7 +12291,7 @@
                   <c:v>25.75</c:v>
                 </c:pt>
                 <c:pt idx="104">
-                  <c:v>26</c:v>
+                  <c:v>26.0</c:v>
                 </c:pt>
                 <c:pt idx="105">
                   <c:v>26.25</c:v>
@@ -12254,7 +12303,7 @@
                   <c:v>26.75</c:v>
                 </c:pt>
                 <c:pt idx="108">
-                  <c:v>27</c:v>
+                  <c:v>27.0</c:v>
                 </c:pt>
                 <c:pt idx="109">
                   <c:v>27.25</c:v>
@@ -12266,7 +12315,7 @@
                   <c:v>27.75</c:v>
                 </c:pt>
                 <c:pt idx="112">
-                  <c:v>28</c:v>
+                  <c:v>28.0</c:v>
                 </c:pt>
                 <c:pt idx="113">
                   <c:v>28.25</c:v>
@@ -12278,7 +12327,7 @@
                   <c:v>28.75</c:v>
                 </c:pt>
                 <c:pt idx="116">
-                  <c:v>29</c:v>
+                  <c:v>29.0</c:v>
                 </c:pt>
                 <c:pt idx="117">
                   <c:v>29.25</c:v>
@@ -12290,7 +12339,7 @@
                   <c:v>29.75</c:v>
                 </c:pt>
                 <c:pt idx="120">
-                  <c:v>30</c:v>
+                  <c:v>30.0</c:v>
                 </c:pt>
                 <c:pt idx="121">
                   <c:v>30.25</c:v>
@@ -12302,7 +12351,7 @@
                   <c:v>30.75</c:v>
                 </c:pt>
                 <c:pt idx="124">
-                  <c:v>31</c:v>
+                  <c:v>31.0</c:v>
                 </c:pt>
                 <c:pt idx="125">
                   <c:v>31.25</c:v>
@@ -12314,7 +12363,7 @@
                   <c:v>31.75</c:v>
                 </c:pt>
                 <c:pt idx="128">
-                  <c:v>32</c:v>
+                  <c:v>32.0</c:v>
                 </c:pt>
                 <c:pt idx="129">
                   <c:v>32.25</c:v>
@@ -12326,7 +12375,7 @@
                   <c:v>32.75</c:v>
                 </c:pt>
                 <c:pt idx="132">
-                  <c:v>33</c:v>
+                  <c:v>33.0</c:v>
                 </c:pt>
                 <c:pt idx="133">
                   <c:v>33.25</c:v>
@@ -12338,7 +12387,7 @@
                   <c:v>33.75</c:v>
                 </c:pt>
                 <c:pt idx="136">
-                  <c:v>34</c:v>
+                  <c:v>34.0</c:v>
                 </c:pt>
                 <c:pt idx="137">
                   <c:v>34.25</c:v>
@@ -12350,7 +12399,7 @@
                   <c:v>34.75</c:v>
                 </c:pt>
                 <c:pt idx="140">
-                  <c:v>35</c:v>
+                  <c:v>35.0</c:v>
                 </c:pt>
                 <c:pt idx="141">
                   <c:v>35.25</c:v>
@@ -12362,7 +12411,7 @@
                   <c:v>35.75</c:v>
                 </c:pt>
                 <c:pt idx="144">
-                  <c:v>36</c:v>
+                  <c:v>36.0</c:v>
                 </c:pt>
                 <c:pt idx="145">
                   <c:v>36.25</c:v>
@@ -12374,7 +12423,7 @@
                   <c:v>36.75</c:v>
                 </c:pt>
                 <c:pt idx="148">
-                  <c:v>37</c:v>
+                  <c:v>37.0</c:v>
                 </c:pt>
                 <c:pt idx="149">
                   <c:v>37.25</c:v>
@@ -12386,7 +12435,7 @@
                   <c:v>37.75</c:v>
                 </c:pt>
                 <c:pt idx="152">
-                  <c:v>38</c:v>
+                  <c:v>38.0</c:v>
                 </c:pt>
                 <c:pt idx="153">
                   <c:v>38.25</c:v>
@@ -12398,7 +12447,7 @@
                   <c:v>38.75</c:v>
                 </c:pt>
                 <c:pt idx="156">
-                  <c:v>39</c:v>
+                  <c:v>39.0</c:v>
                 </c:pt>
                 <c:pt idx="157">
                   <c:v>39.25</c:v>
@@ -12410,499 +12459,499 @@
                   <c:v>39.75</c:v>
                 </c:pt>
                 <c:pt idx="160">
-                  <c:v>40</c:v>
+                  <c:v>40.0</c:v>
                 </c:pt>
               </c:numCache>
             </c:numRef>
           </c:xVal>
           <c:yVal>
             <c:numRef>
-              <c:f>'Chart Data'!$B$2:$B$162</c:f>
+              <c:f>Sheet1!$B$2:$B$162</c:f>
               <c:numCache>
                 <c:formatCode>General</c:formatCode>
                 <c:ptCount val="161"/>
                 <c:pt idx="0">
-                  <c:v>0</c:v>
+                  <c:v>0.0</c:v>
                 </c:pt>
                 <c:pt idx="1">
-                  <c:v>0.0784591</c:v>
+                  <c:v>0.0785</c:v>
                 </c:pt>
                 <c:pt idx="2">
-                  <c:v>0.15643447</c:v>
+                  <c:v>0.1564</c:v>
                 </c:pt>
                 <c:pt idx="3">
-                  <c:v>0.23344536</c:v>
+                  <c:v>0.2334</c:v>
                 </c:pt>
                 <c:pt idx="4">
-                  <c:v>0.30901699</c:v>
+                  <c:v>0.309</c:v>
                 </c:pt>
                 <c:pt idx="5">
-                  <c:v>0.38268343</c:v>
+                  <c:v>0.3827</c:v>
                 </c:pt>
                 <c:pt idx="6">
-                  <c:v>0.4539905</c:v>
+                  <c:v>0.454</c:v>
                 </c:pt>
                 <c:pt idx="7">
-                  <c:v>0.52249856</c:v>
+                  <c:v>0.5225</c:v>
                 </c:pt>
                 <c:pt idx="8">
-                  <c:v>0.58778525</c:v>
+                  <c:v>0.5878</c:v>
                 </c:pt>
                 <c:pt idx="9">
-                  <c:v>0.64944805</c:v>
+                  <c:v>0.6494</c:v>
                 </c:pt>
                 <c:pt idx="10">
-                  <c:v>0.70710678</c:v>
+                  <c:v>0.7071</c:v>
                 </c:pt>
                 <c:pt idx="11">
-                  <c:v>0.76040597</c:v>
+                  <c:v>0.7604</c:v>
                 </c:pt>
                 <c:pt idx="12">
-                  <c:v>0.80901699</c:v>
+                  <c:v>0.809</c:v>
                 </c:pt>
                 <c:pt idx="13">
-                  <c:v>0.85264016</c:v>
+                  <c:v>0.8526</c:v>
                 </c:pt>
                 <c:pt idx="14">
-                  <c:v>0.89100652</c:v>
+                  <c:v>0.891</c:v>
                 </c:pt>
                 <c:pt idx="15">
-                  <c:v>0.92387953</c:v>
+                  <c:v>0.9239</c:v>
                 </c:pt>
                 <c:pt idx="16">
-                  <c:v>0.95105652</c:v>
+                  <c:v>0.9511</c:v>
                 </c:pt>
                 <c:pt idx="17">
-                  <c:v>0.97236992</c:v>
+                  <c:v>0.9724</c:v>
                 </c:pt>
                 <c:pt idx="18">
-                  <c:v>0.98768834</c:v>
+                  <c:v>0.9877</c:v>
                 </c:pt>
                 <c:pt idx="19">
-                  <c:v>0.99691733</c:v>
+                  <c:v>0.9969</c:v>
                 </c:pt>
                 <c:pt idx="20">
-                  <c:v>1</c:v>
+                  <c:v>1.0</c:v>
                 </c:pt>
                 <c:pt idx="21">
-                  <c:v>0.99691733</c:v>
+                  <c:v>0.9969</c:v>
                 </c:pt>
                 <c:pt idx="22">
-                  <c:v>0.98768834</c:v>
+                  <c:v>0.9877</c:v>
                 </c:pt>
                 <c:pt idx="23">
-                  <c:v>0.97236992</c:v>
+                  <c:v>0.9724</c:v>
                 </c:pt>
                 <c:pt idx="24">
-                  <c:v>0.95105652</c:v>
+                  <c:v>0.9511</c:v>
                 </c:pt>
                 <c:pt idx="25">
-                  <c:v>0.92387953</c:v>
+                  <c:v>0.9239</c:v>
                 </c:pt>
                 <c:pt idx="26">
-                  <c:v>0.89100652</c:v>
+                  <c:v>0.891</c:v>
                 </c:pt>
                 <c:pt idx="27">
-                  <c:v>0.85264016</c:v>
+                  <c:v>0.8526</c:v>
                 </c:pt>
                 <c:pt idx="28">
-                  <c:v>0.80901699</c:v>
+                  <c:v>0.809</c:v>
                 </c:pt>
                 <c:pt idx="29">
-                  <c:v>0.76040597</c:v>
+                  <c:v>0.7604</c:v>
                 </c:pt>
                 <c:pt idx="30">
-                  <c:v>0.70710678</c:v>
+                  <c:v>0.7071</c:v>
                 </c:pt>
                 <c:pt idx="31">
-                  <c:v>0.64944805</c:v>
+                  <c:v>0.6494</c:v>
                 </c:pt>
                 <c:pt idx="32">
-                  <c:v>0.58778525</c:v>
+                  <c:v>0.5878</c:v>
                 </c:pt>
                 <c:pt idx="33">
-                  <c:v>0.52249856</c:v>
+                  <c:v>0.5225</c:v>
                 </c:pt>
                 <c:pt idx="34">
-                  <c:v>0.4539905</c:v>
+                  <c:v>0.454</c:v>
                 </c:pt>
                 <c:pt idx="35">
-                  <c:v>0.38268343</c:v>
+                  <c:v>0.3827</c:v>
                 </c:pt>
                 <c:pt idx="36">
-                  <c:v>0.30901699</c:v>
+                  <c:v>0.309</c:v>
                 </c:pt>
                 <c:pt idx="37">
-                  <c:v>0.23344536</c:v>
+                  <c:v>0.2334</c:v>
                 </c:pt>
                 <c:pt idx="38">
-                  <c:v>0.15643447</c:v>
+                  <c:v>0.1564</c:v>
                 </c:pt>
                 <c:pt idx="39">
-                  <c:v>0.0784591</c:v>
+                  <c:v>0.0785</c:v>
                 </c:pt>
                 <c:pt idx="40">
-                  <c:v>0</c:v>
+                  <c:v>0.0</c:v>
                 </c:pt>
                 <c:pt idx="41">
-                  <c:v>-0.0784591</c:v>
+                  <c:v>-0.0785</c:v>
                 </c:pt>
                 <c:pt idx="42">
-                  <c:v>-0.15643447</c:v>
+                  <c:v>-0.1564</c:v>
                 </c:pt>
                 <c:pt idx="43">
-                  <c:v>-0.23344536</c:v>
+                  <c:v>-0.2334</c:v>
                 </c:pt>
                 <c:pt idx="44">
-                  <c:v>-0.30901699</c:v>
+                  <c:v>-0.309</c:v>
                 </c:pt>
                 <c:pt idx="45">
-                  <c:v>-0.38268343</c:v>
+                  <c:v>-0.3827</c:v>
                 </c:pt>
                 <c:pt idx="46">
-                  <c:v>-0.4539905</c:v>
+                  <c:v>-0.454</c:v>
                 </c:pt>
                 <c:pt idx="47">
-                  <c:v>-0.52249856</c:v>
+                  <c:v>-0.5225</c:v>
                 </c:pt>
                 <c:pt idx="48">
-                  <c:v>-0.58778525</c:v>
+                  <c:v>-0.5878</c:v>
                 </c:pt>
                 <c:pt idx="49">
-                  <c:v>-0.64944805</c:v>
+                  <c:v>-0.6494</c:v>
                 </c:pt>
                 <c:pt idx="50">
-                  <c:v>-0.70710678</c:v>
+                  <c:v>-0.7071</c:v>
                 </c:pt>
                 <c:pt idx="51">
-                  <c:v>-0.76040597</c:v>
+                  <c:v>-0.7604</c:v>
                 </c:pt>
                 <c:pt idx="52">
-                  <c:v>-0.80901699</c:v>
+                  <c:v>-0.809</c:v>
                 </c:pt>
                 <c:pt idx="53">
-                  <c:v>-0.85264016</c:v>
+                  <c:v>-0.8526</c:v>
                 </c:pt>
                 <c:pt idx="54">
-                  <c:v>-0.89100652</c:v>
+                  <c:v>-0.891</c:v>
                 </c:pt>
                 <c:pt idx="55">
-                  <c:v>-0.92387953</c:v>
+                  <c:v>-0.9239</c:v>
                 </c:pt>
                 <c:pt idx="56">
-                  <c:v>-0.95105652</c:v>
+                  <c:v>-0.9511</c:v>
                 </c:pt>
                 <c:pt idx="57">
-                  <c:v>-0.97236992</c:v>
+                  <c:v>-0.9724</c:v>
                 </c:pt>
                 <c:pt idx="58">
-                  <c:v>-0.98768834</c:v>
+                  <c:v>-0.9877</c:v>
                 </c:pt>
                 <c:pt idx="59">
-                  <c:v>-0.99691733</c:v>
+                  <c:v>-0.9969</c:v>
                 </c:pt>
                 <c:pt idx="60">
-                  <c:v>-1</c:v>
+                  <c:v>-1.0</c:v>
                 </c:pt>
                 <c:pt idx="61">
-                  <c:v>-0.99691733</c:v>
+                  <c:v>-0.9969</c:v>
                 </c:pt>
                 <c:pt idx="62">
-                  <c:v>-0.98768834</c:v>
+                  <c:v>-0.9877</c:v>
                 </c:pt>
                 <c:pt idx="63">
-                  <c:v>-0.97236992</c:v>
+                  <c:v>-0.9724</c:v>
                 </c:pt>
                 <c:pt idx="64">
-                  <c:v>-0.95105652</c:v>
+                  <c:v>-0.9511</c:v>
                 </c:pt>
                 <c:pt idx="65">
-                  <c:v>-0.92387953</c:v>
+                  <c:v>-0.9239</c:v>
                 </c:pt>
                 <c:pt idx="66">
-                  <c:v>-0.89100652</c:v>
+                  <c:v>-0.891</c:v>
                 </c:pt>
                 <c:pt idx="67">
-                  <c:v>-0.85264016</c:v>
+                  <c:v>-0.8526</c:v>
                 </c:pt>
                 <c:pt idx="68">
-                  <c:v>-0.80901699</c:v>
+                  <c:v>-0.809</c:v>
                 </c:pt>
                 <c:pt idx="69">
-                  <c:v>-0.76040597</c:v>
+                  <c:v>-0.7604</c:v>
                 </c:pt>
                 <c:pt idx="70">
-                  <c:v>-0.70710678</c:v>
+                  <c:v>-0.7071</c:v>
                 </c:pt>
                 <c:pt idx="71">
-                  <c:v>-0.64944805</c:v>
+                  <c:v>-0.6494</c:v>
                 </c:pt>
                 <c:pt idx="72">
-                  <c:v>-0.58778525</c:v>
+                  <c:v>-0.5878</c:v>
                 </c:pt>
                 <c:pt idx="73">
-                  <c:v>-0.52249856</c:v>
+                  <c:v>-0.5225</c:v>
                 </c:pt>
                 <c:pt idx="74">
-                  <c:v>-0.4539905</c:v>
+                  <c:v>-0.454</c:v>
                 </c:pt>
                 <c:pt idx="75">
-                  <c:v>-0.38268343</c:v>
+                  <c:v>-0.3827</c:v>
                 </c:pt>
                 <c:pt idx="76">
-                  <c:v>-0.30901699</c:v>
+                  <c:v>-0.309</c:v>
                 </c:pt>
                 <c:pt idx="77">
-                  <c:v>-0.23344536</c:v>
+                  <c:v>-0.2334</c:v>
                 </c:pt>
                 <c:pt idx="78">
-                  <c:v>-0.15643447</c:v>
+                  <c:v>-0.1564</c:v>
                 </c:pt>
                 <c:pt idx="79">
-                  <c:v>-0.0784591</c:v>
+                  <c:v>-0.0785</c:v>
                 </c:pt>
                 <c:pt idx="80">
-                  <c:v>-0</c:v>
+                  <c:v>-0.0</c:v>
                 </c:pt>
                 <c:pt idx="81">
-                  <c:v>0.0784591</c:v>
+                  <c:v>0.0785</c:v>
                 </c:pt>
                 <c:pt idx="82">
-                  <c:v>0.15643447</c:v>
+                  <c:v>0.1564</c:v>
                 </c:pt>
                 <c:pt idx="83">
-                  <c:v>0.23344536</c:v>
+                  <c:v>0.2334</c:v>
                 </c:pt>
                 <c:pt idx="84">
-                  <c:v>0.30901699</c:v>
+                  <c:v>0.309</c:v>
                 </c:pt>
                 <c:pt idx="85">
-                  <c:v>0.38268343</c:v>
+                  <c:v>0.3827</c:v>
                 </c:pt>
                 <c:pt idx="86">
-                  <c:v>0.4539905</c:v>
+                  <c:v>0.454</c:v>
                 </c:pt>
                 <c:pt idx="87">
-                  <c:v>0.52249856</c:v>
+                  <c:v>0.5225</c:v>
                 </c:pt>
                 <c:pt idx="88">
-                  <c:v>0.58778525</c:v>
+                  <c:v>0.5878</c:v>
                 </c:pt>
                 <c:pt idx="89">
-                  <c:v>0.64944805</c:v>
+                  <c:v>0.6494</c:v>
                 </c:pt>
                 <c:pt idx="90">
-                  <c:v>0.70710678</c:v>
+                  <c:v>0.7071</c:v>
                 </c:pt>
                 <c:pt idx="91">
-                  <c:v>0.76040597</c:v>
+                  <c:v>0.7604</c:v>
                 </c:pt>
                 <c:pt idx="92">
-                  <c:v>0.80901699</c:v>
+                  <c:v>0.809</c:v>
                 </c:pt>
                 <c:pt idx="93">
-                  <c:v>0.85264016</c:v>
+                  <c:v>0.8526</c:v>
                 </c:pt>
                 <c:pt idx="94">
-                  <c:v>0.89100652</c:v>
+                  <c:v>0.891</c:v>
                 </c:pt>
                 <c:pt idx="95">
-                  <c:v>0.92387953</c:v>
+                  <c:v>0.9239</c:v>
                 </c:pt>
                 <c:pt idx="96">
-                  <c:v>0.95105652</c:v>
+                  <c:v>0.9511</c:v>
                 </c:pt>
                 <c:pt idx="97">
-                  <c:v>0.97236992</c:v>
+                  <c:v>0.9724</c:v>
                 </c:pt>
                 <c:pt idx="98">
-                  <c:v>0.98768834</c:v>
+                  <c:v>0.9877</c:v>
                 </c:pt>
                 <c:pt idx="99">
-                  <c:v>0.99691733</c:v>
+                  <c:v>0.9969</c:v>
                 </c:pt>
                 <c:pt idx="100">
-                  <c:v>1</c:v>
+                  <c:v>1.0</c:v>
                 </c:pt>
                 <c:pt idx="101">
-                  <c:v>0.99691733</c:v>
+                  <c:v>0.9969</c:v>
                 </c:pt>
                 <c:pt idx="102">
-                  <c:v>0.98768834</c:v>
+                  <c:v>0.9877</c:v>
                 </c:pt>
                 <c:pt idx="103">
-                  <c:v>0.97236992</c:v>
+                  <c:v>0.9724</c:v>
                 </c:pt>
                 <c:pt idx="104">
-                  <c:v>0.95105652</c:v>
+                  <c:v>0.9511</c:v>
                 </c:pt>
                 <c:pt idx="105">
-                  <c:v>0.92387953</c:v>
+                  <c:v>0.9239</c:v>
                 </c:pt>
                 <c:pt idx="106">
-                  <c:v>0.89100652</c:v>
+                  <c:v>0.891</c:v>
                 </c:pt>
                 <c:pt idx="107">
-                  <c:v>0.85264016</c:v>
+                  <c:v>0.8526</c:v>
                 </c:pt>
                 <c:pt idx="108">
-                  <c:v>0.80901699</c:v>
+                  <c:v>0.809</c:v>
                 </c:pt>
                 <c:pt idx="109">
-                  <c:v>0.76040597</c:v>
+                  <c:v>0.7604</c:v>
                 </c:pt>
                 <c:pt idx="110">
-                  <c:v>0.70710678</c:v>
+                  <c:v>0.7071</c:v>
                 </c:pt>
                 <c:pt idx="111">
-                  <c:v>0.64944805</c:v>
+                  <c:v>0.6494</c:v>
                 </c:pt>
                 <c:pt idx="112">
-                  <c:v>0.58778525</c:v>
+                  <c:v>0.5878</c:v>
                 </c:pt>
                 <c:pt idx="113">
-                  <c:v>0.52249856</c:v>
+                  <c:v>0.5225</c:v>
                 </c:pt>
                 <c:pt idx="114">
-                  <c:v>0.4539905</c:v>
+                  <c:v>0.454</c:v>
                 </c:pt>
                 <c:pt idx="115">
-                  <c:v>0.38268343</c:v>
+                  <c:v>0.3827</c:v>
                 </c:pt>
                 <c:pt idx="116">
-                  <c:v>0.30901699</c:v>
+                  <c:v>0.309</c:v>
                 </c:pt>
                 <c:pt idx="117">
-                  <c:v>0.23344536</c:v>
+                  <c:v>0.2334</c:v>
                 </c:pt>
                 <c:pt idx="118">
-                  <c:v>0.15643447</c:v>
+                  <c:v>0.1564</c:v>
                 </c:pt>
                 <c:pt idx="119">
-                  <c:v>0.0784591</c:v>
+                  <c:v>0.0785</c:v>
                 </c:pt>
                 <c:pt idx="120">
-                  <c:v>0</c:v>
+                  <c:v>0.0</c:v>
                 </c:pt>
                 <c:pt idx="121">
-                  <c:v>-0.0784591</c:v>
+                  <c:v>-0.0785</c:v>
                 </c:pt>
                 <c:pt idx="122">
-                  <c:v>-0.15643447</c:v>
+                  <c:v>-0.1564</c:v>
                 </c:pt>
                 <c:pt idx="123">
-                  <c:v>-0.23344536</c:v>
+                  <c:v>-0.2334</c:v>
                 </c:pt>
                 <c:pt idx="124">
-                  <c:v>-0.30901699</c:v>
+                  <c:v>-0.309</c:v>
                 </c:pt>
                 <c:pt idx="125">
-                  <c:v>-0.38268343</c:v>
+                  <c:v>-0.3827</c:v>
                 </c:pt>
                 <c:pt idx="126">
-                  <c:v>-0.4539905</c:v>
+                  <c:v>-0.454</c:v>
                 </c:pt>
                 <c:pt idx="127">
-                  <c:v>-0.52249856</c:v>
+                  <c:v>-0.5225</c:v>
                 </c:pt>
                 <c:pt idx="128">
-                  <c:v>-0.58778525</c:v>
+                  <c:v>-0.5878</c:v>
                 </c:pt>
                 <c:pt idx="129">
-                  <c:v>-0.64944805</c:v>
+                  <c:v>-0.6494</c:v>
                 </c:pt>
                 <c:pt idx="130">
-                  <c:v>-0.70710678</c:v>
+                  <c:v>-0.7071</c:v>
                 </c:pt>
                 <c:pt idx="131">
-                  <c:v>-0.76040597</c:v>
+                  <c:v>-0.7604</c:v>
                 </c:pt>
                 <c:pt idx="132">
-                  <c:v>-0.80901699</c:v>
+                  <c:v>-0.809</c:v>
                 </c:pt>
                 <c:pt idx="133">
-                  <c:v>-0.85264016</c:v>
+                  <c:v>-0.8526</c:v>
                 </c:pt>
                 <c:pt idx="134">
-                  <c:v>-0.89100652</c:v>
+                  <c:v>-0.891</c:v>
                 </c:pt>
                 <c:pt idx="135">
-                  <c:v>-0.92387953</c:v>
+                  <c:v>-0.9239</c:v>
                 </c:pt>
                 <c:pt idx="136">
-                  <c:v>-0.95105652</c:v>
+                  <c:v>-0.9511</c:v>
                 </c:pt>
                 <c:pt idx="137">
-                  <c:v>-0.97236992</c:v>
+                  <c:v>-0.9724</c:v>
                 </c:pt>
                 <c:pt idx="138">
-                  <c:v>-0.98768834</c:v>
+                  <c:v>-0.9877</c:v>
                 </c:pt>
                 <c:pt idx="139">
-                  <c:v>-0.99691733</c:v>
+                  <c:v>-0.9969</c:v>
                 </c:pt>
                 <c:pt idx="140">
-                  <c:v>-1</c:v>
+                  <c:v>-1.0</c:v>
                 </c:pt>
                 <c:pt idx="141">
-                  <c:v>-0.99691733</c:v>
+                  <c:v>-0.9969</c:v>
                 </c:pt>
                 <c:pt idx="142">
-                  <c:v>-0.98768834</c:v>
+                  <c:v>-0.9877</c:v>
                 </c:pt>
                 <c:pt idx="143">
-                  <c:v>-0.97236992</c:v>
+                  <c:v>-0.9724</c:v>
                 </c:pt>
                 <c:pt idx="144">
-                  <c:v>-0.95105652</c:v>
+                  <c:v>-0.9511</c:v>
                 </c:pt>
                 <c:pt idx="145">
-                  <c:v>-0.92387953</c:v>
+                  <c:v>-0.9239</c:v>
                 </c:pt>
                 <c:pt idx="146">
-                  <c:v>-0.89100652</c:v>
+                  <c:v>-0.891</c:v>
                 </c:pt>
                 <c:pt idx="147">
-                  <c:v>-0.85264016</c:v>
+                  <c:v>-0.8526</c:v>
                 </c:pt>
                 <c:pt idx="148">
-                  <c:v>-0.80901699</c:v>
+                  <c:v>-0.809</c:v>
                 </c:pt>
                 <c:pt idx="149">
-                  <c:v>-0.76040597</c:v>
+                  <c:v>-0.7604</c:v>
                 </c:pt>
                 <c:pt idx="150">
-                  <c:v>-0.70710678</c:v>
+                  <c:v>-0.7071</c:v>
                 </c:pt>
                 <c:pt idx="151">
-                  <c:v>-0.64944805</c:v>
+                  <c:v>-0.6494</c:v>
                 </c:pt>
                 <c:pt idx="152">
-                  <c:v>-0.58778525</c:v>
+                  <c:v>-0.5878</c:v>
                 </c:pt>
                 <c:pt idx="153">
-                  <c:v>-0.52249856</c:v>
+                  <c:v>-0.5225</c:v>
                 </c:pt>
                 <c:pt idx="154">
-                  <c:v>-0.4539905</c:v>
+                  <c:v>-0.454</c:v>
                 </c:pt>
                 <c:pt idx="155">
-                  <c:v>-0.38268343</c:v>
+                  <c:v>-0.3827</c:v>
                 </c:pt>
                 <c:pt idx="156">
-                  <c:v>-0.30901699</c:v>
+                  <c:v>-0.309</c:v>
                 </c:pt>
                 <c:pt idx="157">
-                  <c:v>-0.23344536</c:v>
+                  <c:v>-0.2334</c:v>
                 </c:pt>
                 <c:pt idx="158">
-                  <c:v>-0.15643447</c:v>
+                  <c:v>-0.1564</c:v>
                 </c:pt>
                 <c:pt idx="159">
-                  <c:v>-0.0784591</c:v>
+                  <c:v>-0.0785</c:v>
                 </c:pt>
                 <c:pt idx="160">
-                  <c:v>-0</c:v>
+                  <c:v>-0.0</c:v>
                 </c:pt>
               </c:numCache>
             </c:numRef>
@@ -12912,7 +12961,15 @@
           <c:idx val="1"/>
           <c:order val="1"/>
           <c:tx>
-            <c:v>Ström i (normaliserad)</c:v>
+            <c:strRef>
+              <c:f>Sheet1!$B$164</c:f>
+              <c:strCache>
+                <c:ptCount val="1"/>
+                <c:pt idx="0">
+                  <c:v>i</c:v>
+                </c:pt>
+              </c:strCache>
+            </c:strRef>
           </c:tx>
           <c:spPr>
             <a:ln xmlns:a="http://schemas.openxmlformats.org/drawingml/2006/main" w="23813">
@@ -12926,12 +12983,12 @@
           </c:marker>
           <c:xVal>
             <c:numRef>
-              <c:f>'Chart Data'!$C$2:$C$162</c:f>
+              <c:f>Sheet1!$A$165:$A$325</c:f>
               <c:numCache>
                 <c:formatCode>General</c:formatCode>
                 <c:ptCount val="161"/>
                 <c:pt idx="0">
-                  <c:v>0</c:v>
+                  <c:v>0.0</c:v>
                 </c:pt>
                 <c:pt idx="1">
                   <c:v>0.25</c:v>
@@ -12943,7 +13000,7 @@
                   <c:v>0.75</c:v>
                 </c:pt>
                 <c:pt idx="4">
-                  <c:v>1</c:v>
+                  <c:v>1.0</c:v>
                 </c:pt>
                 <c:pt idx="5">
                   <c:v>1.25</c:v>
@@ -12955,7 +13012,7 @@
                   <c:v>1.75</c:v>
                 </c:pt>
                 <c:pt idx="8">
-                  <c:v>2</c:v>
+                  <c:v>2.0</c:v>
                 </c:pt>
                 <c:pt idx="9">
                   <c:v>2.25</c:v>
@@ -12967,7 +13024,7 @@
                   <c:v>2.75</c:v>
                 </c:pt>
                 <c:pt idx="12">
-                  <c:v>3</c:v>
+                  <c:v>3.0</c:v>
                 </c:pt>
                 <c:pt idx="13">
                   <c:v>3.25</c:v>
@@ -12979,7 +13036,7 @@
                   <c:v>3.75</c:v>
                 </c:pt>
                 <c:pt idx="16">
-                  <c:v>4</c:v>
+                  <c:v>4.0</c:v>
                 </c:pt>
                 <c:pt idx="17">
                   <c:v>4.25</c:v>
@@ -12991,7 +13048,7 @@
                   <c:v>4.75</c:v>
                 </c:pt>
                 <c:pt idx="20">
-                  <c:v>5</c:v>
+                  <c:v>5.0</c:v>
                 </c:pt>
                 <c:pt idx="21">
                   <c:v>5.25</c:v>
@@ -13003,7 +13060,7 @@
                   <c:v>5.75</c:v>
                 </c:pt>
                 <c:pt idx="24">
-                  <c:v>6</c:v>
+                  <c:v>6.0</c:v>
                 </c:pt>
                 <c:pt idx="25">
                   <c:v>6.25</c:v>
@@ -13015,7 +13072,7 @@
                   <c:v>6.75</c:v>
                 </c:pt>
                 <c:pt idx="28">
-                  <c:v>7</c:v>
+                  <c:v>7.0</c:v>
                 </c:pt>
                 <c:pt idx="29">
                   <c:v>7.25</c:v>
@@ -13027,7 +13084,7 @@
                   <c:v>7.75</c:v>
                 </c:pt>
                 <c:pt idx="32">
-                  <c:v>8</c:v>
+                  <c:v>8.0</c:v>
                 </c:pt>
                 <c:pt idx="33">
                   <c:v>8.25</c:v>
@@ -13039,7 +13096,7 @@
                   <c:v>8.75</c:v>
                 </c:pt>
                 <c:pt idx="36">
-                  <c:v>9</c:v>
+                  <c:v>9.0</c:v>
                 </c:pt>
                 <c:pt idx="37">
                   <c:v>9.25</c:v>
@@ -13051,7 +13108,7 @@
                   <c:v>9.75</c:v>
                 </c:pt>
                 <c:pt idx="40">
-                  <c:v>10</c:v>
+                  <c:v>10.0</c:v>
                 </c:pt>
                 <c:pt idx="41">
                   <c:v>10.25</c:v>
@@ -13063,7 +13120,7 @@
                   <c:v>10.75</c:v>
                 </c:pt>
                 <c:pt idx="44">
-                  <c:v>11</c:v>
+                  <c:v>11.0</c:v>
                 </c:pt>
                 <c:pt idx="45">
                   <c:v>11.25</c:v>
@@ -13075,7 +13132,7 @@
                   <c:v>11.75</c:v>
                 </c:pt>
                 <c:pt idx="48">
-                  <c:v>12</c:v>
+                  <c:v>12.0</c:v>
                 </c:pt>
                 <c:pt idx="49">
                   <c:v>12.25</c:v>
@@ -13087,7 +13144,7 @@
                   <c:v>12.75</c:v>
                 </c:pt>
                 <c:pt idx="52">
-                  <c:v>13</c:v>
+                  <c:v>13.0</c:v>
                 </c:pt>
                 <c:pt idx="53">
                   <c:v>13.25</c:v>
@@ -13099,7 +13156,7 @@
                   <c:v>13.75</c:v>
                 </c:pt>
                 <c:pt idx="56">
-                  <c:v>14</c:v>
+                  <c:v>14.0</c:v>
                 </c:pt>
                 <c:pt idx="57">
                   <c:v>14.25</c:v>
@@ -13111,7 +13168,7 @@
                   <c:v>14.75</c:v>
                 </c:pt>
                 <c:pt idx="60">
-                  <c:v>15</c:v>
+                  <c:v>15.0</c:v>
                 </c:pt>
                 <c:pt idx="61">
                   <c:v>15.25</c:v>
@@ -13123,7 +13180,7 @@
                   <c:v>15.75</c:v>
                 </c:pt>
                 <c:pt idx="64">
-                  <c:v>16</c:v>
+                  <c:v>16.0</c:v>
                 </c:pt>
                 <c:pt idx="65">
                   <c:v>16.25</c:v>
@@ -13135,7 +13192,7 @@
                   <c:v>16.75</c:v>
                 </c:pt>
                 <c:pt idx="68">
-                  <c:v>17</c:v>
+                  <c:v>17.0</c:v>
                 </c:pt>
                 <c:pt idx="69">
                   <c:v>17.25</c:v>
@@ -13147,7 +13204,7 @@
                   <c:v>17.75</c:v>
                 </c:pt>
                 <c:pt idx="72">
-                  <c:v>18</c:v>
+                  <c:v>18.0</c:v>
                 </c:pt>
                 <c:pt idx="73">
                   <c:v>18.25</c:v>
@@ -13159,7 +13216,7 @@
                   <c:v>18.75</c:v>
                 </c:pt>
                 <c:pt idx="76">
-                  <c:v>19</c:v>
+                  <c:v>19.0</c:v>
                 </c:pt>
                 <c:pt idx="77">
                   <c:v>19.25</c:v>
@@ -13171,7 +13228,7 @@
                   <c:v>19.75</c:v>
                 </c:pt>
                 <c:pt idx="80">
-                  <c:v>20</c:v>
+                  <c:v>20.0</c:v>
                 </c:pt>
                 <c:pt idx="81">
                   <c:v>20.25</c:v>
@@ -13183,7 +13240,7 @@
                   <c:v>20.75</c:v>
                 </c:pt>
                 <c:pt idx="84">
-                  <c:v>21</c:v>
+                  <c:v>21.0</c:v>
                 </c:pt>
                 <c:pt idx="85">
                   <c:v>21.25</c:v>
@@ -13195,7 +13252,7 @@
                   <c:v>21.75</c:v>
                 </c:pt>
                 <c:pt idx="88">
-                  <c:v>22</c:v>
+                  <c:v>22.0</c:v>
                 </c:pt>
                 <c:pt idx="89">
                   <c:v>22.25</c:v>
@@ -13207,7 +13264,7 @@
                   <c:v>22.75</c:v>
                 </c:pt>
                 <c:pt idx="92">
-                  <c:v>23</c:v>
+                  <c:v>23.0</c:v>
                 </c:pt>
                 <c:pt idx="93">
                   <c:v>23.25</c:v>
@@ -13219,7 +13276,7 @@
                   <c:v>23.75</c:v>
                 </c:pt>
                 <c:pt idx="96">
-                  <c:v>24</c:v>
+                  <c:v>24.0</c:v>
                 </c:pt>
                 <c:pt idx="97">
                   <c:v>24.25</c:v>
@@ -13231,7 +13288,7 @@
                   <c:v>24.75</c:v>
                 </c:pt>
                 <c:pt idx="100">
-                  <c:v>25</c:v>
+                  <c:v>25.0</c:v>
                 </c:pt>
                 <c:pt idx="101">
                   <c:v>25.25</c:v>
@@ -13243,7 +13300,7 @@
                   <c:v>25.75</c:v>
                 </c:pt>
                 <c:pt idx="104">
-                  <c:v>26</c:v>
+                  <c:v>26.0</c:v>
                 </c:pt>
                 <c:pt idx="105">
                   <c:v>26.25</c:v>
@@ -13255,7 +13312,7 @@
                   <c:v>26.75</c:v>
                 </c:pt>
                 <c:pt idx="108">
-                  <c:v>27</c:v>
+                  <c:v>27.0</c:v>
                 </c:pt>
                 <c:pt idx="109">
                   <c:v>27.25</c:v>
@@ -13267,7 +13324,7 @@
                   <c:v>27.75</c:v>
                 </c:pt>
                 <c:pt idx="112">
-                  <c:v>28</c:v>
+                  <c:v>28.0</c:v>
                 </c:pt>
                 <c:pt idx="113">
                   <c:v>28.25</c:v>
@@ -13279,7 +13336,7 @@
                   <c:v>28.75</c:v>
                 </c:pt>
                 <c:pt idx="116">
-                  <c:v>29</c:v>
+                  <c:v>29.0</c:v>
                 </c:pt>
                 <c:pt idx="117">
                   <c:v>29.25</c:v>
@@ -13291,7 +13348,7 @@
                   <c:v>29.75</c:v>
                 </c:pt>
                 <c:pt idx="120">
-                  <c:v>30</c:v>
+                  <c:v>30.0</c:v>
                 </c:pt>
                 <c:pt idx="121">
                   <c:v>30.25</c:v>
@@ -13303,7 +13360,7 @@
                   <c:v>30.75</c:v>
                 </c:pt>
                 <c:pt idx="124">
-                  <c:v>31</c:v>
+                  <c:v>31.0</c:v>
                 </c:pt>
                 <c:pt idx="125">
                   <c:v>31.25</c:v>
@@ -13315,7 +13372,7 @@
                   <c:v>31.75</c:v>
                 </c:pt>
                 <c:pt idx="128">
-                  <c:v>32</c:v>
+                  <c:v>32.0</c:v>
                 </c:pt>
                 <c:pt idx="129">
                   <c:v>32.25</c:v>
@@ -13327,7 +13384,7 @@
                   <c:v>32.75</c:v>
                 </c:pt>
                 <c:pt idx="132">
-                  <c:v>33</c:v>
+                  <c:v>33.0</c:v>
                 </c:pt>
                 <c:pt idx="133">
                   <c:v>33.25</c:v>
@@ -13339,7 +13396,7 @@
                   <c:v>33.75</c:v>
                 </c:pt>
                 <c:pt idx="136">
-                  <c:v>34</c:v>
+                  <c:v>34.0</c:v>
                 </c:pt>
                 <c:pt idx="137">
                   <c:v>34.25</c:v>
@@ -13351,7 +13408,7 @@
                   <c:v>34.75</c:v>
                 </c:pt>
                 <c:pt idx="140">
-                  <c:v>35</c:v>
+                  <c:v>35.0</c:v>
                 </c:pt>
                 <c:pt idx="141">
                   <c:v>35.25</c:v>
@@ -13363,7 +13420,7 @@
                   <c:v>35.75</c:v>
                 </c:pt>
                 <c:pt idx="144">
-                  <c:v>36</c:v>
+                  <c:v>36.0</c:v>
                 </c:pt>
                 <c:pt idx="145">
                   <c:v>36.25</c:v>
@@ -13375,7 +13432,7 @@
                   <c:v>36.75</c:v>
                 </c:pt>
                 <c:pt idx="148">
-                  <c:v>37</c:v>
+                  <c:v>37.0</c:v>
                 </c:pt>
                 <c:pt idx="149">
                   <c:v>37.25</c:v>
@@ -13387,7 +13444,7 @@
                   <c:v>37.75</c:v>
                 </c:pt>
                 <c:pt idx="152">
-                  <c:v>38</c:v>
+                  <c:v>38.0</c:v>
                 </c:pt>
                 <c:pt idx="153">
                   <c:v>38.25</c:v>
@@ -13399,7 +13456,7 @@
                   <c:v>38.75</c:v>
                 </c:pt>
                 <c:pt idx="156">
-                  <c:v>39</c:v>
+                  <c:v>39.0</c:v>
                 </c:pt>
                 <c:pt idx="157">
                   <c:v>39.25</c:v>
@@ -13411,499 +13468,499 @@
                   <c:v>39.75</c:v>
                 </c:pt>
                 <c:pt idx="160">
-                  <c:v>40</c:v>
+                  <c:v>40.0</c:v>
                 </c:pt>
               </c:numCache>
             </c:numRef>
           </c:xVal>
           <c:yVal>
             <c:numRef>
-              <c:f>'Chart Data'!$D$2:$D$162</c:f>
+              <c:f>Sheet1!$B$165:$B$325</c:f>
               <c:numCache>
                 <c:formatCode>General</c:formatCode>
                 <c:ptCount val="161"/>
                 <c:pt idx="0">
-                  <c:v>-0.6</c:v>
+                  <c:v>-0.9231</c:v>
                 </c:pt>
                 <c:pt idx="1">
-                  <c:v>-0.53538312</c:v>
+                  <c:v>-0.8901</c:v>
                 </c:pt>
                 <c:pt idx="2">
-                  <c:v>-0.46746543</c:v>
+                  <c:v>-0.8515</c:v>
                 </c:pt>
                 <c:pt idx="3">
-                  <c:v>-0.39666566</c:v>
+                  <c:v>-0.8078</c:v>
                 </c:pt>
                 <c:pt idx="4">
-                  <c:v>-0.32342031</c:v>
+                  <c:v>-0.759</c:v>
                 </c:pt>
                 <c:pt idx="5">
-                  <c:v>-0.24818097</c:v>
+                  <c:v>-0.7056</c:v>
                 </c:pt>
                 <c:pt idx="6">
-                  <c:v>-0.17141151</c:v>
+                  <c:v>-0.6479</c:v>
                 </c:pt>
                 <c:pt idx="7">
-                  <c:v>-0.09358525</c:v>
+                  <c:v>-0.5861</c:v>
                 </c:pt>
                 <c:pt idx="8">
-                  <c:v>-0.01518199</c:v>
+                  <c:v>-0.5207</c:v>
                 </c:pt>
                 <c:pt idx="9">
-                  <c:v>0.06331486</c:v>
+                  <c:v>-0.4521</c:v>
                 </c:pt>
                 <c:pt idx="10">
-                  <c:v>0.14142136</c:v>
+                  <c:v>-0.3807</c:v>
                 </c:pt>
                 <c:pt idx="11">
-                  <c:v>0.21865594</c:v>
+                  <c:v>-0.307</c:v>
                 </c:pt>
                 <c:pt idx="12">
-                  <c:v>0.29454244</c:v>
+                  <c:v>-0.2314</c:v>
                 </c:pt>
                 <c:pt idx="13">
-                  <c:v>0.36861299</c:v>
+                  <c:v>-0.1544</c:v>
                 </c:pt>
                 <c:pt idx="14">
-                  <c:v>0.44041092</c:v>
+                  <c:v>-0.0764</c:v>
                 </c:pt>
                 <c:pt idx="15">
-                  <c:v>0.50949357</c:v>
+                  <c:v>0.0021</c:v>
                 </c:pt>
                 <c:pt idx="16">
-                  <c:v>0.57543502</c:v>
+                  <c:v>0.0805</c:v>
                 </c:pt>
                 <c:pt idx="17">
-                  <c:v>0.63782872</c:v>
+                  <c:v>0.1585</c:v>
                 </c:pt>
                 <c:pt idx="18">
-                  <c:v>0.69628999</c:v>
+                  <c:v>0.2355</c:v>
                 </c:pt>
                 <c:pt idx="19">
-                  <c:v>0.75045841</c:v>
+                  <c:v>0.311</c:v>
                 </c:pt>
                 <c:pt idx="20">
-                  <c:v>0.8</c:v>
+                  <c:v>0.3846</c:v>
                 </c:pt>
                 <c:pt idx="21">
-                  <c:v>0.84460932</c:v>
+                  <c:v>0.4559</c:v>
                 </c:pt>
                 <c:pt idx="22">
-                  <c:v>0.88401135</c:v>
+                  <c:v>0.5243</c:v>
                 </c:pt>
                 <c:pt idx="23">
-                  <c:v>0.91796315</c:v>
+                  <c:v>0.5895</c:v>
                 </c:pt>
                 <c:pt idx="24">
-                  <c:v>0.94625541</c:v>
+                  <c:v>0.651</c:v>
                 </c:pt>
                 <c:pt idx="25">
-                  <c:v>0.96871369</c:v>
+                  <c:v>0.7086</c:v>
                 </c:pt>
                 <c:pt idx="26">
-                  <c:v>0.98519952</c:v>
+                  <c:v>0.7618</c:v>
                 </c:pt>
                 <c:pt idx="27">
-                  <c:v>0.99561127</c:v>
+                  <c:v>0.8102</c:v>
                 </c:pt>
                 <c:pt idx="28">
-                  <c:v>0.99988475</c:v>
+                  <c:v>0.8537</c:v>
                 </c:pt>
                 <c:pt idx="29">
-                  <c:v>0.9979936</c:v>
+                  <c:v>0.892</c:v>
                 </c:pt>
                 <c:pt idx="30">
-                  <c:v>0.98994949</c:v>
+                  <c:v>0.9247</c:v>
                 </c:pt>
                 <c:pt idx="31">
-                  <c:v>0.97580202</c:v>
+                  <c:v>0.9517</c:v>
                 </c:pt>
                 <c:pt idx="32">
-                  <c:v>0.9556384</c:v>
+                  <c:v>0.9729</c:v>
                 </c:pt>
                 <c:pt idx="33">
-                  <c:v>0.92958295</c:v>
+                  <c:v>0.988</c:v>
                 </c:pt>
                 <c:pt idx="34">
-                  <c:v>0.89779631</c:v>
+                  <c:v>0.9971</c:v>
                 </c:pt>
                 <c:pt idx="35">
-                  <c:v>0.86047447</c:v>
+                  <c:v>1.0</c:v>
                 </c:pt>
                 <c:pt idx="36">
-                  <c:v>0.81784751</c:v>
+                  <c:v>0.9968</c:v>
                 </c:pt>
                 <c:pt idx="37">
-                  <c:v>0.77017824</c:v>
+                  <c:v>0.9874</c:v>
                 </c:pt>
                 <c:pt idx="38">
-                  <c:v>0.71776058</c:v>
+                  <c:v>0.9719</c:v>
                 </c:pt>
                 <c:pt idx="39">
-                  <c:v>0.66091768</c:v>
+                  <c:v>0.9504</c:v>
                 </c:pt>
                 <c:pt idx="40">
-                  <c:v>0.6</c:v>
+                  <c:v>0.9231</c:v>
                 </c:pt>
                 <c:pt idx="41">
-                  <c:v>0.53538312</c:v>
+                  <c:v>0.8901</c:v>
                 </c:pt>
                 <c:pt idx="42">
-                  <c:v>0.46746543</c:v>
+                  <c:v>0.8515</c:v>
                 </c:pt>
                 <c:pt idx="43">
-                  <c:v>0.39666566</c:v>
+                  <c:v>0.8078</c:v>
                 </c:pt>
                 <c:pt idx="44">
-                  <c:v>0.32342031</c:v>
+                  <c:v>0.759</c:v>
                 </c:pt>
                 <c:pt idx="45">
-                  <c:v>0.24818097</c:v>
+                  <c:v>0.7056</c:v>
                 </c:pt>
                 <c:pt idx="46">
-                  <c:v>0.17141151</c:v>
+                  <c:v>0.6479</c:v>
                 </c:pt>
                 <c:pt idx="47">
-                  <c:v>0.09358525</c:v>
+                  <c:v>0.5861</c:v>
                 </c:pt>
                 <c:pt idx="48">
-                  <c:v>0.01518199</c:v>
+                  <c:v>0.5207</c:v>
                 </c:pt>
                 <c:pt idx="49">
-                  <c:v>-0.06331486</c:v>
+                  <c:v>0.4521</c:v>
                 </c:pt>
                 <c:pt idx="50">
-                  <c:v>-0.14142136</c:v>
+                  <c:v>0.3807</c:v>
                 </c:pt>
                 <c:pt idx="51">
-                  <c:v>-0.21865594</c:v>
+                  <c:v>0.307</c:v>
                 </c:pt>
                 <c:pt idx="52">
-                  <c:v>-0.29454244</c:v>
+                  <c:v>0.2314</c:v>
                 </c:pt>
                 <c:pt idx="53">
-                  <c:v>-0.36861299</c:v>
+                  <c:v>0.1544</c:v>
                 </c:pt>
                 <c:pt idx="54">
-                  <c:v>-0.44041092</c:v>
+                  <c:v>0.0764</c:v>
                 </c:pt>
                 <c:pt idx="55">
-                  <c:v>-0.50949357</c:v>
+                  <c:v>-0.0021</c:v>
                 </c:pt>
                 <c:pt idx="56">
-                  <c:v>-0.57543502</c:v>
+                  <c:v>-0.0805</c:v>
                 </c:pt>
                 <c:pt idx="57">
-                  <c:v>-0.63782872</c:v>
+                  <c:v>-0.1585</c:v>
                 </c:pt>
                 <c:pt idx="58">
-                  <c:v>-0.69628999</c:v>
+                  <c:v>-0.2355</c:v>
                 </c:pt>
                 <c:pt idx="59">
-                  <c:v>-0.75045841</c:v>
+                  <c:v>-0.311</c:v>
                 </c:pt>
                 <c:pt idx="60">
-                  <c:v>-0.8</c:v>
+                  <c:v>-0.3846</c:v>
                 </c:pt>
                 <c:pt idx="61">
-                  <c:v>-0.84460932</c:v>
+                  <c:v>-0.4559</c:v>
                 </c:pt>
                 <c:pt idx="62">
-                  <c:v>-0.88401135</c:v>
+                  <c:v>-0.5243</c:v>
                 </c:pt>
                 <c:pt idx="63">
-                  <c:v>-0.91796315</c:v>
+                  <c:v>-0.5895</c:v>
                 </c:pt>
                 <c:pt idx="64">
-                  <c:v>-0.94625541</c:v>
+                  <c:v>-0.651</c:v>
                 </c:pt>
                 <c:pt idx="65">
-                  <c:v>-0.96871369</c:v>
+                  <c:v>-0.7086</c:v>
                 </c:pt>
                 <c:pt idx="66">
-                  <c:v>-0.98519952</c:v>
+                  <c:v>-0.7618</c:v>
                 </c:pt>
                 <c:pt idx="67">
-                  <c:v>-0.99561127</c:v>
+                  <c:v>-0.8102</c:v>
                 </c:pt>
                 <c:pt idx="68">
-                  <c:v>-0.99988475</c:v>
+                  <c:v>-0.8537</c:v>
                 </c:pt>
                 <c:pt idx="69">
-                  <c:v>-0.9979936</c:v>
+                  <c:v>-0.892</c:v>
                 </c:pt>
                 <c:pt idx="70">
-                  <c:v>-0.98994949</c:v>
+                  <c:v>-0.9247</c:v>
                 </c:pt>
                 <c:pt idx="71">
-                  <c:v>-0.97580202</c:v>
+                  <c:v>-0.9517</c:v>
                 </c:pt>
                 <c:pt idx="72">
-                  <c:v>-0.9556384</c:v>
+                  <c:v>-0.9729</c:v>
                 </c:pt>
                 <c:pt idx="73">
-                  <c:v>-0.92958295</c:v>
+                  <c:v>-0.988</c:v>
                 </c:pt>
                 <c:pt idx="74">
-                  <c:v>-0.89779631</c:v>
+                  <c:v>-0.9971</c:v>
                 </c:pt>
                 <c:pt idx="75">
-                  <c:v>-0.86047447</c:v>
+                  <c:v>-1.0</c:v>
                 </c:pt>
                 <c:pt idx="76">
-                  <c:v>-0.81784751</c:v>
+                  <c:v>-0.9968</c:v>
                 </c:pt>
                 <c:pt idx="77">
-                  <c:v>-0.77017824</c:v>
+                  <c:v>-0.9874</c:v>
                 </c:pt>
                 <c:pt idx="78">
-                  <c:v>-0.71776058</c:v>
+                  <c:v>-0.9719</c:v>
                 </c:pt>
                 <c:pt idx="79">
-                  <c:v>-0.66091768</c:v>
+                  <c:v>-0.9504</c:v>
                 </c:pt>
                 <c:pt idx="80">
-                  <c:v>-0.6</c:v>
+                  <c:v>-0.9231</c:v>
                 </c:pt>
                 <c:pt idx="81">
-                  <c:v>-0.53538312</c:v>
+                  <c:v>-0.8901</c:v>
                 </c:pt>
                 <c:pt idx="82">
-                  <c:v>-0.46746543</c:v>
+                  <c:v>-0.8515</c:v>
                 </c:pt>
                 <c:pt idx="83">
-                  <c:v>-0.39666566</c:v>
+                  <c:v>-0.8078</c:v>
                 </c:pt>
                 <c:pt idx="84">
-                  <c:v>-0.32342031</c:v>
+                  <c:v>-0.759</c:v>
                 </c:pt>
                 <c:pt idx="85">
-                  <c:v>-0.24818097</c:v>
+                  <c:v>-0.7056</c:v>
                 </c:pt>
                 <c:pt idx="86">
-                  <c:v>-0.17141151</c:v>
+                  <c:v>-0.6479</c:v>
                 </c:pt>
                 <c:pt idx="87">
-                  <c:v>-0.09358525</c:v>
+                  <c:v>-0.5861</c:v>
                 </c:pt>
                 <c:pt idx="88">
-                  <c:v>-0.01518199</c:v>
+                  <c:v>-0.5207</c:v>
                 </c:pt>
                 <c:pt idx="89">
-                  <c:v>0.06331486</c:v>
+                  <c:v>-0.4521</c:v>
                 </c:pt>
                 <c:pt idx="90">
-                  <c:v>0.14142136</c:v>
+                  <c:v>-0.3807</c:v>
                 </c:pt>
                 <c:pt idx="91">
-                  <c:v>0.21865594</c:v>
+                  <c:v>-0.307</c:v>
                 </c:pt>
                 <c:pt idx="92">
-                  <c:v>0.29454244</c:v>
+                  <c:v>-0.2314</c:v>
                 </c:pt>
                 <c:pt idx="93">
-                  <c:v>0.36861299</c:v>
+                  <c:v>-0.1544</c:v>
                 </c:pt>
                 <c:pt idx="94">
-                  <c:v>0.44041092</c:v>
+                  <c:v>-0.0764</c:v>
                 </c:pt>
                 <c:pt idx="95">
-                  <c:v>0.50949357</c:v>
+                  <c:v>0.0021</c:v>
                 </c:pt>
                 <c:pt idx="96">
-                  <c:v>0.57543502</c:v>
+                  <c:v>0.0805</c:v>
                 </c:pt>
                 <c:pt idx="97">
-                  <c:v>0.63782872</c:v>
+                  <c:v>0.1585</c:v>
                 </c:pt>
                 <c:pt idx="98">
-                  <c:v>0.69628999</c:v>
+                  <c:v>0.2355</c:v>
                 </c:pt>
                 <c:pt idx="99">
-                  <c:v>0.75045841</c:v>
+                  <c:v>0.311</c:v>
                 </c:pt>
                 <c:pt idx="100">
-                  <c:v>0.8</c:v>
+                  <c:v>0.3846</c:v>
                 </c:pt>
                 <c:pt idx="101">
-                  <c:v>0.84460932</c:v>
+                  <c:v>0.4559</c:v>
                 </c:pt>
                 <c:pt idx="102">
-                  <c:v>0.88401135</c:v>
+                  <c:v>0.5243</c:v>
                 </c:pt>
                 <c:pt idx="103">
-                  <c:v>0.91796315</c:v>
+                  <c:v>0.5895</c:v>
                 </c:pt>
                 <c:pt idx="104">
-                  <c:v>0.94625541</c:v>
+                  <c:v>0.651</c:v>
                 </c:pt>
                 <c:pt idx="105">
-                  <c:v>0.96871369</c:v>
+                  <c:v>0.7086</c:v>
                 </c:pt>
                 <c:pt idx="106">
-                  <c:v>0.98519952</c:v>
+                  <c:v>0.7618</c:v>
                 </c:pt>
                 <c:pt idx="107">
-                  <c:v>0.99561127</c:v>
+                  <c:v>0.8102</c:v>
                 </c:pt>
                 <c:pt idx="108">
-                  <c:v>0.99988475</c:v>
+                  <c:v>0.8537</c:v>
                 </c:pt>
                 <c:pt idx="109">
-                  <c:v>0.9979936</c:v>
+                  <c:v>0.892</c:v>
                 </c:pt>
                 <c:pt idx="110">
-                  <c:v>0.98994949</c:v>
+                  <c:v>0.9247</c:v>
                 </c:pt>
                 <c:pt idx="111">
-                  <c:v>0.97580202</c:v>
+                  <c:v>0.9517</c:v>
                 </c:pt>
                 <c:pt idx="112">
-                  <c:v>0.9556384</c:v>
+                  <c:v>0.9729</c:v>
                 </c:pt>
                 <c:pt idx="113">
-                  <c:v>0.92958295</c:v>
+                  <c:v>0.988</c:v>
                 </c:pt>
                 <c:pt idx="114">
-                  <c:v>0.89779631</c:v>
+                  <c:v>0.9971</c:v>
                 </c:pt>
                 <c:pt idx="115">
-                  <c:v>0.86047447</c:v>
+                  <c:v>1.0</c:v>
                 </c:pt>
                 <c:pt idx="116">
-                  <c:v>0.81784751</c:v>
+                  <c:v>0.9968</c:v>
                 </c:pt>
                 <c:pt idx="117">
-                  <c:v>0.77017824</c:v>
+                  <c:v>0.9874</c:v>
                 </c:pt>
                 <c:pt idx="118">
-                  <c:v>0.71776058</c:v>
+                  <c:v>0.9719</c:v>
                 </c:pt>
                 <c:pt idx="119">
-                  <c:v>0.66091768</c:v>
+                  <c:v>0.9504</c:v>
                 </c:pt>
                 <c:pt idx="120">
-                  <c:v>0.6</c:v>
+                  <c:v>0.9231</c:v>
                 </c:pt>
                 <c:pt idx="121">
-                  <c:v>0.53538312</c:v>
+                  <c:v>0.8901</c:v>
                 </c:pt>
                 <c:pt idx="122">
-                  <c:v>0.46746543</c:v>
+                  <c:v>0.8515</c:v>
                 </c:pt>
                 <c:pt idx="123">
-                  <c:v>0.39666566</c:v>
+                  <c:v>0.8078</c:v>
                 </c:pt>
                 <c:pt idx="124">
-                  <c:v>0.32342031</c:v>
+                  <c:v>0.759</c:v>
                 </c:pt>
                 <c:pt idx="125">
-                  <c:v>0.24818097</c:v>
+                  <c:v>0.7056</c:v>
                 </c:pt>
                 <c:pt idx="126">
-                  <c:v>0.17141151</c:v>
+                  <c:v>0.6479</c:v>
                 </c:pt>
                 <c:pt idx="127">
-                  <c:v>0.09358525</c:v>
+                  <c:v>0.5861</c:v>
                 </c:pt>
                 <c:pt idx="128">
-                  <c:v>0.01518199</c:v>
+                  <c:v>0.5207</c:v>
                 </c:pt>
                 <c:pt idx="129">
-                  <c:v>-0.06331486</c:v>
+                  <c:v>0.4521</c:v>
                 </c:pt>
                 <c:pt idx="130">
-                  <c:v>-0.14142136</c:v>
+                  <c:v>0.3807</c:v>
                 </c:pt>
                 <c:pt idx="131">
-                  <c:v>-0.21865594</c:v>
+                  <c:v>0.307</c:v>
                 </c:pt>
                 <c:pt idx="132">
-                  <c:v>-0.29454244</c:v>
+                  <c:v>0.2314</c:v>
                 </c:pt>
                 <c:pt idx="133">
-                  <c:v>-0.36861299</c:v>
+                  <c:v>0.1544</c:v>
                 </c:pt>
                 <c:pt idx="134">
-                  <c:v>-0.44041092</c:v>
+                  <c:v>0.0764</c:v>
                 </c:pt>
                 <c:pt idx="135">
-                  <c:v>-0.50949357</c:v>
+                  <c:v>-0.0021</c:v>
                 </c:pt>
                 <c:pt idx="136">
-                  <c:v>-0.57543502</c:v>
+                  <c:v>-0.0805</c:v>
                 </c:pt>
                 <c:pt idx="137">
-                  <c:v>-0.63782872</c:v>
+                  <c:v>-0.1585</c:v>
                 </c:pt>
                 <c:pt idx="138">
-                  <c:v>-0.69628999</c:v>
+                  <c:v>-0.2355</c:v>
                 </c:pt>
                 <c:pt idx="139">
-                  <c:v>-0.75045841</c:v>
+                  <c:v>-0.311</c:v>
                 </c:pt>
                 <c:pt idx="140">
-                  <c:v>-0.8</c:v>
+                  <c:v>-0.3846</c:v>
                 </c:pt>
                 <c:pt idx="141">
-                  <c:v>-0.84460932</c:v>
+                  <c:v>-0.4559</c:v>
                 </c:pt>
                 <c:pt idx="142">
-                  <c:v>-0.88401135</c:v>
+                  <c:v>-0.5243</c:v>
                 </c:pt>
                 <c:pt idx="143">
-                  <c:v>-0.91796315</c:v>
+                  <c:v>-0.5895</c:v>
                 </c:pt>
                 <c:pt idx="144">
-                  <c:v>-0.94625541</c:v>
+                  <c:v>-0.651</c:v>
                 </c:pt>
                 <c:pt idx="145">
-                  <c:v>-0.96871369</c:v>
+                  <c:v>-0.7086</c:v>
                 </c:pt>
                 <c:pt idx="146">
-                  <c:v>-0.98519952</c:v>
+                  <c:v>-0.7618</c:v>
                 </c:pt>
                 <c:pt idx="147">
-                  <c:v>-0.99561127</c:v>
+                  <c:v>-0.8102</c:v>
                 </c:pt>
                 <c:pt idx="148">
-                  <c:v>-0.99988475</c:v>
+                  <c:v>-0.8537</c:v>
                 </c:pt>
                 <c:pt idx="149">
-                  <c:v>-0.9979936</c:v>
+                  <c:v>-0.892</c:v>
                 </c:pt>
                 <c:pt idx="150">
-                  <c:v>-0.98994949</c:v>
+                  <c:v>-0.9247</c:v>
                 </c:pt>
                 <c:pt idx="151">
-                  <c:v>-0.97580202</c:v>
+                  <c:v>-0.9517</c:v>
                 </c:pt>
                 <c:pt idx="152">
-                  <c:v>-0.9556384</c:v>
+                  <c:v>-0.9729</c:v>
                 </c:pt>
                 <c:pt idx="153">
-                  <c:v>-0.92958295</c:v>
+                  <c:v>-0.988</c:v>
                 </c:pt>
                 <c:pt idx="154">
-                  <c:v>-0.89779631</c:v>
+                  <c:v>-0.9971</c:v>
                 </c:pt>
                 <c:pt idx="155">
-                  <c:v>-0.86047447</c:v>
+                  <c:v>-1.0</c:v>
                 </c:pt>
                 <c:pt idx="156">
-                  <c:v>-0.81784751</c:v>
+                  <c:v>-0.9968</c:v>
                 </c:pt>
                 <c:pt idx="157">
-                  <c:v>-0.77017824</c:v>
+                  <c:v>-0.9874</c:v>
                 </c:pt>
                 <c:pt idx="158">
-                  <c:v>-0.71776058</c:v>
+                  <c:v>-0.9719</c:v>
                 </c:pt>
                 <c:pt idx="159">
-                  <c:v>-0.66091768</c:v>
+                  <c:v>-0.9504</c:v>
                 </c:pt>
                 <c:pt idx="160">
-                  <c:v>-0.6</c:v>
+                  <c:v>-0.9231</c:v>
                 </c:pt>
               </c:numCache>
             </c:numRef>
@@ -14233,6 +14290,10 @@
             <a:noFill/>
           </a:ln>
         </p:spPr>
+        <p:txBody xmlns:a="http://schemas.openxmlformats.org/drawingml/2006/main">
+          <a:bodyPr/>
+          <a:p/>
+        </p:txBody>
       </p:sp>
       <p:sp>
         <p:nvSpPr>
@@ -14636,7 +14697,7 @@
                 <a:ea typeface="Calibri"/>
                 <a:cs typeface="Calibri"/>
               </a:rPr>
-              <a:t>. Med R = 40 Ω och X</a:t>
+              <a:t>. Fläktmotorn med R = 50 Ω och X</a:t>
             </a:r>
             <a:r>
               <a:rPr sz="1650" b="0" baseline="-25000">
@@ -14658,7 +14719,7 @@
                 <a:ea typeface="Calibri"/>
                 <a:cs typeface="Calibri"/>
               </a:rPr>
-              <a:t> = 30 Ω blir φ ≈ +36,87°.</a:t>
+              <a:t> = 120 Ω får φ ≈ +67,38°.</a:t>
             </a:r>
           </a:p>
           <a:p xmlns:a="http://schemas.openxmlformats.org/drawingml/2006/main">
@@ -15936,7 +15997,7 @@
                 <a:ea typeface="Calibri"/>
                 <a:cs typeface="Calibri"/>
               </a:rPr>
-              <a:t>Resistor och kondensator i serie kallas RC-krets. R = 40 Ω och X</a:t>
+              <a:t>Resistor och kondensator i serie kallas RC-krets. R = 60 Ω och X</a:t>
             </a:r>
             <a:r>
               <a:rPr sz="2100" b="0" baseline="-25000">
@@ -15958,7 +16019,7 @@
                 <a:ea typeface="Calibri"/>
                 <a:cs typeface="Calibri"/>
               </a:rPr>
-              <a:t> = 30 Ω. Nettoreaktansen är X = −30 Ω.</a:t>
+              <a:t> = 80 Ω. Nettoreaktansen är X = −80 Ω.</a:t>
             </a:r>
           </a:p>
           <a:p xmlns:a="http://schemas.openxmlformats.org/drawingml/2006/main">
@@ -15993,7 +16054,7 @@
                 <a:ea typeface="Calibri"/>
                 <a:cs typeface="Calibri"/>
               </a:rPr>
-              <a:t>|Z| = √(40² + (−30)²) = 50 Ω.</a:t>
+              <a:t>|Z| = √(60² + (−80)²) = 100 Ω.</a:t>
             </a:r>
           </a:p>
           <a:p xmlns:a="http://schemas.openxmlformats.org/drawingml/2006/main">
@@ -16028,7 +16089,7 @@
                 <a:ea typeface="Calibri"/>
                 <a:cs typeface="Calibri"/>
               </a:rPr>
-              <a:t>φ = arctan(−30/40) ≈ −36,87°. Strömmen leder källspänningen.</a:t>
+              <a:t>φ = arctan(−80/60) ≈ −53,13°. Strömmen leder källspänningen.</a:t>
             </a:r>
           </a:p>
           <a:p xmlns:a="http://schemas.openxmlformats.org/drawingml/2006/main">
@@ -16063,7 +16124,7 @@
                 <a:ea typeface="Calibri"/>
                 <a:cs typeface="Calibri"/>
               </a:rPr>
-              <a:t>Vid U = 100 V RMS blir I = 100/50 = 2,00 A.</a:t>
+              <a:t>Vid U = 230 V RMS blir I = 230/100 = 2,30 A.</a:t>
             </a:r>
           </a:p>
         </p:txBody>
@@ -16451,7 +16512,7 @@
                 <a:ea typeface="Calibri"/>
                 <a:cs typeface="Calibri"/>
               </a:rPr>
-              <a:t>Exempel: R = 30 Ω, X</a:t>
+              <a:t>Exempel: R = 24 Ω, X</a:t>
             </a:r>
             <a:r>
               <a:rPr sz="2100" b="0" baseline="-25000">
@@ -16495,7 +16556,7 @@
                 <a:ea typeface="Calibri"/>
                 <a:cs typeface="Calibri"/>
               </a:rPr>
-              <a:t> = 10 Ω. X = 40 Ω och |Z| = 50 Ω.</a:t>
+              <a:t> = 18 Ω. X = 32 Ω och |Z| = 40 Ω.</a:t>
             </a:r>
           </a:p>
         </p:txBody>
@@ -16870,7 +16931,7 @@
                 <a:ea typeface="Calibri"/>
                 <a:cs typeface="Calibri"/>
               </a:rPr>
-              <a:t>L = 50 mH = 0,050 H. C = 150 µF = 0,000150 F.</a:t>
+              <a:t>L = 100 mH = 0,100 H. C = 47 µF = 0,000047 F.</a:t>
             </a:r>
           </a:p>
           <a:p xmlns:a="http://schemas.openxmlformats.org/drawingml/2006/main">
@@ -16905,7 +16966,7 @@
                 <a:ea typeface="Calibri"/>
                 <a:cs typeface="Calibri"/>
               </a:rPr>
-              <a:t>√(L · C) = √0,0000075 ≈ 0,0027386.</a:t>
+              <a:t>√(L · C) = √0,0000047 ≈ 0,0021679.</a:t>
             </a:r>
           </a:p>
           <a:p xmlns:a="http://schemas.openxmlformats.org/drawingml/2006/main">
@@ -16962,7 +17023,7 @@
                 <a:ea typeface="Calibri"/>
                 <a:cs typeface="Calibri"/>
               </a:rPr>
-              <a:t> = 1/(2π · 0,0027386) ≈ 58,12 Hz.</a:t>
+              <a:t> = 1/(2π · 0,0021679) ≈ 73,4 Hz.</a:t>
             </a:r>
           </a:p>
         </p:txBody>
@@ -18098,7 +18159,7 @@
                 <a:ea typeface="Calibri"/>
                 <a:cs typeface="Calibri"/>
               </a:rPr>
-              <a:t>En resistor på 40 Ω ligger över 12,00 V RMS.</a:t>
+              <a:t>Ett värmeelement på 50 Ω ligger på 230 V RMS.</a:t>
             </a:r>
           </a:p>
           <a:p xmlns:a="http://schemas.openxmlformats.org/drawingml/2006/main">
@@ -18126,7 +18187,7 @@
                 <a:ea typeface="Calibri"/>
                 <a:cs typeface="Calibri"/>
               </a:rPr>
-              <a:t>I = U/R = 12/40 = 0,30 A RMS.</a:t>
+              <a:t>I = U/R = 230/50 = 4,6 A RMS.</a:t>
             </a:r>
           </a:p>
           <a:p xmlns:a="http://schemas.openxmlformats.org/drawingml/2006/main">
@@ -18810,7 +18871,7 @@
                 <a:ea typeface="Calibri"/>
                 <a:cs typeface="Calibri"/>
               </a:rPr>
-              <a:t> (X för reaktans, L för spole). L är spolens induktans i henry. Givet: L = 95,5 mH = 0,0955 H och f = 50 Hz.</a:t>
+              <a:t> (X för reaktans, L för spole). L är spolens induktans i henry. Exempel: en fläktmotors lindning har L = 382 mH = 0,382 H och f = 50 Hz.</a:t>
             </a:r>
           </a:p>
           <a:p xmlns:a="http://schemas.openxmlformats.org/drawingml/2006/main">
@@ -18867,7 +18928,29 @@
                 <a:ea typeface="Calibri"/>
                 <a:cs typeface="Calibri"/>
               </a:rPr>
-              <a:t> = 2π · 50 · 0,0955 ≈ 30,00 Ω.</a:t>
+              <a:t> = 2π · 50 · 0,382 ≈ 120 Ω. Ombord, vid 60 Hz, blir X</a:t>
+            </a:r>
+            <a:r>
+              <a:rPr sz="2100" b="0" baseline="-25000">
+                <a:solidFill>
+                  <a:srgbClr val="172F43"/>
+                </a:solidFill>
+                <a:latin typeface="Calibri"/>
+                <a:ea typeface="Calibri"/>
+                <a:cs typeface="Calibri"/>
+              </a:rPr>
+              <a:t>L</a:t>
+            </a:r>
+            <a:r>
+              <a:rPr sz="2100" b="0">
+                <a:solidFill>
+                  <a:srgbClr val="172F43"/>
+                </a:solidFill>
+                <a:latin typeface="Calibri"/>
+                <a:ea typeface="Calibri"/>
+                <a:cs typeface="Calibri"/>
+              </a:rPr>
+              <a:t> ≈ 144 Ω.</a:t>
             </a:r>
           </a:p>
           <a:p xmlns:a="http://schemas.openxmlformats.org/drawingml/2006/main">
@@ -19299,16 +19382,16 @@
         <p:spPr>
           <a:xfrm xmlns:a="http://schemas.openxmlformats.org/drawingml/2006/main">
             <a:off x="2714625" y="3143250"/>
-            <a:ext cx="2413000" cy="9525"/>
+            <a:ext cx="754062" cy="9525"/>
           </a:xfrm>
           <a:custGeom xmlns:a="http://schemas.openxmlformats.org/drawingml/2006/main">
             <a:pathLst>
-              <a:path w="2413000" h="9525">
+              <a:path w="754062" h="9525">
                 <a:moveTo>
                   <a:pt x="0" y="0"/>
                 </a:moveTo>
                 <a:lnTo>
-                  <a:pt x="2413000" y="0"/>
+                  <a:pt x="754062" y="0"/>
                 </a:lnTo>
               </a:path>
             </a:pathLst>
@@ -19320,6 +19403,10 @@
             </a:solidFill>
           </a:ln>
         </p:spPr>
+        <p:txBody xmlns:a="http://schemas.openxmlformats.org/drawingml/2006/main">
+          <a:bodyPr/>
+          <a:p/>
+        </p:txBody>
       </p:sp>
       <p:sp>
         <p:nvSpPr>
@@ -19337,7 +19424,7 @@
         </p:nvSpPr>
         <p:spPr>
           <a:xfrm xmlns:a="http://schemas.openxmlformats.org/drawingml/2006/main">
-            <a:off x="5127625" y="1333500"/>
+            <a:off x="3468687" y="1333500"/>
             <a:ext cx="9525" cy="1809750"/>
           </a:xfrm>
           <a:custGeom xmlns:a="http://schemas.openxmlformats.org/drawingml/2006/main">
@@ -19359,6 +19446,10 @@
             </a:solidFill>
           </a:ln>
         </p:spPr>
+        <p:txBody xmlns:a="http://schemas.openxmlformats.org/drawingml/2006/main">
+          <a:bodyPr/>
+          <a:p/>
+        </p:txBody>
       </p:sp>
       <p:sp>
         <p:nvSpPr>
@@ -19377,16 +19468,16 @@
         <p:spPr>
           <a:xfrm xmlns:a="http://schemas.openxmlformats.org/drawingml/2006/main">
             <a:off x="2714625" y="1333500"/>
-            <a:ext cx="2413000" cy="1809750"/>
+            <a:ext cx="754062" cy="1809750"/>
           </a:xfrm>
           <a:custGeom xmlns:a="http://schemas.openxmlformats.org/drawingml/2006/main">
             <a:pathLst>
-              <a:path w="2413000" h="1809750">
+              <a:path w="754062" h="1809750">
                 <a:moveTo>
                   <a:pt x="0" y="1809750"/>
                 </a:moveTo>
                 <a:lnTo>
-                  <a:pt x="2413000" y="0"/>
+                  <a:pt x="754062" y="0"/>
                 </a:lnTo>
               </a:path>
             </a:pathLst>
@@ -19398,6 +19489,10 @@
             </a:solidFill>
           </a:ln>
         </p:spPr>
+        <p:txBody xmlns:a="http://schemas.openxmlformats.org/drawingml/2006/main">
+          <a:bodyPr/>
+          <a:p/>
+        </p:txBody>
       </p:sp>
       <p:sp>
         <p:nvSpPr>
@@ -19415,7 +19510,7 @@
         </p:nvSpPr>
         <p:spPr>
           <a:xfrm xmlns:a="http://schemas.openxmlformats.org/drawingml/2006/main">
-            <a:off x="5013325" y="3028950"/>
+            <a:off x="3354387" y="3028950"/>
             <a:ext cx="114300" cy="9525"/>
           </a:xfrm>
           <a:custGeom xmlns:a="http://schemas.openxmlformats.org/drawingml/2006/main">
@@ -19437,6 +19532,10 @@
             </a:solidFill>
           </a:ln>
         </p:spPr>
+        <p:txBody xmlns:a="http://schemas.openxmlformats.org/drawingml/2006/main">
+          <a:bodyPr/>
+          <a:p/>
+        </p:txBody>
       </p:sp>
       <p:sp>
         <p:nvSpPr>
@@ -19454,7 +19553,7 @@
         </p:nvSpPr>
         <p:spPr>
           <a:xfrm xmlns:a="http://schemas.openxmlformats.org/drawingml/2006/main">
-            <a:off x="5013325" y="3028950"/>
+            <a:off x="3354387" y="3028950"/>
             <a:ext cx="9525" cy="114300"/>
           </a:xfrm>
           <a:custGeom xmlns:a="http://schemas.openxmlformats.org/drawingml/2006/main">
@@ -19476,6 +19575,10 @@
             </a:solidFill>
           </a:ln>
         </p:spPr>
+        <p:txBody xmlns:a="http://schemas.openxmlformats.org/drawingml/2006/main">
+          <a:bodyPr/>
+          <a:p/>
+        </p:txBody>
       </p:sp>
       <p:sp>
         <p:nvSpPr>
@@ -19493,7 +19596,7 @@
         </p:nvSpPr>
         <p:spPr>
           <a:xfrm xmlns:a="http://schemas.openxmlformats.org/drawingml/2006/main">
-            <a:off x="2667000" y="3219450"/>
+            <a:off x="1758156" y="3219450"/>
             <a:ext cx="2667000" cy="285750"/>
           </a:xfrm>
           <a:prstGeom xmlns:a="http://schemas.openxmlformats.org/drawingml/2006/main" prst="rect">
@@ -19529,7 +19632,7 @@
                 <a:ea typeface="Calibri"/>
                 <a:cs typeface="Calibri"/>
               </a:rPr>
-              <a:t>R = 40 Ω</a:t>
+              <a:t>R = 50 Ω</a:t>
             </a:r>
           </a:p>
         </p:txBody>
@@ -19550,7 +19653,7 @@
         </p:nvSpPr>
         <p:spPr>
           <a:xfrm xmlns:a="http://schemas.openxmlformats.org/drawingml/2006/main">
-            <a:off x="5318125" y="2143125"/>
+            <a:off x="3659187" y="2143125"/>
             <a:ext cx="2571750" cy="285750"/>
           </a:xfrm>
           <a:prstGeom xmlns:a="http://schemas.openxmlformats.org/drawingml/2006/main" prst="rect">
@@ -19608,7 +19711,7 @@
                 <a:ea typeface="Calibri"/>
                 <a:cs typeface="Calibri"/>
               </a:rPr>
-              <a:t> ≈ 30 Ω</a:t>
+              <a:t> ≈ 120 Ω</a:t>
             </a:r>
           </a:p>
         </p:txBody>
@@ -19629,7 +19732,7 @@
         </p:nvSpPr>
         <p:spPr>
           <a:xfrm xmlns:a="http://schemas.openxmlformats.org/drawingml/2006/main">
-            <a:off x="1143000" y="1476375"/>
+            <a:off x="1264625" y="2050000"/>
             <a:ext cx="2190750" cy="285750"/>
           </a:xfrm>
           <a:prstGeom xmlns:a="http://schemas.openxmlformats.org/drawingml/2006/main" prst="rect">
@@ -19665,7 +19768,7 @@
                 <a:ea typeface="Calibri"/>
                 <a:cs typeface="Calibri"/>
               </a:rPr>
-              <a:t>|Z| ≈ 50 Ω</a:t>
+              <a:t>|Z| ≈ 130 Ω</a:t>
             </a:r>
           </a:p>
         </p:txBody>
@@ -19722,7 +19825,7 @@
                 <a:ea typeface="Calibri"/>
                 <a:cs typeface="Calibri"/>
               </a:rPr>
-              <a:t>Impedansen Z är kretsens totala motstånd mot växelström. R = 40 Ω och X</a:t>
+              <a:t>Impedansen Z är kretsens totala motstånd mot växelström. Fläktmotorns lindning: R = 50 Ω och X</a:t>
             </a:r>
             <a:r>
               <a:rPr sz="1650" b="0" baseline="-25000">
@@ -19744,7 +19847,7 @@
                 <a:ea typeface="Calibri"/>
                 <a:cs typeface="Calibri"/>
               </a:rPr>
-              <a:t> ≈ 30 Ω är vinkelräta delar i impedansdiagrammet.</a:t>
+              <a:t> ≈ 120 Ω är vinkelräta delar i impedansdiagrammet.</a:t>
             </a:r>
           </a:p>
           <a:p xmlns:a="http://schemas.openxmlformats.org/drawingml/2006/main">
@@ -19779,7 +19882,7 @@
                 <a:ea typeface="Calibri"/>
                 <a:cs typeface="Calibri"/>
               </a:rPr>
-              <a:t>|Z| = √(40² + 30²) = √2 500 = 50 Ω.</a:t>
+              <a:t>|Z| = √(50² + 120²) = √16 900 = 130 Ω.</a:t>
             </a:r>
           </a:p>
           <a:p xmlns:a="http://schemas.openxmlformats.org/drawingml/2006/main">
@@ -19814,7 +19917,7 @@
                 <a:ea typeface="Calibri"/>
                 <a:cs typeface="Calibri"/>
               </a:rPr>
-              <a:t>Beloppen 40 och 30 ska inte adderas direkt. Diagonalen ger impedansens belopp |Z|; strecken betyder belopp (storlek).</a:t>
+              <a:t>Beloppen 50 och 120 ska inte adderas direkt. Diagonalen ger impedansens belopp |Z|; strecken betyder belopp (storlek).</a:t>
             </a:r>
           </a:p>
         </p:txBody>
@@ -20183,7 +20286,7 @@
                 <a:ea typeface="Calibri"/>
                 <a:cs typeface="Calibri"/>
               </a:rPr>
-              <a:t>Källspänningen är fortfarande 12,00 V RMS.</a:t>
+              <a:t>Fläktmotorn ligger på 230 V RMS.</a:t>
             </a:r>
           </a:p>
           <a:p xmlns:a="http://schemas.openxmlformats.org/drawingml/2006/main">
@@ -20211,7 +20314,7 @@
                 <a:ea typeface="Calibri"/>
                 <a:cs typeface="Calibri"/>
               </a:rPr>
-              <a:t>I = U/|Z| ≈ 12/50 = 0,24 A RMS.</a:t>
+              <a:t>I = U/|Z| ≈ 230/130 ≈ 1,77 A RMS.</a:t>
             </a:r>
           </a:p>
           <a:p xmlns:a="http://schemas.openxmlformats.org/drawingml/2006/main">
@@ -20239,7 +20342,7 @@
                 <a:ea typeface="Calibri"/>
                 <a:cs typeface="Calibri"/>
               </a:rPr>
-              <a:t>Med bara R var strömmen 0,30 A. Med R och L blir den mindre och släpar efter spänningen.</a:t>
+              <a:t>Med bara resistansen 50 Ω skulle strömmen vara 4,6 A. Med R och L blir den mindre och släpar efter spänningen.</a:t>
             </a:r>
           </a:p>
         </p:txBody>

--- a/sjoskolan/vecka-40/aktuell/v40_02_Reaktans_och_impedans_elev.pptx
+++ b/sjoskolan/vecka-40/aktuell/v40_02_Reaktans_och_impedans_elev.pptx
@@ -15530,7 +15530,7 @@
                 <a:ea typeface="Calibri"/>
                 <a:cs typeface="Calibri"/>
               </a:rPr>
-              <a:t>. C är kapacitansen i farad (F). C = 100 µF (mikrofarad) = 0,000100 F vid 50 Hz.</a:t>
+              <a:t>. C är kapacitansen i farad (F). C = 47 µF (mikrofarad) = 0,000047 F vid 50 Hz.</a:t>
             </a:r>
           </a:p>
           <a:p xmlns:a="http://schemas.openxmlformats.org/drawingml/2006/main">
@@ -15587,7 +15587,7 @@
                 <a:ea typeface="Calibri"/>
                 <a:cs typeface="Calibri"/>
               </a:rPr>
-              <a:t> = 1/(2π · 50 · 0,000100) ≈ 31,83 Ω.</a:t>
+              <a:t> = 1/(2π · 50 · 0,000047) ≈ 67,7 Ω.</a:t>
             </a:r>
           </a:p>
           <a:p xmlns:a="http://schemas.openxmlformats.org/drawingml/2006/main">
@@ -16512,7 +16512,7 @@
                 <a:ea typeface="Calibri"/>
                 <a:cs typeface="Calibri"/>
               </a:rPr>
-              <a:t>Exempel: R = 24 Ω, X</a:t>
+              <a:t>Exempel: R = 45 Ω, X</a:t>
             </a:r>
             <a:r>
               <a:rPr sz="2100" b="0" baseline="-25000">
@@ -16534,7 +16534,7 @@
                 <a:ea typeface="Calibri"/>
                 <a:cs typeface="Calibri"/>
               </a:rPr>
-              <a:t> = 50 Ω, X</a:t>
+              <a:t> = 80 Ω, X</a:t>
             </a:r>
             <a:r>
               <a:rPr sz="2100" b="0" baseline="-25000">
@@ -16556,7 +16556,7 @@
                 <a:ea typeface="Calibri"/>
                 <a:cs typeface="Calibri"/>
               </a:rPr>
-              <a:t> = 18 Ω. X = 32 Ω och |Z| = 40 Ω.</a:t>
+              <a:t> = 20 Ω. X = 60 Ω och |Z| = 75 Ω.</a:t>
             </a:r>
           </a:p>
         </p:txBody>
@@ -17869,7 +17869,7 @@
                 <a:ea typeface="Calibri"/>
                 <a:cs typeface="Calibri"/>
               </a:rPr>
-              <a:t>Basexemplet använder U = 12,00 V RMS, f = 50 Hz och R = 40 Ω.</a:t>
+              <a:t>I labben är U = 12,00 V RMS och f = 50 Hz. Resistansen R och induktansen L räknas fram ur ditt namn.</a:t>
             </a:r>
           </a:p>
         </p:txBody>

--- a/sjoskolan/vecka-40/aktuell/v40_02_Reaktans_och_impedans_elev.pptx
+++ b/sjoskolan/vecka-40/aktuell/v40_02_Reaktans_och_impedans_elev.pptx
@@ -619,7 +619,7 @@
           <a:lstStyle xmlns:a="http://schemas.openxmlformats.org/drawingml/2006/main"/>
           <a:p xmlns:a="http://schemas.openxmlformats.org/drawingml/2006/main">
             <a:r>
-              <a:t>Be eleven rita de vinkelräta delarna om svaret bygger på 30 + 40.</a:t>
+              <a:t>Be eleven rita de vinkelräta delarna om svaret bygger på 90 + 120.</a:t>
             </a:r>
           </a:p>
           <a:p xmlns:a="http://schemas.openxmlformats.org/drawingml/2006/main">
@@ -634,7 +634,7 @@
           </a:p>
           <a:p xmlns:a="http://schemas.openxmlformats.org/drawingml/2006/main">
             <a:r>
-              <a:t>Facit: |Z| = 50 Ω. I = 2,00 A. Strömmen släpar.</a:t>
+              <a:t>Facit: |Z| = 150 Ω. I ≈ 1,53 A. Strömmen släpar.</a:t>
             </a:r>
           </a:p>
           <a:p xmlns:a="http://schemas.openxmlformats.org/drawingml/2006/main">
@@ -15085,7 +15085,7 @@
                 <a:ea typeface="Calibri"/>
                 <a:cs typeface="Calibri"/>
               </a:rPr>
-              <a:t>R = 30 Ω, X</a:t>
+              <a:t>R = 90 Ω, X</a:t>
             </a:r>
             <a:r>
               <a:rPr sz="2100" b="0" baseline="-25000">
@@ -15107,7 +15107,7 @@
                 <a:ea typeface="Calibri"/>
                 <a:cs typeface="Calibri"/>
               </a:rPr>
-              <a:t> = 40 Ω och U = 100 V RMS.</a:t>
+              <a:t> = 120 Ω och U = 230 V RMS.</a:t>
             </a:r>
           </a:p>
           <a:p xmlns:a="http://schemas.openxmlformats.org/drawingml/2006/main">

--- a/sjoskolan/vecka-40/aktuell/v40_02_Reaktans_och_impedans_elev.pptx
+++ b/sjoskolan/vecka-40/aktuell/v40_02_Reaktans_och_impedans_elev.pptx
@@ -17742,7 +17742,7 @@
                 <a:ea typeface="Calibri"/>
                 <a:cs typeface="Calibri"/>
               </a:rPr>
-              <a:t>Det här behövs i labben</a:t>
+              <a:t>Det här ska du kunna</a:t>
             </a:r>
           </a:p>
         </p:txBody>
@@ -17799,7 +17799,7 @@
                 <a:ea typeface="Calibri"/>
                 <a:cs typeface="Calibri"/>
               </a:rPr>
-              <a:t>Börja med en resistor och Ohms lag. Lägg sedan till en spole.</a:t>
+              <a:t>Räkna strömmen genom en resistor med Ohms lag.</a:t>
             </a:r>
           </a:p>
           <a:p xmlns:a="http://schemas.openxmlformats.org/drawingml/2006/main">
@@ -17834,7 +17834,29 @@
                 <a:ea typeface="Calibri"/>
                 <a:cs typeface="Calibri"/>
               </a:rPr>
-              <a:t>Du ska kunna omvandla mH (millihenry) till H (henry, enheten för induktans), beräkna reaktans och därefter ström.</a:t>
+              <a:t>Omvandla mH (millihenry) till H (henry, enheten för induktans) och räkna spolens reaktans X</a:t>
+            </a:r>
+            <a:r>
+              <a:rPr sz="2100" b="0" baseline="-25000">
+                <a:solidFill>
+                  <a:srgbClr val="172F43"/>
+                </a:solidFill>
+                <a:latin typeface="Calibri"/>
+                <a:ea typeface="Calibri"/>
+                <a:cs typeface="Calibri"/>
+              </a:rPr>
+              <a:t>L</a:t>
+            </a:r>
+            <a:r>
+              <a:rPr sz="2100" b="0">
+                <a:solidFill>
+                  <a:srgbClr val="172F43"/>
+                </a:solidFill>
+                <a:latin typeface="Calibri"/>
+                <a:ea typeface="Calibri"/>
+                <a:cs typeface="Calibri"/>
+              </a:rPr>
+              <a:t>.</a:t>
             </a:r>
           </a:p>
           <a:p xmlns:a="http://schemas.openxmlformats.org/drawingml/2006/main">
@@ -17869,7 +17891,7 @@
                 <a:ea typeface="Calibri"/>
                 <a:cs typeface="Calibri"/>
               </a:rPr>
-              <a:t>I labben är U = 12,00 V RMS och f = 50 Hz. Resistansen R och induktansen L räknas fram ur ditt namn.</a:t>
+              <a:t>Räkna impedansen |Z| och strömmen när en spole sitter i serie med en resistor.</a:t>
             </a:r>
           </a:p>
         </p:txBody>
@@ -21140,7 +21162,7 @@
                 <a:ea typeface="Calibri"/>
                 <a:cs typeface="Calibri"/>
               </a:rPr>
-              <a:t>Förutsäg X</a:t>
+              <a:t>Du får egna värden på R och L ur ditt namn. Förutsäg X</a:t>
             </a:r>
             <a:r>
               <a:rPr sz="2100" b="0" baseline="-25000">
@@ -21162,7 +21184,7 @@
                 <a:ea typeface="Calibri"/>
                 <a:cs typeface="Calibri"/>
               </a:rPr>
-              <a:t>. Läs av och kontrollera enheten Ω.</a:t>
+              <a:t>, läs av och kontrollera enheten Ω.</a:t>
             </a:r>
           </a:p>
           <a:p xmlns:a="http://schemas.openxmlformats.org/drawingml/2006/main">

--- a/sjoskolan/vecka-40/aktuell/v40_02_Reaktans_och_impedans_elev.pptx
+++ b/sjoskolan/vecka-40/aktuell/v40_02_Reaktans_och_impedans_elev.pptx
@@ -527,31 +527,7 @@
         <p:txBody>
           <a:bodyPr xmlns:a="http://schemas.openxmlformats.org/drawingml/2006/main"/>
           <a:lstStyle xmlns:a="http://schemas.openxmlformats.org/drawingml/2006/main"/>
-          <a:p xmlns:a="http://schemas.openxmlformats.org/drawingml/2006/main">
-            <a:r>
-              <a:t>Skilj vinkelns tecken från den vardagliga formuleringen strömmen släpar.</a:t>
-            </a:r>
-          </a:p>
-          <a:p xmlns:a="http://schemas.openxmlformats.org/drawingml/2006/main">
-            <a:r>
-              <a:t/>
-            </a:r>
-          </a:p>
-          <a:p xmlns:a="http://schemas.openxmlformats.org/drawingml/2006/main">
-            <a:r>
-              <a:t>Webbgenomgång: https://nj22az.github.io/sjoskolan/vecka-40/aktuell/Genomgang.html?del=impedans&amp;avsnitt=fas</a:t>
-            </a:r>
-          </a:p>
-          <a:p xmlns:a="http://schemas.openxmlformats.org/drawingml/2006/main">
-            <a:r>
-              <a:t/>
-            </a:r>
-          </a:p>
-          <a:p xmlns:a="http://schemas.openxmlformats.org/drawingml/2006/main">
-            <a:r>
-              <a:t>Guidad labb: https://nj22az.github.io/sjoskolan/vaxelstromslabbet/?lage=guidad&amp;del=impedans</a:t>
-            </a:r>
-          </a:p>
+          <a:p xmlns:a="http://schemas.openxmlformats.org/drawingml/2006/main"/>
         </p:txBody>
       </p:sp>
       <p:sp>
@@ -617,46 +593,7 @@
         <p:txBody>
           <a:bodyPr xmlns:a="http://schemas.openxmlformats.org/drawingml/2006/main"/>
           <a:lstStyle xmlns:a="http://schemas.openxmlformats.org/drawingml/2006/main"/>
-          <a:p xmlns:a="http://schemas.openxmlformats.org/drawingml/2006/main">
-            <a:r>
-              <a:t>Be eleven rita de vinkelräta delarna om svaret bygger på 90 + 120.</a:t>
-            </a:r>
-          </a:p>
-          <a:p xmlns:a="http://schemas.openxmlformats.org/drawingml/2006/main">
-            <a:r>
-              <a:t/>
-            </a:r>
-          </a:p>
-          <a:p xmlns:a="http://schemas.openxmlformats.org/drawingml/2006/main">
-            <a:r>
-              <a:t>Kontrollfråga: Räkna innan facit visas.</a:t>
-            </a:r>
-          </a:p>
-          <a:p xmlns:a="http://schemas.openxmlformats.org/drawingml/2006/main">
-            <a:r>
-              <a:t>Facit: |Z| = 150 Ω. I ≈ 1,53 A. Strömmen släpar.</a:t>
-            </a:r>
-          </a:p>
-          <a:p xmlns:a="http://schemas.openxmlformats.org/drawingml/2006/main">
-            <a:r>
-              <a:t/>
-            </a:r>
-          </a:p>
-          <a:p xmlns:a="http://schemas.openxmlformats.org/drawingml/2006/main">
-            <a:r>
-              <a:t>Webbgenomgång: https://nj22az.github.io/sjoskolan/vecka-40/aktuell/Genomgang.html?del=impedans&amp;avsnitt=eget</a:t>
-            </a:r>
-          </a:p>
-          <a:p xmlns:a="http://schemas.openxmlformats.org/drawingml/2006/main">
-            <a:r>
-              <a:t/>
-            </a:r>
-          </a:p>
-          <a:p xmlns:a="http://schemas.openxmlformats.org/drawingml/2006/main">
-            <a:r>
-              <a:t>Guidad labb: https://nj22az.github.io/sjoskolan/vaxelstromslabbet/?lage=guidad&amp;del=impedans</a:t>
-            </a:r>
-          </a:p>
+          <a:p xmlns:a="http://schemas.openxmlformats.org/drawingml/2006/main"/>
         </p:txBody>
       </p:sp>
       <p:sp>
@@ -722,31 +659,7 @@
         <p:txBody>
           <a:bodyPr xmlns:a="http://schemas.openxmlformats.org/drawingml/2006/main"/>
           <a:lstStyle xmlns:a="http://schemas.openxmlformats.org/drawingml/2006/main"/>
-          <a:p xmlns:a="http://schemas.openxmlformats.org/drawingml/2006/main">
-            <a:r>
-              <a:t>XC anges här som ett positivt belopp. Den kapacitiva nettoreaktansen har negativt tecken.</a:t>
-            </a:r>
-          </a:p>
-          <a:p xmlns:a="http://schemas.openxmlformats.org/drawingml/2006/main">
-            <a:r>
-              <a:t/>
-            </a:r>
-          </a:p>
-          <a:p xmlns:a="http://schemas.openxmlformats.org/drawingml/2006/main">
-            <a:r>
-              <a:t>Webbgenomgång: https://nj22az.github.io/sjoskolan/vecka-40/aktuell/Genomgang.html?del=impedans&amp;avsnitt=xc</a:t>
-            </a:r>
-          </a:p>
-          <a:p xmlns:a="http://schemas.openxmlformats.org/drawingml/2006/main">
-            <a:r>
-              <a:t/>
-            </a:r>
-          </a:p>
-          <a:p xmlns:a="http://schemas.openxmlformats.org/drawingml/2006/main">
-            <a:r>
-              <a:t>Guidad labb: https://nj22az.github.io/sjoskolan/vaxelstromslabbet/?lage=guidad&amp;del=impedans</a:t>
-            </a:r>
-          </a:p>
+          <a:p xmlns:a="http://schemas.openxmlformats.org/drawingml/2006/main"/>
         </p:txBody>
       </p:sp>
       <p:sp>
@@ -812,31 +725,7 @@
         <p:txBody>
           <a:bodyPr xmlns:a="http://schemas.openxmlformats.org/drawingml/2006/main"/>
           <a:lstStyle xmlns:a="http://schemas.openxmlformats.org/drawingml/2006/main"/>
-          <a:p xmlns:a="http://schemas.openxmlformats.org/drawingml/2006/main">
-            <a:r>
-              <a:t>Minus ingår i fasvinkeln. Kvadreringen gör impedansens belopp positivt.</a:t>
-            </a:r>
-          </a:p>
-          <a:p xmlns:a="http://schemas.openxmlformats.org/drawingml/2006/main">
-            <a:r>
-              <a:t/>
-            </a:r>
-          </a:p>
-          <a:p xmlns:a="http://schemas.openxmlformats.org/drawingml/2006/main">
-            <a:r>
-              <a:t>Webbgenomgång: https://nj22az.github.io/sjoskolan/vecka-40/aktuell/Genomgang.html?del=impedans&amp;avsnitt=rc</a:t>
-            </a:r>
-          </a:p>
-          <a:p xmlns:a="http://schemas.openxmlformats.org/drawingml/2006/main">
-            <a:r>
-              <a:t/>
-            </a:r>
-          </a:p>
-          <a:p xmlns:a="http://schemas.openxmlformats.org/drawingml/2006/main">
-            <a:r>
-              <a:t>Guidad labb: https://nj22az.github.io/sjoskolan/vaxelstromslabbet/?lage=guidad&amp;del=impedans</a:t>
-            </a:r>
-          </a:p>
+          <a:p xmlns:a="http://schemas.openxmlformats.org/drawingml/2006/main"/>
         </p:txBody>
       </p:sp>
       <p:sp>
@@ -902,31 +791,7 @@
         <p:txBody>
           <a:bodyPr xmlns:a="http://schemas.openxmlformats.org/drawingml/2006/main"/>
           <a:lstStyle xmlns:a="http://schemas.openxmlformats.org/drawingml/2006/main"/>
-          <a:p xmlns:a="http://schemas.openxmlformats.org/drawingml/2006/main">
-            <a:r>
-              <a:t>Komplex form introduceras efter att eleven förstått den geometriska betydelsen.</a:t>
-            </a:r>
-          </a:p>
-          <a:p xmlns:a="http://schemas.openxmlformats.org/drawingml/2006/main">
-            <a:r>
-              <a:t/>
-            </a:r>
-          </a:p>
-          <a:p xmlns:a="http://schemas.openxmlformats.org/drawingml/2006/main">
-            <a:r>
-              <a:t>Webbgenomgång: https://nj22az.github.io/sjoskolan/vecka-40/aktuell/Genomgang.html?del=impedans&amp;avsnitt=rlc</a:t>
-            </a:r>
-          </a:p>
-          <a:p xmlns:a="http://schemas.openxmlformats.org/drawingml/2006/main">
-            <a:r>
-              <a:t/>
-            </a:r>
-          </a:p>
-          <a:p xmlns:a="http://schemas.openxmlformats.org/drawingml/2006/main">
-            <a:r>
-              <a:t>Guidad labb: https://nj22az.github.io/sjoskolan/vaxelstromslabbet/?lage=guidad&amp;del=impedans</a:t>
-            </a:r>
-          </a:p>
+          <a:p xmlns:a="http://schemas.openxmlformats.org/drawingml/2006/main"/>
         </p:txBody>
       </p:sp>
       <p:sp>
@@ -992,31 +857,7 @@
         <p:txBody>
           <a:bodyPr xmlns:a="http://schemas.openxmlformats.org/drawingml/2006/main"/>
           <a:lstStyle xmlns:a="http://schemas.openxmlformats.org/drawingml/2006/main"/>
-          <a:p xmlns:a="http://schemas.openxmlformats.org/drawingml/2006/main">
-            <a:r>
-              <a:t>Härledd ur 2πfL = 1/(2πfC). Vid R = 25 Ω och U = 100 V blir I = 4 A och φ = 0°. Verkliga komponenter har förluster och begränsningar.</a:t>
-            </a:r>
-          </a:p>
-          <a:p xmlns:a="http://schemas.openxmlformats.org/drawingml/2006/main">
-            <a:r>
-              <a:t/>
-            </a:r>
-          </a:p>
-          <a:p xmlns:a="http://schemas.openxmlformats.org/drawingml/2006/main">
-            <a:r>
-              <a:t>Webbgenomgång: https://nj22az.github.io/sjoskolan/vecka-40/aktuell/Genomgang.html?del=impedans&amp;avsnitt=resonans</a:t>
-            </a:r>
-          </a:p>
-          <a:p xmlns:a="http://schemas.openxmlformats.org/drawingml/2006/main">
-            <a:r>
-              <a:t/>
-            </a:r>
-          </a:p>
-          <a:p xmlns:a="http://schemas.openxmlformats.org/drawingml/2006/main">
-            <a:r>
-              <a:t>Guidad labb: https://nj22az.github.io/sjoskolan/vaxelstromslabbet/?lage=guidad&amp;del=impedans</a:t>
-            </a:r>
-          </a:p>
+          <a:p xmlns:a="http://schemas.openxmlformats.org/drawingml/2006/main"/>
         </p:txBody>
       </p:sp>
       <p:sp>
@@ -1082,31 +923,7 @@
         <p:txBody>
           <a:bodyPr xmlns:a="http://schemas.openxmlformats.org/drawingml/2006/main"/>
           <a:lstStyle xmlns:a="http://schemas.openxmlformats.org/drawingml/2006/main"/>
-          <a:p xmlns:a="http://schemas.openxmlformats.org/drawingml/2006/main">
-            <a:r>
-              <a:t>Återgå till resistor- och spolkurvorna om ledande/släpande fortfarande är oklart.</a:t>
-            </a:r>
-          </a:p>
-          <a:p xmlns:a="http://schemas.openxmlformats.org/drawingml/2006/main">
-            <a:r>
-              <a:t/>
-            </a:r>
-          </a:p>
-          <a:p xmlns:a="http://schemas.openxmlformats.org/drawingml/2006/main">
-            <a:r>
-              <a:t>Webbgenomgång: https://nj22az.github.io/sjoskolan/vecka-40/aktuell/Genomgang.html?del=impedans&amp;avsnitt=klart</a:t>
-            </a:r>
-          </a:p>
-          <a:p xmlns:a="http://schemas.openxmlformats.org/drawingml/2006/main">
-            <a:r>
-              <a:t/>
-            </a:r>
-          </a:p>
-          <a:p xmlns:a="http://schemas.openxmlformats.org/drawingml/2006/main">
-            <a:r>
-              <a:t>Guidad labb: https://nj22az.github.io/sjoskolan/vaxelstromslabbet/?lage=guidad&amp;del=impedans</a:t>
-            </a:r>
-          </a:p>
+          <a:p xmlns:a="http://schemas.openxmlformats.org/drawingml/2006/main"/>
         </p:txBody>
       </p:sp>
       <p:sp>
@@ -1172,31 +989,7 @@
         <p:txBody>
           <a:bodyPr xmlns:a="http://schemas.openxmlformats.org/drawingml/2006/main"/>
           <a:lstStyle xmlns:a="http://schemas.openxmlformats.org/drawingml/2006/main"/>
-          <a:p xmlns:a="http://schemas.openxmlformats.org/drawingml/2006/main">
-            <a:r>
-              <a:t>Förslag: 30 min genomgång och film, 15 min gemensamt exempel, 30 min guidad labb, 15 min återkoppling. Fördjupning fördelas efter elevgruppens behov.</a:t>
-            </a:r>
-          </a:p>
-          <a:p xmlns:a="http://schemas.openxmlformats.org/drawingml/2006/main">
-            <a:r>
-              <a:t/>
-            </a:r>
-          </a:p>
-          <a:p xmlns:a="http://schemas.openxmlformats.org/drawingml/2006/main">
-            <a:r>
-              <a:t>Webbgenomgång: https://nj22az.github.io/sjoskolan/vecka-40/aktuell/Genomgang.html?del=impedans&amp;avsnitt=mal</a:t>
-            </a:r>
-          </a:p>
-          <a:p xmlns:a="http://schemas.openxmlformats.org/drawingml/2006/main">
-            <a:r>
-              <a:t/>
-            </a:r>
-          </a:p>
-          <a:p xmlns:a="http://schemas.openxmlformats.org/drawingml/2006/main">
-            <a:r>
-              <a:t>Guidad labb: https://nj22az.github.io/sjoskolan/vaxelstromslabbet/?lage=guidad&amp;del=impedans</a:t>
-            </a:r>
-          </a:p>
+          <a:p xmlns:a="http://schemas.openxmlformats.org/drawingml/2006/main"/>
         </p:txBody>
       </p:sp>
       <p:sp>
@@ -1262,31 +1055,7 @@
         <p:txBody>
           <a:bodyPr xmlns:a="http://schemas.openxmlformats.org/drawingml/2006/main"/>
           <a:lstStyle xmlns:a="http://schemas.openxmlformats.org/drawingml/2006/main"/>
-          <a:p xmlns:a="http://schemas.openxmlformats.org/drawingml/2006/main">
-            <a:r>
-              <a:t>Kurvorna har egna amplitudskalor. Jämför tiden, inte höjden i volt och ampere.</a:t>
-            </a:r>
-          </a:p>
-          <a:p xmlns:a="http://schemas.openxmlformats.org/drawingml/2006/main">
-            <a:r>
-              <a:t/>
-            </a:r>
-          </a:p>
-          <a:p xmlns:a="http://schemas.openxmlformats.org/drawingml/2006/main">
-            <a:r>
-              <a:t>Webbgenomgång: https://nj22az.github.io/sjoskolan/vecka-40/aktuell/Genomgang.html?del=impedans&amp;avsnitt=resistor</a:t>
-            </a:r>
-          </a:p>
-          <a:p xmlns:a="http://schemas.openxmlformats.org/drawingml/2006/main">
-            <a:r>
-              <a:t/>
-            </a:r>
-          </a:p>
-          <a:p xmlns:a="http://schemas.openxmlformats.org/drawingml/2006/main">
-            <a:r>
-              <a:t>Guidad labb: https://nj22az.github.io/sjoskolan/vaxelstromslabbet/?lage=guidad&amp;del=impedans</a:t>
-            </a:r>
-          </a:p>
+          <a:p xmlns:a="http://schemas.openxmlformats.org/drawingml/2006/main"/>
         </p:txBody>
       </p:sp>
       <p:sp>
@@ -1352,31 +1121,7 @@
         <p:txBody>
           <a:bodyPr xmlns:a="http://schemas.openxmlformats.org/drawingml/2006/main"/>
           <a:lstStyle xmlns:a="http://schemas.openxmlformats.org/drawingml/2006/main"/>
-          <a:p xmlns:a="http://schemas.openxmlformats.org/drawingml/2006/main">
-            <a:r>
-              <a:t>En ideal spole ensam har 90° fasförskjutning. En RL-krets har en vinkel mellan 0° och 90°.</a:t>
-            </a:r>
-          </a:p>
-          <a:p xmlns:a="http://schemas.openxmlformats.org/drawingml/2006/main">
-            <a:r>
-              <a:t/>
-            </a:r>
-          </a:p>
-          <a:p xmlns:a="http://schemas.openxmlformats.org/drawingml/2006/main">
-            <a:r>
-              <a:t>Webbgenomgång: https://nj22az.github.io/sjoskolan/vecka-40/aktuell/Genomgang.html?del=impedans&amp;avsnitt=spole</a:t>
-            </a:r>
-          </a:p>
-          <a:p xmlns:a="http://schemas.openxmlformats.org/drawingml/2006/main">
-            <a:r>
-              <a:t/>
-            </a:r>
-          </a:p>
-          <a:p xmlns:a="http://schemas.openxmlformats.org/drawingml/2006/main">
-            <a:r>
-              <a:t>Guidad labb: https://nj22az.github.io/sjoskolan/vaxelstromslabbet/?lage=guidad&amp;del=impedans</a:t>
-            </a:r>
-          </a:p>
+          <a:p xmlns:a="http://schemas.openxmlformats.org/drawingml/2006/main"/>
         </p:txBody>
       </p:sp>
       <p:sp>
@@ -1442,46 +1187,7 @@
         <p:txBody>
           <a:bodyPr xmlns:a="http://schemas.openxmlformats.org/drawingml/2006/main"/>
           <a:lstStyle xmlns:a="http://schemas.openxmlformats.org/drawingml/2006/main"/>
-          <a:p xmlns:a="http://schemas.openxmlformats.org/drawingml/2006/main">
-            <a:r>
-              <a:t>Låt eleven skriva enhetsomvandlingen som en egen rad. XL är reaktans, inte spoltrådens resistans.</a:t>
-            </a:r>
-          </a:p>
-          <a:p xmlns:a="http://schemas.openxmlformats.org/drawingml/2006/main">
-            <a:r>
-              <a:t/>
-            </a:r>
-          </a:p>
-          <a:p xmlns:a="http://schemas.openxmlformats.org/drawingml/2006/main">
-            <a:r>
-              <a:t>Kontrollfråga: Hur många henry är 100 mH?</a:t>
-            </a:r>
-          </a:p>
-          <a:p xmlns:a="http://schemas.openxmlformats.org/drawingml/2006/main">
-            <a:r>
-              <a:t>Facit: 100 mH = 0,100 H.</a:t>
-            </a:r>
-          </a:p>
-          <a:p xmlns:a="http://schemas.openxmlformats.org/drawingml/2006/main">
-            <a:r>
-              <a:t/>
-            </a:r>
-          </a:p>
-          <a:p xmlns:a="http://schemas.openxmlformats.org/drawingml/2006/main">
-            <a:r>
-              <a:t>Webbgenomgång: https://nj22az.github.io/sjoskolan/vecka-40/aktuell/Genomgang.html?del=impedans&amp;avsnitt=xl</a:t>
-            </a:r>
-          </a:p>
-          <a:p xmlns:a="http://schemas.openxmlformats.org/drawingml/2006/main">
-            <a:r>
-              <a:t/>
-            </a:r>
-          </a:p>
-          <a:p xmlns:a="http://schemas.openxmlformats.org/drawingml/2006/main">
-            <a:r>
-              <a:t>Guidad labb: https://nj22az.github.io/sjoskolan/vaxelstromslabbet/?lage=guidad&amp;del=impedans</a:t>
-            </a:r>
-          </a:p>
+          <a:p xmlns:a="http://schemas.openxmlformats.org/drawingml/2006/main"/>
         </p:txBody>
       </p:sp>
       <p:sp>
@@ -1547,31 +1253,7 @@
         <p:txBody>
           <a:bodyPr xmlns:a="http://schemas.openxmlformats.org/drawingml/2006/main"/>
           <a:lstStyle xmlns:a="http://schemas.openxmlformats.org/drawingml/2006/main"/>
-          <a:p xmlns:a="http://schemas.openxmlformats.org/drawingml/2006/main">
-            <a:r>
-              <a:t>Visa först de vinkelräta sidorna och sedan diagonalen. Komplexa tal behövs inte för denna beräkning.</a:t>
-            </a:r>
-          </a:p>
-          <a:p xmlns:a="http://schemas.openxmlformats.org/drawingml/2006/main">
-            <a:r>
-              <a:t/>
-            </a:r>
-          </a:p>
-          <a:p xmlns:a="http://schemas.openxmlformats.org/drawingml/2006/main">
-            <a:r>
-              <a:t>Webbgenomgång: https://nj22az.github.io/sjoskolan/vecka-40/aktuell/Genomgang.html?del=impedans&amp;avsnitt=z</a:t>
-            </a:r>
-          </a:p>
-          <a:p xmlns:a="http://schemas.openxmlformats.org/drawingml/2006/main">
-            <a:r>
-              <a:t/>
-            </a:r>
-          </a:p>
-          <a:p xmlns:a="http://schemas.openxmlformats.org/drawingml/2006/main">
-            <a:r>
-              <a:t>Guidad labb: https://nj22az.github.io/sjoskolan/vaxelstromslabbet/?lage=guidad&amp;del=impedans</a:t>
-            </a:r>
-          </a:p>
+          <a:p xmlns:a="http://schemas.openxmlformats.org/drawingml/2006/main"/>
         </p:txBody>
       </p:sp>
       <p:sp>
@@ -1637,55 +1319,7 @@
         <p:txBody>
           <a:bodyPr xmlns:a="http://schemas.openxmlformats.org/drawingml/2006/main"/>
           <a:lstStyle xmlns:a="http://schemas.openxmlformats.org/drawingml/2006/main"/>
-          <a:p xmlns:a="http://schemas.openxmlformats.org/drawingml/2006/main">
-            <a:r>
-              <a:rPr/>
-              <a:t>Med X</a:t>
-            </a:r>
-            <a:r>
-              <a:rPr baseline="-25000"/>
-              <a:t>L</a:t>
-            </a:r>
-            <a:r>
-              <a:rPr/>
-              <a:t> = 2π · 50 · 0,382 = 120,0 Ω blir I ≈ 1,769 A. Två decimaler är 1,77 A. Labbens krets räknas på samma sätt med andra värden.</a:t>
-            </a:r>
-          </a:p>
-          <a:p xmlns:a="http://schemas.openxmlformats.org/drawingml/2006/main">
-            <a:r>
-              <a:t/>
-            </a:r>
-          </a:p>
-          <a:p xmlns:a="http://schemas.openxmlformats.org/drawingml/2006/main">
-            <a:r>
-              <a:t>Kontrollfråga: Varför räcker inte 12/40 när spolen är med?</a:t>
-            </a:r>
-          </a:p>
-          <a:p xmlns:a="http://schemas.openxmlformats.org/drawingml/2006/main">
-            <a:r>
-              <a:t>Facit: Spolens reaktans ingår också i impedansen.</a:t>
-            </a:r>
-          </a:p>
-          <a:p xmlns:a="http://schemas.openxmlformats.org/drawingml/2006/main">
-            <a:r>
-              <a:t/>
-            </a:r>
-          </a:p>
-          <a:p xmlns:a="http://schemas.openxmlformats.org/drawingml/2006/main">
-            <a:r>
-              <a:t>Webbgenomgång: https://nj22az.github.io/sjoskolan/vecka-40/aktuell/Genomgang.html?del=impedans&amp;avsnitt=strom</a:t>
-            </a:r>
-          </a:p>
-          <a:p xmlns:a="http://schemas.openxmlformats.org/drawingml/2006/main">
-            <a:r>
-              <a:t/>
-            </a:r>
-          </a:p>
-          <a:p xmlns:a="http://schemas.openxmlformats.org/drawingml/2006/main">
-            <a:r>
-              <a:t>Guidad labb: https://nj22az.github.io/sjoskolan/vaxelstromslabbet/?lage=guidad&amp;del=impedans</a:t>
-            </a:r>
-          </a:p>
+          <a:p xmlns:a="http://schemas.openxmlformats.org/drawingml/2006/main"/>
         </p:txBody>
       </p:sp>
       <p:sp>
@@ -1751,31 +1385,7 @@
         <p:txBody>
           <a:bodyPr xmlns:a="http://schemas.openxmlformats.org/drawingml/2006/main"/>
           <a:lstStyle xmlns:a="http://schemas.openxmlformats.org/drawingml/2006/main"/>
-          <a:p xmlns:a="http://schemas.openxmlformats.org/drawingml/2006/main">
-            <a:r>
-              <a:t>Spänningarnas belopp summeras inte direkt eftersom de är fasförskjutna.</a:t>
-            </a:r>
-          </a:p>
-          <a:p xmlns:a="http://schemas.openxmlformats.org/drawingml/2006/main">
-            <a:r>
-              <a:t/>
-            </a:r>
-          </a:p>
-          <a:p xmlns:a="http://schemas.openxmlformats.org/drawingml/2006/main">
-            <a:r>
-              <a:t>Webbgenomgång: https://nj22az.github.io/sjoskolan/vecka-40/aktuell/Genomgang.html?del=impedans&amp;avsnitt=exempel</a:t>
-            </a:r>
-          </a:p>
-          <a:p xmlns:a="http://schemas.openxmlformats.org/drawingml/2006/main">
-            <a:r>
-              <a:t/>
-            </a:r>
-          </a:p>
-          <a:p xmlns:a="http://schemas.openxmlformats.org/drawingml/2006/main">
-            <a:r>
-              <a:t>Guidad labb: https://nj22az.github.io/sjoskolan/vaxelstromslabbet/?lage=guidad&amp;del=impedans</a:t>
-            </a:r>
-          </a:p>
+          <a:p xmlns:a="http://schemas.openxmlformats.org/drawingml/2006/main"/>
         </p:txBody>
       </p:sp>
       <p:sp>
@@ -1841,31 +1451,7 @@
         <p:txBody>
           <a:bodyPr xmlns:a="http://schemas.openxmlformats.org/drawingml/2006/main"/>
           <a:lstStyle xmlns:a="http://schemas.openxmlformats.org/drawingml/2006/main"/>
-          <a:p xmlns:a="http://schemas.openxmlformats.org/drawingml/2006/main">
-            <a:r>
-              <a:t>Uppgifterna ställer in samma krets automatiskt. Eleven gör beräkningen före avläsningen.</a:t>
-            </a:r>
-          </a:p>
-          <a:p xmlns:a="http://schemas.openxmlformats.org/drawingml/2006/main">
-            <a:r>
-              <a:t/>
-            </a:r>
-          </a:p>
-          <a:p xmlns:a="http://schemas.openxmlformats.org/drawingml/2006/main">
-            <a:r>
-              <a:t>Webbgenomgång: https://nj22az.github.io/sjoskolan/vecka-40/aktuell/Genomgang.html?del=impedans&amp;avsnitt=labb</a:t>
-            </a:r>
-          </a:p>
-          <a:p xmlns:a="http://schemas.openxmlformats.org/drawingml/2006/main">
-            <a:r>
-              <a:t/>
-            </a:r>
-          </a:p>
-          <a:p xmlns:a="http://schemas.openxmlformats.org/drawingml/2006/main">
-            <a:r>
-              <a:t>Guidad labb: https://nj22az.github.io/sjoskolan/vaxelstromslabbet/?lage=guidad&amp;del=impedans</a:t>
-            </a:r>
-          </a:p>
+          <a:p xmlns:a="http://schemas.openxmlformats.org/drawingml/2006/main"/>
         </p:txBody>
       </p:sp>
       <p:sp>

--- a/sjoskolan/vecka-40/aktuell/v40_02_Reaktans_och_impedans_elev.pptx
+++ b/sjoskolan/vecka-40/aktuell/v40_02_Reaktans_och_impedans_elev.pptx
@@ -20748,7 +20748,7 @@
                 <a:ea typeface="Calibri"/>
                 <a:cs typeface="Calibri"/>
               </a:rPr>
-              <a:t>Du får egna värden på R och L ur ditt namn. Förutsäg X</a:t>
+              <a:t>Du får egna värden på R och L ur ditt D. Förutsäg X</a:t>
             </a:r>
             <a:r>
               <a:rPr sz="2100" b="0" baseline="-25000">

--- a/sjoskolan/vecka-40/aktuell/v40_02_Reaktans_och_impedans_elev.pptx
+++ b/sjoskolan/vecka-40/aktuell/v40_02_Reaktans_och_impedans_elev.pptx
@@ -15,9 +15,11 @@
     <p:sldId xmlns:r="http://schemas.openxmlformats.org/officeDocument/2006/relationships" id="260" r:id="R0cf053cd21684bcf"/>
     <p:sldId xmlns:r="http://schemas.openxmlformats.org/officeDocument/2006/relationships" id="261" r:id="Re222a03666184089"/>
     <p:sldId xmlns:r="http://schemas.openxmlformats.org/officeDocument/2006/relationships" id="262" r:id="R5ec7eb76327844e8"/>
+    <p:sldId xmlns:ns0="http://schemas.openxmlformats.org/officeDocument/2006/relationships" id="272" ns0:id="rId23"/>
     <p:sldId xmlns:r="http://schemas.openxmlformats.org/officeDocument/2006/relationships" id="263" r:id="Rb21a034434ad46e0"/>
     <p:sldId xmlns:r="http://schemas.openxmlformats.org/officeDocument/2006/relationships" id="264" r:id="R060d93ff5f5142bd"/>
     <p:sldId xmlns:r="http://schemas.openxmlformats.org/officeDocument/2006/relationships" id="265" r:id="R0993178b8c854c8f"/>
+    <p:sldId xmlns:ns0="http://schemas.openxmlformats.org/officeDocument/2006/relationships" id="273" ns0:id="rId24"/>
     <p:sldId xmlns:r="http://schemas.openxmlformats.org/officeDocument/2006/relationships" id="266" r:id="R5c6ad57e50dc4145"/>
     <p:sldId xmlns:r="http://schemas.openxmlformats.org/officeDocument/2006/relationships" id="267" r:id="R68314872dbed4bd9"/>
     <p:sldId xmlns:r="http://schemas.openxmlformats.org/officeDocument/2006/relationships" id="268" r:id="R39232d4f950d4735"/>
@@ -14079,6 +14081,429 @@
       </p:grpSpPr>
       <p:pic>
         <p:nvPicPr>
+          <p:cNvPr id="13" name="Bildobjekt 2"/>
+          <p:cNvPicPr>
+            <a:picLocks xmlns:a="http://schemas.openxmlformats.org/drawingml/2006/main" noChangeAspect="1"/>
+          </p:cNvPicPr>
+          <p:nvPr/>
+        </p:nvPicPr>
+        <p:blipFill>
+          <a:blip xmlns:r="http://schemas.openxmlformats.org/officeDocument/2006/relationships" xmlns:a="http://schemas.openxmlformats.org/drawingml/2006/main" r:embed="R1b078ca888674f4c"/>
+          <a:stretch xmlns:a="http://schemas.openxmlformats.org/drawingml/2006/main">
+            <a:fillRect l="0" t="0" r="0" b="0"/>
+          </a:stretch>
+        </p:blipFill>
+        <p:spPr>
+          <a:xfrm xmlns:a="http://schemas.openxmlformats.org/drawingml/2006/main">
+            <a:off x="0" y="6098791"/>
+            <a:ext cx="9144006" cy="763524"/>
+          </a:xfrm>
+          <a:prstGeom xmlns:a="http://schemas.openxmlformats.org/drawingml/2006/main" prst="rect">
+            <a:avLst/>
+          </a:prstGeom>
+        </p:spPr>
+      </p:pic>
+      <p:sp>
+        <p:nvSpPr>
+          <p:cNvPr id="9" name="title">
+            <a:extLst xmlns:a="http://schemas.openxmlformats.org/drawingml/2006/main">
+              <a:ext uri="{FF2B5EF4-FFF2-40B4-BE49-F238E27FC236}">
+                <a16:creationId xmlns:a16="http://schemas.microsoft.com/office/drawing/2014/main" id="{59AF0E0B-997B-4927-AECB-0DF795231049}"/>
+              </a:ext>
+            </a:extLst>
+          </p:cNvPr>
+          <p:cNvSpPr>
+            <a:spLocks xmlns:a="http://schemas.openxmlformats.org/drawingml/2006/main" noGrp="1"/>
+          </p:cNvSpPr>
+          <p:nvPr/>
+        </p:nvSpPr>
+        <p:spPr>
+          <a:xfrm xmlns:a="http://schemas.openxmlformats.org/drawingml/2006/main">
+            <a:off x="571500" y="428625"/>
+            <a:ext cx="8001000" cy="781050"/>
+          </a:xfrm>
+          <a:prstGeom xmlns:a="http://schemas.openxmlformats.org/drawingml/2006/main" prst="rect">
+            <a:avLst/>
+          </a:prstGeom>
+          <a:noFill xmlns:a="http://schemas.openxmlformats.org/drawingml/2006/main"/>
+          <a:ln xmlns:a="http://schemas.openxmlformats.org/drawingml/2006/main" w="0">
+            <a:noFill/>
+          </a:ln>
+        </p:spPr>
+        <p:txBody>
+          <a:bodyPr xmlns:a="http://schemas.openxmlformats.org/drawingml/2006/main" lIns="0" tIns="0" rIns="0" bIns="0" anchor="t">
+            <a:noAutofit/>
+          </a:bodyPr>
+          <a:lstStyle xmlns:a="http://schemas.openxmlformats.org/drawingml/2006/main"/>
+          <a:p xmlns:a="http://schemas.openxmlformats.org/drawingml/2006/main">
+            <a:pPr>
+              <a:defRPr sz="3000" b="1">
+                <a:solidFill>
+                  <a:srgbClr val="111111"/>
+                </a:solidFill>
+                <a:latin typeface="Calibri"/>
+                <a:ea typeface="Calibri"/>
+                <a:cs typeface="Calibri"/>
+              </a:defRPr>
+            </a:pPr>
+            <a:r>
+              <a:rPr sz="3000" b="1">
+                <a:solidFill>
+                  <a:srgbClr val="111111"/>
+                </a:solidFill>
+                <a:latin typeface="Calibri"/>
+                <a:ea typeface="Calibri"/>
+                <a:cs typeface="Calibri"/>
+              </a:rPr>
+              <a:t>Arbetsgång i den guidade labben</a:t>
+            </a:r>
+          </a:p>
+        </p:txBody>
+      </p:sp>
+      <p:sp>
+        <p:nvSpPr>
+          <p:cNvPr id="10" name="body">
+            <a:extLst xmlns:a="http://schemas.openxmlformats.org/drawingml/2006/main">
+              <a:ext uri="{FF2B5EF4-FFF2-40B4-BE49-F238E27FC236}">
+                <a16:creationId xmlns:a16="http://schemas.microsoft.com/office/drawing/2014/main" id="{73849165-873D-40A5-9AB9-ED0CC03C699D}"/>
+              </a:ext>
+            </a:extLst>
+          </p:cNvPr>
+          <p:cNvSpPr>
+            <a:spLocks xmlns:a="http://schemas.openxmlformats.org/drawingml/2006/main" noGrp="1"/>
+          </p:cNvSpPr>
+          <p:nvPr/>
+        </p:nvSpPr>
+        <p:spPr>
+          <a:xfrm xmlns:a="http://schemas.openxmlformats.org/drawingml/2006/main">
+            <a:off x="762000" y="1590675"/>
+            <a:ext cx="7620000" cy="3524250"/>
+          </a:xfrm>
+          <a:prstGeom xmlns:a="http://schemas.openxmlformats.org/drawingml/2006/main" prst="rect">
+            <a:avLst/>
+          </a:prstGeom>
+          <a:noFill xmlns:a="http://schemas.openxmlformats.org/drawingml/2006/main"/>
+          <a:ln xmlns:a="http://schemas.openxmlformats.org/drawingml/2006/main" w="0">
+            <a:noFill/>
+          </a:ln>
+        </p:spPr>
+        <p:txBody>
+          <a:bodyPr xmlns:a="http://schemas.openxmlformats.org/drawingml/2006/main" lIns="0" tIns="0" rIns="0" bIns="0" anchor="t">
+            <a:noAutofit/>
+          </a:bodyPr>
+          <a:lstStyle xmlns:a="http://schemas.openxmlformats.org/drawingml/2006/main"/>
+          <a:p xmlns:a="http://schemas.openxmlformats.org/drawingml/2006/main">
+            <a:pPr>
+              <a:defRPr sz="2100" b="0">
+                <a:solidFill>
+                  <a:srgbClr val="172F43"/>
+                </a:solidFill>
+                <a:latin typeface="Calibri"/>
+                <a:ea typeface="Calibri"/>
+                <a:cs typeface="Calibri"/>
+              </a:defRPr>
+            </a:pPr>
+            <a:r>
+              <a:rPr sz="2100" b="0">
+                <a:solidFill>
+                  <a:srgbClr val="172F43"/>
+                </a:solidFill>
+                <a:latin typeface="Calibri"/>
+                <a:ea typeface="Calibri"/>
+                <a:cs typeface="Calibri"/>
+              </a:rPr>
+              <a:t>Du får egna värden på R och L ur ditt D. Förutsäg X</a:t>
+            </a:r>
+            <a:r>
+              <a:rPr sz="2100" b="0" baseline="-25000">
+                <a:solidFill>
+                  <a:srgbClr val="172F43"/>
+                </a:solidFill>
+                <a:latin typeface="Calibri"/>
+                <a:ea typeface="Calibri"/>
+                <a:cs typeface="Calibri"/>
+              </a:rPr>
+              <a:t>L</a:t>
+            </a:r>
+            <a:r>
+              <a:rPr sz="2100" b="0">
+                <a:solidFill>
+                  <a:srgbClr val="172F43"/>
+                </a:solidFill>
+                <a:latin typeface="Calibri"/>
+                <a:ea typeface="Calibri"/>
+                <a:cs typeface="Calibri"/>
+              </a:rPr>
+              <a:t>, läs av och kontrollera enheten Ω.</a:t>
+            </a:r>
+          </a:p>
+          <a:p xmlns:a="http://schemas.openxmlformats.org/drawingml/2006/main">
+            <a:pPr>
+              <a:defRPr sz="2100" b="0">
+                <a:solidFill>
+                  <a:srgbClr val="172F43"/>
+                </a:solidFill>
+                <a:latin typeface="Calibri"/>
+                <a:ea typeface="Calibri"/>
+                <a:cs typeface="Calibri"/>
+              </a:defRPr>
+            </a:pPr>
+          </a:p>
+          <a:p xmlns:a="http://schemas.openxmlformats.org/drawingml/2006/main">
+            <a:pPr>
+              <a:defRPr sz="2100" b="0">
+                <a:solidFill>
+                  <a:srgbClr val="172F43"/>
+                </a:solidFill>
+                <a:latin typeface="Calibri"/>
+                <a:ea typeface="Calibri"/>
+                <a:cs typeface="Calibri"/>
+              </a:defRPr>
+            </a:pPr>
+            <a:r>
+              <a:rPr sz="2100" b="0">
+                <a:solidFill>
+                  <a:srgbClr val="172F43"/>
+                </a:solidFill>
+                <a:latin typeface="Calibri"/>
+                <a:ea typeface="Calibri"/>
+                <a:cs typeface="Calibri"/>
+              </a:rPr>
+              <a:t>Använd R och X</a:t>
+            </a:r>
+            <a:r>
+              <a:rPr sz="2100" b="0" baseline="-25000">
+                <a:solidFill>
+                  <a:srgbClr val="172F43"/>
+                </a:solidFill>
+                <a:latin typeface="Calibri"/>
+                <a:ea typeface="Calibri"/>
+                <a:cs typeface="Calibri"/>
+              </a:rPr>
+              <a:t>L</a:t>
+            </a:r>
+            <a:r>
+              <a:rPr sz="2100" b="0">
+                <a:solidFill>
+                  <a:srgbClr val="172F43"/>
+                </a:solidFill>
+                <a:latin typeface="Calibri"/>
+                <a:ea typeface="Calibri"/>
+                <a:cs typeface="Calibri"/>
+              </a:rPr>
+              <a:t> för att beräkna |Z|.</a:t>
+            </a:r>
+          </a:p>
+          <a:p xmlns:a="http://schemas.openxmlformats.org/drawingml/2006/main">
+            <a:pPr>
+              <a:defRPr sz="2100" b="0">
+                <a:solidFill>
+                  <a:srgbClr val="172F43"/>
+                </a:solidFill>
+                <a:latin typeface="Calibri"/>
+                <a:ea typeface="Calibri"/>
+                <a:cs typeface="Calibri"/>
+              </a:defRPr>
+            </a:pPr>
+          </a:p>
+          <a:p xmlns:a="http://schemas.openxmlformats.org/drawingml/2006/main">
+            <a:pPr>
+              <a:defRPr sz="2100" b="0">
+                <a:solidFill>
+                  <a:srgbClr val="172F43"/>
+                </a:solidFill>
+                <a:latin typeface="Calibri"/>
+                <a:ea typeface="Calibri"/>
+                <a:cs typeface="Calibri"/>
+              </a:defRPr>
+            </a:pPr>
+            <a:r>
+              <a:rPr sz="2100" b="0">
+                <a:solidFill>
+                  <a:srgbClr val="172F43"/>
+                </a:solidFill>
+                <a:latin typeface="Calibri"/>
+                <a:ea typeface="Calibri"/>
+                <a:cs typeface="Calibri"/>
+              </a:rPr>
+              <a:t>Beräkna strömmen och jämför med kretsen som bara innehåller R.</a:t>
+            </a:r>
+          </a:p>
+          <a:p xmlns:a="http://schemas.openxmlformats.org/drawingml/2006/main">
+            <a:pPr>
+              <a:defRPr sz="2100" b="0">
+                <a:solidFill>
+                  <a:srgbClr val="172F43"/>
+                </a:solidFill>
+                <a:latin typeface="Calibri"/>
+                <a:ea typeface="Calibri"/>
+                <a:cs typeface="Calibri"/>
+              </a:defRPr>
+            </a:pPr>
+          </a:p>
+          <a:p xmlns:a="http://schemas.openxmlformats.org/drawingml/2006/main">
+            <a:pPr>
+              <a:defRPr sz="2100" b="0">
+                <a:solidFill>
+                  <a:srgbClr val="172F43"/>
+                </a:solidFill>
+                <a:latin typeface="Calibri"/>
+                <a:ea typeface="Calibri"/>
+                <a:cs typeface="Calibri"/>
+              </a:defRPr>
+            </a:pPr>
+            <a:r>
+              <a:rPr sz="2100" b="0">
+                <a:solidFill>
+                  <a:srgbClr val="172F43"/>
+                </a:solidFill>
+                <a:latin typeface="Calibri"/>
+                <a:ea typeface="Calibri"/>
+                <a:cs typeface="Calibri"/>
+              </a:rPr>
+              <a:t>Skriv varför strömmen ändras och vilken kurva som kommer först.</a:t>
+            </a:r>
+          </a:p>
+        </p:txBody>
+      </p:sp>
+      <p:sp>
+        <p:nvSpPr>
+          <p:cNvPr id="11" name="section">
+            <a:extLst xmlns:a="http://schemas.openxmlformats.org/drawingml/2006/main">
+              <a:ext uri="{FF2B5EF4-FFF2-40B4-BE49-F238E27FC236}">
+                <a16:creationId xmlns:a16="http://schemas.microsoft.com/office/drawing/2014/main" id="{782C72AB-CC0D-49A3-830D-C88D45E82433}"/>
+              </a:ext>
+            </a:extLst>
+          </p:cNvPr>
+          <p:cNvSpPr>
+            <a:spLocks xmlns:a="http://schemas.openxmlformats.org/drawingml/2006/main" noGrp="1"/>
+          </p:cNvSpPr>
+          <p:nvPr/>
+        </p:nvSpPr>
+        <p:spPr>
+          <a:xfrm xmlns:a="http://schemas.openxmlformats.org/drawingml/2006/main">
+            <a:off x="1809750" y="6419850"/>
+            <a:ext cx="4191000" cy="266700"/>
+          </a:xfrm>
+          <a:prstGeom xmlns:a="http://schemas.openxmlformats.org/drawingml/2006/main" prst="rect">
+            <a:avLst/>
+          </a:prstGeom>
+          <a:noFill xmlns:a="http://schemas.openxmlformats.org/drawingml/2006/main"/>
+          <a:ln xmlns:a="http://schemas.openxmlformats.org/drawingml/2006/main" w="0">
+            <a:noFill/>
+          </a:ln>
+        </p:spPr>
+        <p:txBody>
+          <a:bodyPr xmlns:a="http://schemas.openxmlformats.org/drawingml/2006/main" lIns="0" tIns="0" rIns="0" bIns="0" anchor="t">
+            <a:noAutofit/>
+          </a:bodyPr>
+          <a:lstStyle xmlns:a="http://schemas.openxmlformats.org/drawingml/2006/main"/>
+          <a:p xmlns:a="http://schemas.openxmlformats.org/drawingml/2006/main">
+            <a:pPr>
+              <a:defRPr sz="1275" b="0">
+                <a:solidFill>
+                  <a:srgbClr val="FFFFFF"/>
+                </a:solidFill>
+                <a:latin typeface="Calibri"/>
+                <a:ea typeface="Calibri"/>
+                <a:cs typeface="Calibri"/>
+              </a:defRPr>
+            </a:pPr>
+            <a:r>
+              <a:rPr sz="1275" b="0">
+                <a:solidFill>
+                  <a:srgbClr val="FFFFFF"/>
+                </a:solidFill>
+                <a:latin typeface="Calibri"/>
+                <a:ea typeface="Calibri"/>
+                <a:cs typeface="Calibri"/>
+              </a:rPr>
+              <a:t>Grunddel</a:t>
+            </a:r>
+          </a:p>
+        </p:txBody>
+      </p:sp>
+      <p:sp>
+        <p:nvSpPr>
+          <p:cNvPr id="12" name="page">
+            <a:extLst xmlns:a="http://schemas.openxmlformats.org/drawingml/2006/main">
+              <a:ext uri="{FF2B5EF4-FFF2-40B4-BE49-F238E27FC236}">
+                <a16:creationId xmlns:a16="http://schemas.microsoft.com/office/drawing/2014/main" id="{2C25477F-255F-4BC7-B3DD-ED121F65763C}"/>
+              </a:ext>
+            </a:extLst>
+          </p:cNvPr>
+          <p:cNvSpPr>
+            <a:spLocks xmlns:a="http://schemas.openxmlformats.org/drawingml/2006/main" noGrp="1"/>
+          </p:cNvSpPr>
+          <p:nvPr/>
+        </p:nvSpPr>
+        <p:spPr>
+          <a:xfrm xmlns:a="http://schemas.openxmlformats.org/drawingml/2006/main">
+            <a:off x="8286750" y="6438900"/>
+            <a:ext cx="428625" cy="285750"/>
+          </a:xfrm>
+          <a:prstGeom xmlns:a="http://schemas.openxmlformats.org/drawingml/2006/main" prst="rect">
+            <a:avLst/>
+          </a:prstGeom>
+          <a:noFill xmlns:a="http://schemas.openxmlformats.org/drawingml/2006/main"/>
+          <a:ln xmlns:a="http://schemas.openxmlformats.org/drawingml/2006/main" w="0">
+            <a:noFill/>
+          </a:ln>
+        </p:spPr>
+        <p:txBody>
+          <a:bodyPr xmlns:a="http://schemas.openxmlformats.org/drawingml/2006/main" lIns="0" tIns="0" rIns="0" bIns="0" anchor="t">
+            <a:noAutofit/>
+          </a:bodyPr>
+          <a:lstStyle xmlns:a="http://schemas.openxmlformats.org/drawingml/2006/main"/>
+          <a:p xmlns:a="http://schemas.openxmlformats.org/drawingml/2006/main">
+            <a:pPr>
+              <a:defRPr sz="1500" b="0">
+                <a:solidFill>
+                  <a:srgbClr val="FFFFFF"/>
+                </a:solidFill>
+                <a:latin typeface="Calibri"/>
+                <a:ea typeface="Calibri"/>
+                <a:cs typeface="Calibri"/>
+              </a:defRPr>
+            </a:pPr>
+            <a:r>
+              <a:rPr sz="1500" b="0">
+                <a:solidFill>
+                  <a:srgbClr val="FFFFFF"/>
+                </a:solidFill>
+                <a:latin typeface="Calibri"/>
+                <a:ea typeface="Calibri"/>
+                <a:cs typeface="Calibri"/>
+              </a:rPr>
+              <a:t>10</a:t>
+            </a:r>
+          </a:p>
+        </p:txBody>
+      </p:sp>
+    </p:spTree>
+    <p:extLst>
+      <p:ext uri="{BB962C8B-B14F-4D97-AF65-F5344CB8AC3E}">
+        <p14:creationId xmlns:p14="http://schemas.microsoft.com/office/powerpoint/2010/main" val="2747996220"/>
+      </p:ext>
+    </p:extLst>
+  </p:cSld>
+</p:sld>
+</file>
+
+<file path=ppt/slides/slide11.xml><?xml version="1.0" encoding="utf-8"?>
+<p:sld xmlns:p="http://schemas.openxmlformats.org/presentationml/2006/main">
+  <p:cSld>
+    <p:spTree>
+      <p:nvGrpSpPr>
+        <p:cNvPr id="1" name=""/>
+        <p:cNvGrpSpPr/>
+        <p:nvPr/>
+      </p:nvGrpSpPr>
+      <p:grpSpPr>
+        <a:xfrm xmlns:a="http://schemas.openxmlformats.org/drawingml/2006/main"/>
+      </p:grpSpPr>
+      <p:pic>
+        <p:nvPicPr>
           <p:cNvPr id="15" name="Bildobjekt 2"/>
           <p:cNvPicPr>
             <a:picLocks xmlns:a="http://schemas.openxmlformats.org/drawingml/2006/main" noChangeAspect="1"/>
@@ -14511,7 +14936,7 @@
                 <a:ea typeface="Calibri"/>
                 <a:cs typeface="Calibri"/>
               </a:rPr>
-              <a:t>10</a:t>
+              <a:t>11</a:t>
             </a:r>
           </a:p>
         </p:txBody>
@@ -14526,7 +14951,495 @@
 </p:sld>
 </file>
 
-<file path=ppt/slides/slide11.xml><?xml version="1.0" encoding="utf-8"?>
+<file path=ppt/slides/slide12.xml><?xml version="1.0" encoding="utf-8"?>
+<p:sld xmlns:a="http://schemas.openxmlformats.org/drawingml/2006/main" xmlns:p="http://schemas.openxmlformats.org/presentationml/2006/main" xmlns:r="http://schemas.openxmlformats.org/officeDocument/2006/relationships">
+  <p:cSld>
+    <p:spTree>
+      <p:nvGrpSpPr>
+        <p:cNvPr id="1" name=""/>
+        <p:cNvGrpSpPr/>
+        <p:nvPr/>
+      </p:nvGrpSpPr>
+      <p:grpSpPr/>
+      <p:pic>
+        <p:nvPicPr>
+          <p:cNvPr id="2" name="Picture 1" descr="image.jpeg"/>
+          <p:cNvPicPr>
+            <a:picLocks noChangeAspect="1"/>
+          </p:cNvPicPr>
+          <p:nvPr/>
+        </p:nvPicPr>
+        <p:blipFill>
+          <a:blip r:embed="rId2"/>
+          <a:stretch>
+            <a:fillRect/>
+          </a:stretch>
+        </p:blipFill>
+        <p:spPr>
+          <a:xfrm>
+            <a:off x="0" y="6098791"/>
+            <a:ext cx="9144006" cy="763524"/>
+          </a:xfrm>
+          <a:prstGeom prst="rect">
+            <a:avLst/>
+          </a:prstGeom>
+        </p:spPr>
+      </p:pic>
+      <p:sp>
+        <p:nvSpPr>
+          <p:cNvPr id="9" name="title">
+            <a:extLst>
+              <a:ext uri="{FF2B5EF4-FFF2-40B4-BE49-F238E27FC236}">
+                <a16:creationId xmlns:a16="http://schemas.microsoft.com/office/drawing/2014/main" id="{F2521703-A77C-49DA-B9AC-CE41A70E1F20}"/>
+              </a:ext>
+            </a:extLst>
+          </p:cNvPr>
+          <p:cNvSpPr>
+            <a:spLocks noGrp="1"/>
+          </p:cNvSpPr>
+          <p:nvPr/>
+        </p:nvSpPr>
+        <p:spPr>
+          <a:xfrm>
+            <a:off x="571500" y="428625"/>
+            <a:ext cx="8001000" cy="781050"/>
+          </a:xfrm>
+          <a:prstGeom prst="rect">
+            <a:avLst/>
+          </a:prstGeom>
+          <a:noFill/>
+          <a:ln w="0">
+            <a:noFill/>
+          </a:ln>
+        </p:spPr>
+        <p:txBody>
+          <a:bodyPr lIns="0" tIns="0" rIns="0" bIns="0" anchor="t">
+            <a:noAutofit/>
+          </a:bodyPr>
+          <a:lstStyle/>
+          <a:p>
+            <a:pPr>
+              <a:defRPr sz="3000" b="1">
+                <a:solidFill>
+                  <a:srgbClr val="111111"/>
+                </a:solidFill>
+                <a:latin typeface="Calibri"/>
+                <a:ea typeface="Calibri"/>
+                <a:cs typeface="Calibri"/>
+              </a:defRPr>
+            </a:pPr>
+            <a:r>
+              <a:rPr sz="3000" b="1">
+                <a:solidFill>
+                  <a:srgbClr val="111111"/>
+                </a:solidFill>
+                <a:latin typeface="Calibri"/>
+                <a:ea typeface="Calibri"/>
+                <a:cs typeface="Calibri"/>
+              </a:rPr>
+              <a:t>Din tur: fläktens fasvinkel</a:t>
+            </a:r>
+          </a:p>
+        </p:txBody>
+      </p:sp>
+      <p:sp>
+        <p:nvSpPr>
+          <p:cNvPr id="10" name="body">
+            <a:extLst>
+              <a:ext uri="{FF2B5EF4-FFF2-40B4-BE49-F238E27FC236}">
+                <a16:creationId xmlns:a16="http://schemas.microsoft.com/office/drawing/2014/main" id="{291BF31B-45F2-49F6-9EF5-10A99306BE85}"/>
+              </a:ext>
+            </a:extLst>
+          </p:cNvPr>
+          <p:cNvSpPr>
+            <a:spLocks noGrp="1"/>
+          </p:cNvSpPr>
+          <p:nvPr/>
+        </p:nvSpPr>
+        <p:spPr>
+          <a:xfrm>
+            <a:off x="762000" y="1330000"/>
+            <a:ext cx="7620000" cy="560000"/>
+          </a:xfrm>
+          <a:prstGeom prst="rect">
+            <a:avLst/>
+          </a:prstGeom>
+          <a:noFill/>
+          <a:ln w="0">
+            <a:noFill/>
+          </a:ln>
+        </p:spPr>
+        <p:txBody>
+          <a:bodyPr lIns="0" tIns="0" rIns="0" bIns="0" anchor="t">
+            <a:noAutofit/>
+          </a:bodyPr>
+          <a:lstStyle/>
+          <a:p>
+            <a:pPr>
+              <a:defRPr sz="2100" b="0">
+                <a:solidFill>
+                  <a:srgbClr val="172F43"/>
+                </a:solidFill>
+                <a:latin typeface="Calibri"/>
+                <a:ea typeface="Calibri"/>
+                <a:cs typeface="Calibri"/>
+              </a:defRPr>
+            </a:pPr>
+            <a:r>
+              <a:rPr sz="1600" b="0">
+                <a:solidFill>
+                  <a:srgbClr val="4D6579"/>
+                </a:solidFill>
+                <a:latin typeface="Calibri"/>
+                <a:ea typeface="Calibri"/>
+                <a:cs typeface="Calibri"/>
+              </a:rPr>
+              <a:t>Räkna på papper eller miniwhiteboard. Titta på svaret först när du har ett eget.</a:t>
+            </a:r>
+          </a:p>
+        </p:txBody>
+      </p:sp>
+      <p:sp>
+        <p:nvSpPr>
+          <p:cNvPr id="11" name="check">
+            <a:extLst>
+              <a:ext uri="{FF2B5EF4-FFF2-40B4-BE49-F238E27FC236}">
+                <a16:creationId xmlns:a16="http://schemas.microsoft.com/office/drawing/2014/main" id="{30756698-D4DD-4191-BE47-3D34838EF194}"/>
+              </a:ext>
+            </a:extLst>
+          </p:cNvPr>
+          <p:cNvSpPr>
+            <a:spLocks noGrp="1"/>
+          </p:cNvSpPr>
+          <p:nvPr/>
+        </p:nvSpPr>
+        <p:spPr>
+          <a:xfrm>
+            <a:off x="762000" y="1950000"/>
+            <a:ext cx="7620000" cy="1900000"/>
+          </a:xfrm>
+          <a:prstGeom prst="rect">
+            <a:avLst/>
+          </a:prstGeom>
+          <a:noFill/>
+          <a:ln w="0">
+            <a:noFill/>
+          </a:ln>
+        </p:spPr>
+        <p:txBody>
+          <a:bodyPr lIns="0" tIns="0" rIns="0" bIns="0" anchor="t" wrap="square">
+            <a:noAutofit/>
+          </a:bodyPr>
+          <a:lstStyle/>
+          <a:p>
+            <a:pPr>
+              <a:defRPr sz="1725" b="1">
+                <a:solidFill>
+                  <a:srgbClr val="064F91"/>
+                </a:solidFill>
+                <a:latin typeface="Calibri"/>
+                <a:ea typeface="Calibri"/>
+                <a:cs typeface="Calibri"/>
+              </a:defRPr>
+            </a:pPr>
+            <a:r>
+              <a:rPr sz="2600" b="1">
+                <a:solidFill>
+                  <a:srgbClr val="163248"/>
+                </a:solidFill>
+                <a:latin typeface="Calibri"/>
+                <a:ea typeface="Calibri"/>
+                <a:cs typeface="Calibri"/>
+              </a:rPr>
+              <a:t>Samma fläkt: R = 110 Ω och X</a:t>
+            </a:r>
+            <a:r>
+              <a:rPr sz="2600" b="1" baseline="-25000">
+                <a:solidFill>
+                  <a:srgbClr val="163248"/>
+                </a:solidFill>
+                <a:latin typeface="Calibri"/>
+                <a:ea typeface="Calibri"/>
+                <a:cs typeface="Calibri"/>
+              </a:rPr>
+              <a:t>L</a:t>
+            </a:r>
+            <a:r>
+              <a:rPr sz="2600" b="1">
+                <a:solidFill>
+                  <a:srgbClr val="163248"/>
+                </a:solidFill>
+                <a:latin typeface="Calibri"/>
+                <a:ea typeface="Calibri"/>
+                <a:cs typeface="Calibri"/>
+              </a:rPr>
+              <a:t> = 45 Ω. Räkna fasvinkeln φ med räknaren i DEG. Leder eller släpar strömmen?</a:t>
+            </a:r>
+          </a:p>
+        </p:txBody>
+      </p:sp>
+      <p:sp>
+        <p:nvSpPr>
+          <p:cNvPr id="12" name="section">
+            <a:extLst>
+              <a:ext uri="{FF2B5EF4-FFF2-40B4-BE49-F238E27FC236}">
+                <a16:creationId xmlns:a16="http://schemas.microsoft.com/office/drawing/2014/main" id="{D1BC1236-8E3B-46F9-AE6D-1B33BF1E1CB1}"/>
+              </a:ext>
+            </a:extLst>
+          </p:cNvPr>
+          <p:cNvSpPr>
+            <a:spLocks noGrp="1"/>
+          </p:cNvSpPr>
+          <p:nvPr/>
+        </p:nvSpPr>
+        <p:spPr>
+          <a:xfrm>
+            <a:off x="1809750" y="6419850"/>
+            <a:ext cx="4191000" cy="266700"/>
+          </a:xfrm>
+          <a:prstGeom prst="rect">
+            <a:avLst/>
+          </a:prstGeom>
+          <a:noFill/>
+          <a:ln w="0">
+            <a:noFill/>
+          </a:ln>
+        </p:spPr>
+        <p:txBody>
+          <a:bodyPr lIns="0" tIns="0" rIns="0" bIns="0" anchor="t">
+            <a:noAutofit/>
+          </a:bodyPr>
+          <a:lstStyle/>
+          <a:p>
+            <a:pPr>
+              <a:defRPr sz="1275" b="0">
+                <a:solidFill>
+                  <a:srgbClr val="FFFFFF"/>
+                </a:solidFill>
+                <a:latin typeface="Calibri"/>
+                <a:ea typeface="Calibri"/>
+                <a:cs typeface="Calibri"/>
+              </a:defRPr>
+            </a:pPr>
+            <a:r>
+              <a:rPr sz="1275" b="0">
+                <a:solidFill>
+                  <a:srgbClr val="FFFFFF"/>
+                </a:solidFill>
+                <a:latin typeface="Calibri"/>
+                <a:ea typeface="Calibri"/>
+                <a:cs typeface="Calibri"/>
+              </a:rPr>
+              <a:t>Grunddel</a:t>
+            </a:r>
+          </a:p>
+        </p:txBody>
+      </p:sp>
+      <p:sp>
+        <p:nvSpPr>
+          <p:cNvPr id="13" name="page">
+            <a:extLst>
+              <a:ext uri="{FF2B5EF4-FFF2-40B4-BE49-F238E27FC236}">
+                <a16:creationId xmlns:a16="http://schemas.microsoft.com/office/drawing/2014/main" id="{9DD3F340-4DA8-4A3C-A729-2F92D598CA18}"/>
+              </a:ext>
+            </a:extLst>
+          </p:cNvPr>
+          <p:cNvSpPr>
+            <a:spLocks noGrp="1"/>
+          </p:cNvSpPr>
+          <p:nvPr/>
+        </p:nvSpPr>
+        <p:spPr>
+          <a:xfrm>
+            <a:off x="8286750" y="6438900"/>
+            <a:ext cx="428625" cy="285750"/>
+          </a:xfrm>
+          <a:prstGeom prst="rect">
+            <a:avLst/>
+          </a:prstGeom>
+          <a:noFill/>
+          <a:ln w="0">
+            <a:noFill/>
+          </a:ln>
+        </p:spPr>
+        <p:txBody>
+          <a:bodyPr lIns="0" tIns="0" rIns="0" bIns="0" anchor="t">
+            <a:noAutofit/>
+          </a:bodyPr>
+          <a:lstStyle/>
+          <a:p>
+            <a:pPr>
+              <a:defRPr sz="1500" b="0">
+                <a:solidFill>
+                  <a:srgbClr val="FFFFFF"/>
+                </a:solidFill>
+                <a:latin typeface="Calibri"/>
+                <a:ea typeface="Calibri"/>
+                <a:cs typeface="Calibri"/>
+              </a:defRPr>
+            </a:pPr>
+            <a:r>
+              <a:rPr sz="1500" b="0">
+                <a:solidFill>
+                  <a:srgbClr val="FFFFFF"/>
+                </a:solidFill>
+                <a:latin typeface="Calibri"/>
+                <a:ea typeface="Calibri"/>
+                <a:cs typeface="Calibri"/>
+              </a:rPr>
+              <a:t>12</a:t>
+            </a:r>
+          </a:p>
+        </p:txBody>
+      </p:sp>
+      <p:sp>
+        <p:nvSpPr>
+          <p:cNvPr id="14" name="svar">
+            <a:extLst>
+              <a:ext uri="{FF2B5EF4-FFF2-40B4-BE49-F238E27FC236}">
+                <a16:creationId xmlns:a16="http://schemas.microsoft.com/office/drawing/2014/main" id="{30756698-D4DD-4191-BE47-3D34838EF194}"/>
+              </a:ext>
+            </a:extLst>
+          </p:cNvPr>
+          <p:cNvSpPr>
+            <a:spLocks noGrp="1"/>
+          </p:cNvSpPr>
+          <p:nvPr/>
+        </p:nvSpPr>
+        <p:spPr>
+          <a:xfrm>
+            <a:off x="762000" y="3950000"/>
+            <a:ext cx="7620000" cy="1250000"/>
+          </a:xfrm>
+          <a:prstGeom prst="rect">
+            <a:avLst/>
+          </a:prstGeom>
+          <a:solidFill>
+            <a:srgbClr val="E9F5EE"/>
+          </a:solidFill>
+          <a:ln w="19050">
+            <a:solidFill>
+              <a:srgbClr val="176844"/>
+            </a:solidFill>
+          </a:ln>
+        </p:spPr>
+        <p:txBody>
+          <a:bodyPr lIns="160000" tIns="110000" rIns="160000" bIns="110000" anchor="t" wrap="square">
+            <a:noAutofit/>
+          </a:bodyPr>
+          <a:lstStyle/>
+          <a:p>
+            <a:pPr>
+              <a:defRPr sz="1725" b="1">
+                <a:solidFill>
+                  <a:srgbClr val="064F91"/>
+                </a:solidFill>
+                <a:latin typeface="Calibri"/>
+                <a:ea typeface="Calibri"/>
+                <a:cs typeface="Calibri"/>
+              </a:defRPr>
+            </a:pPr>
+            <a:r>
+              <a:rPr sz="2000" b="1">
+                <a:solidFill>
+                  <a:srgbClr val="176844"/>
+                </a:solidFill>
+                <a:latin typeface="Calibri"/>
+                <a:ea typeface="Calibri"/>
+                <a:cs typeface="Calibri"/>
+              </a:rPr>
+              <a:t>φ = arctan(45/110) ≈ 22,2°. Strömmen släpar efter spänningen.</a:t>
+            </a:r>
+          </a:p>
+        </p:txBody>
+      </p:sp>
+    </p:spTree>
+  </p:cSld>
+  <p:clrMapOvr>
+    <a:masterClrMapping/>
+  </p:clrMapOvr>
+  <p:timing>
+    <p:tnLst>
+      <p:par>
+        <p:cTn id="1" dur="indefinite" restart="never" nodeType="tmRoot">
+          <p:childTnLst>
+            <p:seq concurrent="1" nextAc="seek">
+              <p:cTn id="2" dur="indefinite" nodeType="mainSeq">
+                <p:childTnLst>
+                  <p:par>
+                    <p:cTn id="3" fill="hold">
+                      <p:stCondLst>
+                        <p:cond delay="indefinite"/>
+                      </p:stCondLst>
+                      <p:childTnLst>
+                        <p:par>
+                          <p:cTn id="4" fill="hold">
+                            <p:stCondLst>
+                              <p:cond delay="0"/>
+                            </p:stCondLst>
+                            <p:childTnLst>
+                              <p:par>
+                                <p:cTn id="5" presetID="1" presetClass="entr" presetSubtype="0" fill="hold" grpId="0" nodeType="clickEffect">
+                                  <p:stCondLst>
+                                    <p:cond delay="0"/>
+                                  </p:stCondLst>
+                                  <p:childTnLst>
+                                    <p:set>
+                                      <p:cBhvr>
+                                        <p:cTn id="6" dur="1" fill="hold">
+                                          <p:stCondLst>
+                                            <p:cond delay="0"/>
+                                          </p:stCondLst>
+                                        </p:cTn>
+                                        <p:tgtEl>
+                                          <p:spTgt spid="14"/>
+                                        </p:tgtEl>
+                                        <p:attrNameLst>
+                                          <p:attrName>style.visibility</p:attrName>
+                                        </p:attrNameLst>
+                                      </p:cBhvr>
+                                      <p:to>
+                                        <p:strVal val="visible"/>
+                                      </p:to>
+                                    </p:set>
+                                  </p:childTnLst>
+                                </p:cTn>
+                              </p:par>
+                            </p:childTnLst>
+                          </p:cTn>
+                        </p:par>
+                      </p:childTnLst>
+                    </p:cTn>
+                  </p:par>
+                </p:childTnLst>
+              </p:cTn>
+              <p:prevCondLst>
+                <p:cond evt="onPrev" delay="0">
+                  <p:tgtEl>
+                    <p:sldTgt/>
+                  </p:tgtEl>
+                </p:cond>
+              </p:prevCondLst>
+              <p:nextCondLst>
+                <p:cond evt="onNext" delay="0">
+                  <p:tgtEl>
+                    <p:sldTgt/>
+                  </p:tgtEl>
+                </p:cond>
+              </p:nextCondLst>
+            </p:seq>
+          </p:childTnLst>
+        </p:cTn>
+      </p:par>
+    </p:tnLst>
+    <p:bldLst>
+      <p:bldP spid="14" grpId="0" animBg="1"/>
+    </p:bldLst>
+  </p:timing>
+</p:sld>
+</file>
+
+<file path=ppt/slides/slide13.xml><?xml version="1.0" encoding="utf-8"?>
 <p:sld xmlns:p="http://schemas.openxmlformats.org/presentationml/2006/main">
   <p:cSld>
     <p:spTree>
@@ -14899,7 +15812,7 @@
                 <a:ea typeface="Calibri"/>
                 <a:cs typeface="Calibri"/>
               </a:rPr>
-              <a:t>11</a:t>
+              <a:t>13</a:t>
             </a:r>
           </a:p>
         </p:txBody>
@@ -14914,7 +15827,7 @@
 </p:sld>
 </file>
 
-<file path=ppt/slides/slide12.xml><?xml version="1.0" encoding="utf-8"?>
+<file path=ppt/slides/slide14.xml><?xml version="1.0" encoding="utf-8"?>
 <p:sld xmlns:p="http://schemas.openxmlformats.org/presentationml/2006/main">
   <p:cSld>
     <p:spTree>
@@ -15423,7 +16336,7 @@
                 <a:ea typeface="Calibri"/>
                 <a:cs typeface="Calibri"/>
               </a:rPr>
-              <a:t>12</a:t>
+              <a:t>14</a:t>
             </a:r>
           </a:p>
         </p:txBody>
@@ -15438,7 +16351,7 @@
 </p:sld>
 </file>
 
-<file path=ppt/slides/slide13.xml><?xml version="1.0" encoding="utf-8"?>
+<file path=ppt/slides/slide15.xml><?xml version="1.0" encoding="utf-8"?>
 <p:sld xmlns:p="http://schemas.openxmlformats.org/presentationml/2006/main">
   <p:cSld>
     <p:spTree>
@@ -15824,7 +16737,7 @@
                 <a:ea typeface="Calibri"/>
                 <a:cs typeface="Calibri"/>
               </a:rPr>
-              <a:t>13</a:t>
+              <a:t>15</a:t>
             </a:r>
           </a:p>
         </p:txBody>
@@ -15839,7 +16752,7 @@
 </p:sld>
 </file>
 
-<file path=ppt/slides/slide14.xml><?xml version="1.0" encoding="utf-8"?>
+<file path=ppt/slides/slide16.xml><?xml version="1.0" encoding="utf-8"?>
 <p:sld xmlns:p="http://schemas.openxmlformats.org/presentationml/2006/main">
   <p:cSld>
     <p:spTree>
@@ -16256,7 +17169,7 @@
                 <a:ea typeface="Calibri"/>
                 <a:cs typeface="Calibri"/>
               </a:rPr>
-              <a:t>14</a:t>
+              <a:t>16</a:t>
             </a:r>
           </a:p>
         </p:txBody>
@@ -16271,7 +17184,7 @@
 </p:sld>
 </file>
 
-<file path=ppt/slides/slide15.xml><?xml version="1.0" encoding="utf-8"?>
+<file path=ppt/slides/slide17.xml><?xml version="1.0" encoding="utf-8"?>
 <p:sld xmlns:p="http://schemas.openxmlformats.org/presentationml/2006/main">
   <p:cSld>
     <p:spTree>
@@ -16802,7 +17715,7 @@
                 <a:ea typeface="Calibri"/>
                 <a:cs typeface="Calibri"/>
               </a:rPr>
-              <a:t>15</a:t>
+              <a:t>17</a:t>
             </a:r>
           </a:p>
         </p:txBody>
@@ -16817,7 +17730,7 @@
 </p:sld>
 </file>
 
-<file path=ppt/slides/slide16.xml><?xml version="1.0" encoding="utf-8"?>
+<file path=ppt/slides/slide18.xml><?xml version="1.0" encoding="utf-8"?>
 <p:sld xmlns:p="http://schemas.openxmlformats.org/presentationml/2006/main">
   <p:cSld>
     <p:spTree>
@@ -17225,7 +18138,7 @@
                 <a:ea typeface="Calibri"/>
                 <a:cs typeface="Calibri"/>
               </a:rPr>
-              <a:t>16</a:t>
+              <a:t>18</a:t>
             </a:r>
           </a:p>
         </p:txBody>
@@ -20137,6 +21050,494 @@
 </file>
 
 <file path=ppt/slides/slide8.xml><?xml version="1.0" encoding="utf-8"?>
+<p:sld xmlns:a="http://schemas.openxmlformats.org/drawingml/2006/main" xmlns:p="http://schemas.openxmlformats.org/presentationml/2006/main" xmlns:r="http://schemas.openxmlformats.org/officeDocument/2006/relationships">
+  <p:cSld>
+    <p:spTree>
+      <p:nvGrpSpPr>
+        <p:cNvPr id="1" name=""/>
+        <p:cNvGrpSpPr/>
+        <p:nvPr/>
+      </p:nvGrpSpPr>
+      <p:grpSpPr/>
+      <p:pic>
+        <p:nvPicPr>
+          <p:cNvPr id="2" name="Picture 1" descr="image.jpeg"/>
+          <p:cNvPicPr>
+            <a:picLocks noChangeAspect="1"/>
+          </p:cNvPicPr>
+          <p:nvPr/>
+        </p:nvPicPr>
+        <p:blipFill>
+          <a:blip r:embed="rId2"/>
+          <a:stretch>
+            <a:fillRect/>
+          </a:stretch>
+        </p:blipFill>
+        <p:spPr>
+          <a:xfrm>
+            <a:off x="0" y="6098791"/>
+            <a:ext cx="9144006" cy="763524"/>
+          </a:xfrm>
+          <a:prstGeom prst="rect">
+            <a:avLst/>
+          </a:prstGeom>
+        </p:spPr>
+      </p:pic>
+      <p:sp>
+        <p:nvSpPr>
+          <p:cNvPr id="9" name="title">
+            <a:extLst>
+              <a:ext uri="{FF2B5EF4-FFF2-40B4-BE49-F238E27FC236}">
+                <a16:creationId xmlns:a16="http://schemas.microsoft.com/office/drawing/2014/main" id="{F2521703-A77C-49DA-B9AC-CE41A70E1F20}"/>
+              </a:ext>
+            </a:extLst>
+          </p:cNvPr>
+          <p:cNvSpPr>
+            <a:spLocks noGrp="1"/>
+          </p:cNvSpPr>
+          <p:nvPr/>
+        </p:nvSpPr>
+        <p:spPr>
+          <a:xfrm>
+            <a:off x="571500" y="428625"/>
+            <a:ext cx="8001000" cy="781050"/>
+          </a:xfrm>
+          <a:prstGeom prst="rect">
+            <a:avLst/>
+          </a:prstGeom>
+          <a:noFill/>
+          <a:ln w="0">
+            <a:noFill/>
+          </a:ln>
+        </p:spPr>
+        <p:txBody>
+          <a:bodyPr lIns="0" tIns="0" rIns="0" bIns="0" anchor="t">
+            <a:noAutofit/>
+          </a:bodyPr>
+          <a:lstStyle/>
+          <a:p>
+            <a:pPr>
+              <a:defRPr sz="3000" b="1">
+                <a:solidFill>
+                  <a:srgbClr val="111111"/>
+                </a:solidFill>
+                <a:latin typeface="Calibri"/>
+                <a:ea typeface="Calibri"/>
+                <a:cs typeface="Calibri"/>
+              </a:defRPr>
+            </a:pPr>
+            <a:r>
+              <a:rPr sz="3000" b="1">
+                <a:solidFill>
+                  <a:srgbClr val="111111"/>
+                </a:solidFill>
+                <a:latin typeface="Calibri"/>
+                <a:ea typeface="Calibri"/>
+                <a:cs typeface="Calibri"/>
+              </a:rPr>
+              <a:t>Din tur: ventilationsfläkten</a:t>
+            </a:r>
+          </a:p>
+        </p:txBody>
+      </p:sp>
+      <p:sp>
+        <p:nvSpPr>
+          <p:cNvPr id="10" name="body">
+            <a:extLst>
+              <a:ext uri="{FF2B5EF4-FFF2-40B4-BE49-F238E27FC236}">
+                <a16:creationId xmlns:a16="http://schemas.microsoft.com/office/drawing/2014/main" id="{291BF31B-45F2-49F6-9EF5-10A99306BE85}"/>
+              </a:ext>
+            </a:extLst>
+          </p:cNvPr>
+          <p:cNvSpPr>
+            <a:spLocks noGrp="1"/>
+          </p:cNvSpPr>
+          <p:nvPr/>
+        </p:nvSpPr>
+        <p:spPr>
+          <a:xfrm>
+            <a:off x="762000" y="1330000"/>
+            <a:ext cx="7620000" cy="560000"/>
+          </a:xfrm>
+          <a:prstGeom prst="rect">
+            <a:avLst/>
+          </a:prstGeom>
+          <a:noFill/>
+          <a:ln w="0">
+            <a:noFill/>
+          </a:ln>
+        </p:spPr>
+        <p:txBody>
+          <a:bodyPr lIns="0" tIns="0" rIns="0" bIns="0" anchor="t">
+            <a:noAutofit/>
+          </a:bodyPr>
+          <a:lstStyle/>
+          <a:p>
+            <a:pPr>
+              <a:defRPr sz="2100" b="0">
+                <a:solidFill>
+                  <a:srgbClr val="172F43"/>
+                </a:solidFill>
+                <a:latin typeface="Calibri"/>
+                <a:ea typeface="Calibri"/>
+                <a:cs typeface="Calibri"/>
+              </a:defRPr>
+            </a:pPr>
+            <a:r>
+              <a:rPr sz="1600" b="0">
+                <a:solidFill>
+                  <a:srgbClr val="4D6579"/>
+                </a:solidFill>
+                <a:latin typeface="Calibri"/>
+                <a:ea typeface="Calibri"/>
+                <a:cs typeface="Calibri"/>
+              </a:rPr>
+              <a:t>Räkna på papper eller miniwhiteboard. Titta på svaret först när du har ett eget.</a:t>
+            </a:r>
+          </a:p>
+        </p:txBody>
+      </p:sp>
+      <p:sp>
+        <p:nvSpPr>
+          <p:cNvPr id="11" name="check">
+            <a:extLst>
+              <a:ext uri="{FF2B5EF4-FFF2-40B4-BE49-F238E27FC236}">
+                <a16:creationId xmlns:a16="http://schemas.microsoft.com/office/drawing/2014/main" id="{30756698-D4DD-4191-BE47-3D34838EF194}"/>
+              </a:ext>
+            </a:extLst>
+          </p:cNvPr>
+          <p:cNvSpPr>
+            <a:spLocks noGrp="1"/>
+          </p:cNvSpPr>
+          <p:nvPr/>
+        </p:nvSpPr>
+        <p:spPr>
+          <a:xfrm>
+            <a:off x="762000" y="1950000"/>
+            <a:ext cx="7620000" cy="1900000"/>
+          </a:xfrm>
+          <a:prstGeom prst="rect">
+            <a:avLst/>
+          </a:prstGeom>
+          <a:noFill/>
+          <a:ln w="0">
+            <a:noFill/>
+          </a:ln>
+        </p:spPr>
+        <p:txBody>
+          <a:bodyPr lIns="0" tIns="0" rIns="0" bIns="0" anchor="t" wrap="square">
+            <a:noAutofit/>
+          </a:bodyPr>
+          <a:lstStyle/>
+          <a:p>
+            <a:pPr>
+              <a:defRPr sz="1725" b="1">
+                <a:solidFill>
+                  <a:srgbClr val="064F91"/>
+                </a:solidFill>
+                <a:latin typeface="Calibri"/>
+                <a:ea typeface="Calibri"/>
+                <a:cs typeface="Calibri"/>
+              </a:defRPr>
+            </a:pPr>
+            <a:r>
+              <a:rPr sz="2600" b="1">
+                <a:solidFill>
+                  <a:srgbClr val="163248"/>
+                </a:solidFill>
+                <a:latin typeface="Calibri"/>
+                <a:ea typeface="Calibri"/>
+                <a:cs typeface="Calibri"/>
+              </a:rPr>
+              <a:t>En ventilationsfläkt har R = 110 Ω och X</a:t>
+            </a:r>
+            <a:r>
+              <a:rPr sz="2600" b="1" baseline="-25000">
+                <a:solidFill>
+                  <a:srgbClr val="163248"/>
+                </a:solidFill>
+                <a:latin typeface="Calibri"/>
+                <a:ea typeface="Calibri"/>
+                <a:cs typeface="Calibri"/>
+              </a:rPr>
+              <a:t>L</a:t>
+            </a:r>
+            <a:r>
+              <a:rPr sz="2600" b="1">
+                <a:solidFill>
+                  <a:srgbClr val="163248"/>
+                </a:solidFill>
+                <a:latin typeface="Calibri"/>
+                <a:ea typeface="Calibri"/>
+                <a:cs typeface="Calibri"/>
+              </a:rPr>
+              <a:t> = 45 Ω och ligger på 230 V RMS. Räkna impedansen |Z| och strömmen I.</a:t>
+            </a:r>
+          </a:p>
+        </p:txBody>
+      </p:sp>
+      <p:sp>
+        <p:nvSpPr>
+          <p:cNvPr id="12" name="section">
+            <a:extLst>
+              <a:ext uri="{FF2B5EF4-FFF2-40B4-BE49-F238E27FC236}">
+                <a16:creationId xmlns:a16="http://schemas.microsoft.com/office/drawing/2014/main" id="{D1BC1236-8E3B-46F9-AE6D-1B33BF1E1CB1}"/>
+              </a:ext>
+            </a:extLst>
+          </p:cNvPr>
+          <p:cNvSpPr>
+            <a:spLocks noGrp="1"/>
+          </p:cNvSpPr>
+          <p:nvPr/>
+        </p:nvSpPr>
+        <p:spPr>
+          <a:xfrm>
+            <a:off x="1809750" y="6419850"/>
+            <a:ext cx="4191000" cy="266700"/>
+          </a:xfrm>
+          <a:prstGeom prst="rect">
+            <a:avLst/>
+          </a:prstGeom>
+          <a:noFill/>
+          <a:ln w="0">
+            <a:noFill/>
+          </a:ln>
+        </p:spPr>
+        <p:txBody>
+          <a:bodyPr lIns="0" tIns="0" rIns="0" bIns="0" anchor="t">
+            <a:noAutofit/>
+          </a:bodyPr>
+          <a:lstStyle/>
+          <a:p>
+            <a:pPr>
+              <a:defRPr sz="1275" b="0">
+                <a:solidFill>
+                  <a:srgbClr val="FFFFFF"/>
+                </a:solidFill>
+                <a:latin typeface="Calibri"/>
+                <a:ea typeface="Calibri"/>
+                <a:cs typeface="Calibri"/>
+              </a:defRPr>
+            </a:pPr>
+            <a:r>
+              <a:rPr sz="1275" b="0">
+                <a:solidFill>
+                  <a:srgbClr val="FFFFFF"/>
+                </a:solidFill>
+                <a:latin typeface="Calibri"/>
+                <a:ea typeface="Calibri"/>
+                <a:cs typeface="Calibri"/>
+              </a:rPr>
+              <a:t>Grunddel</a:t>
+            </a:r>
+          </a:p>
+        </p:txBody>
+      </p:sp>
+      <p:sp>
+        <p:nvSpPr>
+          <p:cNvPr id="13" name="page">
+            <a:extLst>
+              <a:ext uri="{FF2B5EF4-FFF2-40B4-BE49-F238E27FC236}">
+                <a16:creationId xmlns:a16="http://schemas.microsoft.com/office/drawing/2014/main" id="{9DD3F340-4DA8-4A3C-A729-2F92D598CA18}"/>
+              </a:ext>
+            </a:extLst>
+          </p:cNvPr>
+          <p:cNvSpPr>
+            <a:spLocks noGrp="1"/>
+          </p:cNvSpPr>
+          <p:nvPr/>
+        </p:nvSpPr>
+        <p:spPr>
+          <a:xfrm>
+            <a:off x="8286750" y="6438900"/>
+            <a:ext cx="428625" cy="285750"/>
+          </a:xfrm>
+          <a:prstGeom prst="rect">
+            <a:avLst/>
+          </a:prstGeom>
+          <a:noFill/>
+          <a:ln w="0">
+            <a:noFill/>
+          </a:ln>
+        </p:spPr>
+        <p:txBody>
+          <a:bodyPr lIns="0" tIns="0" rIns="0" bIns="0" anchor="t">
+            <a:noAutofit/>
+          </a:bodyPr>
+          <a:lstStyle/>
+          <a:p>
+            <a:pPr>
+              <a:defRPr sz="1500" b="0">
+                <a:solidFill>
+                  <a:srgbClr val="FFFFFF"/>
+                </a:solidFill>
+                <a:latin typeface="Calibri"/>
+                <a:ea typeface="Calibri"/>
+                <a:cs typeface="Calibri"/>
+              </a:defRPr>
+            </a:pPr>
+            <a:r>
+              <a:rPr sz="1500" b="0">
+                <a:solidFill>
+                  <a:srgbClr val="FFFFFF"/>
+                </a:solidFill>
+                <a:latin typeface="Calibri"/>
+                <a:ea typeface="Calibri"/>
+                <a:cs typeface="Calibri"/>
+              </a:rPr>
+              <a:t>8</a:t>
+            </a:r>
+          </a:p>
+        </p:txBody>
+      </p:sp>
+      <p:sp>
+        <p:nvSpPr>
+          <p:cNvPr id="14" name="svar">
+            <a:extLst>
+              <a:ext uri="{FF2B5EF4-FFF2-40B4-BE49-F238E27FC236}">
+                <a16:creationId xmlns:a16="http://schemas.microsoft.com/office/drawing/2014/main" id="{30756698-D4DD-4191-BE47-3D34838EF194}"/>
+              </a:ext>
+            </a:extLst>
+          </p:cNvPr>
+          <p:cNvSpPr>
+            <a:spLocks noGrp="1"/>
+          </p:cNvSpPr>
+          <p:nvPr/>
+        </p:nvSpPr>
+        <p:spPr>
+          <a:xfrm>
+            <a:off x="762000" y="3950000"/>
+            <a:ext cx="7620000" cy="1250000"/>
+          </a:xfrm>
+          <a:prstGeom prst="rect">
+            <a:avLst/>
+          </a:prstGeom>
+          <a:solidFill>
+            <a:srgbClr val="E9F5EE"/>
+          </a:solidFill>
+          <a:ln w="19050">
+            <a:solidFill>
+              <a:srgbClr val="176844"/>
+            </a:solidFill>
+          </a:ln>
+        </p:spPr>
+        <p:txBody>
+          <a:bodyPr lIns="160000" tIns="110000" rIns="160000" bIns="110000" anchor="t" wrap="square">
+            <a:noAutofit/>
+          </a:bodyPr>
+          <a:lstStyle/>
+          <a:p>
+            <a:pPr>
+              <a:defRPr sz="1725" b="1">
+                <a:solidFill>
+                  <a:srgbClr val="064F91"/>
+                </a:solidFill>
+                <a:latin typeface="Calibri"/>
+                <a:ea typeface="Calibri"/>
+                <a:cs typeface="Calibri"/>
+              </a:defRPr>
+            </a:pPr>
+            <a:r>
+              <a:rPr sz="2000" b="1">
+                <a:solidFill>
+                  <a:srgbClr val="176844"/>
+                </a:solidFill>
+                <a:latin typeface="Calibri"/>
+                <a:ea typeface="Calibri"/>
+                <a:cs typeface="Calibri"/>
+              </a:rPr>
+              <a:t>|Z| = √(110² + 45²) ≈ 118,8 Ω. I = 230/118,8 ≈ 1,94 A.</a:t>
+            </a:r>
+          </a:p>
+        </p:txBody>
+      </p:sp>
+    </p:spTree>
+  </p:cSld>
+  <p:clrMapOvr>
+    <a:masterClrMapping/>
+  </p:clrMapOvr>
+  <p:timing>
+    <p:tnLst>
+      <p:par>
+        <p:cTn id="1" dur="indefinite" restart="never" nodeType="tmRoot">
+          <p:childTnLst>
+            <p:seq concurrent="1" nextAc="seek">
+              <p:cTn id="2" dur="indefinite" nodeType="mainSeq">
+                <p:childTnLst>
+                  <p:par>
+                    <p:cTn id="3" fill="hold">
+                      <p:stCondLst>
+                        <p:cond delay="indefinite"/>
+                      </p:stCondLst>
+                      <p:childTnLst>
+                        <p:par>
+                          <p:cTn id="4" fill="hold">
+                            <p:stCondLst>
+                              <p:cond delay="0"/>
+                            </p:stCondLst>
+                            <p:childTnLst>
+                              <p:par>
+                                <p:cTn id="5" presetID="1" presetClass="entr" presetSubtype="0" fill="hold" grpId="0" nodeType="clickEffect">
+                                  <p:stCondLst>
+                                    <p:cond delay="0"/>
+                                  </p:stCondLst>
+                                  <p:childTnLst>
+                                    <p:set>
+                                      <p:cBhvr>
+                                        <p:cTn id="6" dur="1" fill="hold">
+                                          <p:stCondLst>
+                                            <p:cond delay="0"/>
+                                          </p:stCondLst>
+                                        </p:cTn>
+                                        <p:tgtEl>
+                                          <p:spTgt spid="14"/>
+                                        </p:tgtEl>
+                                        <p:attrNameLst>
+                                          <p:attrName>style.visibility</p:attrName>
+                                        </p:attrNameLst>
+                                      </p:cBhvr>
+                                      <p:to>
+                                        <p:strVal val="visible"/>
+                                      </p:to>
+                                    </p:set>
+                                  </p:childTnLst>
+                                </p:cTn>
+                              </p:par>
+                            </p:childTnLst>
+                          </p:cTn>
+                        </p:par>
+                      </p:childTnLst>
+                    </p:cTn>
+                  </p:par>
+                </p:childTnLst>
+              </p:cTn>
+              <p:prevCondLst>
+                <p:cond evt="onPrev" delay="0">
+                  <p:tgtEl>
+                    <p:sldTgt/>
+                  </p:tgtEl>
+                </p:cond>
+              </p:prevCondLst>
+              <p:nextCondLst>
+                <p:cond evt="onNext" delay="0">
+                  <p:tgtEl>
+                    <p:sldTgt/>
+                  </p:tgtEl>
+                </p:cond>
+              </p:nextCondLst>
+            </p:seq>
+          </p:childTnLst>
+        </p:cTn>
+      </p:par>
+    </p:tnLst>
+    <p:bldLst>
+      <p:bldP spid="14" grpId="0" animBg="1"/>
+    </p:bldLst>
+  </p:timing>
+</p:sld>
+</file>
+
+<file path=ppt/slides/slide9.xml><?xml version="1.0" encoding="utf-8"?>
 <p:sld xmlns:p="http://schemas.openxmlformats.org/presentationml/2006/main">
   <p:cSld>
     <p:spTree>
@@ -20542,429 +21943,6 @@
             <a:extLst xmlns:a="http://schemas.openxmlformats.org/drawingml/2006/main">
               <a:ext uri="{FF2B5EF4-FFF2-40B4-BE49-F238E27FC236}">
                 <a16:creationId xmlns:a16="http://schemas.microsoft.com/office/drawing/2014/main" id="{0C5711E2-BDED-4C84-AFB1-D6880BB33C4A}"/>
-              </a:ext>
-            </a:extLst>
-          </p:cNvPr>
-          <p:cNvSpPr>
-            <a:spLocks xmlns:a="http://schemas.openxmlformats.org/drawingml/2006/main" noGrp="1"/>
-          </p:cNvSpPr>
-          <p:nvPr/>
-        </p:nvSpPr>
-        <p:spPr>
-          <a:xfrm xmlns:a="http://schemas.openxmlformats.org/drawingml/2006/main">
-            <a:off x="8286750" y="6438900"/>
-            <a:ext cx="428625" cy="285750"/>
-          </a:xfrm>
-          <a:prstGeom xmlns:a="http://schemas.openxmlformats.org/drawingml/2006/main" prst="rect">
-            <a:avLst/>
-          </a:prstGeom>
-          <a:noFill xmlns:a="http://schemas.openxmlformats.org/drawingml/2006/main"/>
-          <a:ln xmlns:a="http://schemas.openxmlformats.org/drawingml/2006/main" w="0">
-            <a:noFill/>
-          </a:ln>
-        </p:spPr>
-        <p:txBody>
-          <a:bodyPr xmlns:a="http://schemas.openxmlformats.org/drawingml/2006/main" lIns="0" tIns="0" rIns="0" bIns="0" anchor="t">
-            <a:noAutofit/>
-          </a:bodyPr>
-          <a:lstStyle xmlns:a="http://schemas.openxmlformats.org/drawingml/2006/main"/>
-          <a:p xmlns:a="http://schemas.openxmlformats.org/drawingml/2006/main">
-            <a:pPr>
-              <a:defRPr sz="1500" b="0">
-                <a:solidFill>
-                  <a:srgbClr val="FFFFFF"/>
-                </a:solidFill>
-                <a:latin typeface="Calibri"/>
-                <a:ea typeface="Calibri"/>
-                <a:cs typeface="Calibri"/>
-              </a:defRPr>
-            </a:pPr>
-            <a:r>
-              <a:rPr sz="1500" b="0">
-                <a:solidFill>
-                  <a:srgbClr val="FFFFFF"/>
-                </a:solidFill>
-                <a:latin typeface="Calibri"/>
-                <a:ea typeface="Calibri"/>
-                <a:cs typeface="Calibri"/>
-              </a:rPr>
-              <a:t>8</a:t>
-            </a:r>
-          </a:p>
-        </p:txBody>
-      </p:sp>
-    </p:spTree>
-    <p:extLst>
-      <p:ext uri="{BB962C8B-B14F-4D97-AF65-F5344CB8AC3E}">
-        <p14:creationId xmlns:p14="http://schemas.microsoft.com/office/powerpoint/2010/main" val="2747996220"/>
-      </p:ext>
-    </p:extLst>
-  </p:cSld>
-</p:sld>
-</file>
-
-<file path=ppt/slides/slide9.xml><?xml version="1.0" encoding="utf-8"?>
-<p:sld xmlns:p="http://schemas.openxmlformats.org/presentationml/2006/main">
-  <p:cSld>
-    <p:spTree>
-      <p:nvGrpSpPr>
-        <p:cNvPr id="1" name=""/>
-        <p:cNvGrpSpPr/>
-        <p:nvPr/>
-      </p:nvGrpSpPr>
-      <p:grpSpPr>
-        <a:xfrm xmlns:a="http://schemas.openxmlformats.org/drawingml/2006/main"/>
-      </p:grpSpPr>
-      <p:pic>
-        <p:nvPicPr>
-          <p:cNvPr id="13" name="Bildobjekt 2"/>
-          <p:cNvPicPr>
-            <a:picLocks xmlns:a="http://schemas.openxmlformats.org/drawingml/2006/main" noChangeAspect="1"/>
-          </p:cNvPicPr>
-          <p:nvPr/>
-        </p:nvPicPr>
-        <p:blipFill>
-          <a:blip xmlns:r="http://schemas.openxmlformats.org/officeDocument/2006/relationships" xmlns:a="http://schemas.openxmlformats.org/drawingml/2006/main" r:embed="R1b078ca888674f4c"/>
-          <a:stretch xmlns:a="http://schemas.openxmlformats.org/drawingml/2006/main">
-            <a:fillRect l="0" t="0" r="0" b="0"/>
-          </a:stretch>
-        </p:blipFill>
-        <p:spPr>
-          <a:xfrm xmlns:a="http://schemas.openxmlformats.org/drawingml/2006/main">
-            <a:off x="0" y="6098791"/>
-            <a:ext cx="9144006" cy="763524"/>
-          </a:xfrm>
-          <a:prstGeom xmlns:a="http://schemas.openxmlformats.org/drawingml/2006/main" prst="rect">
-            <a:avLst/>
-          </a:prstGeom>
-        </p:spPr>
-      </p:pic>
-      <p:sp>
-        <p:nvSpPr>
-          <p:cNvPr id="9" name="title">
-            <a:extLst xmlns:a="http://schemas.openxmlformats.org/drawingml/2006/main">
-              <a:ext uri="{FF2B5EF4-FFF2-40B4-BE49-F238E27FC236}">
-                <a16:creationId xmlns:a16="http://schemas.microsoft.com/office/drawing/2014/main" id="{59AF0E0B-997B-4927-AECB-0DF795231049}"/>
-              </a:ext>
-            </a:extLst>
-          </p:cNvPr>
-          <p:cNvSpPr>
-            <a:spLocks xmlns:a="http://schemas.openxmlformats.org/drawingml/2006/main" noGrp="1"/>
-          </p:cNvSpPr>
-          <p:nvPr/>
-        </p:nvSpPr>
-        <p:spPr>
-          <a:xfrm xmlns:a="http://schemas.openxmlformats.org/drawingml/2006/main">
-            <a:off x="571500" y="428625"/>
-            <a:ext cx="8001000" cy="781050"/>
-          </a:xfrm>
-          <a:prstGeom xmlns:a="http://schemas.openxmlformats.org/drawingml/2006/main" prst="rect">
-            <a:avLst/>
-          </a:prstGeom>
-          <a:noFill xmlns:a="http://schemas.openxmlformats.org/drawingml/2006/main"/>
-          <a:ln xmlns:a="http://schemas.openxmlformats.org/drawingml/2006/main" w="0">
-            <a:noFill/>
-          </a:ln>
-        </p:spPr>
-        <p:txBody>
-          <a:bodyPr xmlns:a="http://schemas.openxmlformats.org/drawingml/2006/main" lIns="0" tIns="0" rIns="0" bIns="0" anchor="t">
-            <a:noAutofit/>
-          </a:bodyPr>
-          <a:lstStyle xmlns:a="http://schemas.openxmlformats.org/drawingml/2006/main"/>
-          <a:p xmlns:a="http://schemas.openxmlformats.org/drawingml/2006/main">
-            <a:pPr>
-              <a:defRPr sz="3000" b="1">
-                <a:solidFill>
-                  <a:srgbClr val="111111"/>
-                </a:solidFill>
-                <a:latin typeface="Calibri"/>
-                <a:ea typeface="Calibri"/>
-                <a:cs typeface="Calibri"/>
-              </a:defRPr>
-            </a:pPr>
-            <a:r>
-              <a:rPr sz="3000" b="1">
-                <a:solidFill>
-                  <a:srgbClr val="111111"/>
-                </a:solidFill>
-                <a:latin typeface="Calibri"/>
-                <a:ea typeface="Calibri"/>
-                <a:cs typeface="Calibri"/>
-              </a:rPr>
-              <a:t>Arbetsgång i den guidade labben</a:t>
-            </a:r>
-          </a:p>
-        </p:txBody>
-      </p:sp>
-      <p:sp>
-        <p:nvSpPr>
-          <p:cNvPr id="10" name="body">
-            <a:extLst xmlns:a="http://schemas.openxmlformats.org/drawingml/2006/main">
-              <a:ext uri="{FF2B5EF4-FFF2-40B4-BE49-F238E27FC236}">
-                <a16:creationId xmlns:a16="http://schemas.microsoft.com/office/drawing/2014/main" id="{73849165-873D-40A5-9AB9-ED0CC03C699D}"/>
-              </a:ext>
-            </a:extLst>
-          </p:cNvPr>
-          <p:cNvSpPr>
-            <a:spLocks xmlns:a="http://schemas.openxmlformats.org/drawingml/2006/main" noGrp="1"/>
-          </p:cNvSpPr>
-          <p:nvPr/>
-        </p:nvSpPr>
-        <p:spPr>
-          <a:xfrm xmlns:a="http://schemas.openxmlformats.org/drawingml/2006/main">
-            <a:off x="762000" y="1590675"/>
-            <a:ext cx="7620000" cy="3524250"/>
-          </a:xfrm>
-          <a:prstGeom xmlns:a="http://schemas.openxmlformats.org/drawingml/2006/main" prst="rect">
-            <a:avLst/>
-          </a:prstGeom>
-          <a:noFill xmlns:a="http://schemas.openxmlformats.org/drawingml/2006/main"/>
-          <a:ln xmlns:a="http://schemas.openxmlformats.org/drawingml/2006/main" w="0">
-            <a:noFill/>
-          </a:ln>
-        </p:spPr>
-        <p:txBody>
-          <a:bodyPr xmlns:a="http://schemas.openxmlformats.org/drawingml/2006/main" lIns="0" tIns="0" rIns="0" bIns="0" anchor="t">
-            <a:noAutofit/>
-          </a:bodyPr>
-          <a:lstStyle xmlns:a="http://schemas.openxmlformats.org/drawingml/2006/main"/>
-          <a:p xmlns:a="http://schemas.openxmlformats.org/drawingml/2006/main">
-            <a:pPr>
-              <a:defRPr sz="2100" b="0">
-                <a:solidFill>
-                  <a:srgbClr val="172F43"/>
-                </a:solidFill>
-                <a:latin typeface="Calibri"/>
-                <a:ea typeface="Calibri"/>
-                <a:cs typeface="Calibri"/>
-              </a:defRPr>
-            </a:pPr>
-            <a:r>
-              <a:rPr sz="2100" b="0">
-                <a:solidFill>
-                  <a:srgbClr val="172F43"/>
-                </a:solidFill>
-                <a:latin typeface="Calibri"/>
-                <a:ea typeface="Calibri"/>
-                <a:cs typeface="Calibri"/>
-              </a:rPr>
-              <a:t>Du får egna värden på R och L ur ditt D. Förutsäg X</a:t>
-            </a:r>
-            <a:r>
-              <a:rPr sz="2100" b="0" baseline="-25000">
-                <a:solidFill>
-                  <a:srgbClr val="172F43"/>
-                </a:solidFill>
-                <a:latin typeface="Calibri"/>
-                <a:ea typeface="Calibri"/>
-                <a:cs typeface="Calibri"/>
-              </a:rPr>
-              <a:t>L</a:t>
-            </a:r>
-            <a:r>
-              <a:rPr sz="2100" b="0">
-                <a:solidFill>
-                  <a:srgbClr val="172F43"/>
-                </a:solidFill>
-                <a:latin typeface="Calibri"/>
-                <a:ea typeface="Calibri"/>
-                <a:cs typeface="Calibri"/>
-              </a:rPr>
-              <a:t>, läs av och kontrollera enheten Ω.</a:t>
-            </a:r>
-          </a:p>
-          <a:p xmlns:a="http://schemas.openxmlformats.org/drawingml/2006/main">
-            <a:pPr>
-              <a:defRPr sz="2100" b="0">
-                <a:solidFill>
-                  <a:srgbClr val="172F43"/>
-                </a:solidFill>
-                <a:latin typeface="Calibri"/>
-                <a:ea typeface="Calibri"/>
-                <a:cs typeface="Calibri"/>
-              </a:defRPr>
-            </a:pPr>
-          </a:p>
-          <a:p xmlns:a="http://schemas.openxmlformats.org/drawingml/2006/main">
-            <a:pPr>
-              <a:defRPr sz="2100" b="0">
-                <a:solidFill>
-                  <a:srgbClr val="172F43"/>
-                </a:solidFill>
-                <a:latin typeface="Calibri"/>
-                <a:ea typeface="Calibri"/>
-                <a:cs typeface="Calibri"/>
-              </a:defRPr>
-            </a:pPr>
-            <a:r>
-              <a:rPr sz="2100" b="0">
-                <a:solidFill>
-                  <a:srgbClr val="172F43"/>
-                </a:solidFill>
-                <a:latin typeface="Calibri"/>
-                <a:ea typeface="Calibri"/>
-                <a:cs typeface="Calibri"/>
-              </a:rPr>
-              <a:t>Använd R och X</a:t>
-            </a:r>
-            <a:r>
-              <a:rPr sz="2100" b="0" baseline="-25000">
-                <a:solidFill>
-                  <a:srgbClr val="172F43"/>
-                </a:solidFill>
-                <a:latin typeface="Calibri"/>
-                <a:ea typeface="Calibri"/>
-                <a:cs typeface="Calibri"/>
-              </a:rPr>
-              <a:t>L</a:t>
-            </a:r>
-            <a:r>
-              <a:rPr sz="2100" b="0">
-                <a:solidFill>
-                  <a:srgbClr val="172F43"/>
-                </a:solidFill>
-                <a:latin typeface="Calibri"/>
-                <a:ea typeface="Calibri"/>
-                <a:cs typeface="Calibri"/>
-              </a:rPr>
-              <a:t> för att beräkna |Z|.</a:t>
-            </a:r>
-          </a:p>
-          <a:p xmlns:a="http://schemas.openxmlformats.org/drawingml/2006/main">
-            <a:pPr>
-              <a:defRPr sz="2100" b="0">
-                <a:solidFill>
-                  <a:srgbClr val="172F43"/>
-                </a:solidFill>
-                <a:latin typeface="Calibri"/>
-                <a:ea typeface="Calibri"/>
-                <a:cs typeface="Calibri"/>
-              </a:defRPr>
-            </a:pPr>
-          </a:p>
-          <a:p xmlns:a="http://schemas.openxmlformats.org/drawingml/2006/main">
-            <a:pPr>
-              <a:defRPr sz="2100" b="0">
-                <a:solidFill>
-                  <a:srgbClr val="172F43"/>
-                </a:solidFill>
-                <a:latin typeface="Calibri"/>
-                <a:ea typeface="Calibri"/>
-                <a:cs typeface="Calibri"/>
-              </a:defRPr>
-            </a:pPr>
-            <a:r>
-              <a:rPr sz="2100" b="0">
-                <a:solidFill>
-                  <a:srgbClr val="172F43"/>
-                </a:solidFill>
-                <a:latin typeface="Calibri"/>
-                <a:ea typeface="Calibri"/>
-                <a:cs typeface="Calibri"/>
-              </a:rPr>
-              <a:t>Beräkna strömmen och jämför med kretsen som bara innehåller R.</a:t>
-            </a:r>
-          </a:p>
-          <a:p xmlns:a="http://schemas.openxmlformats.org/drawingml/2006/main">
-            <a:pPr>
-              <a:defRPr sz="2100" b="0">
-                <a:solidFill>
-                  <a:srgbClr val="172F43"/>
-                </a:solidFill>
-                <a:latin typeface="Calibri"/>
-                <a:ea typeface="Calibri"/>
-                <a:cs typeface="Calibri"/>
-              </a:defRPr>
-            </a:pPr>
-          </a:p>
-          <a:p xmlns:a="http://schemas.openxmlformats.org/drawingml/2006/main">
-            <a:pPr>
-              <a:defRPr sz="2100" b="0">
-                <a:solidFill>
-                  <a:srgbClr val="172F43"/>
-                </a:solidFill>
-                <a:latin typeface="Calibri"/>
-                <a:ea typeface="Calibri"/>
-                <a:cs typeface="Calibri"/>
-              </a:defRPr>
-            </a:pPr>
-            <a:r>
-              <a:rPr sz="2100" b="0">
-                <a:solidFill>
-                  <a:srgbClr val="172F43"/>
-                </a:solidFill>
-                <a:latin typeface="Calibri"/>
-                <a:ea typeface="Calibri"/>
-                <a:cs typeface="Calibri"/>
-              </a:rPr>
-              <a:t>Skriv varför strömmen ändras och vilken kurva som kommer först.</a:t>
-            </a:r>
-          </a:p>
-        </p:txBody>
-      </p:sp>
-      <p:sp>
-        <p:nvSpPr>
-          <p:cNvPr id="11" name="section">
-            <a:extLst xmlns:a="http://schemas.openxmlformats.org/drawingml/2006/main">
-              <a:ext uri="{FF2B5EF4-FFF2-40B4-BE49-F238E27FC236}">
-                <a16:creationId xmlns:a16="http://schemas.microsoft.com/office/drawing/2014/main" id="{782C72AB-CC0D-49A3-830D-C88D45E82433}"/>
-              </a:ext>
-            </a:extLst>
-          </p:cNvPr>
-          <p:cNvSpPr>
-            <a:spLocks xmlns:a="http://schemas.openxmlformats.org/drawingml/2006/main" noGrp="1"/>
-          </p:cNvSpPr>
-          <p:nvPr/>
-        </p:nvSpPr>
-        <p:spPr>
-          <a:xfrm xmlns:a="http://schemas.openxmlformats.org/drawingml/2006/main">
-            <a:off x="1809750" y="6419850"/>
-            <a:ext cx="4191000" cy="266700"/>
-          </a:xfrm>
-          <a:prstGeom xmlns:a="http://schemas.openxmlformats.org/drawingml/2006/main" prst="rect">
-            <a:avLst/>
-          </a:prstGeom>
-          <a:noFill xmlns:a="http://schemas.openxmlformats.org/drawingml/2006/main"/>
-          <a:ln xmlns:a="http://schemas.openxmlformats.org/drawingml/2006/main" w="0">
-            <a:noFill/>
-          </a:ln>
-        </p:spPr>
-        <p:txBody>
-          <a:bodyPr xmlns:a="http://schemas.openxmlformats.org/drawingml/2006/main" lIns="0" tIns="0" rIns="0" bIns="0" anchor="t">
-            <a:noAutofit/>
-          </a:bodyPr>
-          <a:lstStyle xmlns:a="http://schemas.openxmlformats.org/drawingml/2006/main"/>
-          <a:p xmlns:a="http://schemas.openxmlformats.org/drawingml/2006/main">
-            <a:pPr>
-              <a:defRPr sz="1275" b="0">
-                <a:solidFill>
-                  <a:srgbClr val="FFFFFF"/>
-                </a:solidFill>
-                <a:latin typeface="Calibri"/>
-                <a:ea typeface="Calibri"/>
-                <a:cs typeface="Calibri"/>
-              </a:defRPr>
-            </a:pPr>
-            <a:r>
-              <a:rPr sz="1275" b="0">
-                <a:solidFill>
-                  <a:srgbClr val="FFFFFF"/>
-                </a:solidFill>
-                <a:latin typeface="Calibri"/>
-                <a:ea typeface="Calibri"/>
-                <a:cs typeface="Calibri"/>
-              </a:rPr>
-              <a:t>Grunddel</a:t>
-            </a:r>
-          </a:p>
-        </p:txBody>
-      </p:sp>
-      <p:sp>
-        <p:nvSpPr>
-          <p:cNvPr id="12" name="page">
-            <a:extLst xmlns:a="http://schemas.openxmlformats.org/drawingml/2006/main">
-              <a:ext uri="{FF2B5EF4-FFF2-40B4-BE49-F238E27FC236}">
-                <a16:creationId xmlns:a16="http://schemas.microsoft.com/office/drawing/2014/main" id="{2C25477F-255F-4BC7-B3DD-ED121F65763C}"/>
               </a:ext>
             </a:extLst>
           </p:cNvPr>
